--- a/docs/presentation/M1_presentation_draft_v0.1.pptx
+++ b/docs/presentation/M1_presentation_draft_v0.1.pptx
@@ -5949,7 +5949,7 @@
                           <a:ea typeface="Malgun Gothic" pitchFamily="34" charset="-122"/>
                           <a:cs typeface="Malgun Gothic" pitchFamily="34" charset="-120"/>
                         </a:rPr>
-                        <a:t>AI 서버는 로그인만 확인하고 하루 한도는 화면에서만 확인</a:t>
+                        <a:t>실제 로그인 상태로 AI 분석을 끝까지 해 보기 전</a:t>
                       </a:r>
                       <a:endParaRPr lang="en-US" sz="1400" dirty="0">
                         <a:latin typeface="Malgun Gothic" charset="0"/>
@@ -6017,7 +6017,7 @@
                           <a:ea typeface="Malgun Gothic" pitchFamily="34" charset="-122"/>
                           <a:cs typeface="Malgun Gothic" pitchFamily="34" charset="-120"/>
                         </a:rPr>
-                        <a:t>서버에서도 하루 한도 확인 (TECH_SPEC T-08)</a:t>
+                        <a:t>병합 → 로그인 연결 → 시연 전에 1회 확인</a:t>
                       </a:r>
                       <a:endParaRPr lang="en-US" sz="1400" dirty="0">
                         <a:latin typeface="Malgun Gothic" charset="0"/>
@@ -12475,7 +12475,7 @@
                 <a:ea typeface="Malgun Gothic" pitchFamily="34" charset="-122"/>
                 <a:cs typeface="Malgun Gothic" pitchFamily="34" charset="-120"/>
               </a:rPr>
-              <a:t>로그인 확인</a:t>
+              <a:t>로그인 · 한도 확인</a:t>
             </a:r>
             <a:endParaRPr lang="en-US" sz="1200" dirty="0"/>
           </a:p>

--- a/docs/presentation/M1_presentation_draft_v0.1.pptx
+++ b/docs/presentation/M1_presentation_draft_v0.1.pptx
@@ -6846,7 +6846,7 @@
                 <a:ea typeface="Malgun Gothic" pitchFamily="34" charset="-122"/>
                 <a:cs typeface="Malgun Gothic" pitchFamily="34" charset="-120"/>
               </a:rPr>
-              <a:t>체험  [GitHub Pages 주소]/part5/</a:t>
+              <a:t>체험  ctaleez51-art.github.io/sales-analysis/part5/</a:t>
             </a:r>
             <a:endParaRPr lang="en-US" sz="1500" dirty="0"/>
           </a:p>
@@ -14724,7 +14724,7 @@
                 <a:ea typeface="Malgun Gothic" pitchFamily="34" charset="-122"/>
                 <a:cs typeface="Malgun Gothic" pitchFamily="34" charset="-120"/>
               </a:rPr>
-              <a:t>체험 주소: [GitHub Pages 주소 — 병합 · 설정 뒤 채우기] /part5/</a:t>
+              <a:t>체험 주소: ctaleez51-art.github.io/sales-analysis/part5/</a:t>
             </a:r>
             <a:endParaRPr lang="en-US" sz="1500" dirty="0"/>
           </a:p>

--- a/docs/presentation/M1_presentation_draft_v0.1.pptx
+++ b/docs/presentation/M1_presentation_draft_v0.1.pptx
@@ -10719,11 +10719,11 @@
             </a:avLst>
           </a:prstGeom>
           <a:solidFill>
-            <a:srgbClr val="8A93A6"/>
+            <a:srgbClr val="2F5FD0"/>
           </a:solidFill>
           <a:ln w="12700">
             <a:solidFill>
-              <a:srgbClr val="8A93A6"/>
+              <a:srgbClr val="2F5FD0"/>
             </a:solidFill>
             <a:prstDash val="solid"/>
           </a:ln>
@@ -10762,7 +10762,7 @@
                 <a:ea typeface="Malgun Gothic" pitchFamily="34" charset="-122"/>
                 <a:cs typeface="Malgun Gothic" pitchFamily="34" charset="-120"/>
               </a:rPr>
-              <a:t>계획</a:t>
+              <a:t>한 일</a:t>
             </a:r>
             <a:endParaRPr lang="en-US" sz="1200" dirty="0"/>
           </a:p>
@@ -10843,7 +10843,7 @@
                 <a:ea typeface="Malgun Gothic" pitchFamily="34" charset="-122"/>
                 <a:cs typeface="Malgun Gothic" pitchFamily="34" charset="-120"/>
               </a:rPr>
-              <a:t>PR 병합</a:t>
+              <a:t>팀 저장소로 모음</a:t>
             </a:r>
             <a:endParaRPr lang="en-US" sz="1300" dirty="0"/>
           </a:p>
@@ -10863,7 +10863,7 @@
                 <a:ea typeface="Malgun Gothic" pitchFamily="34" charset="-122"/>
                 <a:cs typeface="Malgun Gothic" pitchFamily="34" charset="-120"/>
               </a:rPr>
-              <a:t>로그인 연결</a:t>
+              <a:t>전체 합치기 시험</a:t>
             </a:r>
             <a:endParaRPr lang="en-US" sz="1300" dirty="0"/>
           </a:p>
@@ -10883,7 +10883,7 @@
                 <a:ea typeface="Malgun Gothic" pitchFamily="34" charset="-122"/>
                 <a:cs typeface="Malgun Gothic" pitchFamily="34" charset="-120"/>
               </a:rPr>
-              <a:t>합친 뒤 재점검</a:t>
+              <a:t>로그인 연결</a:t>
             </a:r>
             <a:endParaRPr lang="en-US" sz="1300" dirty="0"/>
           </a:p>
@@ -10903,7 +10903,7 @@
                 <a:ea typeface="Malgun Gothic" pitchFamily="34" charset="-122"/>
                 <a:cs typeface="Malgun Gothic" pitchFamily="34" charset="-120"/>
               </a:rPr>
-              <a:t>실제 AI 분석 확인</a:t>
+              <a:t>AI 오류 원인 추적</a:t>
             </a:r>
             <a:endParaRPr lang="en-US" sz="1300" dirty="0"/>
           </a:p>
@@ -11370,7 +11370,7 @@
                 <a:ea typeface="Malgun Gothic" pitchFamily="34" charset="-122"/>
                 <a:cs typeface="Malgun Gothic" pitchFamily="34" charset="-120"/>
               </a:rPr>
-              <a:t>M1팀 · 매출분석 툴 · 05  ·  수 · 목은 계획 — 끝나면 '한 일'로 바꾸기</a:t>
+              <a:t>M1팀 · 매출분석 툴 · 05  ·  목은 계획 — 끝나면 '한 일'로 바꾸기</a:t>
             </a:r>
             <a:endParaRPr lang="en-US" sz="1100" dirty="0"/>
           </a:p>

--- a/docs/presentation/M1_presentation_draft_v0.1.pptx
+++ b/docs/presentation/M1_presentation_draft_v0.1.pptx
@@ -2354,7 +2354,7 @@
                 <a:ea typeface="Malgun Gothic" pitchFamily="34" charset="-122"/>
                 <a:cs typeface="Malgun Gothic" pitchFamily="34" charset="-120"/>
               </a:rPr>
-              <a:t>사실과 추정을 색으로 나눠 보여 준다</a:t>
+              <a:t>실제 답변: 사실과 원인 후보를 나눠 말한다</a:t>
             </a:r>
             <a:endParaRPr lang="en-US" sz="3200" dirty="0"/>
           </a:p>
@@ -2362,41 +2362,14 @@
       </p:sp>
       <p:sp>
         <p:nvSpPr>
-          <p:cNvPr id="5" name="Shape 2"/>
-          <p:cNvSpPr/>
-          <p:nvPr/>
-        </p:nvSpPr>
-        <p:spPr>
-          <a:xfrm>
-            <a:off x="813816" y="2240280"/>
-            <a:ext cx="2435276" cy="2331720"/>
-          </a:xfrm>
-          <a:prstGeom prst="roundRect">
-            <a:avLst>
-              <a:gd name="adj" fmla="val 4706"/>
-            </a:avLst>
-          </a:prstGeom>
-          <a:solidFill>
-            <a:srgbClr val="EAF4EE"/>
-          </a:solidFill>
-          <a:ln w="12700">
-            <a:solidFill>
-              <a:srgbClr val="BFE0CC"/>
-            </a:solidFill>
-            <a:prstDash val="solid"/>
-          </a:ln>
-        </p:spPr>
-      </p:sp>
-      <p:sp>
-        <p:nvSpPr>
-          <p:cNvPr id="6" name="Text 3"/>
+          <p:cNvPr id="18" name="Text 15"/>
           <p:cNvSpPr txBox="1"/>
           <p:nvPr/>
         </p:nvSpPr>
         <p:spPr>
           <a:xfrm>
-            <a:off x="1088136" y="2514600"/>
-            <a:ext cx="1886636" cy="731520"/>
+            <a:off x="813816" y="6327648"/>
+            <a:ext cx="10564063" cy="274320"/>
           </a:xfrm>
           <a:prstGeom prst="rect">
             <a:avLst/>
@@ -2412,638 +2385,288 @@
               <a:buNone/>
             </a:pPr>
             <a:r>
-              <a:rPr lang="en-US" sz="1700" b="1" dirty="0">
+              <a:rPr lang="en-US" sz="1100" dirty="0">
+                <a:solidFill>
+                  <a:srgbClr val="8A93A6"/>
+                </a:solidFill>
+                <a:latin typeface="Malgun Gothic" pitchFamily="34" charset="0"/>
+                <a:ea typeface="Malgun Gothic" pitchFamily="34" charset="-122"/>
+                <a:cs typeface="Malgun Gothic" pitchFamily="34" charset="-120"/>
+              </a:rPr>
+              <a:t>M1팀 · 매출분석 툴 · 10</a:t>
+            </a:r>
+            <a:endParaRPr lang="en-US" sz="1100" dirty="0"/>
+          </a:p>
+        </p:txBody>
+      </p:sp>
+      <p:pic>
+        <p:nvPicPr>
+          <p:cNvPr id="19" name="Picture 18" descr="slide10_ai_answer.png"/>
+          <p:cNvPicPr>
+            <a:picLocks noChangeAspect="1"/>
+          </p:cNvPicPr>
+          <p:nvPr/>
+        </p:nvPicPr>
+        <p:blipFill>
+          <a:blip r:embed="rId3"/>
+          <a:stretch>
+            <a:fillRect/>
+          </a:stretch>
+        </p:blipFill>
+        <p:spPr>
+          <a:xfrm>
+            <a:off x="813816" y="2011680"/>
+            <a:ext cx="6493621" cy="4206240"/>
+          </a:xfrm>
+          <a:prstGeom prst="rect">
+            <a:avLst/>
+          </a:prstGeom>
+          <a:ln w="9525">
+            <a:solidFill>
+              <a:srgbClr val="E1E4EA"/>
+            </a:solidFill>
+          </a:ln>
+        </p:spPr>
+      </p:pic>
+      <p:sp>
+        <p:nvSpPr>
+          <p:cNvPr id="20" name="TextBox 19"/>
+          <p:cNvSpPr txBox="1"/>
+          <p:nvPr/>
+        </p:nvSpPr>
+        <p:spPr>
+          <a:xfrm>
+            <a:off x="7627477" y="2103120"/>
+            <a:ext cx="3750402" cy="1234440"/>
+          </a:xfrm>
+          <a:prstGeom prst="rect">
+            <a:avLst/>
+          </a:prstGeom>
+          <a:noFill/>
+        </p:spPr>
+        <p:txBody>
+          <a:bodyPr wrap="square" lIns="0" rIns="0" tIns="0" bIns="0">
+            <a:spAutoFit/>
+          </a:bodyPr>
+          <a:lstStyle/>
+          <a:p>
+            <a:r>
+              <a:rPr sz="1700" b="1">
                 <a:solidFill>
                   <a:srgbClr val="1E6B45"/>
                 </a:solidFill>
-                <a:latin typeface="Malgun Gothic" pitchFamily="34" charset="0"/>
-                <a:ea typeface="Malgun Gothic" pitchFamily="34" charset="-122"/>
-                <a:cs typeface="Malgun Gothic" pitchFamily="34" charset="-120"/>
-              </a:rPr>
-              <a:t>확인된 사실</a:t>
-            </a:r>
-            <a:endParaRPr lang="en-US" sz="1700" dirty="0"/>
-          </a:p>
-        </p:txBody>
-      </p:sp>
-      <p:sp>
-        <p:nvSpPr>
-          <p:cNvPr id="7" name="Text 4"/>
+                <a:latin typeface="Malgun Gothic"/>
+                <a:ea typeface="Malgun Gothic"/>
+              </a:rPr>
+              <a:t>실제 호출 · 12.2초</a:t>
+            </a:r>
+          </a:p>
+          <a:p>
+            <a:pPr>
+              <a:spcBef>
+                <a:spcPts val="400"/>
+              </a:spcBef>
+            </a:pPr>
+            <a:r>
+              <a:rPr sz="1400">
+                <a:solidFill>
+                  <a:srgbClr val="2D3B33"/>
+                </a:solidFill>
+                <a:latin typeface="Malgun Gothic"/>
+                <a:ea typeface="Malgun Gothic"/>
+              </a:rPr>
+              <a:t>9/30 16:58 · 로그인 계정 1회</a:t>
+            </a:r>
+          </a:p>
+          <a:p>
+            <a:pPr>
+              <a:spcBef>
+                <a:spcPts val="0"/>
+              </a:spcBef>
+            </a:pPr>
+            <a:r>
+              <a:rPr sz="1400">
+                <a:solidFill>
+                  <a:srgbClr val="2D3B33"/>
+                </a:solidFill>
+                <a:latin typeface="Malgun Gothic"/>
+                <a:ea typeface="Malgun Gothic"/>
+              </a:rPr>
+              <a:t>4번 AI 서버 응답 200</a:t>
+            </a:r>
+          </a:p>
+        </p:txBody>
+      </p:sp>
+      <p:sp>
+        <p:nvSpPr>
+          <p:cNvPr id="21" name="TextBox 20"/>
           <p:cNvSpPr txBox="1"/>
           <p:nvPr/>
         </p:nvSpPr>
         <p:spPr>
           <a:xfrm>
-            <a:off x="1088136" y="3291840"/>
-            <a:ext cx="1886636" cy="1280160"/>
+            <a:off x="7627477" y="3474720"/>
+            <a:ext cx="3750402" cy="1234440"/>
           </a:xfrm>
           <a:prstGeom prst="rect">
             <a:avLst/>
           </a:prstGeom>
           <a:noFill/>
-          <a:ln/>
-        </p:spPr>
-        <p:txBody>
-          <a:bodyPr wrap="square" lIns="0" tIns="0" rIns="0" bIns="0" rtlCol="0" anchor="t"/>
-          <a:lstStyle/>
-          <a:p>
-            <a:pPr indent="0" marL="0">
-              <a:lnSpc>
-                <a:spcPct val="135000"/>
-              </a:lnSpc>
-              <a:buNone/>
-            </a:pPr>
-            <a:r>
-              <a:rPr lang="en-US" sz="1400" dirty="0">
+        </p:spPr>
+        <p:txBody>
+          <a:bodyPr wrap="square" lIns="0" rIns="0" tIns="0" bIns="0">
+            <a:spAutoFit/>
+          </a:bodyPr>
+          <a:lstStyle/>
+          <a:p>
+            <a:r>
+              <a:rPr sz="1700" b="1">
+                <a:solidFill>
+                  <a:srgbClr val="1E6B45"/>
+                </a:solidFill>
+                <a:latin typeface="Malgun Gothic"/>
+                <a:ea typeface="Malgun Gothic"/>
+              </a:rPr>
+              <a:t>숫자 = 계산 결과</a:t>
+            </a:r>
+          </a:p>
+          <a:p>
+            <a:pPr>
+              <a:spcBef>
+                <a:spcPts val="400"/>
+              </a:spcBef>
+            </a:pPr>
+            <a:r>
+              <a:rPr sz="1400">
                 <a:solidFill>
                   <a:srgbClr val="2D3B33"/>
                 </a:solidFill>
-                <a:latin typeface="Malgun Gothic" pitchFamily="34" charset="0"/>
-                <a:ea typeface="Malgun Gothic" pitchFamily="34" charset="-122"/>
-                <a:cs typeface="Malgun Gothic" pitchFamily="34" charset="-120"/>
-              </a:rPr>
-              <a:t>전체 매출 하락액의</a:t>
-            </a:r>
-            <a:endParaRPr lang="en-US" sz="1400" dirty="0"/>
-          </a:p>
-          <a:p>
-            <a:pPr indent="0" marL="0">
-              <a:lnSpc>
-                <a:spcPct val="135000"/>
-              </a:lnSpc>
-              <a:buNone/>
-            </a:pPr>
-            <a:r>
-              <a:rPr lang="en-US" sz="1400" dirty="0">
+                <a:latin typeface="Malgun Gothic"/>
+                <a:ea typeface="Malgun Gothic"/>
+              </a:rPr>
+              <a:t>31.5% · 32.8% · 33.4% · 8개</a:t>
+            </a:r>
+          </a:p>
+          <a:p>
+            <a:pPr>
+              <a:spcBef>
+                <a:spcPts val="0"/>
+              </a:spcBef>
+            </a:pPr>
+            <a:r>
+              <a:rPr sz="1400">
                 <a:solidFill>
                   <a:srgbClr val="2D3B33"/>
                 </a:solidFill>
-                <a:latin typeface="Malgun Gothic" pitchFamily="34" charset="0"/>
-                <a:ea typeface="Malgun Gothic" pitchFamily="34" charset="-122"/>
-                <a:cs typeface="Malgun Gothic" pitchFamily="34" charset="-120"/>
-              </a:rPr>
-              <a:t>약 93%가 쿠팡에서</a:t>
-            </a:r>
-            <a:endParaRPr lang="en-US" sz="1400" dirty="0"/>
-          </a:p>
-          <a:p>
-            <a:pPr indent="0" marL="0">
-              <a:lnSpc>
-                <a:spcPct val="135000"/>
-              </a:lnSpc>
-              <a:buNone/>
-            </a:pPr>
-            <a:r>
-              <a:rPr lang="en-US" sz="1400" dirty="0">
+                <a:latin typeface="Malgun Gothic"/>
+                <a:ea typeface="Malgun Gothic"/>
+              </a:rPr>
+              <a:t>모두 정답표 값 그대로</a:t>
+            </a:r>
+          </a:p>
+        </p:txBody>
+      </p:sp>
+      <p:sp>
+        <p:nvSpPr>
+          <p:cNvPr id="22" name="TextBox 21"/>
+          <p:cNvSpPr txBox="1"/>
+          <p:nvPr/>
+        </p:nvSpPr>
+        <p:spPr>
+          <a:xfrm>
+            <a:off x="7627477" y="4846320"/>
+            <a:ext cx="3750402" cy="1234440"/>
+          </a:xfrm>
+          <a:prstGeom prst="rect">
+            <a:avLst/>
+          </a:prstGeom>
+          <a:noFill/>
+        </p:spPr>
+        <p:txBody>
+          <a:bodyPr wrap="square" lIns="0" rIns="0" tIns="0" bIns="0">
+            <a:spAutoFit/>
+          </a:bodyPr>
+          <a:lstStyle/>
+          <a:p>
+            <a:r>
+              <a:rPr sz="1700" b="1">
+                <a:solidFill>
+                  <a:srgbClr val="1E6B45"/>
+                </a:solidFill>
+                <a:latin typeface="Malgun Gothic"/>
+                <a:ea typeface="Malgun Gothic"/>
+              </a:rPr>
+              <a:t>원인은 '후보'로</a:t>
+            </a:r>
+          </a:p>
+          <a:p>
+            <a:pPr>
+              <a:spcBef>
+                <a:spcPts val="400"/>
+              </a:spcBef>
+            </a:pPr>
+            <a:r>
+              <a:rPr sz="1400">
                 <a:solidFill>
                   <a:srgbClr val="2D3B33"/>
                 </a:solidFill>
-                <a:latin typeface="Malgun Gothic" pitchFamily="34" charset="0"/>
-                <a:ea typeface="Malgun Gothic" pitchFamily="34" charset="-122"/>
-                <a:cs typeface="Malgun Gothic" pitchFamily="34" charset="-120"/>
-              </a:rPr>
-              <a:t>발생</a:t>
-            </a:r>
-            <a:endParaRPr lang="en-US" sz="1400" dirty="0"/>
-          </a:p>
-        </p:txBody>
-      </p:sp>
-      <p:sp>
-        <p:nvSpPr>
-          <p:cNvPr id="8" name="Shape 5"/>
-          <p:cNvSpPr/>
-          <p:nvPr/>
-        </p:nvSpPr>
-        <p:spPr>
-          <a:xfrm>
-            <a:off x="3523412" y="2240280"/>
-            <a:ext cx="2435276" cy="2331720"/>
-          </a:xfrm>
-          <a:prstGeom prst="roundRect">
-            <a:avLst>
-              <a:gd name="adj" fmla="val 4706"/>
-            </a:avLst>
-          </a:prstGeom>
-          <a:solidFill>
-            <a:srgbClr val="FDF1E6"/>
-          </a:solidFill>
-          <a:ln w="12700">
-            <a:solidFill>
-              <a:srgbClr val="E3A36B"/>
-            </a:solidFill>
-            <a:prstDash val="solid"/>
-          </a:ln>
-        </p:spPr>
-      </p:sp>
-      <p:sp>
-        <p:nvSpPr>
-          <p:cNvPr id="9" name="Text 6"/>
+                <a:latin typeface="Malgun Gothic"/>
+                <a:ea typeface="Malgun Gothic"/>
+              </a:rPr>
+              <a:t>"인과관계는 확정할 수</a:t>
+            </a:r>
+          </a:p>
+          <a:p>
+            <a:pPr>
+              <a:spcBef>
+                <a:spcPts val="0"/>
+              </a:spcBef>
+            </a:pPr>
+            <a:r>
+              <a:rPr sz="1400">
+                <a:solidFill>
+                  <a:srgbClr val="2D3B33"/>
+                </a:solidFill>
+                <a:latin typeface="Malgun Gothic"/>
+                <a:ea typeface="Malgun Gothic"/>
+              </a:rPr>
+              <a:t>없습니다"</a:t>
+            </a:r>
+          </a:p>
+        </p:txBody>
+      </p:sp>
+      <p:sp>
+        <p:nvSpPr>
+          <p:cNvPr id="23" name="TextBox 22"/>
           <p:cNvSpPr txBox="1"/>
           <p:nvPr/>
         </p:nvSpPr>
         <p:spPr>
           <a:xfrm>
-            <a:off x="3797732" y="2514600"/>
-            <a:ext cx="1886636" cy="731520"/>
+            <a:off x="7627477" y="5897880"/>
+            <a:ext cx="3750402" cy="320040"/>
           </a:xfrm>
           <a:prstGeom prst="rect">
             <a:avLst/>
           </a:prstGeom>
           <a:noFill/>
-          <a:ln/>
-        </p:spPr>
-        <p:txBody>
-          <a:bodyPr wrap="square" lIns="0" tIns="0" rIns="0" bIns="0" rtlCol="0" anchor="t"/>
-          <a:lstStyle/>
-          <a:p>
-            <a:pPr indent="0" marL="0">
-              <a:buNone/>
-            </a:pPr>
-            <a:r>
-              <a:rPr lang="en-US" sz="1700" b="1" dirty="0">
-                <a:solidFill>
-                  <a:srgbClr val="9A4412"/>
-                </a:solidFill>
-                <a:latin typeface="Malgun Gothic" pitchFamily="34" charset="0"/>
-                <a:ea typeface="Malgun Gothic" pitchFamily="34" charset="-122"/>
-                <a:cs typeface="Malgun Gothic" pitchFamily="34" charset="-120"/>
-              </a:rPr>
-              <a:t>원인 후보</a:t>
-            </a:r>
-            <a:endParaRPr lang="en-US" sz="1700" dirty="0"/>
-          </a:p>
-          <a:p>
-            <a:pPr indent="0" marL="0">
-              <a:buNone/>
-            </a:pPr>
-            <a:r>
-              <a:rPr lang="en-US" sz="1700" b="1" dirty="0">
-                <a:solidFill>
-                  <a:srgbClr val="9A4412"/>
-                </a:solidFill>
-                <a:latin typeface="Malgun Gothic" pitchFamily="34" charset="0"/>
-                <a:ea typeface="Malgun Gothic" pitchFamily="34" charset="-122"/>
-                <a:cs typeface="Malgun Gothic" pitchFamily="34" charset="-120"/>
-              </a:rPr>
-              <a:t>(확정 아님)</a:t>
-            </a:r>
-            <a:endParaRPr lang="en-US" sz="1700" dirty="0"/>
-          </a:p>
-        </p:txBody>
-      </p:sp>
-      <p:sp>
-        <p:nvSpPr>
-          <p:cNvPr id="10" name="Text 7"/>
-          <p:cNvSpPr txBox="1"/>
-          <p:nvPr/>
-        </p:nvSpPr>
-        <p:spPr>
-          <a:xfrm>
-            <a:off x="3797732" y="3291840"/>
-            <a:ext cx="1886636" cy="1280160"/>
-          </a:xfrm>
-          <a:prstGeom prst="rect">
-            <a:avLst/>
-          </a:prstGeom>
-          <a:noFill/>
-          <a:ln/>
-        </p:spPr>
-        <p:txBody>
-          <a:bodyPr wrap="square" lIns="0" tIns="0" rIns="0" bIns="0" rtlCol="0" anchor="t"/>
-          <a:lstStyle/>
-          <a:p>
-            <a:pPr indent="0" marL="0">
-              <a:lnSpc>
-                <a:spcPct val="135000"/>
-              </a:lnSpc>
-              <a:buNone/>
-            </a:pPr>
-            <a:r>
-              <a:rPr lang="en-US" sz="1400" dirty="0">
-                <a:solidFill>
-                  <a:srgbClr val="4A3524"/>
-                </a:solidFill>
-                <a:latin typeface="Malgun Gothic" pitchFamily="34" charset="0"/>
-                <a:ea typeface="Malgun Gothic" pitchFamily="34" charset="-122"/>
-                <a:cs typeface="Malgun Gothic" pitchFamily="34" charset="-120"/>
-              </a:rPr>
-              <a:t>경쟁 셀러의 더 낮은</a:t>
-            </a:r>
-            <a:endParaRPr lang="en-US" sz="1400" dirty="0"/>
-          </a:p>
-          <a:p>
-            <a:pPr indent="0" marL="0">
-              <a:lnSpc>
-                <a:spcPct val="135000"/>
-              </a:lnSpc>
-              <a:buNone/>
-            </a:pPr>
-            <a:r>
-              <a:rPr lang="en-US" sz="1400" dirty="0">
-                <a:solidFill>
-                  <a:srgbClr val="4A3524"/>
-                </a:solidFill>
-                <a:latin typeface="Malgun Gothic" pitchFamily="34" charset="0"/>
-                <a:ea typeface="Malgun Gothic" pitchFamily="34" charset="-122"/>
-                <a:cs typeface="Malgun Gothic" pitchFamily="34" charset="-120"/>
-              </a:rPr>
-              <a:t>가격으로 구매가</a:t>
-            </a:r>
-            <a:endParaRPr lang="en-US" sz="1400" dirty="0"/>
-          </a:p>
-          <a:p>
-            <a:pPr indent="0" marL="0">
-              <a:lnSpc>
-                <a:spcPct val="135000"/>
-              </a:lnSpc>
-              <a:buNone/>
-            </a:pPr>
-            <a:r>
-              <a:rPr lang="en-US" sz="1400" dirty="0">
-                <a:solidFill>
-                  <a:srgbClr val="4A3524"/>
-                </a:solidFill>
-                <a:latin typeface="Malgun Gothic" pitchFamily="34" charset="0"/>
-                <a:ea typeface="Malgun Gothic" pitchFamily="34" charset="-122"/>
-                <a:cs typeface="Malgun Gothic" pitchFamily="34" charset="-120"/>
-              </a:rPr>
-              <a:t>옮겨 갔을 가능성</a:t>
-            </a:r>
-            <a:endParaRPr lang="en-US" sz="1400" dirty="0"/>
-          </a:p>
-        </p:txBody>
-      </p:sp>
-      <p:sp>
-        <p:nvSpPr>
-          <p:cNvPr id="11" name="Shape 8"/>
-          <p:cNvSpPr/>
-          <p:nvPr/>
-        </p:nvSpPr>
-        <p:spPr>
-          <a:xfrm>
-            <a:off x="6233008" y="2240280"/>
-            <a:ext cx="2435276" cy="2331720"/>
-          </a:xfrm>
-          <a:prstGeom prst="roundRect">
-            <a:avLst>
-              <a:gd name="adj" fmla="val 4706"/>
-            </a:avLst>
-          </a:prstGeom>
-          <a:solidFill>
-            <a:srgbClr val="EAEFFB"/>
-          </a:solidFill>
-          <a:ln w="12700">
-            <a:solidFill>
-              <a:srgbClr val="C3D0F2"/>
-            </a:solidFill>
-            <a:prstDash val="solid"/>
-          </a:ln>
-        </p:spPr>
-      </p:sp>
-      <p:sp>
-        <p:nvSpPr>
-          <p:cNvPr id="12" name="Text 9"/>
-          <p:cNvSpPr txBox="1"/>
-          <p:nvPr/>
-        </p:nvSpPr>
-        <p:spPr>
-          <a:xfrm>
-            <a:off x="6507328" y="2514600"/>
-            <a:ext cx="1886636" cy="731520"/>
-          </a:xfrm>
-          <a:prstGeom prst="rect">
-            <a:avLst/>
-          </a:prstGeom>
-          <a:noFill/>
-          <a:ln/>
-        </p:spPr>
-        <p:txBody>
-          <a:bodyPr wrap="square" lIns="0" tIns="0" rIns="0" bIns="0" rtlCol="0" anchor="t"/>
-          <a:lstStyle/>
-          <a:p>
-            <a:pPr indent="0" marL="0">
-              <a:buNone/>
-            </a:pPr>
-            <a:r>
-              <a:rPr lang="en-US" sz="1700" b="1" dirty="0">
-                <a:solidFill>
-                  <a:srgbClr val="2F5FD0"/>
-                </a:solidFill>
-                <a:latin typeface="Malgun Gothic" pitchFamily="34" charset="0"/>
-                <a:ea typeface="Malgun Gothic" pitchFamily="34" charset="-122"/>
-                <a:cs typeface="Malgun Gothic" pitchFamily="34" charset="-120"/>
-              </a:rPr>
-              <a:t>실행 제안</a:t>
-            </a:r>
-            <a:endParaRPr lang="en-US" sz="1700" dirty="0"/>
-          </a:p>
-        </p:txBody>
-      </p:sp>
-      <p:sp>
-        <p:nvSpPr>
-          <p:cNvPr id="13" name="Text 10"/>
-          <p:cNvSpPr txBox="1"/>
-          <p:nvPr/>
-        </p:nvSpPr>
-        <p:spPr>
-          <a:xfrm>
-            <a:off x="6507328" y="3291840"/>
-            <a:ext cx="1886636" cy="1280160"/>
-          </a:xfrm>
-          <a:prstGeom prst="rect">
-            <a:avLst/>
-          </a:prstGeom>
-          <a:noFill/>
-          <a:ln/>
-        </p:spPr>
-        <p:txBody>
-          <a:bodyPr wrap="square" lIns="0" tIns="0" rIns="0" bIns="0" rtlCol="0" anchor="t"/>
-          <a:lstStyle/>
-          <a:p>
-            <a:pPr indent="0" marL="0">
-              <a:lnSpc>
-                <a:spcPct val="135000"/>
-              </a:lnSpc>
-              <a:buNone/>
-            </a:pPr>
-            <a:r>
-              <a:rPr lang="en-US" sz="1400" dirty="0">
-                <a:solidFill>
-                  <a:srgbClr val="2A3350"/>
-                </a:solidFill>
-                <a:latin typeface="Malgun Gothic" pitchFamily="34" charset="0"/>
-                <a:ea typeface="Malgun Gothic" pitchFamily="34" charset="-122"/>
-                <a:cs typeface="Malgun Gothic" pitchFamily="34" charset="-120"/>
-              </a:rPr>
-              <a:t>1순위: 경쟁가 8개</a:t>
-            </a:r>
-            <a:endParaRPr lang="en-US" sz="1400" dirty="0"/>
-          </a:p>
-          <a:p>
-            <a:pPr indent="0" marL="0">
-              <a:lnSpc>
-                <a:spcPct val="135000"/>
-              </a:lnSpc>
-              <a:buNone/>
-            </a:pPr>
-            <a:r>
-              <a:rPr lang="en-US" sz="1400" dirty="0">
-                <a:solidFill>
-                  <a:srgbClr val="2A3350"/>
-                </a:solidFill>
-                <a:latin typeface="Malgun Gothic" pitchFamily="34" charset="0"/>
-                <a:ea typeface="Malgun Gothic" pitchFamily="34" charset="-122"/>
-                <a:cs typeface="Malgun Gothic" pitchFamily="34" charset="-120"/>
-              </a:rPr>
-              <a:t>제품의 실구매가</a:t>
-            </a:r>
-            <a:endParaRPr lang="en-US" sz="1400" dirty="0"/>
-          </a:p>
-          <a:p>
-            <a:pPr indent="0" marL="0">
-              <a:lnSpc>
-                <a:spcPct val="135000"/>
-              </a:lnSpc>
-              <a:buNone/>
-            </a:pPr>
-            <a:r>
-              <a:rPr lang="en-US" sz="1400" dirty="0">
-                <a:solidFill>
-                  <a:srgbClr val="2A3350"/>
-                </a:solidFill>
-                <a:latin typeface="Malgun Gothic" pitchFamily="34" charset="0"/>
-                <a:ea typeface="Malgun Gothic" pitchFamily="34" charset="-122"/>
-                <a:cs typeface="Malgun Gothic" pitchFamily="34" charset="-120"/>
-              </a:rPr>
-              <a:t>맞추기</a:t>
-            </a:r>
-            <a:endParaRPr lang="en-US" sz="1400" dirty="0"/>
-          </a:p>
-        </p:txBody>
-      </p:sp>
-      <p:sp>
-        <p:nvSpPr>
-          <p:cNvPr id="14" name="Shape 11"/>
-          <p:cNvSpPr/>
-          <p:nvPr/>
-        </p:nvSpPr>
-        <p:spPr>
-          <a:xfrm>
-            <a:off x="8942603" y="2240280"/>
-            <a:ext cx="2435276" cy="2331720"/>
-          </a:xfrm>
-          <a:prstGeom prst="roundRect">
-            <a:avLst>
-              <a:gd name="adj" fmla="val 4706"/>
-            </a:avLst>
-          </a:prstGeom>
-          <a:solidFill>
-            <a:srgbClr val="EFF0F2"/>
-          </a:solidFill>
-          <a:ln w="12700">
-            <a:solidFill>
-              <a:srgbClr val="D5D8DE"/>
-            </a:solidFill>
-            <a:prstDash val="solid"/>
-          </a:ln>
-        </p:spPr>
-      </p:sp>
-      <p:sp>
-        <p:nvSpPr>
-          <p:cNvPr id="15" name="Text 12"/>
-          <p:cNvSpPr txBox="1"/>
-          <p:nvPr/>
-        </p:nvSpPr>
-        <p:spPr>
-          <a:xfrm>
-            <a:off x="9216923" y="2514600"/>
-            <a:ext cx="1886636" cy="731520"/>
-          </a:xfrm>
-          <a:prstGeom prst="rect">
-            <a:avLst/>
-          </a:prstGeom>
-          <a:noFill/>
-          <a:ln/>
-        </p:spPr>
-        <p:txBody>
-          <a:bodyPr wrap="square" lIns="0" tIns="0" rIns="0" bIns="0" rtlCol="0" anchor="t"/>
-          <a:lstStyle/>
-          <a:p>
-            <a:pPr indent="0" marL="0">
-              <a:buNone/>
-            </a:pPr>
-            <a:r>
-              <a:rPr lang="en-US" sz="1700" b="1" dirty="0">
+        </p:spPr>
+        <p:txBody>
+          <a:bodyPr wrap="square" lIns="0" rIns="0" tIns="0" bIns="0">
+            <a:spAutoFit/>
+          </a:bodyPr>
+          <a:lstStyle/>
+          <a:p>
+            <a:r>
+              <a:rPr sz="1000">
                 <a:solidFill>
                   <a:srgbClr val="4A5568"/>
                 </a:solidFill>
-                <a:latin typeface="Malgun Gothic" pitchFamily="34" charset="0"/>
-                <a:ea typeface="Malgun Gothic" pitchFamily="34" charset="-122"/>
-                <a:cs typeface="Malgun Gothic" pitchFamily="34" charset="-120"/>
-              </a:rPr>
-              <a:t>분석 한계</a:t>
-            </a:r>
-            <a:endParaRPr lang="en-US" sz="1700" dirty="0"/>
-          </a:p>
-        </p:txBody>
-      </p:sp>
-      <p:sp>
-        <p:nvSpPr>
-          <p:cNvPr id="16" name="Text 13"/>
-          <p:cNvSpPr txBox="1"/>
-          <p:nvPr/>
-        </p:nvSpPr>
-        <p:spPr>
-          <a:xfrm>
-            <a:off x="9216923" y="3291840"/>
-            <a:ext cx="1886636" cy="1280160"/>
-          </a:xfrm>
-          <a:prstGeom prst="rect">
-            <a:avLst/>
-          </a:prstGeom>
-          <a:noFill/>
-          <a:ln/>
-        </p:spPr>
-        <p:txBody>
-          <a:bodyPr wrap="square" lIns="0" tIns="0" rIns="0" bIns="0" rtlCol="0" anchor="t"/>
-          <a:lstStyle/>
-          <a:p>
-            <a:pPr indent="0" marL="0">
-              <a:lnSpc>
-                <a:spcPct val="135000"/>
-              </a:lnSpc>
-              <a:buNone/>
-            </a:pPr>
-            <a:r>
-              <a:rPr lang="en-US" sz="1400" dirty="0">
-                <a:solidFill>
-                  <a:srgbClr val="4A5568"/>
-                </a:solidFill>
-                <a:latin typeface="Malgun Gothic" pitchFamily="34" charset="0"/>
-                <a:ea typeface="Malgun Gothic" pitchFamily="34" charset="-122"/>
-                <a:cs typeface="Malgun Gothic" pitchFamily="34" charset="-120"/>
-              </a:rPr>
-              <a:t>시점이 겹칠 뿐</a:t>
-            </a:r>
-            <a:endParaRPr lang="en-US" sz="1400" dirty="0"/>
-          </a:p>
-          <a:p>
-            <a:pPr indent="0" marL="0">
-              <a:lnSpc>
-                <a:spcPct val="135000"/>
-              </a:lnSpc>
-              <a:buNone/>
-            </a:pPr>
-            <a:r>
-              <a:rPr lang="en-US" sz="1400" dirty="0">
-                <a:solidFill>
-                  <a:srgbClr val="4A5568"/>
-                </a:solidFill>
-                <a:latin typeface="Malgun Gothic" pitchFamily="34" charset="0"/>
-                <a:ea typeface="Malgun Gothic" pitchFamily="34" charset="-122"/>
-                <a:cs typeface="Malgun Gothic" pitchFamily="34" charset="-120"/>
-              </a:rPr>
-              <a:t>인과관계는 확정할</a:t>
-            </a:r>
-            <a:endParaRPr lang="en-US" sz="1400" dirty="0"/>
-          </a:p>
-          <a:p>
-            <a:pPr indent="0" marL="0">
-              <a:lnSpc>
-                <a:spcPct val="135000"/>
-              </a:lnSpc>
-              <a:buNone/>
-            </a:pPr>
-            <a:r>
-              <a:rPr lang="en-US" sz="1400" dirty="0">
-                <a:solidFill>
-                  <a:srgbClr val="4A5568"/>
-                </a:solidFill>
-                <a:latin typeface="Malgun Gothic" pitchFamily="34" charset="0"/>
-                <a:ea typeface="Malgun Gothic" pitchFamily="34" charset="-122"/>
-                <a:cs typeface="Malgun Gothic" pitchFamily="34" charset="-120"/>
-              </a:rPr>
-              <a:t>수 없음</a:t>
-            </a:r>
-            <a:endParaRPr lang="en-US" sz="1400" dirty="0"/>
-          </a:p>
-        </p:txBody>
-      </p:sp>
-      <p:sp>
-        <p:nvSpPr>
-          <p:cNvPr id="17" name="Text 14"/>
-          <p:cNvSpPr txBox="1"/>
-          <p:nvPr/>
-        </p:nvSpPr>
-        <p:spPr>
-          <a:xfrm>
-            <a:off x="813816" y="4892040"/>
-            <a:ext cx="10564063" cy="548640"/>
-          </a:xfrm>
-          <a:prstGeom prst="rect">
-            <a:avLst/>
-          </a:prstGeom>
-          <a:noFill/>
-          <a:ln/>
-        </p:spPr>
-        <p:txBody>
-          <a:bodyPr wrap="square" lIns="0" tIns="0" rIns="0" bIns="0" rtlCol="0" anchor="t"/>
-          <a:lstStyle/>
-          <a:p>
-            <a:pPr indent="0" marL="0">
-              <a:buNone/>
-            </a:pPr>
-            <a:r>
-              <a:rPr lang="en-US" sz="1300" dirty="0">
-                <a:solidFill>
-                  <a:srgbClr val="4A5568"/>
-                </a:solidFill>
-                <a:latin typeface="Malgun Gothic" pitchFamily="34" charset="0"/>
-                <a:ea typeface="Malgun Gothic" pitchFamily="34" charset="-122"/>
-                <a:cs typeface="Malgun Gothic" pitchFamily="34" charset="-120"/>
-              </a:rPr>
-              <a:t>예시 문장은 3번 정답 시나리오 §10 의 모범 답에서 가져왔다. [시연 때 받은 실제 AI 답변 캡처로 바꾸기]</a:t>
-            </a:r>
-            <a:endParaRPr lang="en-US" sz="1300" dirty="0"/>
-          </a:p>
-        </p:txBody>
-      </p:sp>
-      <p:sp>
-        <p:nvSpPr>
-          <p:cNvPr id="18" name="Text 15"/>
-          <p:cNvSpPr txBox="1"/>
-          <p:nvPr/>
-        </p:nvSpPr>
-        <p:spPr>
-          <a:xfrm>
-            <a:off x="813816" y="6327648"/>
-            <a:ext cx="10564063" cy="274320"/>
-          </a:xfrm>
-          <a:prstGeom prst="rect">
-            <a:avLst/>
-          </a:prstGeom>
-          <a:noFill/>
-          <a:ln/>
-        </p:spPr>
-        <p:txBody>
-          <a:bodyPr wrap="square" lIns="0" tIns="0" rIns="0" bIns="0" rtlCol="0" anchor="t"/>
-          <a:lstStyle/>
-          <a:p>
-            <a:pPr indent="0" marL="0">
-              <a:buNone/>
-            </a:pPr>
-            <a:r>
-              <a:rPr lang="en-US" sz="1100" dirty="0">
-                <a:solidFill>
-                  <a:srgbClr val="8A93A6"/>
-                </a:solidFill>
-                <a:latin typeface="Malgun Gothic" pitchFamily="34" charset="0"/>
-                <a:ea typeface="Malgun Gothic" pitchFamily="34" charset="-122"/>
-                <a:cs typeface="Malgun Gothic" pitchFamily="34" charset="-120"/>
-              </a:rPr>
-              <a:t>M1팀 · 매출분석 툴 · 10</a:t>
-            </a:r>
-            <a:endParaRPr lang="en-US" sz="1100" dirty="0"/>
+                <a:latin typeface="Malgun Gothic"/>
+                <a:ea typeface="Malgun Gothic"/>
+              </a:rPr>
+              <a:t>실제 응답 화면 · part5/REHEARSAL.md 9/30</a:t>
+            </a:r>
           </a:p>
         </p:txBody>
       </p:sp>

--- a/docs/presentation/M1_presentation_draft_v0.1.pptx
+++ b/docs/presentation/M1_presentation_draft_v0.1.pptx
@@ -5566,13 +5566,13 @@
                       <a:r>
                         <a:rPr lang="en-US" sz="1400" dirty="0">
                           <a:solidFill>
-                            <a:srgbClr val="14213D"/>
+                            <a:srgbClr val="1E6B45"/>
                           </a:solidFill>
                           <a:latin typeface="Malgun Gothic" pitchFamily="34" charset="0"/>
                           <a:ea typeface="Malgun Gothic" pitchFamily="34" charset="-122"/>
                           <a:cs typeface="Malgun Gothic" pitchFamily="34" charset="-120"/>
                         </a:rPr>
-                        <a:t>실제 로그인 상태로 AI 분석을 끝까지 해 보기 전</a:t>
+                        <a:t>✓ 완료 (9/30) — 로그인 상태로 AI 분석 끝까지 확인</a:t>
                       </a:r>
                       <a:endParaRPr lang="en-US" sz="1400" dirty="0">
                         <a:latin typeface="Malgun Gothic" charset="0"/>
@@ -5640,7 +5640,7 @@
                           <a:ea typeface="Malgun Gothic" pitchFamily="34" charset="-122"/>
                           <a:cs typeface="Malgun Gothic" pitchFamily="34" charset="-120"/>
                         </a:rPr>
-                        <a:t>병합 → 로그인 연결 → 시연 전에 1회 확인</a:t>
+                        <a:t>200 · 12.2초 (400 원인: 키 크레딧 0 → 키 교체)</a:t>
                       </a:r>
                       <a:endParaRPr lang="en-US" sz="1400" dirty="0">
                         <a:latin typeface="Malgun Gothic" charset="0"/>

--- a/docs/presentation/M1_presentation_draft_v0.1.pptx
+++ b/docs/presentation/M1_presentation_draft_v0.1.pptx
@@ -10576,11 +10576,11 @@
             </a:avLst>
           </a:prstGeom>
           <a:solidFill>
-            <a:srgbClr val="8A93A6"/>
+            <a:srgbClr val="2F5FD0"/>
           </a:solidFill>
           <a:ln w="12700">
             <a:solidFill>
-              <a:srgbClr val="8A93A6"/>
+              <a:srgbClr val="2F5FD0"/>
             </a:solidFill>
             <a:prstDash val="solid"/>
           </a:ln>
@@ -10619,7 +10619,7 @@
                 <a:ea typeface="Malgun Gothic" pitchFamily="34" charset="-122"/>
                 <a:cs typeface="Malgun Gothic" pitchFamily="34" charset="-120"/>
               </a:rPr>
-              <a:t>계획</a:t>
+              <a:t>한 일</a:t>
             </a:r>
             <a:endParaRPr lang="en-US" sz="1200" dirty="0"/>
           </a:p>
@@ -10700,7 +10700,7 @@
                 <a:ea typeface="Malgun Gothic" pitchFamily="34" charset="-122"/>
                 <a:cs typeface="Malgun Gothic" pitchFamily="34" charset="-120"/>
               </a:rPr>
-              <a:t>결제 붙이기</a:t>
+              <a:t>대시보드 v2</a:t>
             </a:r>
             <a:endParaRPr lang="en-US" sz="1300" dirty="0"/>
           </a:p>
@@ -10720,7 +10720,7 @@
                 <a:ea typeface="Malgun Gothic" pitchFamily="34" charset="-122"/>
                 <a:cs typeface="Malgun Gothic" pitchFamily="34" charset="-120"/>
               </a:rPr>
-              <a:t>배포 주소 확정</a:t>
+              <a:t>화면 버전 구분</a:t>
             </a:r>
             <a:endParaRPr lang="en-US" sz="1300" dirty="0"/>
           </a:p>
@@ -10740,7 +10740,7 @@
                 <a:ea typeface="Malgun Gothic" pitchFamily="34" charset="-122"/>
                 <a:cs typeface="Malgun Gothic" pitchFamily="34" charset="-120"/>
               </a:rPr>
-              <a:t>발표 자료 마감</a:t>
+              <a:t>PR 병합 요청</a:t>
             </a:r>
             <a:endParaRPr lang="en-US" sz="1300" dirty="0"/>
           </a:p>
@@ -10760,7 +10760,7 @@
                 <a:ea typeface="Malgun Gothic" pitchFamily="34" charset="-122"/>
                 <a:cs typeface="Malgun Gothic" pitchFamily="34" charset="-120"/>
               </a:rPr>
-              <a:t>시연 리허설</a:t>
+              <a:t>발표 자료 정리</a:t>
             </a:r>
             <a:endParaRPr lang="en-US" sz="1300" dirty="0"/>
           </a:p>
@@ -10993,7 +10993,7 @@
                 <a:ea typeface="Malgun Gothic" pitchFamily="34" charset="-122"/>
                 <a:cs typeface="Malgun Gothic" pitchFamily="34" charset="-120"/>
               </a:rPr>
-              <a:t>M1팀 · 매출분석 툴 · 05  ·  목은 계획 — 끝나면 '한 일'로 바꾸기</a:t>
+              <a:t>M1팀 · 매출분석 툴 · 05</a:t>
             </a:r>
             <a:endParaRPr lang="en-US" sz="1100" dirty="0"/>
           </a:p>

--- a/docs/presentation/M1_presentation_draft_v0.1.pptx
+++ b/docs/presentation/M1_presentation_draft_v0.1.pptx
@@ -3716,7 +3716,7 @@
                           <a:ea typeface="Malgun Gothic" pitchFamily="34" charset="-122"/>
                           <a:cs typeface="Malgun Gothic" pitchFamily="34" charset="-120"/>
                         </a:rPr>
-                        <a:t>열 누락 · 숫자 칸 글자 · 빈 파일 · 이미지</a:t>
+                        <a:t>필수 열 누락 · 숫자 칸 글자 · 빈 파일 · 이미지</a:t>
                       </a:r>
                       <a:endParaRPr lang="en-US" sz="1500" dirty="0">
                         <a:latin typeface="Malgun Gothic" charset="0"/>
@@ -9685,7 +9685,7 @@
                           <a:ea typeface="Malgun Gothic" pitchFamily="34" charset="-122"/>
                           <a:cs typeface="Malgun Gothic" pitchFamily="34" charset="-120"/>
                         </a:rPr>
-                        <a:t>part5 · PR #3</a:t>
+                        <a:t>part5 · PR #8</a:t>
                       </a:r>
                       <a:endParaRPr lang="en-US" sz="1500" dirty="0">
                         <a:latin typeface="Malgun Gothic" charset="0"/>
@@ -10720,7 +10720,7 @@
                 <a:ea typeface="Malgun Gothic" pitchFamily="34" charset="-122"/>
                 <a:cs typeface="Malgun Gothic" pitchFamily="34" charset="-120"/>
               </a:rPr>
-              <a:t>화면 버전 구분</a:t>
+              <a:t>CSV 기준 정리</a:t>
             </a:r>
             <a:endParaRPr lang="en-US" sz="1300" dirty="0"/>
           </a:p>
@@ -10740,7 +10740,7 @@
                 <a:ea typeface="Malgun Gothic" pitchFamily="34" charset="-122"/>
                 <a:cs typeface="Malgun Gothic" pitchFamily="34" charset="-120"/>
               </a:rPr>
-              <a:t>PR 병합 요청</a:t>
+              <a:t>PR 병합 · 배포</a:t>
             </a:r>
             <a:endParaRPr lang="en-US" sz="1300" dirty="0"/>
           </a:p>

--- a/docs/presentation/M1_presentation_draft_v0.1.pptx
+++ b/docs/presentation/M1_presentation_draft_v0.1.pptx
@@ -514,10 +514,28 @@
           <a:lstStyle/>
           <a:p>
             <a:r>
-              <a:rPr lang="en-US" dirty="0"/>
-              <a:t>인사하고 팀 이름과 주제를 한 문장으로. "매출이 왜 떨어졌는지 데이터로 답해 주는 도구입니다." 발표 순서: 문제 → 해결 → 역할·일정 → 시연 → 품질·한계. (약 30초)</a:t>
-            </a:r>
-            <a:endParaRPr lang="en-US" dirty="0"/>
+              <a:t>[0:00–0:45 · 45초]</a:t>
+            </a:r>
+          </a:p>
+          <a:p>
+            <a:r>
+              <a:t>안녕하세요, M1팀입니다. 저희는 '매출분석 툴'을 만들었습니다.</a:t>
+            </a:r>
+          </a:p>
+          <a:p>
+            <a:r>
+              <a:t>매출 CSV를 올리면 지표는 코드가 계산하고, AI는 그 결과를 쉬운 말로 해석해 줍니다.</a:t>
+            </a:r>
+          </a:p>
+          <a:p>
+            <a:r>
+              <a:t>한 문장으로 말씀드리면, "매출이 왜 떨어졌는지 데이터로 답해 주는 도구"입니다.</a:t>
+            </a:r>
+          </a:p>
+          <a:p>
+            <a:r>
+              <a:t>문제, 해결 방법, 역할과 일정, 시연, 품질과 한계 순서로 말씀드리겠습니다.</a:t>
+            </a:r>
           </a:p>
         </p:txBody>
       </p:sp>
@@ -602,10 +620,28 @@
           <a:lstStyle/>
           <a:p>
             <a:r>
-              <a:rPr lang="en-US" dirty="0"/>
-              <a:t>답변 카드 구조(summary · facts · hypotheses · actions · limitations)는 4번 프롬프트, 3번 모범 답, 5번 카드가 모두 같은 형식. 오답 기준(시나리오 §12): 추석 · 품절 · 유입 감소를 원인으로 단정하면 오답. (약 1분)</a:t>
-            </a:r>
-            <a:endParaRPr lang="en-US" dirty="0"/>
+              <a:t>[10:45–11:45 · 1분]</a:t>
+            </a:r>
+          </a:p>
+          <a:p>
+            <a:r>
+              <a:t>실제 AI 답변 화면입니다. 9월 30일 로그인한 상태로 실제 서버를 불렀고, 12.2초 만에 응답했습니다.</a:t>
+            </a:r>
+          </a:p>
+          <a:p>
+            <a:r>
+              <a:t>답변 속 숫자 — 31.5%, 32.8%, 33.4% 등 8개 — 는 모두 정답표 값 그대로였습니다. AI가 숫자를 새로 만들지 않았다는 뜻입니다.</a:t>
+            </a:r>
+          </a:p>
+          <a:p>
+            <a:r>
+              <a:t>그리고 원인은 '후보'로만 말합니다. "인과관계는 확정할 수 없습니다"라는 문장이 답변에 들어 있습니다.</a:t>
+            </a:r>
+          </a:p>
+          <a:p>
+            <a:r>
+              <a:t>추석이나 품절을 원인으로 단정하면 오답으로 정해 두었는데, 그런 단정은 없었습니다.</a:t>
+            </a:r>
           </a:p>
         </p:txBody>
       </p:sp>
@@ -690,10 +726,33 @@
           <a:lstStyle/>
           <a:p>
             <a:r>
-              <a:rPr lang="en-US" dirty="0"/>
-              <a:t>각 줄의 증거 파일: 4번 part4/TEAM_HANDOFF.md, 2번 docs/test_results/rls_test_2026-09-29.csv, 5번 PR #3 확인 항목. 합친 뒤 STEP_CHECKLIST Step 1~3 을 다시 해 본 결과로 이 표를 갱신한다. (약 1분)</a:t>
-            </a:r>
-            <a:endParaRPr lang="en-US" dirty="0"/>
+              <a:t>[11:45–12:30 · 45초]</a:t>
+            </a:r>
+          </a:p>
+          <a:p>
+            <a:r>
+              <a:t>"됐다"가 아니라 확인한 기록입니다.</a:t>
+            </a:r>
+          </a:p>
+          <a:p>
+            <a:r>
+              <a:t>계산 정확도는 1,200행을 정답표와 대조해 190개 모두 일치했습니다.</a:t>
+            </a:r>
+          </a:p>
+          <a:p>
+            <a:r>
+              <a:t>DB 권한은 A · B 두 계정으로 시험해 10개 모두 통과했습니다.</a:t>
+            </a:r>
+          </a:p>
+          <a:p>
+            <a:r>
+              <a:t>잘못된 CSV는 필수 열 누락, 숫자 칸 글자, 빈 파일, 이미지 4가지를 안내합니다.</a:t>
+            </a:r>
+          </a:p>
+          <a:p>
+            <a:r>
+              <a:t>승인 전이나 취소 후에는 AI 호출이 0회였고, PR들을 함께 합쳐 봐도 충돌이 없었습니다.</a:t>
+            </a:r>
           </a:p>
         </p:txBody>
       </p:sp>
@@ -778,10 +837,28 @@
           <a:lstStyle/>
           <a:p>
             <a:r>
-              <a:rPr lang="en-US" dirty="0"/>
-              <a:t>저장소 전체에서 비밀키 검색 결과 없음(공개용 publishable 키만). 화면 가리기는 1차 방어이고 실제 보호는 RLS 라는 점(2번 PR #4). (약 40초)</a:t>
-            </a:r>
-            <a:endParaRPr lang="en-US" dirty="0"/>
+              <a:t>[12:30–13:00 · 30초]</a:t>
+            </a:r>
+          </a:p>
+          <a:p>
+            <a:r>
+              <a:t>보안은 세 가지입니다.</a:t>
+            </a:r>
+          </a:p>
+          <a:p>
+            <a:r>
+              <a:t>AI 키와 결제 비밀키는 서버 Secret에만 있고, 브라우저에는 공개용 키만 있습니다.</a:t>
+            </a:r>
+          </a:p>
+          <a:p>
+            <a:r>
+              <a:t>DB는 행 단위 권한(RLS)으로, 로그인한 사람은 자기 데이터만 읽고 씁니다.</a:t>
+            </a:r>
+          </a:p>
+          <a:p>
+            <a:r>
+              <a:t>그리고 AI 답변에 태그가 섞여 와도 실행되지 않고 글자로만 보입니다.</a:t>
+            </a:r>
           </a:p>
         </p:txBody>
       </p:sp>
@@ -866,10 +943,28 @@
           <a:lstStyle/>
           <a:p>
             <a:r>
-              <a:rPr lang="en-US" dirty="0"/>
-              <a:t>발표 당일까지 해결된 줄은 지우거나 "해결"로 바꾼다. 한계를 먼저 말하면 질의응답에서 방어가 쉽다. 실제 데이터로 이어 쓰는 계획이 있다면 여기서 한 줄. (약 1분)</a:t>
-            </a:r>
-            <a:endParaRPr lang="en-US" dirty="0"/>
+              <a:t>[13:00–14:00 · 1분]</a:t>
+            </a:r>
+          </a:p>
+          <a:p>
+            <a:r>
+              <a:t>아직 안 된 것도 숨기지 않겠습니다.</a:t>
+            </a:r>
+          </a:p>
+          <a:p>
+            <a:r>
+              <a:t>로그인 상태로 AI 분석을 끝까지 해 보는 것은 9월 30일에 완료했습니다. 처음엔 400 오류가 났는데, 원인은 API 키의 크레딧이 0이었던 것이고 키를 바꿔 해결했습니다.</a:t>
+            </a:r>
+          </a:p>
+          <a:p>
+            <a:r>
+              <a:t>남은 것은 이렇습니다. AI 답변이 정해진 형식이 아니라 글로 와서, 화면이 제목을 알아보고 나눠 보여 주고 있습니다 — 다음엔 형식 자체로 받겠습니다.</a:t>
+            </a:r>
+          </a:p>
+          <a:p>
+            <a:r>
+              <a:t>결제는 토스 테스트 결제 왕복, 분석 결과 저장과 다른 계정 거부 테스트, 그리고 개발용으로 꺼 둔 이메일 인증이 다음 단계입니다.</a:t>
+            </a:r>
           </a:p>
         </p:txBody>
       </p:sp>
@@ -954,10 +1049,33 @@
           <a:lstStyle/>
           <a:p>
             <a:r>
-              <a:rPr lang="en-US" dirty="0"/>
-              <a:t>예상 질문: 왜 AI 에 계산을 안 맡겼나(같은 입력 같은 숫자, 정답표 190/190) · AI 가 틀리면(원인은 후보로만, 실패하면 가짜 결과 없음) · 실제 데이터로 쓸 수 있나(CSV 필수 7열만 맞추면 됨, PRD §7).</a:t>
-            </a:r>
-            <a:endParaRPr lang="en-US" dirty="0"/>
+              <a:t>[14:00–14:30 · 30초, 이어서 질문 시간]</a:t>
+            </a:r>
+          </a:p>
+          <a:p>
+            <a:r>
+              <a:t>들어 주셔서 감사합니다. 저장소와 체험 주소는 화면에 있습니다. 질문 받겠습니다.</a:t>
+            </a:r>
+          </a:p>
+          <a:p>
+            <a:r>
+              <a:t>[예상 질문]</a:t>
+            </a:r>
+          </a:p>
+          <a:p>
+            <a:r>
+              <a:t>· 왜 AI에게 계산을 안 맡겼나요? → 같은 입력에 같은 숫자가 나와야 해서입니다. 정답표 190개 모두 일치.</a:t>
+            </a:r>
+          </a:p>
+          <a:p>
+            <a:r>
+              <a:t>· AI가 틀리면요? → 원인은 후보로만 말하고, 실패하면 가짜 결과 없이 실패 카드를 보여 줍니다.</a:t>
+            </a:r>
+          </a:p>
+          <a:p>
+            <a:r>
+              <a:t>· 실제 데이터로도 쓸 수 있나요? → 날짜 · 상품 · 채널 3열만 있으면 올라가고, 쿠팡 주문내역 원본은 그대로 읽습니다. 없는 지표는 '계산 불가'로 표시합니다.</a:t>
+            </a:r>
           </a:p>
         </p:txBody>
       </p:sp>
@@ -1042,10 +1160,38 @@
           <a:lstStyle/>
           <a:p>
             <a:r>
-              <a:rPr lang="en-US" dirty="0"/>
-              <a:t>대상은 쇼핑몰 운영자(PRD §2). 세 가지 불편을 짧게. 세 번째가 우리 설계의 출발점: "그래서 계산은 코드가, 해석은 AI가 하도록 나눴습니다"로 다음 장에 연결. (약 1분)</a:t>
-            </a:r>
-            <a:endParaRPr lang="en-US" dirty="0"/>
+              <a:t>[0:45–1:45 · 1분]</a:t>
+            </a:r>
+          </a:p>
+          <a:p>
+            <a:r>
+              <a:t>쇼핑몰을 운영하면 "이번 달 매출이 왜 떨어졌지?"라는 질문을 자주 하게 됩니다.</a:t>
+            </a:r>
+          </a:p>
+          <a:p>
+            <a:r>
+              <a:t>그런데 바로 답하기 어려운 이유가 세 가지 있습니다.</a:t>
+            </a:r>
+          </a:p>
+          <a:p>
+            <a:r>
+              <a:t>첫째, 쿠팡 · 네이버스토어 · 자사몰, 제품 20종의 숫자가 한 파일에 섞여 있어 어느 쪽이 줄었는지 눈으로 찾기 어렵습니다.</a:t>
+            </a:r>
+          </a:p>
+          <a:p>
+            <a:r>
+              <a:t>둘째, 광고비 · 방문 · 구매전환율 · ROAS를 따로 보면 원인이 안 보이고 이어서 봐야 합니다.</a:t>
+            </a:r>
+          </a:p>
+          <a:p>
+            <a:r>
+              <a:t>셋째, 이 계산을 AI에게 통째로 맡기면 틀리거나 지어낼 수 있습니다. 같은 입력에 같은 숫자가 나와야 하는데 말이죠.</a:t>
+            </a:r>
+          </a:p>
+          <a:p>
+            <a:r>
+              <a:t>그래서 저희는 일을 둘로 나눴습니다.</a:t>
+            </a:r>
           </a:p>
         </p:txBody>
       </p:sp>
@@ -1130,10 +1276,33 @@
           <a:lstStyle/>
           <a:p>
             <a:r>
-              <a:rPr lang="en-US" dirty="0"/>
-              <a:t>우리 팀의 원칙 한 줄(PRD §1, 4번 TEAM_HANDOFF "AI 원칙"). "원인은 확정하지 않고 후보로만 말한다"도 강조. (약 1분)</a:t>
-            </a:r>
-            <a:endParaRPr lang="en-US" dirty="0"/>
+              <a:t>[1:45–2:30 · 45초]</a:t>
+            </a:r>
+          </a:p>
+          <a:p>
+            <a:r>
+              <a:t>저희 원칙은 "계산은 코드, 해석은 AI"입니다.</a:t>
+            </a:r>
+          </a:p>
+          <a:p>
+            <a:r>
+              <a:t>첫째, 숫자는 코드가 정해진 공식으로 계산합니다. 같은 입력이면 늘 같은 숫자입니다.</a:t>
+            </a:r>
+          </a:p>
+          <a:p>
+            <a:r>
+              <a:t>둘째, AI는 계산이 끝난 결과만 받아서 해석합니다. 숫자를 다시 계산하지 않습니다.</a:t>
+            </a:r>
+          </a:p>
+          <a:p>
+            <a:r>
+              <a:t>셋째, 사실과 추정을 나눕니다. AI 답변은 확인된 사실, 원인 후보, 실행 제안, 한계로 나눠 보여 주고,</a:t>
+            </a:r>
+          </a:p>
+          <a:p>
+            <a:r>
+              <a:t>원인은 확정하지 않고 '후보'로만 말하게 했습니다.</a:t>
+            </a:r>
           </a:p>
         </p:txBody>
       </p:sp>
@@ -1218,10 +1387,33 @@
           <a:lstStyle/>
           <a:p>
             <a:r>
-              <a:rPr lang="en-US" dirty="0"/>
-              <a:t>역할 분담은 과제 필수 항목. 각자 폴더(part2 · part4 · part5)를 따로 두고 PR 로 합쳐 서로 코드를 덮지 않게 했다는 점을 말한다. 담당자별로 이어서 설명할 경우 이 장에서 순서를 알려 준다. (약 1분)</a:t>
-            </a:r>
-            <a:endParaRPr lang="en-US" dirty="0"/>
+              <a:t>[2:30–3:15 · 45초]</a:t>
+            </a:r>
+          </a:p>
+          <a:p>
+            <a:r>
+              <a:t>다섯 명이 한 흐름에서 한 칸씩 맡았습니다.</a:t>
+            </a:r>
+          </a:p>
+          <a:p>
+            <a:r>
+              <a:t>지연님이 PM과 문서 · 저장소 관리, 규현님이 로그인 · DB · 권한 · 결제,</a:t>
+            </a:r>
+          </a:p>
+          <a:p>
+            <a:r>
+              <a:t>보겸님이 더미 데이터와 정답 시나리오, 성순님이 지표 계산과 AI 분석 서버,</a:t>
+            </a:r>
+          </a:p>
+          <a:p>
+            <a:r>
+              <a:t>두규님이 대시보드와 화면 디자인을 맡았습니다.</a:t>
+            </a:r>
+          </a:p>
+          <a:p>
+            <a:r>
+              <a:t>각자 폴더를 따로 두고 브랜치와 PR로 합쳐서, 서로의 코드를 덮어쓰지 않게 했습니다.</a:t>
+            </a:r>
           </a:p>
         </p:txBody>
       </p:sp>
@@ -1306,10 +1498,28 @@
           <a:lstStyle/>
           <a:p>
             <a:r>
-              <a:rPr lang="en-US" dirty="0"/>
-              <a:t>개발 일정은 과제 필수 항목. 화요일 하루에 네 파트가 PR 로 1차 완성한 점을 강조. 수 · 목은 계획(회색 줄) — 끝나면 파란 줄로 바꾸고 실제로 한 일로 고친다. 수: PR #1~#5 병합(순서 #1 · #2 → #3 → #4 → #5), 2번 로그인을 대시보드에 연결, STEP_CHECKLIST Step 1~3 을 합친 뒤 다시 해 보기, 로그인 상태로 실제 AI 분석 1회. 목: 2번 결제(U03), GitHub Pages 를 main 으로 바꿔 체험 주소 확정, 발표 자료 마감(시연 캡처 넣기), 시연 리허설. (약 1분)</a:t>
-            </a:r>
-            <a:endParaRPr lang="en-US" dirty="0"/>
+              <a:t>[3:15–4:00 · 45초]</a:t>
+            </a:r>
+          </a:p>
+          <a:p>
+            <a:r>
+              <a:t>일정은 5일이었습니다.</a:t>
+            </a:r>
+          </a:p>
+          <a:p>
+            <a:r>
+              <a:t>월요일에 주제와 역할, 문서 틀을 정했고, 화요일 하루에 파트별로 1차 완성해 PR 다섯 개로 올렸습니다.</a:t>
+            </a:r>
+          </a:p>
+          <a:p>
+            <a:r>
+              <a:t>수요일에는 팀 저장소로 모아 전체 합치기를 시험하고, 로그인을 연결하고, AI 오류 원인을 추적했습니다.</a:t>
+            </a:r>
+          </a:p>
+          <a:p>
+            <a:r>
+              <a:t>목요일에는 대시보드 2차 버전과 CSV 기준 정리, PR 병합과 배포를 마쳤고, 오늘 오전 10시에 제출했습니다.</a:t>
+            </a:r>
           </a:p>
         </p:txBody>
       </p:sp>
@@ -1394,10 +1604,33 @@
           <a:lstStyle/>
           <a:p>
             <a:r>
-              <a:rPr lang="en-US" dirty="0"/>
-              <a:t>TECH_SPEC §2 의 구조. 모두 HTML/JS + Supabase(2번도 Streamlit 에서 옮김). 각 파트가 폴더로 나뉘어 있고, 합칠 때는 파일 몇 줄만 불러오면 이어진다는 점. (약 1분)</a:t>
-            </a:r>
-            <a:endParaRPr lang="en-US" dirty="0"/>
+              <a:t>[4:00–5:00 · 1분]</a:t>
+            </a:r>
+          </a:p>
+          <a:p>
+            <a:r>
+              <a:t>화면 하나 안에서 다섯 파트가 차례로 이어집니다.</a:t>
+            </a:r>
+          </a:p>
+          <a:p>
+            <a:r>
+              <a:t>먼저 로그인해야 화면이 열립니다. CSV는 월별 파일 여러 개를 한 번에 올릴 수 있고, 잘못된 파일이면 이유를 안내합니다.</a:t>
+            </a:r>
+          </a:p>
+          <a:p>
+            <a:r>
+              <a:t>올린 데이터는 4번 엔진이 월별 · 채널별 지표와 경쟁가 진단으로 계산하고, 대시보드가 KPI와 차트로 보여 줍니다.</a:t>
+            </a:r>
+          </a:p>
+          <a:p>
+            <a:r>
+              <a:t>질문하면 먼저 분석 계획 카드가 나오고, [승인]을 눌러야만 AI 서버를 부릅니다.</a:t>
+            </a:r>
+          </a:p>
+          <a:p>
+            <a:r>
+              <a:t>AI 키는 서버에만 있고, AI는 계산이 끝난 결과만 받습니다.</a:t>
+            </a:r>
           </a:p>
         </p:txBody>
       </p:sp>
@@ -1482,10 +1715,33 @@
           <a:lstStyle/>
           <a:p>
             <a:r>
-              <a:rPr lang="en-US" dirty="0"/>
-              <a:t>3번이 만든 데이터. 도구가 이 숨은 이야기를 찾아내는지, 함정 변수(추석 등)에 속지 않는지로 정답을 판단한다. 제품명만 실제 판매 제품을 참고했고 숫자는 모두 가상. (약 1분)</a:t>
-            </a:r>
-            <a:endParaRPr lang="en-US" dirty="0"/>
+              <a:t>[5:00–5:45 · 45초]</a:t>
+            </a:r>
+          </a:p>
+          <a:p>
+            <a:r>
+              <a:t>시험용으로 정답을 미리 숨겨 둔 가상 쇼핑몰 데이터를 만들었습니다.</a:t>
+            </a:r>
+          </a:p>
+          <a:p>
+            <a:r>
+              <a:t>건강보조식품 20종, 판매 채널 3곳, 6월부터 9월까지 1,200행입니다.</a:t>
+            </a:r>
+          </a:p>
+          <a:p>
+            <a:r>
+              <a:t>숨겨 둔 이야기는 이렇습니다. 9월 초 쿠팡에 경쟁 셀러가 들어와 우리 인기 제품 8개를 더 싸게 팔았고,</a:t>
+            </a:r>
+          </a:p>
+          <a:p>
+            <a:r>
+              <a:t>쿠팡 광고비를 늘렸는데도 쿠팡 구매전환율이 5.16%에서 2.43%로 떨어졌습니다.</a:t>
+            </a:r>
+          </a:p>
+          <a:p>
+            <a:r>
+              <a:t>도구가 이 이야기를 찾아내는지, 추석 같은 함정에 속지 않는지로 정답을 판단합니다.</a:t>
+            </a:r>
           </a:p>
         </p:txBody>
       </p:sp>
@@ -1570,10 +1826,38 @@
           <a:lstStyle/>
           <a:p>
             <a:r>
-              <a:rPr lang="en-US" dirty="0"/>
-              <a:t>대시보드 KPI 가 보여 주는 숫자 그대로(정답표와 같음). 핵심 메시지: 방문은 그대로인데 전환이 떨어졌고, 그 하락이 쿠팡에 몰렸다. 다음 장에서 실제 화면으로. (약 1분)</a:t>
-            </a:r>
-            <a:endParaRPr lang="en-US" dirty="0"/>
+              <a:t>[5:45–6:45 · 1분]</a:t>
+            </a:r>
+          </a:p>
+          <a:p>
+            <a:r>
+              <a:t>도구가 찾아낸 숫자입니다. 정답표와 모두 같습니다.</a:t>
+            </a:r>
+          </a:p>
+          <a:p>
+            <a:r>
+              <a:t>9월 매출은 2,735만 원으로 전월보다 31.45% 줄었습니다.</a:t>
+            </a:r>
+          </a:p>
+          <a:p>
+            <a:r>
+              <a:t>하락액의 92.7%가 쿠팡에서 나왔고, 쿠팡 ROAS는 2.97배로 떨어졌습니다.</a:t>
+            </a:r>
+          </a:p>
+          <a:p>
+            <a:r>
+              <a:t>전체 ROAS는 3.95배, 구매전환율은 2.99%입니다.</a:t>
+            </a:r>
+          </a:p>
+          <a:p>
+            <a:r>
+              <a:t>핵심은 이 줄입니다. 광고비는 23% 늘렸고 방문은 0.9%로 그대로였는데, 구매가 줄었습니다.</a:t>
+            </a:r>
+          </a:p>
+          <a:p>
+            <a:r>
+              <a:t>즉, 손님이 안 온 게 아니라 와서 사지 않았다 — 유입이 아니라 전환의 문제입니다. 이제 실제 화면으로 보여 드리겠습니다.</a:t>
+            </a:r>
           </a:p>
         </p:txBody>
       </p:sp>
@@ -1658,10 +1942,58 @@
           <a:lstStyle/>
           <a:p>
             <a:r>
-              <a:rPr lang="en-US" dirty="0"/>
-              <a:t>시연 대본. 2) KPI 6칸이 앞 장 숫자와 같다는 것. 3) 쿠팡 막대가 가장 짧고 -66% 빨강, 경쟁가 제품 8개. 4) 계획 카드: "아직 AI 를 부르지 않았습니다 — 승인해야 부릅니다". 5) 답변 카드의 사실 / 원인 후보(확정 아님) 색 구분, 실행 기록. 6) 숫자 칸에 글자 → 파일명 · 행 번호. 네트워크가 끊기면: 실패 카드가 나오는 것 자체가 Step 3 시연(가짜 결과 없음). 예비로 화면 녹화 준비.</a:t>
-            </a:r>
-            <a:endParaRPr lang="en-US" dirty="0"/>
+              <a:t>[6:45–10:45 · 4분, 시연]</a:t>
+            </a:r>
+          </a:p>
+          <a:p>
+            <a:r>
+              <a:t>[준비] 배포 주소(화면 아래)를 미리 열어 두고, 발표자 본인 계정으로 로그인해 둡니다. AI 분석은 계정당 하루 한도가 있으니 리허설에서 다 쓰지 않게 합니다.</a:t>
+            </a:r>
+          </a:p>
+          <a:p>
+            <a:r>
+              <a:t>(1) 로그인합니다. 로그인 전에는 화면이 가려져 있습니다. (20초)</a:t>
+            </a:r>
+          </a:p>
+          <a:p>
+            <a:r>
+              <a:t>(2) [예시 데이터로 시작]을 누르면 맨 위에 결론이 먼저 나옵니다. "9월 매출 31.5% 감소, 손님은 그대로인데 사지 않았다."</a:t>
+            </a:r>
+          </a:p>
+          <a:p>
+            <a:r>
+              <a:t>    아래 분해 줄 — 매출 = 방문 × 구매전환율 × 객단가 — 에서 구매전환율 칸이 '여기서 무너짐'으로 표시됩니다. KPI 칸의 매출 · ROAS · 구매전환율은 앞 장 숫자와 같습니다. (50초)</a:t>
+            </a:r>
+          </a:p>
+          <a:p>
+            <a:r>
+              <a:t>(3) 판매 채널별 ROAS에서 쿠팡이 가장 크게 떨어졌고(-66%), 아래 경쟁가 진단에 우리보다 싸게 파는 제품 8개가 나옵니다. (30초)</a:t>
+            </a:r>
+          </a:p>
+          <a:p>
+            <a:r>
+              <a:t>(4) "광고비는 늘었는데 왜 매출이 안 늘었어?"라고 물으면 분석 계획 카드가 먼저 나옵니다. 아직 AI를 부르지 않았고, 승인해야 부릅니다. (30초)</a:t>
+            </a:r>
+          </a:p>
+          <a:p>
+            <a:r>
+              <a:t>(5) [승인하고 분석]을 누르면 AI 답변이 확인된 사실 · 원인 후보 · 우선 액션으로 나뉘어 나옵니다. 원인 후보에는 '확정 아님' 표시가 붙습니다. (1분)</a:t>
+            </a:r>
+          </a:p>
+          <a:p>
+            <a:r>
+              <a:t>(6) 마지막으로 잘못된 CSV를 올리면 계산하지 않고, 파일 이름 · 행 번호 · 열 이름으로 이유를 알려 줍니다.</a:t>
+            </a:r>
+          </a:p>
+          <a:p>
+            <a:r>
+              <a:t>    판매 지표만 있는 CSV나 쿠팡 주문내역 원본도 올릴 수 있고, 없는 지표는 0이 아니라 '계산 불가'로 표시됩니다. (50초)</a:t>
+            </a:r>
+          </a:p>
+          <a:p>
+            <a:r>
+              <a:t>[대비] AI 응답이 늦으면(보통 7~27초) 기다리는 동안 (6)을 먼저 보여 줍니다. 네트워크가 끊기면 실패 카드가 나오는 것도 '가짜 결과를 만들지 않는다'는 시연입니다.</a:t>
+            </a:r>
           </a:p>
         </p:txBody>
       </p:sp>
@@ -2013,8 +2345,293 @@
   <p:cSld name="Slide 1">
     <p:bg>
       <p:bgPr>
+        <a:gradFill rotWithShape="1">
+          <a:gsLst>
+            <a:gs pos="0">
+              <a:srgbClr val="131A2E"/>
+            </a:gs>
+            <a:gs pos="55000">
+              <a:srgbClr val="1F2C6B"/>
+            </a:gs>
+            <a:gs pos="100000">
+              <a:srgbClr val="3346C9"/>
+            </a:gs>
+          </a:gsLst>
+          <a:lin ang="2280000" scaled="0"/>
+        </a:gradFill>
+      </p:bgPr>
+    </p:bg>
+    <p:spTree>
+      <p:nvGrpSpPr>
+        <p:cNvPr id="1" name=""/>
+        <p:cNvGrpSpPr/>
+        <p:nvPr/>
+      </p:nvGrpSpPr>
+      <p:grpSpPr>
+        <a:xfrm>
+          <a:off x="0" y="0"/>
+          <a:ext cx="0" cy="0"/>
+          <a:chOff x="0" y="0"/>
+          <a:chExt cx="0" cy="0"/>
+        </a:xfrm>
+      </p:grpSpPr>
+      <p:sp>
+        <p:nvSpPr>
+          <p:cNvPr id="3" name="Text 0"/>
+          <p:cNvSpPr txBox="1"/>
+          <p:nvPr/>
+        </p:nvSpPr>
+        <p:spPr>
+          <a:xfrm>
+            <a:off x="813816" y="685800"/>
+            <a:ext cx="10564063" cy="411480"/>
+          </a:xfrm>
+          <a:prstGeom prst="rect">
+            <a:avLst/>
+          </a:prstGeom>
+          <a:noFill/>
+          <a:ln/>
+        </p:spPr>
+        <p:txBody>
+          <a:bodyPr wrap="square" lIns="0" tIns="0" rIns="0" bIns="0" rtlCol="0" anchor="t"/>
+          <a:lstStyle/>
+          <a:p>
+            <a:pPr indent="0" marL="0">
+              <a:buNone/>
+            </a:pPr>
+            <a:r>
+              <a:rPr lang="en-US" sz="1500" b="1" spc="200" kern="0" dirty="0">
+                <a:solidFill>
+                  <a:srgbClr val="9DAAFF"/>
+                </a:solidFill>
+                <a:latin typeface="Malgun Gothic" pitchFamily="34" charset="0"/>
+                <a:ea typeface="Malgun Gothic" pitchFamily="34" charset="-122"/>
+                <a:cs typeface="Malgun Gothic" pitchFamily="34" charset="-120"/>
+              </a:rPr>
+              <a:t>M1팀 · 모두의연구소 AI 에이전트 2기 팀프로젝트</a:t>
+            </a:r>
+            <a:endParaRPr lang="en-US" sz="1500" dirty="0"/>
+          </a:p>
+        </p:txBody>
+      </p:sp>
+      <p:sp>
+        <p:nvSpPr>
+          <p:cNvPr id="4" name="Text 1"/>
+          <p:cNvSpPr txBox="1"/>
+          <p:nvPr/>
+        </p:nvSpPr>
+        <p:spPr>
+          <a:xfrm>
+            <a:off x="813816" y="2148840"/>
+            <a:ext cx="10564063" cy="1005840"/>
+          </a:xfrm>
+          <a:prstGeom prst="rect">
+            <a:avLst/>
+          </a:prstGeom>
+          <a:noFill/>
+          <a:ln/>
+        </p:spPr>
+        <p:txBody>
+          <a:bodyPr wrap="square" lIns="0" tIns="0" rIns="0" bIns="0" rtlCol="0" anchor="t"/>
+          <a:lstStyle/>
+          <a:p>
+            <a:pPr indent="0" marL="0">
+              <a:buNone/>
+            </a:pPr>
+            <a:r>
+              <a:rPr lang="en-US" sz="5600" b="1" dirty="0">
+                <a:solidFill>
+                  <a:srgbClr val="F5F7FC"/>
+                </a:solidFill>
+                <a:latin typeface="Malgun Gothic" pitchFamily="34" charset="0"/>
+                <a:ea typeface="Malgun Gothic" pitchFamily="34" charset="-122"/>
+                <a:cs typeface="Malgun Gothic" pitchFamily="34" charset="-120"/>
+              </a:rPr>
+              <a:t>매출분석 툴</a:t>
+            </a:r>
+            <a:endParaRPr lang="en-US" sz="5600" dirty="0"/>
+          </a:p>
+        </p:txBody>
+      </p:sp>
+      <p:sp>
+        <p:nvSpPr>
+          <p:cNvPr id="5" name="Text 2"/>
+          <p:cNvSpPr txBox="1"/>
+          <p:nvPr/>
+        </p:nvSpPr>
+        <p:spPr>
+          <a:xfrm>
+            <a:off x="813816" y="3291840"/>
+            <a:ext cx="8686800" cy="1097280"/>
+          </a:xfrm>
+          <a:prstGeom prst="rect">
+            <a:avLst/>
+          </a:prstGeom>
+          <a:noFill/>
+          <a:ln/>
+        </p:spPr>
+        <p:txBody>
+          <a:bodyPr wrap="square" lIns="0" tIns="0" rIns="0" bIns="0" rtlCol="0" anchor="t"/>
+          <a:lstStyle/>
+          <a:p>
+            <a:pPr indent="0" marL="0">
+              <a:lnSpc>
+                <a:spcPct val="125000"/>
+              </a:lnSpc>
+              <a:buNone/>
+            </a:pPr>
+            <a:r>
+              <a:rPr lang="en-US" sz="2000" dirty="0">
+                <a:solidFill>
+                  <a:srgbClr val="C9D1E0"/>
+                </a:solidFill>
+                <a:latin typeface="Malgun Gothic" pitchFamily="34" charset="0"/>
+                <a:ea typeface="Malgun Gothic" pitchFamily="34" charset="-122"/>
+                <a:cs typeface="Malgun Gothic" pitchFamily="34" charset="-120"/>
+              </a:rPr>
+              <a:t>매출 CSV를 올리면 지표는 코드가 계산하고,</a:t>
+            </a:r>
+            <a:endParaRPr lang="en-US" sz="2000" dirty="0"/>
+          </a:p>
+          <a:p>
+            <a:pPr indent="0" marL="0">
+              <a:lnSpc>
+                <a:spcPct val="125000"/>
+              </a:lnSpc>
+              <a:buNone/>
+            </a:pPr>
+            <a:r>
+              <a:rPr lang="en-US" sz="2000" dirty="0">
+                <a:solidFill>
+                  <a:srgbClr val="C9D1E0"/>
+                </a:solidFill>
+                <a:latin typeface="Malgun Gothic" pitchFamily="34" charset="0"/>
+                <a:ea typeface="Malgun Gothic" pitchFamily="34" charset="-122"/>
+                <a:cs typeface="Malgun Gothic" pitchFamily="34" charset="-120"/>
+              </a:rPr>
+              <a:t>AI는 계산된 결과를 쉬운 말로 해석합니다</a:t>
+            </a:r>
+            <a:endParaRPr lang="en-US" sz="2000" dirty="0"/>
+          </a:p>
+        </p:txBody>
+      </p:sp>
+      <p:sp>
+        <p:nvSpPr>
+          <p:cNvPr id="6" name="Text 3"/>
+          <p:cNvSpPr txBox="1"/>
+          <p:nvPr/>
+        </p:nvSpPr>
+        <p:spPr>
+          <a:xfrm>
+            <a:off x="813816" y="5989320"/>
+            <a:ext cx="7315200" cy="365760"/>
+          </a:xfrm>
+          <a:prstGeom prst="rect">
+            <a:avLst/>
+          </a:prstGeom>
+          <a:noFill/>
+          <a:ln/>
+        </p:spPr>
+        <p:txBody>
+          <a:bodyPr wrap="square" lIns="0" tIns="0" rIns="0" bIns="0" rtlCol="0" anchor="t"/>
+          <a:lstStyle/>
+          <a:p>
+            <a:pPr indent="0" marL="0">
+              <a:buNone/>
+            </a:pPr>
+            <a:r>
+              <a:rPr lang="en-US" sz="1500" dirty="0">
+                <a:solidFill>
+                  <a:srgbClr val="C9D1E0"/>
+                </a:solidFill>
+                <a:latin typeface="Malgun Gothic" pitchFamily="34" charset="0"/>
+                <a:ea typeface="Malgun Gothic" pitchFamily="34" charset="-122"/>
+                <a:cs typeface="Malgun Gothic" pitchFamily="34" charset="-120"/>
+              </a:rPr>
+              <a:t>이지연 · 허규현 · 김보겸 · 김성순 · 이두규</a:t>
+            </a:r>
+            <a:endParaRPr lang="en-US" sz="1500" dirty="0"/>
+          </a:p>
+        </p:txBody>
+      </p:sp>
+      <p:sp>
+        <p:nvSpPr>
+          <p:cNvPr id="7" name="Text 4"/>
+          <p:cNvSpPr txBox="1"/>
+          <p:nvPr/>
+        </p:nvSpPr>
+        <p:spPr>
+          <a:xfrm>
+            <a:off x="8634679" y="5989320"/>
+            <a:ext cx="2743200" cy="365760"/>
+          </a:xfrm>
+          <a:prstGeom prst="rect">
+            <a:avLst/>
+          </a:prstGeom>
+          <a:noFill/>
+          <a:ln/>
+        </p:spPr>
+        <p:txBody>
+          <a:bodyPr wrap="square" lIns="0" tIns="0" rIns="0" bIns="0" rtlCol="0" anchor="t"/>
+          <a:lstStyle/>
+          <a:p>
+            <a:pPr algn="r" indent="0" marL="0">
+              <a:buNone/>
+            </a:pPr>
+            <a:r>
+              <a:rPr lang="en-US" sz="1500" dirty="0">
+                <a:solidFill>
+                  <a:srgbClr val="C9D1E0"/>
+                </a:solidFill>
+                <a:latin typeface="Malgun Gothic" pitchFamily="34" charset="0"/>
+                <a:ea typeface="Malgun Gothic" pitchFamily="34" charset="-122"/>
+                <a:cs typeface="Malgun Gothic" pitchFamily="34" charset="-120"/>
+              </a:rPr>
+              <a:t>2026. 10. 2</a:t>
+            </a:r>
+            <a:endParaRPr lang="en-US" sz="1500" dirty="0"/>
+          </a:p>
+        </p:txBody>
+      </p:sp>
+      <p:pic>
+        <p:nvPicPr>
+          <p:cNvPr id="8" name="Picture 7" descr="cover_bar_chart.png"/>
+          <p:cNvPicPr>
+            <a:picLocks noChangeAspect="1"/>
+          </p:cNvPicPr>
+          <p:nvPr/>
+        </p:nvPicPr>
+        <p:blipFill>
+          <a:blip r:embed="rId3"/>
+          <a:stretch>
+            <a:fillRect/>
+          </a:stretch>
+        </p:blipFill>
+        <p:spPr>
+          <a:xfrm>
+            <a:off x="8717280" y="1828800"/>
+            <a:ext cx="2377440" cy="2377440"/>
+          </a:xfrm>
+          <a:prstGeom prst="rect">
+            <a:avLst/>
+          </a:prstGeom>
+        </p:spPr>
+      </p:pic>
+    </p:spTree>
+  </p:cSld>
+  <p:clrMapOvr>
+    <a:masterClrMapping/>
+  </p:clrMapOvr>
+</p:sld>
+</file>
+
+<file path=ppt/slides/slide10.xml><?xml version="1.0" encoding="utf-8"?>
+<p:sld xmlns:a="http://schemas.openxmlformats.org/drawingml/2006/main" xmlns:r="http://schemas.openxmlformats.org/officeDocument/2006/relationships" xmlns:p="http://schemas.openxmlformats.org/presentationml/2006/main">
+  <p:cSld name="Slide 10">
+    <p:bg>
+      <p:bgPr>
         <a:solidFill>
-          <a:srgbClr val="14213D"/>
+          <a:srgbClr val="F5F7FC"/>
         </a:solidFill>
       </p:bgPr>
     </p:bg>
@@ -2040,8 +2657,8 @@
         </p:nvSpPr>
         <p:spPr>
           <a:xfrm>
-            <a:off x="813816" y="685800"/>
-            <a:ext cx="10564063" cy="411480"/>
+            <a:off x="813816" y="566928"/>
+            <a:ext cx="10564063" cy="365760"/>
           </a:xfrm>
           <a:prstGeom prst="rect">
             <a:avLst/>
@@ -2057,15 +2674,15 @@
               <a:buNone/>
             </a:pPr>
             <a:r>
-              <a:rPr lang="en-US" sz="1500" b="1" spc="200" kern="0" dirty="0">
-                <a:solidFill>
-                  <a:srgbClr val="F2A65A"/>
-                </a:solidFill>
-                <a:latin typeface="Malgun Gothic" pitchFamily="34" charset="0"/>
-                <a:ea typeface="Malgun Gothic" pitchFamily="34" charset="-122"/>
-                <a:cs typeface="Malgun Gothic" pitchFamily="34" charset="-120"/>
-              </a:rPr>
-              <a:t>M1팀 · 모두의연구소 AI 에이전트 2기 팀프로젝트</a:t>
+              <a:rPr lang="en-US" sz="1500" b="1" dirty="0">
+                <a:solidFill>
+                  <a:srgbClr val="5468FF"/>
+                </a:solidFill>
+                <a:latin typeface="Malgun Gothic" pitchFamily="34" charset="0"/>
+                <a:ea typeface="Malgun Gothic" pitchFamily="34" charset="-122"/>
+                <a:cs typeface="Malgun Gothic" pitchFamily="34" charset="-120"/>
+              </a:rPr>
+              <a:t>AI 답변의 모양</a:t>
             </a:r>
             <a:endParaRPr lang="en-US" sz="1500" dirty="0"/>
           </a:p>
@@ -2079,8 +2696,8 @@
         </p:nvSpPr>
         <p:spPr>
           <a:xfrm>
-            <a:off x="813816" y="2148840"/>
-            <a:ext cx="10564063" cy="1005840"/>
+            <a:off x="813816" y="932688"/>
+            <a:ext cx="10564063" cy="960120"/>
           </a:xfrm>
           <a:prstGeom prst="rect">
             <a:avLst/>
@@ -2096,30 +2713,30 @@
               <a:buNone/>
             </a:pPr>
             <a:r>
-              <a:rPr lang="en-US" sz="5600" b="1" dirty="0">
-                <a:solidFill>
-                  <a:srgbClr val="F7F6F2"/>
-                </a:solidFill>
-                <a:latin typeface="Malgun Gothic" pitchFamily="34" charset="0"/>
-                <a:ea typeface="Malgun Gothic" pitchFamily="34" charset="-122"/>
-                <a:cs typeface="Malgun Gothic" pitchFamily="34" charset="-120"/>
-              </a:rPr>
-              <a:t>매출분석 툴</a:t>
-            </a:r>
-            <a:endParaRPr lang="en-US" sz="5600" dirty="0"/>
-          </a:p>
-        </p:txBody>
-      </p:sp>
-      <p:sp>
-        <p:nvSpPr>
-          <p:cNvPr id="5" name="Text 2"/>
+              <a:rPr lang="en-US" sz="3200" b="1" dirty="0">
+                <a:solidFill>
+                  <a:srgbClr val="14213D"/>
+                </a:solidFill>
+                <a:latin typeface="Malgun Gothic" pitchFamily="34" charset="0"/>
+                <a:ea typeface="Malgun Gothic" pitchFamily="34" charset="-122"/>
+                <a:cs typeface="Malgun Gothic" pitchFamily="34" charset="-120"/>
+              </a:rPr>
+              <a:t>실제 답변: 사실과 원인 후보를 나눠 말한다</a:t>
+            </a:r>
+            <a:endParaRPr lang="en-US" sz="3200" dirty="0"/>
+          </a:p>
+        </p:txBody>
+      </p:sp>
+      <p:sp>
+        <p:nvSpPr>
+          <p:cNvPr id="18" name="Text 15"/>
           <p:cNvSpPr txBox="1"/>
           <p:nvPr/>
         </p:nvSpPr>
         <p:spPr>
           <a:xfrm>
-            <a:off x="813816" y="3291840"/>
-            <a:ext cx="8686800" cy="1097280"/>
+            <a:off x="813816" y="6327648"/>
+            <a:ext cx="10564063" cy="274320"/>
           </a:xfrm>
           <a:prstGeom prst="rect">
             <a:avLst/>
@@ -2132,124 +2749,318 @@
           <a:lstStyle/>
           <a:p>
             <a:pPr indent="0" marL="0">
-              <a:lnSpc>
-                <a:spcPct val="125000"/>
-              </a:lnSpc>
-              <a:buNone/>
-            </a:pPr>
-            <a:r>
-              <a:rPr lang="en-US" sz="2000" dirty="0">
-                <a:solidFill>
-                  <a:srgbClr val="C9D1E0"/>
-                </a:solidFill>
-                <a:latin typeface="Malgun Gothic" pitchFamily="34" charset="0"/>
-                <a:ea typeface="Malgun Gothic" pitchFamily="34" charset="-122"/>
-                <a:cs typeface="Malgun Gothic" pitchFamily="34" charset="-120"/>
-              </a:rPr>
-              <a:t>매출 CSV를 올리면 지표는 코드가 계산하고,</a:t>
-            </a:r>
-            <a:endParaRPr lang="en-US" sz="2000" dirty="0"/>
-          </a:p>
-          <a:p>
-            <a:pPr indent="0" marL="0">
-              <a:lnSpc>
-                <a:spcPct val="125000"/>
-              </a:lnSpc>
-              <a:buNone/>
-            </a:pPr>
-            <a:r>
-              <a:rPr lang="en-US" sz="2000" dirty="0">
-                <a:solidFill>
-                  <a:srgbClr val="C9D1E0"/>
-                </a:solidFill>
-                <a:latin typeface="Malgun Gothic" pitchFamily="34" charset="0"/>
-                <a:ea typeface="Malgun Gothic" pitchFamily="34" charset="-122"/>
-                <a:cs typeface="Malgun Gothic" pitchFamily="34" charset="-120"/>
-              </a:rPr>
-              <a:t>AI는 계산된 결과를 쉬운 말로 해석합니다</a:t>
-            </a:r>
-            <a:endParaRPr lang="en-US" sz="2000" dirty="0"/>
-          </a:p>
-        </p:txBody>
-      </p:sp>
-      <p:sp>
-        <p:nvSpPr>
-          <p:cNvPr id="6" name="Text 3"/>
+              <a:buNone/>
+            </a:pPr>
+            <a:r>
+              <a:rPr lang="en-US" sz="1100" dirty="0">
+                <a:solidFill>
+                  <a:srgbClr val="5B6478"/>
+                </a:solidFill>
+                <a:latin typeface="Malgun Gothic" pitchFamily="34" charset="0"/>
+                <a:ea typeface="Malgun Gothic" pitchFamily="34" charset="-122"/>
+                <a:cs typeface="Malgun Gothic" pitchFamily="34" charset="-120"/>
+              </a:rPr>
+              <a:t>M1팀 · 매출분석 툴 · 10</a:t>
+            </a:r>
+            <a:endParaRPr lang="en-US" sz="1100" dirty="0"/>
+          </a:p>
+        </p:txBody>
+      </p:sp>
+      <p:pic>
+        <p:nvPicPr>
+          <p:cNvPr id="19" name="Picture 18" descr="slide10_ai_answer.png"/>
+          <p:cNvPicPr>
+            <a:picLocks noChangeAspect="1"/>
+          </p:cNvPicPr>
+          <p:nvPr/>
+        </p:nvPicPr>
+        <p:blipFill>
+          <a:blip r:embed="rId3"/>
+          <a:stretch>
+            <a:fillRect/>
+          </a:stretch>
+        </p:blipFill>
+        <p:spPr>
+          <a:xfrm>
+            <a:off x="813816" y="2011680"/>
+            <a:ext cx="6493621" cy="4206240"/>
+          </a:xfrm>
+          <a:prstGeom prst="rect">
+            <a:avLst/>
+          </a:prstGeom>
+          <a:ln w="9525">
+            <a:solidFill>
+              <a:srgbClr val="E5E9F2"/>
+            </a:solidFill>
+          </a:ln>
+        </p:spPr>
+      </p:pic>
+      <p:sp>
+        <p:nvSpPr>
+          <p:cNvPr id="20" name="TextBox 19"/>
           <p:cNvSpPr txBox="1"/>
           <p:nvPr/>
         </p:nvSpPr>
         <p:spPr>
           <a:xfrm>
-            <a:off x="813816" y="5989320"/>
-            <a:ext cx="7315200" cy="365760"/>
+            <a:off x="7627477" y="2103120"/>
+            <a:ext cx="3750402" cy="1234440"/>
           </a:xfrm>
           <a:prstGeom prst="rect">
             <a:avLst/>
           </a:prstGeom>
           <a:noFill/>
-          <a:ln/>
-        </p:spPr>
-        <p:txBody>
-          <a:bodyPr wrap="square" lIns="0" tIns="0" rIns="0" bIns="0" rtlCol="0" anchor="t"/>
-          <a:lstStyle/>
-          <a:p>
-            <a:pPr indent="0" marL="0">
-              <a:buNone/>
-            </a:pPr>
-            <a:r>
-              <a:rPr lang="en-US" sz="1500" dirty="0">
-                <a:solidFill>
-                  <a:srgbClr val="C9D1E0"/>
-                </a:solidFill>
-                <a:latin typeface="Malgun Gothic" pitchFamily="34" charset="0"/>
-                <a:ea typeface="Malgun Gothic" pitchFamily="34" charset="-122"/>
-                <a:cs typeface="Malgun Gothic" pitchFamily="34" charset="-120"/>
-              </a:rPr>
-              <a:t>이지연 · 허규현 · 김보겸 · 김성순 · 이두규</a:t>
-            </a:r>
-            <a:endParaRPr lang="en-US" sz="1500" dirty="0"/>
-          </a:p>
-        </p:txBody>
-      </p:sp>
-      <p:sp>
-        <p:nvSpPr>
-          <p:cNvPr id="7" name="Text 4"/>
+        </p:spPr>
+        <p:txBody>
+          <a:bodyPr wrap="square" lIns="0" rIns="0" tIns="0" bIns="0">
+            <a:spAutoFit/>
+          </a:bodyPr>
+          <a:lstStyle/>
+          <a:p>
+            <a:r>
+              <a:rPr sz="1700" b="1">
+                <a:solidFill>
+                  <a:srgbClr val="1E6B45"/>
+                </a:solidFill>
+                <a:latin typeface="Malgun Gothic"/>
+                <a:ea typeface="Malgun Gothic"/>
+              </a:rPr>
+              <a:t>실제 호출 · 12.2초</a:t>
+            </a:r>
+          </a:p>
+          <a:p>
+            <a:pPr>
+              <a:spcBef>
+                <a:spcPts val="400"/>
+              </a:spcBef>
+            </a:pPr>
+            <a:r>
+              <a:rPr sz="1400">
+                <a:solidFill>
+                  <a:srgbClr val="2D3B33"/>
+                </a:solidFill>
+                <a:latin typeface="Malgun Gothic"/>
+                <a:ea typeface="Malgun Gothic"/>
+              </a:rPr>
+              <a:t>9/30 16:58 · 로그인 계정 1회</a:t>
+            </a:r>
+          </a:p>
+          <a:p>
+            <a:pPr>
+              <a:spcBef>
+                <a:spcPts val="0"/>
+              </a:spcBef>
+            </a:pPr>
+            <a:r>
+              <a:rPr sz="1400">
+                <a:solidFill>
+                  <a:srgbClr val="2D3B33"/>
+                </a:solidFill>
+                <a:latin typeface="Malgun Gothic"/>
+                <a:ea typeface="Malgun Gothic"/>
+              </a:rPr>
+              <a:t>4번 AI 서버 응답 200</a:t>
+            </a:r>
+          </a:p>
+        </p:txBody>
+      </p:sp>
+      <p:sp>
+        <p:nvSpPr>
+          <p:cNvPr id="21" name="TextBox 20"/>
           <p:cNvSpPr txBox="1"/>
           <p:nvPr/>
         </p:nvSpPr>
         <p:spPr>
           <a:xfrm>
-            <a:off x="8634679" y="5989320"/>
-            <a:ext cx="2743200" cy="365760"/>
+            <a:off x="7627477" y="3474720"/>
+            <a:ext cx="3750402" cy="1234440"/>
           </a:xfrm>
           <a:prstGeom prst="rect">
             <a:avLst/>
           </a:prstGeom>
           <a:noFill/>
-          <a:ln/>
-        </p:spPr>
-        <p:txBody>
-          <a:bodyPr wrap="square" lIns="0" tIns="0" rIns="0" bIns="0" rtlCol="0" anchor="t"/>
-          <a:lstStyle/>
-          <a:p>
-            <a:pPr algn="r" indent="0" marL="0">
-              <a:buNone/>
-            </a:pPr>
-            <a:r>
-              <a:rPr lang="en-US" sz="1500" dirty="0">
-                <a:solidFill>
-                  <a:srgbClr val="C9D1E0"/>
-                </a:solidFill>
-                <a:latin typeface="Malgun Gothic" pitchFamily="34" charset="0"/>
-                <a:ea typeface="Malgun Gothic" pitchFamily="34" charset="-122"/>
-                <a:cs typeface="Malgun Gothic" pitchFamily="34" charset="-120"/>
-              </a:rPr>
-              <a:t>2026. 10. 2</a:t>
-            </a:r>
-            <a:endParaRPr lang="en-US" sz="1500" dirty="0"/>
-          </a:p>
-        </p:txBody>
-      </p:sp>
+        </p:spPr>
+        <p:txBody>
+          <a:bodyPr wrap="square" lIns="0" rIns="0" tIns="0" bIns="0">
+            <a:spAutoFit/>
+          </a:bodyPr>
+          <a:lstStyle/>
+          <a:p>
+            <a:r>
+              <a:rPr sz="1700" b="1">
+                <a:solidFill>
+                  <a:srgbClr val="1E6B45"/>
+                </a:solidFill>
+                <a:latin typeface="Malgun Gothic"/>
+                <a:ea typeface="Malgun Gothic"/>
+              </a:rPr>
+              <a:t>숫자 = 계산 결과</a:t>
+            </a:r>
+          </a:p>
+          <a:p>
+            <a:pPr>
+              <a:spcBef>
+                <a:spcPts val="400"/>
+              </a:spcBef>
+            </a:pPr>
+            <a:r>
+              <a:rPr sz="1400">
+                <a:solidFill>
+                  <a:srgbClr val="2D3B33"/>
+                </a:solidFill>
+                <a:latin typeface="Malgun Gothic"/>
+                <a:ea typeface="Malgun Gothic"/>
+              </a:rPr>
+              <a:t>31.5% · 32.8% · 33.4% · 8개</a:t>
+            </a:r>
+          </a:p>
+          <a:p>
+            <a:pPr>
+              <a:spcBef>
+                <a:spcPts val="0"/>
+              </a:spcBef>
+            </a:pPr>
+            <a:r>
+              <a:rPr sz="1400">
+                <a:solidFill>
+                  <a:srgbClr val="2D3B33"/>
+                </a:solidFill>
+                <a:latin typeface="Malgun Gothic"/>
+                <a:ea typeface="Malgun Gothic"/>
+              </a:rPr>
+              <a:t>모두 정답표 값 그대로</a:t>
+            </a:r>
+          </a:p>
+        </p:txBody>
+      </p:sp>
+      <p:sp>
+        <p:nvSpPr>
+          <p:cNvPr id="22" name="TextBox 21"/>
+          <p:cNvSpPr txBox="1"/>
+          <p:nvPr/>
+        </p:nvSpPr>
+        <p:spPr>
+          <a:xfrm>
+            <a:off x="7627477" y="4846320"/>
+            <a:ext cx="3750402" cy="1234440"/>
+          </a:xfrm>
+          <a:prstGeom prst="rect">
+            <a:avLst/>
+          </a:prstGeom>
+          <a:noFill/>
+        </p:spPr>
+        <p:txBody>
+          <a:bodyPr wrap="square" lIns="0" rIns="0" tIns="0" bIns="0">
+            <a:spAutoFit/>
+          </a:bodyPr>
+          <a:lstStyle/>
+          <a:p>
+            <a:r>
+              <a:rPr sz="1700" b="1">
+                <a:solidFill>
+                  <a:srgbClr val="1E6B45"/>
+                </a:solidFill>
+                <a:latin typeface="Malgun Gothic"/>
+                <a:ea typeface="Malgun Gothic"/>
+              </a:rPr>
+              <a:t>원인은 '후보'로</a:t>
+            </a:r>
+          </a:p>
+          <a:p>
+            <a:pPr>
+              <a:spcBef>
+                <a:spcPts val="400"/>
+              </a:spcBef>
+            </a:pPr>
+            <a:r>
+              <a:rPr sz="1400">
+                <a:solidFill>
+                  <a:srgbClr val="2D3B33"/>
+                </a:solidFill>
+                <a:latin typeface="Malgun Gothic"/>
+                <a:ea typeface="Malgun Gothic"/>
+              </a:rPr>
+              <a:t>"인과관계는 확정할 수</a:t>
+            </a:r>
+          </a:p>
+          <a:p>
+            <a:pPr>
+              <a:spcBef>
+                <a:spcPts val="0"/>
+              </a:spcBef>
+            </a:pPr>
+            <a:r>
+              <a:rPr sz="1400">
+                <a:solidFill>
+                  <a:srgbClr val="2D3B33"/>
+                </a:solidFill>
+                <a:latin typeface="Malgun Gothic"/>
+                <a:ea typeface="Malgun Gothic"/>
+              </a:rPr>
+              <a:t>없습니다"</a:t>
+            </a:r>
+          </a:p>
+        </p:txBody>
+      </p:sp>
+      <p:sp>
+        <p:nvSpPr>
+          <p:cNvPr id="23" name="TextBox 22"/>
+          <p:cNvSpPr txBox="1"/>
+          <p:nvPr/>
+        </p:nvSpPr>
+        <p:spPr>
+          <a:xfrm>
+            <a:off x="7627477" y="5897880"/>
+            <a:ext cx="3750402" cy="320040"/>
+          </a:xfrm>
+          <a:prstGeom prst="rect">
+            <a:avLst/>
+          </a:prstGeom>
+          <a:noFill/>
+        </p:spPr>
+        <p:txBody>
+          <a:bodyPr wrap="square" lIns="0" rIns="0" tIns="0" bIns="0">
+            <a:spAutoFit/>
+          </a:bodyPr>
+          <a:lstStyle/>
+          <a:p>
+            <a:r>
+              <a:rPr sz="1000">
+                <a:solidFill>
+                  <a:srgbClr val="4A5568"/>
+                </a:solidFill>
+                <a:latin typeface="Malgun Gothic"/>
+                <a:ea typeface="Malgun Gothic"/>
+              </a:rPr>
+              <a:t>실제 응답 화면 · part5/REHEARSAL.md 9/30</a:t>
+            </a:r>
+          </a:p>
+        </p:txBody>
+      </p:sp>
+      <p:pic>
+        <p:nvPicPr>
+          <p:cNvPr id="24" name="Picture 23" descr="s10_robot.png"/>
+          <p:cNvPicPr>
+            <a:picLocks noChangeAspect="1"/>
+          </p:cNvPicPr>
+          <p:nvPr/>
+        </p:nvPicPr>
+        <p:blipFill>
+          <a:blip r:embed="rId4"/>
+          <a:stretch>
+            <a:fillRect/>
+          </a:stretch>
+        </p:blipFill>
+        <p:spPr>
+          <a:xfrm>
+            <a:off x="10774680" y="274320"/>
+            <a:ext cx="603504" cy="603504"/>
+          </a:xfrm>
+          <a:prstGeom prst="rect">
+            <a:avLst/>
+          </a:prstGeom>
+        </p:spPr>
+      </p:pic>
     </p:spTree>
   </p:cSld>
   <p:clrMapOvr>
@@ -2258,13 +3069,13 @@
 </p:sld>
 </file>
 
-<file path=ppt/slides/slide10.xml><?xml version="1.0" encoding="utf-8"?>
+<file path=ppt/slides/slide11.xml><?xml version="1.0" encoding="utf-8"?>
 <p:sld xmlns:a="http://schemas.openxmlformats.org/drawingml/2006/main" xmlns:r="http://schemas.openxmlformats.org/officeDocument/2006/relationships" xmlns:p="http://schemas.openxmlformats.org/presentationml/2006/main">
-  <p:cSld name="Slide 10">
+  <p:cSld name="Slide 11">
     <p:bg>
       <p:bgPr>
         <a:solidFill>
-          <a:srgbClr val="F7F6F2"/>
+          <a:srgbClr val="F5F7FC"/>
         </a:solidFill>
       </p:bgPr>
     </p:bg>
@@ -2309,427 +3120,7 @@
             <a:r>
               <a:rPr lang="en-US" sz="1500" b="1" dirty="0">
                 <a:solidFill>
-                  <a:srgbClr val="2F5FD0"/>
-                </a:solidFill>
-                <a:latin typeface="Malgun Gothic" pitchFamily="34" charset="0"/>
-                <a:ea typeface="Malgun Gothic" pitchFamily="34" charset="-122"/>
-                <a:cs typeface="Malgun Gothic" pitchFamily="34" charset="-120"/>
-              </a:rPr>
-              <a:t>AI 답변의 모양</a:t>
-            </a:r>
-            <a:endParaRPr lang="en-US" sz="1500" dirty="0"/>
-          </a:p>
-        </p:txBody>
-      </p:sp>
-      <p:sp>
-        <p:nvSpPr>
-          <p:cNvPr id="4" name="Text 1"/>
-          <p:cNvSpPr txBox="1"/>
-          <p:nvPr/>
-        </p:nvSpPr>
-        <p:spPr>
-          <a:xfrm>
-            <a:off x="813816" y="932688"/>
-            <a:ext cx="10564063" cy="960120"/>
-          </a:xfrm>
-          <a:prstGeom prst="rect">
-            <a:avLst/>
-          </a:prstGeom>
-          <a:noFill/>
-          <a:ln/>
-        </p:spPr>
-        <p:txBody>
-          <a:bodyPr wrap="square" lIns="0" tIns="0" rIns="0" bIns="0" rtlCol="0" anchor="t"/>
-          <a:lstStyle/>
-          <a:p>
-            <a:pPr indent="0" marL="0">
-              <a:buNone/>
-            </a:pPr>
-            <a:r>
-              <a:rPr lang="en-US" sz="3200" b="1" dirty="0">
-                <a:solidFill>
-                  <a:srgbClr val="14213D"/>
-                </a:solidFill>
-                <a:latin typeface="Malgun Gothic" pitchFamily="34" charset="0"/>
-                <a:ea typeface="Malgun Gothic" pitchFamily="34" charset="-122"/>
-                <a:cs typeface="Malgun Gothic" pitchFamily="34" charset="-120"/>
-              </a:rPr>
-              <a:t>실제 답변: 사실과 원인 후보를 나눠 말한다</a:t>
-            </a:r>
-            <a:endParaRPr lang="en-US" sz="3200" dirty="0"/>
-          </a:p>
-        </p:txBody>
-      </p:sp>
-      <p:sp>
-        <p:nvSpPr>
-          <p:cNvPr id="18" name="Text 15"/>
-          <p:cNvSpPr txBox="1"/>
-          <p:nvPr/>
-        </p:nvSpPr>
-        <p:spPr>
-          <a:xfrm>
-            <a:off x="813816" y="6327648"/>
-            <a:ext cx="10564063" cy="274320"/>
-          </a:xfrm>
-          <a:prstGeom prst="rect">
-            <a:avLst/>
-          </a:prstGeom>
-          <a:noFill/>
-          <a:ln/>
-        </p:spPr>
-        <p:txBody>
-          <a:bodyPr wrap="square" lIns="0" tIns="0" rIns="0" bIns="0" rtlCol="0" anchor="t"/>
-          <a:lstStyle/>
-          <a:p>
-            <a:pPr indent="0" marL="0">
-              <a:buNone/>
-            </a:pPr>
-            <a:r>
-              <a:rPr lang="en-US" sz="1100" dirty="0">
-                <a:solidFill>
-                  <a:srgbClr val="8A93A6"/>
-                </a:solidFill>
-                <a:latin typeface="Malgun Gothic" pitchFamily="34" charset="0"/>
-                <a:ea typeface="Malgun Gothic" pitchFamily="34" charset="-122"/>
-                <a:cs typeface="Malgun Gothic" pitchFamily="34" charset="-120"/>
-              </a:rPr>
-              <a:t>M1팀 · 매출분석 툴 · 10</a:t>
-            </a:r>
-            <a:endParaRPr lang="en-US" sz="1100" dirty="0"/>
-          </a:p>
-        </p:txBody>
-      </p:sp>
-      <p:pic>
-        <p:nvPicPr>
-          <p:cNvPr id="19" name="Picture 18" descr="slide10_ai_answer.png"/>
-          <p:cNvPicPr>
-            <a:picLocks noChangeAspect="1"/>
-          </p:cNvPicPr>
-          <p:nvPr/>
-        </p:nvPicPr>
-        <p:blipFill>
-          <a:blip r:embed="rId3"/>
-          <a:stretch>
-            <a:fillRect/>
-          </a:stretch>
-        </p:blipFill>
-        <p:spPr>
-          <a:xfrm>
-            <a:off x="813816" y="2011680"/>
-            <a:ext cx="6493621" cy="4206240"/>
-          </a:xfrm>
-          <a:prstGeom prst="rect">
-            <a:avLst/>
-          </a:prstGeom>
-          <a:ln w="9525">
-            <a:solidFill>
-              <a:srgbClr val="E1E4EA"/>
-            </a:solidFill>
-          </a:ln>
-        </p:spPr>
-      </p:pic>
-      <p:sp>
-        <p:nvSpPr>
-          <p:cNvPr id="20" name="TextBox 19"/>
-          <p:cNvSpPr txBox="1"/>
-          <p:nvPr/>
-        </p:nvSpPr>
-        <p:spPr>
-          <a:xfrm>
-            <a:off x="7627477" y="2103120"/>
-            <a:ext cx="3750402" cy="1234440"/>
-          </a:xfrm>
-          <a:prstGeom prst="rect">
-            <a:avLst/>
-          </a:prstGeom>
-          <a:noFill/>
-        </p:spPr>
-        <p:txBody>
-          <a:bodyPr wrap="square" lIns="0" rIns="0" tIns="0" bIns="0">
-            <a:spAutoFit/>
-          </a:bodyPr>
-          <a:lstStyle/>
-          <a:p>
-            <a:r>
-              <a:rPr sz="1700" b="1">
-                <a:solidFill>
-                  <a:srgbClr val="1E6B45"/>
-                </a:solidFill>
-                <a:latin typeface="Malgun Gothic"/>
-                <a:ea typeface="Malgun Gothic"/>
-              </a:rPr>
-              <a:t>실제 호출 · 12.2초</a:t>
-            </a:r>
-          </a:p>
-          <a:p>
-            <a:pPr>
-              <a:spcBef>
-                <a:spcPts val="400"/>
-              </a:spcBef>
-            </a:pPr>
-            <a:r>
-              <a:rPr sz="1400">
-                <a:solidFill>
-                  <a:srgbClr val="2D3B33"/>
-                </a:solidFill>
-                <a:latin typeface="Malgun Gothic"/>
-                <a:ea typeface="Malgun Gothic"/>
-              </a:rPr>
-              <a:t>9/30 16:58 · 로그인 계정 1회</a:t>
-            </a:r>
-          </a:p>
-          <a:p>
-            <a:pPr>
-              <a:spcBef>
-                <a:spcPts val="0"/>
-              </a:spcBef>
-            </a:pPr>
-            <a:r>
-              <a:rPr sz="1400">
-                <a:solidFill>
-                  <a:srgbClr val="2D3B33"/>
-                </a:solidFill>
-                <a:latin typeface="Malgun Gothic"/>
-                <a:ea typeface="Malgun Gothic"/>
-              </a:rPr>
-              <a:t>4번 AI 서버 응답 200</a:t>
-            </a:r>
-          </a:p>
-        </p:txBody>
-      </p:sp>
-      <p:sp>
-        <p:nvSpPr>
-          <p:cNvPr id="21" name="TextBox 20"/>
-          <p:cNvSpPr txBox="1"/>
-          <p:nvPr/>
-        </p:nvSpPr>
-        <p:spPr>
-          <a:xfrm>
-            <a:off x="7627477" y="3474720"/>
-            <a:ext cx="3750402" cy="1234440"/>
-          </a:xfrm>
-          <a:prstGeom prst="rect">
-            <a:avLst/>
-          </a:prstGeom>
-          <a:noFill/>
-        </p:spPr>
-        <p:txBody>
-          <a:bodyPr wrap="square" lIns="0" rIns="0" tIns="0" bIns="0">
-            <a:spAutoFit/>
-          </a:bodyPr>
-          <a:lstStyle/>
-          <a:p>
-            <a:r>
-              <a:rPr sz="1700" b="1">
-                <a:solidFill>
-                  <a:srgbClr val="1E6B45"/>
-                </a:solidFill>
-                <a:latin typeface="Malgun Gothic"/>
-                <a:ea typeface="Malgun Gothic"/>
-              </a:rPr>
-              <a:t>숫자 = 계산 결과</a:t>
-            </a:r>
-          </a:p>
-          <a:p>
-            <a:pPr>
-              <a:spcBef>
-                <a:spcPts val="400"/>
-              </a:spcBef>
-            </a:pPr>
-            <a:r>
-              <a:rPr sz="1400">
-                <a:solidFill>
-                  <a:srgbClr val="2D3B33"/>
-                </a:solidFill>
-                <a:latin typeface="Malgun Gothic"/>
-                <a:ea typeface="Malgun Gothic"/>
-              </a:rPr>
-              <a:t>31.5% · 32.8% · 33.4% · 8개</a:t>
-            </a:r>
-          </a:p>
-          <a:p>
-            <a:pPr>
-              <a:spcBef>
-                <a:spcPts val="0"/>
-              </a:spcBef>
-            </a:pPr>
-            <a:r>
-              <a:rPr sz="1400">
-                <a:solidFill>
-                  <a:srgbClr val="2D3B33"/>
-                </a:solidFill>
-                <a:latin typeface="Malgun Gothic"/>
-                <a:ea typeface="Malgun Gothic"/>
-              </a:rPr>
-              <a:t>모두 정답표 값 그대로</a:t>
-            </a:r>
-          </a:p>
-        </p:txBody>
-      </p:sp>
-      <p:sp>
-        <p:nvSpPr>
-          <p:cNvPr id="22" name="TextBox 21"/>
-          <p:cNvSpPr txBox="1"/>
-          <p:nvPr/>
-        </p:nvSpPr>
-        <p:spPr>
-          <a:xfrm>
-            <a:off x="7627477" y="4846320"/>
-            <a:ext cx="3750402" cy="1234440"/>
-          </a:xfrm>
-          <a:prstGeom prst="rect">
-            <a:avLst/>
-          </a:prstGeom>
-          <a:noFill/>
-        </p:spPr>
-        <p:txBody>
-          <a:bodyPr wrap="square" lIns="0" rIns="0" tIns="0" bIns="0">
-            <a:spAutoFit/>
-          </a:bodyPr>
-          <a:lstStyle/>
-          <a:p>
-            <a:r>
-              <a:rPr sz="1700" b="1">
-                <a:solidFill>
-                  <a:srgbClr val="1E6B45"/>
-                </a:solidFill>
-                <a:latin typeface="Malgun Gothic"/>
-                <a:ea typeface="Malgun Gothic"/>
-              </a:rPr>
-              <a:t>원인은 '후보'로</a:t>
-            </a:r>
-          </a:p>
-          <a:p>
-            <a:pPr>
-              <a:spcBef>
-                <a:spcPts val="400"/>
-              </a:spcBef>
-            </a:pPr>
-            <a:r>
-              <a:rPr sz="1400">
-                <a:solidFill>
-                  <a:srgbClr val="2D3B33"/>
-                </a:solidFill>
-                <a:latin typeface="Malgun Gothic"/>
-                <a:ea typeface="Malgun Gothic"/>
-              </a:rPr>
-              <a:t>"인과관계는 확정할 수</a:t>
-            </a:r>
-          </a:p>
-          <a:p>
-            <a:pPr>
-              <a:spcBef>
-                <a:spcPts val="0"/>
-              </a:spcBef>
-            </a:pPr>
-            <a:r>
-              <a:rPr sz="1400">
-                <a:solidFill>
-                  <a:srgbClr val="2D3B33"/>
-                </a:solidFill>
-                <a:latin typeface="Malgun Gothic"/>
-                <a:ea typeface="Malgun Gothic"/>
-              </a:rPr>
-              <a:t>없습니다"</a:t>
-            </a:r>
-          </a:p>
-        </p:txBody>
-      </p:sp>
-      <p:sp>
-        <p:nvSpPr>
-          <p:cNvPr id="23" name="TextBox 22"/>
-          <p:cNvSpPr txBox="1"/>
-          <p:nvPr/>
-        </p:nvSpPr>
-        <p:spPr>
-          <a:xfrm>
-            <a:off x="7627477" y="5897880"/>
-            <a:ext cx="3750402" cy="320040"/>
-          </a:xfrm>
-          <a:prstGeom prst="rect">
-            <a:avLst/>
-          </a:prstGeom>
-          <a:noFill/>
-        </p:spPr>
-        <p:txBody>
-          <a:bodyPr wrap="square" lIns="0" rIns="0" tIns="0" bIns="0">
-            <a:spAutoFit/>
-          </a:bodyPr>
-          <a:lstStyle/>
-          <a:p>
-            <a:r>
-              <a:rPr sz="1000">
-                <a:solidFill>
-                  <a:srgbClr val="4A5568"/>
-                </a:solidFill>
-                <a:latin typeface="Malgun Gothic"/>
-                <a:ea typeface="Malgun Gothic"/>
-              </a:rPr>
-              <a:t>실제 응답 화면 · part5/REHEARSAL.md 9/30</a:t>
-            </a:r>
-          </a:p>
-        </p:txBody>
-      </p:sp>
-    </p:spTree>
-  </p:cSld>
-  <p:clrMapOvr>
-    <a:masterClrMapping/>
-  </p:clrMapOvr>
-</p:sld>
-</file>
-
-<file path=ppt/slides/slide11.xml><?xml version="1.0" encoding="utf-8"?>
-<p:sld xmlns:a="http://schemas.openxmlformats.org/drawingml/2006/main" xmlns:r="http://schemas.openxmlformats.org/officeDocument/2006/relationships" xmlns:p="http://schemas.openxmlformats.org/presentationml/2006/main">
-  <p:cSld name="Slide 11">
-    <p:bg>
-      <p:bgPr>
-        <a:solidFill>
-          <a:srgbClr val="F7F6F2"/>
-        </a:solidFill>
-      </p:bgPr>
-    </p:bg>
-    <p:spTree>
-      <p:nvGrpSpPr>
-        <p:cNvPr id="1" name=""/>
-        <p:cNvGrpSpPr/>
-        <p:nvPr/>
-      </p:nvGrpSpPr>
-      <p:grpSpPr>
-        <a:xfrm>
-          <a:off x="0" y="0"/>
-          <a:ext cx="0" cy="0"/>
-          <a:chOff x="0" y="0"/>
-          <a:chExt cx="0" cy="0"/>
-        </a:xfrm>
-      </p:grpSpPr>
-      <p:sp>
-        <p:nvSpPr>
-          <p:cNvPr id="3" name="Text 0"/>
-          <p:cNvSpPr txBox="1"/>
-          <p:nvPr/>
-        </p:nvSpPr>
-        <p:spPr>
-          <a:xfrm>
-            <a:off x="813816" y="566928"/>
-            <a:ext cx="10564063" cy="365760"/>
-          </a:xfrm>
-          <a:prstGeom prst="rect">
-            <a:avLst/>
-          </a:prstGeom>
-          <a:noFill/>
-          <a:ln/>
-        </p:spPr>
-        <p:txBody>
-          <a:bodyPr wrap="square" lIns="0" tIns="0" rIns="0" bIns="0" rtlCol="0" anchor="t"/>
-          <a:lstStyle/>
-          <a:p>
-            <a:pPr indent="0" marL="0">
-              <a:buNone/>
-            </a:pPr>
-            <a:r>
-              <a:rPr lang="en-US" sz="1500" b="1" dirty="0">
-                <a:solidFill>
-                  <a:srgbClr val="2F5FD0"/>
+                  <a:srgbClr val="5468FF"/>
                 </a:solidFill>
                 <a:latin typeface="Malgun Gothic" pitchFamily="34" charset="0"/>
                 <a:ea typeface="Malgun Gothic" pitchFamily="34" charset="-122"/>
@@ -3421,7 +3812,7 @@
                       <a:tailEnd type="none" w="med" len="med"/>
                     </a:lnB>
                     <a:solidFill>
-                      <a:srgbClr val="EEF1F6"/>
+                      <a:srgbClr val="EEF1FF"/>
                     </a:solidFill>
                   </a:tcPr>
                 </a:tc>
@@ -3489,7 +3880,7 @@
                       <a:tailEnd type="none" w="med" len="med"/>
                     </a:lnB>
                     <a:solidFill>
-                      <a:srgbClr val="EEF1F6"/>
+                      <a:srgbClr val="EEF1FF"/>
                     </a:solidFill>
                   </a:tcPr>
                 </a:tc>
@@ -3557,7 +3948,7 @@
                       <a:tailEnd type="none" w="med" len="med"/>
                     </a:lnB>
                     <a:solidFill>
-                      <a:srgbClr val="EEF1F6"/>
+                      <a:srgbClr val="EEF1FF"/>
                     </a:solidFill>
                   </a:tcPr>
                 </a:tc>
@@ -3625,7 +4016,7 @@
                       <a:tailEnd type="none" w="med" len="med"/>
                     </a:lnB>
                     <a:solidFill>
-                      <a:srgbClr val="EEF1F6"/>
+                      <a:srgbClr val="EEF1FF"/>
                     </a:solidFill>
                   </a:tcPr>
                 </a:tc>
@@ -3969,7 +4360,7 @@
                       <a:tailEnd type="none" w="med" len="med"/>
                     </a:lnB>
                     <a:solidFill>
-                      <a:srgbClr val="EEF1F6"/>
+                      <a:srgbClr val="EEF1FF"/>
                     </a:solidFill>
                   </a:tcPr>
                 </a:tc>
@@ -4037,7 +4428,7 @@
                       <a:tailEnd type="none" w="med" len="med"/>
                     </a:lnB>
                     <a:solidFill>
-                      <a:srgbClr val="EEF1F6"/>
+                      <a:srgbClr val="EEF1FF"/>
                     </a:solidFill>
                   </a:tcPr>
                 </a:tc>
@@ -4105,7 +4496,7 @@
                       <a:tailEnd type="none" w="med" len="med"/>
                     </a:lnB>
                     <a:solidFill>
-                      <a:srgbClr val="EEF1F6"/>
+                      <a:srgbClr val="EEF1FF"/>
                     </a:solidFill>
                   </a:tcPr>
                 </a:tc>
@@ -4173,7 +4564,7 @@
                       <a:tailEnd type="none" w="med" len="med"/>
                     </a:lnB>
                     <a:solidFill>
-                      <a:srgbClr val="EEF1F6"/>
+                      <a:srgbClr val="EEF1FF"/>
                     </a:solidFill>
                   </a:tcPr>
                 </a:tc>
@@ -4483,7 +4874,7 @@
             <a:r>
               <a:rPr lang="en-US" sz="1100" dirty="0">
                 <a:solidFill>
-                  <a:srgbClr val="8A93A6"/>
+                  <a:srgbClr val="5B6478"/>
                 </a:solidFill>
                 <a:latin typeface="Malgun Gothic" pitchFamily="34" charset="0"/>
                 <a:ea typeface="Malgun Gothic" pitchFamily="34" charset="-122"/>
@@ -4495,6 +4886,30 @@
           </a:p>
         </p:txBody>
       </p:sp>
+      <p:pic>
+        <p:nvPicPr>
+          <p:cNvPr id="13" name="Picture 12" descr="s11_check.png"/>
+          <p:cNvPicPr>
+            <a:picLocks noChangeAspect="1"/>
+          </p:cNvPicPr>
+          <p:nvPr/>
+        </p:nvPicPr>
+        <p:blipFill>
+          <a:blip r:embed="rId3"/>
+          <a:stretch>
+            <a:fillRect/>
+          </a:stretch>
+        </p:blipFill>
+        <p:spPr>
+          <a:xfrm>
+            <a:off x="10774680" y="274320"/>
+            <a:ext cx="603504" cy="603504"/>
+          </a:xfrm>
+          <a:prstGeom prst="rect">
+            <a:avLst/>
+          </a:prstGeom>
+        </p:spPr>
+      </p:pic>
     </p:spTree>
   </p:cSld>
   <p:clrMapOvr>
@@ -4509,7 +4924,7 @@
     <p:bg>
       <p:bgPr>
         <a:solidFill>
-          <a:srgbClr val="F7F6F2"/>
+          <a:srgbClr val="F5F7FC"/>
         </a:solidFill>
       </p:bgPr>
     </p:bg>
@@ -4554,7 +4969,7 @@
             <a:r>
               <a:rPr lang="en-US" sz="1500" b="1" dirty="0">
                 <a:solidFill>
-                  <a:srgbClr val="2F5FD0"/>
+                  <a:srgbClr val="5468FF"/>
                 </a:solidFill>
                 <a:latin typeface="Malgun Gothic" pitchFamily="34" charset="0"/>
                 <a:ea typeface="Malgun Gothic" pitchFamily="34" charset="-122"/>
@@ -4621,12 +5036,48 @@
               <a:gd name="adj" fmla="val 3582"/>
             </a:avLst>
           </a:prstGeom>
+          <a:gradFill rotWithShape="1">
+            <a:gsLst>
+              <a:gs pos="0">
+                <a:srgbClr val="FFFFFF"/>
+              </a:gs>
+              <a:gs pos="45000">
+                <a:srgbClr val="F0F2FF"/>
+              </a:gs>
+              <a:gs pos="100000">
+                <a:srgbClr val="DDE3FF"/>
+              </a:gs>
+            </a:gsLst>
+            <a:lin ang="4200000" scaled="0"/>
+          </a:gradFill>
+          <a:ln w="12700">
+            <a:solidFill>
+              <a:srgbClr val="E5E9F2"/>
+            </a:solidFill>
+            <a:prstDash val="solid"/>
+          </a:ln>
+        </p:spPr>
+      </p:sp>
+      <p:sp>
+        <p:nvSpPr>
+          <p:cNvPr id="6" name="Shape 3"/>
+          <p:cNvSpPr/>
+          <p:nvPr/>
+        </p:nvSpPr>
+        <p:spPr>
+          <a:xfrm>
+            <a:off x="1133856" y="2606040"/>
+            <a:ext cx="640080" cy="640080"/>
+          </a:xfrm>
+          <a:prstGeom prst="ellipse">
+            <a:avLst/>
+          </a:prstGeom>
           <a:solidFill>
-            <a:srgbClr val="FFFFFF"/>
+            <a:srgbClr val="EEF1FF"/>
           </a:solidFill>
           <a:ln w="12700">
             <a:solidFill>
-              <a:srgbClr val="E1E4EA"/>
+              <a:srgbClr val="EEF1FF"/>
             </a:solidFill>
             <a:prstDash val="solid"/>
           </a:ln>
@@ -4634,8 +5085,8 @@
       </p:sp>
       <p:sp>
         <p:nvSpPr>
-          <p:cNvPr id="6" name="Shape 3"/>
-          <p:cNvSpPr/>
+          <p:cNvPr id="7" name="Text 4"/>
+          <p:cNvSpPr txBox="1"/>
           <p:nvPr/>
         </p:nvSpPr>
         <p:spPr>
@@ -4643,31 +5094,6 @@
             <a:off x="1133856" y="2606040"/>
             <a:ext cx="640080" cy="640080"/>
           </a:xfrm>
-          <a:prstGeom prst="ellipse">
-            <a:avLst/>
-          </a:prstGeom>
-          <a:solidFill>
-            <a:srgbClr val="EEF1F6"/>
-          </a:solidFill>
-          <a:ln w="12700">
-            <a:solidFill>
-              <a:srgbClr val="EEF1F6"/>
-            </a:solidFill>
-            <a:prstDash val="solid"/>
-          </a:ln>
-        </p:spPr>
-      </p:sp>
-      <p:sp>
-        <p:nvSpPr>
-          <p:cNvPr id="7" name="Text 4"/>
-          <p:cNvSpPr txBox="1"/>
-          <p:nvPr/>
-        </p:nvSpPr>
-        <p:spPr>
-          <a:xfrm>
-            <a:off x="1133856" y="2606040"/>
-            <a:ext cx="640080" cy="640080"/>
-          </a:xfrm>
           <a:prstGeom prst="rect">
             <a:avLst/>
           </a:prstGeom>
@@ -4684,7 +5110,7 @@
             <a:r>
               <a:rPr lang="en-US" sz="2000" b="1" dirty="0">
                 <a:solidFill>
-                  <a:srgbClr val="2F5FD0"/>
+                  <a:srgbClr val="5468FF"/>
                 </a:solidFill>
                 <a:latin typeface="Malgun Gothic" pitchFamily="34" charset="0"/>
                 <a:ea typeface="Malgun Gothic" pitchFamily="34" charset="-122"/>
@@ -4833,12 +5259,48 @@
               <a:gd name="adj" fmla="val 3582"/>
             </a:avLst>
           </a:prstGeom>
+          <a:gradFill rotWithShape="1">
+            <a:gsLst>
+              <a:gs pos="0">
+                <a:srgbClr val="FFFFFF"/>
+              </a:gs>
+              <a:gs pos="45000">
+                <a:srgbClr val="F0F2FF"/>
+              </a:gs>
+              <a:gs pos="100000">
+                <a:srgbClr val="DDE3FF"/>
+              </a:gs>
+            </a:gsLst>
+            <a:lin ang="4200000" scaled="0"/>
+          </a:gradFill>
+          <a:ln w="12700">
+            <a:solidFill>
+              <a:srgbClr val="E5E9F2"/>
+            </a:solidFill>
+            <a:prstDash val="solid"/>
+          </a:ln>
+        </p:spPr>
+      </p:sp>
+      <p:sp>
+        <p:nvSpPr>
+          <p:cNvPr id="11" name="Shape 8"/>
+          <p:cNvSpPr/>
+          <p:nvPr/>
+        </p:nvSpPr>
+        <p:spPr>
+          <a:xfrm>
+            <a:off x="4761890" y="2606040"/>
+            <a:ext cx="640080" cy="640080"/>
+          </a:xfrm>
+          <a:prstGeom prst="ellipse">
+            <a:avLst/>
+          </a:prstGeom>
           <a:solidFill>
-            <a:srgbClr val="FFFFFF"/>
+            <a:srgbClr val="EEF1FF"/>
           </a:solidFill>
           <a:ln w="12700">
             <a:solidFill>
-              <a:srgbClr val="E1E4EA"/>
+              <a:srgbClr val="EEF1FF"/>
             </a:solidFill>
             <a:prstDash val="solid"/>
           </a:ln>
@@ -4846,8 +5308,8 @@
       </p:sp>
       <p:sp>
         <p:nvSpPr>
-          <p:cNvPr id="11" name="Shape 8"/>
-          <p:cNvSpPr/>
+          <p:cNvPr id="12" name="Text 9"/>
+          <p:cNvSpPr txBox="1"/>
           <p:nvPr/>
         </p:nvSpPr>
         <p:spPr>
@@ -4855,31 +5317,6 @@
             <a:off x="4761890" y="2606040"/>
             <a:ext cx="640080" cy="640080"/>
           </a:xfrm>
-          <a:prstGeom prst="ellipse">
-            <a:avLst/>
-          </a:prstGeom>
-          <a:solidFill>
-            <a:srgbClr val="EEF1F6"/>
-          </a:solidFill>
-          <a:ln w="12700">
-            <a:solidFill>
-              <a:srgbClr val="EEF1F6"/>
-            </a:solidFill>
-            <a:prstDash val="solid"/>
-          </a:ln>
-        </p:spPr>
-      </p:sp>
-      <p:sp>
-        <p:nvSpPr>
-          <p:cNvPr id="12" name="Text 9"/>
-          <p:cNvSpPr txBox="1"/>
-          <p:nvPr/>
-        </p:nvSpPr>
-        <p:spPr>
-          <a:xfrm>
-            <a:off x="4761890" y="2606040"/>
-            <a:ext cx="640080" cy="640080"/>
-          </a:xfrm>
           <a:prstGeom prst="rect">
             <a:avLst/>
           </a:prstGeom>
@@ -4896,7 +5333,7 @@
             <a:r>
               <a:rPr lang="en-US" sz="2000" b="1" dirty="0">
                 <a:solidFill>
-                  <a:srgbClr val="2F5FD0"/>
+                  <a:srgbClr val="5468FF"/>
                 </a:solidFill>
                 <a:latin typeface="Malgun Gothic" pitchFamily="34" charset="0"/>
                 <a:ea typeface="Malgun Gothic" pitchFamily="34" charset="-122"/>
@@ -5045,12 +5482,48 @@
               <a:gd name="adj" fmla="val 3582"/>
             </a:avLst>
           </a:prstGeom>
+          <a:gradFill rotWithShape="1">
+            <a:gsLst>
+              <a:gs pos="0">
+                <a:srgbClr val="FFFFFF"/>
+              </a:gs>
+              <a:gs pos="45000">
+                <a:srgbClr val="F0F2FF"/>
+              </a:gs>
+              <a:gs pos="100000">
+                <a:srgbClr val="DDE3FF"/>
+              </a:gs>
+            </a:gsLst>
+            <a:lin ang="4200000" scaled="0"/>
+          </a:gradFill>
+          <a:ln w="12700">
+            <a:solidFill>
+              <a:srgbClr val="E5E9F2"/>
+            </a:solidFill>
+            <a:prstDash val="solid"/>
+          </a:ln>
+        </p:spPr>
+      </p:sp>
+      <p:sp>
+        <p:nvSpPr>
+          <p:cNvPr id="16" name="Shape 13"/>
+          <p:cNvSpPr/>
+          <p:nvPr/>
+        </p:nvSpPr>
+        <p:spPr>
+          <a:xfrm>
+            <a:off x="8389925" y="2606040"/>
+            <a:ext cx="640080" cy="640080"/>
+          </a:xfrm>
+          <a:prstGeom prst="ellipse">
+            <a:avLst/>
+          </a:prstGeom>
           <a:solidFill>
-            <a:srgbClr val="FFFFFF"/>
+            <a:srgbClr val="EEF1FF"/>
           </a:solidFill>
           <a:ln w="12700">
             <a:solidFill>
-              <a:srgbClr val="E1E4EA"/>
+              <a:srgbClr val="EEF1FF"/>
             </a:solidFill>
             <a:prstDash val="solid"/>
           </a:ln>
@@ -5058,8 +5531,8 @@
       </p:sp>
       <p:sp>
         <p:nvSpPr>
-          <p:cNvPr id="16" name="Shape 13"/>
-          <p:cNvSpPr/>
+          <p:cNvPr id="17" name="Text 14"/>
+          <p:cNvSpPr txBox="1"/>
           <p:nvPr/>
         </p:nvSpPr>
         <p:spPr>
@@ -5067,31 +5540,6 @@
             <a:off x="8389925" y="2606040"/>
             <a:ext cx="640080" cy="640080"/>
           </a:xfrm>
-          <a:prstGeom prst="ellipse">
-            <a:avLst/>
-          </a:prstGeom>
-          <a:solidFill>
-            <a:srgbClr val="EEF1F6"/>
-          </a:solidFill>
-          <a:ln w="12700">
-            <a:solidFill>
-              <a:srgbClr val="EEF1F6"/>
-            </a:solidFill>
-            <a:prstDash val="solid"/>
-          </a:ln>
-        </p:spPr>
-      </p:sp>
-      <p:sp>
-        <p:nvSpPr>
-          <p:cNvPr id="17" name="Text 14"/>
-          <p:cNvSpPr txBox="1"/>
-          <p:nvPr/>
-        </p:nvSpPr>
-        <p:spPr>
-          <a:xfrm>
-            <a:off x="8389925" y="2606040"/>
-            <a:ext cx="640080" cy="640080"/>
-          </a:xfrm>
           <a:prstGeom prst="rect">
             <a:avLst/>
           </a:prstGeom>
@@ -5108,7 +5556,7 @@
             <a:r>
               <a:rPr lang="en-US" sz="1400" b="1" dirty="0">
                 <a:solidFill>
-                  <a:srgbClr val="2F5FD0"/>
+                  <a:srgbClr val="5468FF"/>
                 </a:solidFill>
                 <a:latin typeface="Malgun Gothic" pitchFamily="34" charset="0"/>
                 <a:ea typeface="Malgun Gothic" pitchFamily="34" charset="-122"/>
@@ -5268,7 +5716,7 @@
             <a:r>
               <a:rPr lang="en-US" sz="1100" dirty="0">
                 <a:solidFill>
-                  <a:srgbClr val="8A93A6"/>
+                  <a:srgbClr val="5B6478"/>
                 </a:solidFill>
                 <a:latin typeface="Malgun Gothic" pitchFamily="34" charset="0"/>
                 <a:ea typeface="Malgun Gothic" pitchFamily="34" charset="-122"/>
@@ -5280,6 +5728,30 @@
           </a:p>
         </p:txBody>
       </p:sp>
+      <p:pic>
+        <p:nvPicPr>
+          <p:cNvPr id="21" name="Picture 20" descr="s12_locked.png"/>
+          <p:cNvPicPr>
+            <a:picLocks noChangeAspect="1"/>
+          </p:cNvPicPr>
+          <p:nvPr/>
+        </p:nvPicPr>
+        <p:blipFill>
+          <a:blip r:embed="rId3"/>
+          <a:stretch>
+            <a:fillRect/>
+          </a:stretch>
+        </p:blipFill>
+        <p:spPr>
+          <a:xfrm>
+            <a:off x="10774680" y="274320"/>
+            <a:ext cx="603504" cy="603504"/>
+          </a:xfrm>
+          <a:prstGeom prst="rect">
+            <a:avLst/>
+          </a:prstGeom>
+        </p:spPr>
+      </p:pic>
     </p:spTree>
   </p:cSld>
   <p:clrMapOvr>
@@ -5294,7 +5766,7 @@
     <p:bg>
       <p:bgPr>
         <a:solidFill>
-          <a:srgbClr val="F7F6F2"/>
+          <a:srgbClr val="F5F7FC"/>
         </a:solidFill>
       </p:bgPr>
     </p:bg>
@@ -5339,7 +5811,7 @@
             <a:r>
               <a:rPr lang="en-US" sz="1500" b="1" dirty="0">
                 <a:solidFill>
-                  <a:srgbClr val="C4581C"/>
+                  <a:srgbClr val="B42318"/>
                 </a:solidFill>
                 <a:latin typeface="Malgun Gothic" pitchFamily="34" charset="0"/>
                 <a:ea typeface="Malgun Gothic" pitchFamily="34" charset="-122"/>
@@ -5757,7 +6229,7 @@
                       <a:tailEnd type="none" w="med" len="med"/>
                     </a:lnB>
                     <a:solidFill>
-                      <a:srgbClr val="EEF1F6"/>
+                      <a:srgbClr val="EEF1FF"/>
                     </a:solidFill>
                   </a:tcPr>
                 </a:tc>
@@ -5825,7 +6297,7 @@
                       <a:tailEnd type="none" w="med" len="med"/>
                     </a:lnB>
                     <a:solidFill>
-                      <a:srgbClr val="EEF1F6"/>
+                      <a:srgbClr val="EEF1FF"/>
                     </a:solidFill>
                   </a:tcPr>
                 </a:tc>
@@ -6033,7 +6505,7 @@
                       <a:tailEnd type="none" w="med" len="med"/>
                     </a:lnB>
                     <a:solidFill>
-                      <a:srgbClr val="EEF1F6"/>
+                      <a:srgbClr val="EEF1FF"/>
                     </a:solidFill>
                   </a:tcPr>
                 </a:tc>
@@ -6101,7 +6573,7 @@
                       <a:tailEnd type="none" w="med" len="med"/>
                     </a:lnB>
                     <a:solidFill>
-                      <a:srgbClr val="EEF1F6"/>
+                      <a:srgbClr val="EEF1FF"/>
                     </a:solidFill>
                   </a:tcPr>
                 </a:tc>
@@ -6275,7 +6747,7 @@
             <a:r>
               <a:rPr lang="en-US" sz="1100" dirty="0">
                 <a:solidFill>
-                  <a:srgbClr val="8A93A6"/>
+                  <a:srgbClr val="5B6478"/>
                 </a:solidFill>
                 <a:latin typeface="Malgun Gothic" pitchFamily="34" charset="0"/>
                 <a:ea typeface="Malgun Gothic" pitchFamily="34" charset="-122"/>
@@ -6287,6 +6759,30 @@
           </a:p>
         </p:txBody>
       </p:sp>
+      <p:pic>
+        <p:nvPicPr>
+          <p:cNvPr id="15" name="Picture 14" descr="s13_warning.png"/>
+          <p:cNvPicPr>
+            <a:picLocks noChangeAspect="1"/>
+          </p:cNvPicPr>
+          <p:nvPr/>
+        </p:nvPicPr>
+        <p:blipFill>
+          <a:blip r:embed="rId3"/>
+          <a:stretch>
+            <a:fillRect/>
+          </a:stretch>
+        </p:blipFill>
+        <p:spPr>
+          <a:xfrm>
+            <a:off x="10774680" y="274320"/>
+            <a:ext cx="603504" cy="603504"/>
+          </a:xfrm>
+          <a:prstGeom prst="rect">
+            <a:avLst/>
+          </a:prstGeom>
+        </p:spPr>
+      </p:pic>
     </p:spTree>
   </p:cSld>
   <p:clrMapOvr>
@@ -6300,8 +6796,231 @@
   <p:cSld name="Slide 14">
     <p:bg>
       <p:bgPr>
+        <a:gradFill rotWithShape="1">
+          <a:gsLst>
+            <a:gs pos="0">
+              <a:srgbClr val="131A2E"/>
+            </a:gs>
+            <a:gs pos="55000">
+              <a:srgbClr val="1F2C6B"/>
+            </a:gs>
+            <a:gs pos="100000">
+              <a:srgbClr val="3346C9"/>
+            </a:gs>
+          </a:gsLst>
+          <a:lin ang="2280000" scaled="0"/>
+        </a:gradFill>
+      </p:bgPr>
+    </p:bg>
+    <p:spTree>
+      <p:nvGrpSpPr>
+        <p:cNvPr id="1" name=""/>
+        <p:cNvGrpSpPr/>
+        <p:nvPr/>
+      </p:nvGrpSpPr>
+      <p:grpSpPr>
+        <a:xfrm>
+          <a:off x="0" y="0"/>
+          <a:ext cx="0" cy="0"/>
+          <a:chOff x="0" y="0"/>
+          <a:chExt cx="0" cy="0"/>
+        </a:xfrm>
+      </p:grpSpPr>
+      <p:sp>
+        <p:nvSpPr>
+          <p:cNvPr id="3" name="Text 0"/>
+          <p:cNvSpPr txBox="1"/>
+          <p:nvPr/>
+        </p:nvSpPr>
+        <p:spPr>
+          <a:xfrm>
+            <a:off x="813816" y="1828800"/>
+            <a:ext cx="10564063" cy="1005840"/>
+          </a:xfrm>
+          <a:prstGeom prst="rect">
+            <a:avLst/>
+          </a:prstGeom>
+          <a:noFill/>
+          <a:ln/>
+        </p:spPr>
+        <p:txBody>
+          <a:bodyPr wrap="square" lIns="0" tIns="0" rIns="0" bIns="0" rtlCol="0" anchor="t"/>
+          <a:lstStyle/>
+          <a:p>
+            <a:pPr indent="0" marL="0">
+              <a:buNone/>
+            </a:pPr>
+            <a:r>
+              <a:rPr lang="en-US" sz="5600" b="1" dirty="0">
+                <a:solidFill>
+                  <a:srgbClr val="F5F7FC"/>
+                </a:solidFill>
+                <a:latin typeface="Malgun Gothic" pitchFamily="34" charset="0"/>
+                <a:ea typeface="Malgun Gothic" pitchFamily="34" charset="-122"/>
+                <a:cs typeface="Malgun Gothic" pitchFamily="34" charset="-120"/>
+              </a:rPr>
+              <a:t>감사합니다</a:t>
+            </a:r>
+            <a:endParaRPr lang="en-US" sz="5600" dirty="0"/>
+          </a:p>
+        </p:txBody>
+      </p:sp>
+      <p:sp>
+        <p:nvSpPr>
+          <p:cNvPr id="4" name="Text 1"/>
+          <p:cNvSpPr txBox="1"/>
+          <p:nvPr/>
+        </p:nvSpPr>
+        <p:spPr>
+          <a:xfrm>
+            <a:off x="813816" y="2926080"/>
+            <a:ext cx="10564063" cy="548640"/>
+          </a:xfrm>
+          <a:prstGeom prst="rect">
+            <a:avLst/>
+          </a:prstGeom>
+          <a:noFill/>
+          <a:ln/>
+        </p:spPr>
+        <p:txBody>
+          <a:bodyPr wrap="square" lIns="0" tIns="0" rIns="0" bIns="0" rtlCol="0" anchor="t"/>
+          <a:lstStyle/>
+          <a:p>
+            <a:pPr indent="0" marL="0">
+              <a:buNone/>
+            </a:pPr>
+            <a:r>
+              <a:rPr lang="en-US" sz="2000" dirty="0">
+                <a:solidFill>
+                  <a:srgbClr val="C9D1E0"/>
+                </a:solidFill>
+                <a:latin typeface="Malgun Gothic" pitchFamily="34" charset="0"/>
+                <a:ea typeface="Malgun Gothic" pitchFamily="34" charset="-122"/>
+                <a:cs typeface="Malgun Gothic" pitchFamily="34" charset="-120"/>
+              </a:rPr>
+              <a:t>질문 받겠습니다</a:t>
+            </a:r>
+            <a:endParaRPr lang="en-US" sz="2000" dirty="0"/>
+          </a:p>
+        </p:txBody>
+      </p:sp>
+      <p:sp>
+        <p:nvSpPr>
+          <p:cNvPr id="5" name="Text 2"/>
+          <p:cNvSpPr txBox="1"/>
+          <p:nvPr/>
+        </p:nvSpPr>
+        <p:spPr>
+          <a:xfrm>
+            <a:off x="813816" y="4023360"/>
+            <a:ext cx="10564063" cy="411480"/>
+          </a:xfrm>
+          <a:prstGeom prst="rect">
+            <a:avLst/>
+          </a:prstGeom>
+          <a:noFill/>
+          <a:ln/>
+        </p:spPr>
+        <p:txBody>
+          <a:bodyPr wrap="square" lIns="0" tIns="0" rIns="0" bIns="0" rtlCol="0" anchor="t"/>
+          <a:lstStyle/>
+          <a:p>
+            <a:pPr indent="0" marL="0">
+              <a:buNone/>
+            </a:pPr>
+            <a:r>
+              <a:rPr lang="en-US" sz="1500" dirty="0">
+                <a:solidFill>
+                  <a:srgbClr val="9DAAFF"/>
+                </a:solidFill>
+                <a:latin typeface="Malgun Gothic" pitchFamily="34" charset="0"/>
+                <a:ea typeface="Malgun Gothic" pitchFamily="34" charset="-122"/>
+                <a:cs typeface="Malgun Gothic" pitchFamily="34" charset="-120"/>
+              </a:rPr>
+              <a:t>저장소  github.com/ctaleez51-art/sales-analysis</a:t>
+            </a:r>
+            <a:endParaRPr lang="en-US" sz="1500" dirty="0"/>
+          </a:p>
+        </p:txBody>
+      </p:sp>
+      <p:sp>
+        <p:nvSpPr>
+          <p:cNvPr id="6" name="Text 3"/>
+          <p:cNvSpPr txBox="1"/>
+          <p:nvPr/>
+        </p:nvSpPr>
+        <p:spPr>
+          <a:xfrm>
+            <a:off x="813816" y="4480560"/>
+            <a:ext cx="10564063" cy="411480"/>
+          </a:xfrm>
+          <a:prstGeom prst="rect">
+            <a:avLst/>
+          </a:prstGeom>
+          <a:noFill/>
+          <a:ln/>
+        </p:spPr>
+        <p:txBody>
+          <a:bodyPr wrap="square" lIns="0" tIns="0" rIns="0" bIns="0" rtlCol="0" anchor="t"/>
+          <a:lstStyle/>
+          <a:p>
+            <a:pPr indent="0" marL="0">
+              <a:buNone/>
+            </a:pPr>
+            <a:r>
+              <a:rPr lang="en-US" sz="1500" dirty="0">
+                <a:solidFill>
+                  <a:srgbClr val="C9D1E0"/>
+                </a:solidFill>
+                <a:latin typeface="Malgun Gothic" pitchFamily="34" charset="0"/>
+                <a:ea typeface="Malgun Gothic" pitchFamily="34" charset="-122"/>
+                <a:cs typeface="Malgun Gothic" pitchFamily="34" charset="-120"/>
+              </a:rPr>
+              <a:t>체험  ctaleez51-art.github.io/sales-analysis/part5/</a:t>
+            </a:r>
+            <a:endParaRPr lang="en-US" sz="1500" dirty="0"/>
+          </a:p>
+        </p:txBody>
+      </p:sp>
+      <p:pic>
+        <p:nvPicPr>
+          <p:cNvPr id="7" name="Picture 6" descr="s14_folded_hands.png"/>
+          <p:cNvPicPr>
+            <a:picLocks noChangeAspect="1"/>
+          </p:cNvPicPr>
+          <p:nvPr/>
+        </p:nvPicPr>
+        <p:blipFill>
+          <a:blip r:embed="rId3"/>
+          <a:stretch>
+            <a:fillRect/>
+          </a:stretch>
+        </p:blipFill>
+        <p:spPr>
+          <a:xfrm>
+            <a:off x="10774680" y="274320"/>
+            <a:ext cx="603504" cy="603504"/>
+          </a:xfrm>
+          <a:prstGeom prst="rect">
+            <a:avLst/>
+          </a:prstGeom>
+        </p:spPr>
+      </p:pic>
+    </p:spTree>
+  </p:cSld>
+  <p:clrMapOvr>
+    <a:masterClrMapping/>
+  </p:clrMapOvr>
+</p:sld>
+</file>
+
+<file path=ppt/slides/slide2.xml><?xml version="1.0" encoding="utf-8"?>
+<p:sld xmlns:a="http://schemas.openxmlformats.org/drawingml/2006/main" xmlns:r="http://schemas.openxmlformats.org/officeDocument/2006/relationships" xmlns:p="http://schemas.openxmlformats.org/presentationml/2006/main">
+  <p:cSld name="Slide 2">
+    <p:bg>
+      <p:bgPr>
         <a:solidFill>
-          <a:srgbClr val="14213D"/>
+          <a:srgbClr val="F5F7FC"/>
         </a:solidFill>
       </p:bgPr>
     </p:bg>
@@ -6327,8 +7046,8 @@
         </p:nvSpPr>
         <p:spPr>
           <a:xfrm>
-            <a:off x="813816" y="1828800"/>
-            <a:ext cx="10564063" cy="1005840"/>
+            <a:off x="813816" y="566928"/>
+            <a:ext cx="10564063" cy="365760"/>
           </a:xfrm>
           <a:prstGeom prst="rect">
             <a:avLst/>
@@ -6344,17 +7063,17 @@
               <a:buNone/>
             </a:pPr>
             <a:r>
-              <a:rPr lang="en-US" sz="5600" b="1" dirty="0">
-                <a:solidFill>
-                  <a:srgbClr val="F7F6F2"/>
-                </a:solidFill>
-                <a:latin typeface="Malgun Gothic" pitchFamily="34" charset="0"/>
-                <a:ea typeface="Malgun Gothic" pitchFamily="34" charset="-122"/>
-                <a:cs typeface="Malgun Gothic" pitchFamily="34" charset="-120"/>
-              </a:rPr>
-              <a:t>감사합니다</a:t>
-            </a:r>
-            <a:endParaRPr lang="en-US" sz="5600" dirty="0"/>
+              <a:rPr lang="en-US" sz="1500" b="1" dirty="0">
+                <a:solidFill>
+                  <a:srgbClr val="5468FF"/>
+                </a:solidFill>
+                <a:latin typeface="Malgun Gothic" pitchFamily="34" charset="0"/>
+                <a:ea typeface="Malgun Gothic" pitchFamily="34" charset="-122"/>
+                <a:cs typeface="Malgun Gothic" pitchFamily="34" charset="-120"/>
+              </a:rPr>
+              <a:t>문제</a:t>
+            </a:r>
+            <a:endParaRPr lang="en-US" sz="1500" dirty="0"/>
           </a:p>
         </p:txBody>
       </p:sp>
@@ -6366,8 +7085,8 @@
         </p:nvSpPr>
         <p:spPr>
           <a:xfrm>
-            <a:off x="813816" y="2926080"/>
-            <a:ext cx="10564063" cy="548640"/>
+            <a:off x="813816" y="932688"/>
+            <a:ext cx="10564063" cy="960120"/>
           </a:xfrm>
           <a:prstGeom prst="rect">
             <a:avLst/>
@@ -6383,30 +7102,93 @@
               <a:buNone/>
             </a:pPr>
             <a:r>
-              <a:rPr lang="en-US" sz="2000" dirty="0">
-                <a:solidFill>
-                  <a:srgbClr val="C9D1E0"/>
-                </a:solidFill>
-                <a:latin typeface="Malgun Gothic" pitchFamily="34" charset="0"/>
-                <a:ea typeface="Malgun Gothic" pitchFamily="34" charset="-122"/>
-                <a:cs typeface="Malgun Gothic" pitchFamily="34" charset="-120"/>
-              </a:rPr>
-              <a:t>질문 받겠습니다</a:t>
-            </a:r>
-            <a:endParaRPr lang="en-US" sz="2000" dirty="0"/>
-          </a:p>
-        </p:txBody>
-      </p:sp>
-      <p:sp>
-        <p:nvSpPr>
-          <p:cNvPr id="5" name="Text 2"/>
+              <a:rPr lang="en-US" sz="3200" b="1" dirty="0">
+                <a:solidFill>
+                  <a:srgbClr val="14213D"/>
+                </a:solidFill>
+                <a:latin typeface="Malgun Gothic" pitchFamily="34" charset="0"/>
+                <a:ea typeface="Malgun Gothic" pitchFamily="34" charset="-122"/>
+                <a:cs typeface="Malgun Gothic" pitchFamily="34" charset="-120"/>
+              </a:rPr>
+              <a:t>매출이 줄었을 때, 어디서 왜 줄었는지 바로 알기 어렵다</a:t>
+            </a:r>
+            <a:endParaRPr lang="en-US" sz="3200" dirty="0"/>
+          </a:p>
+        </p:txBody>
+      </p:sp>
+      <p:sp>
+        <p:nvSpPr>
+          <p:cNvPr id="5" name="Shape 2"/>
+          <p:cNvSpPr/>
+          <p:nvPr/>
+        </p:nvSpPr>
+        <p:spPr>
+          <a:xfrm>
+            <a:off x="813816" y="2286000"/>
+            <a:ext cx="3307994" cy="3429000"/>
+          </a:xfrm>
+          <a:prstGeom prst="roundRect">
+            <a:avLst>
+              <a:gd name="adj" fmla="val 3317"/>
+            </a:avLst>
+          </a:prstGeom>
+          <a:gradFill rotWithShape="1">
+            <a:gsLst>
+              <a:gs pos="0">
+                <a:srgbClr val="FFFFFF"/>
+              </a:gs>
+              <a:gs pos="45000">
+                <a:srgbClr val="F0F2FF"/>
+              </a:gs>
+              <a:gs pos="100000">
+                <a:srgbClr val="DDE3FF"/>
+              </a:gs>
+            </a:gsLst>
+            <a:lin ang="4200000" scaled="0"/>
+          </a:gradFill>
+          <a:ln w="12700">
+            <a:solidFill>
+              <a:srgbClr val="E5E9F2"/>
+            </a:solidFill>
+            <a:prstDash val="solid"/>
+          </a:ln>
+        </p:spPr>
+      </p:sp>
+      <p:sp>
+        <p:nvSpPr>
+          <p:cNvPr id="6" name="Shape 3"/>
+          <p:cNvSpPr/>
+          <p:nvPr/>
+        </p:nvSpPr>
+        <p:spPr>
+          <a:xfrm>
+            <a:off x="1133856" y="2606040"/>
+            <a:ext cx="502920" cy="502920"/>
+          </a:xfrm>
+          <a:prstGeom prst="ellipse">
+            <a:avLst/>
+          </a:prstGeom>
+          <a:solidFill>
+            <a:srgbClr val="5468FF"/>
+          </a:solidFill>
+          <a:ln w="12700">
+            <a:solidFill>
+              <a:srgbClr val="5468FF"/>
+            </a:solidFill>
+            <a:prstDash val="solid"/>
+          </a:ln>
+        </p:spPr>
+      </p:sp>
+      <p:sp>
+        <p:nvSpPr>
+          <p:cNvPr id="7" name="Text 4"/>
           <p:cNvSpPr txBox="1"/>
           <p:nvPr/>
         </p:nvSpPr>
         <p:spPr>
           <a:xfrm>
-            <a:off x="813816" y="4023360"/>
-            <a:ext cx="10564063" cy="411480"/>
+            <a:off x="1133856" y="2606040"/>
+            <a:ext cx="502920" cy="502920"/>
           </a:xfrm>
           <a:prstGeom prst="rect">
             <a:avLst/>
@@ -6415,22 +7197,22 @@
           <a:ln/>
         </p:spPr>
         <p:txBody>
-          <a:bodyPr wrap="square" lIns="0" tIns="0" rIns="0" bIns="0" rtlCol="0" anchor="t"/>
-          <a:lstStyle/>
-          <a:p>
-            <a:pPr indent="0" marL="0">
-              <a:buNone/>
-            </a:pPr>
-            <a:r>
-              <a:rPr lang="en-US" sz="1500" dirty="0">
-                <a:solidFill>
-                  <a:srgbClr val="F2A65A"/>
-                </a:solidFill>
-                <a:latin typeface="Malgun Gothic" pitchFamily="34" charset="0"/>
-                <a:ea typeface="Malgun Gothic" pitchFamily="34" charset="-122"/>
-                <a:cs typeface="Malgun Gothic" pitchFamily="34" charset="-120"/>
-              </a:rPr>
-              <a:t>저장소  github.com/ctaleez51-art/sales-analysis</a:t>
+          <a:bodyPr wrap="square" lIns="0" tIns="0" rIns="0" bIns="0" rtlCol="0" anchor="ctr"/>
+          <a:lstStyle/>
+          <a:p>
+            <a:pPr algn="ctr" indent="0" marL="0">
+              <a:buNone/>
+            </a:pPr>
+            <a:r>
+              <a:rPr lang="en-US" sz="1500" b="1" dirty="0">
+                <a:solidFill>
+                  <a:srgbClr val="FFFFFF"/>
+                </a:solidFill>
+                <a:latin typeface="Malgun Gothic" pitchFamily="34" charset="0"/>
+                <a:ea typeface="Malgun Gothic" pitchFamily="34" charset="-122"/>
+                <a:cs typeface="Malgun Gothic" pitchFamily="34" charset="-120"/>
+              </a:rPr>
+              <a:t>1</a:t>
             </a:r>
             <a:endParaRPr lang="en-US" sz="1500" dirty="0"/>
           </a:p>
@@ -6438,14 +7220,14 @@
       </p:sp>
       <p:sp>
         <p:nvSpPr>
-          <p:cNvPr id="6" name="Text 3"/>
+          <p:cNvPr id="8" name="Text 5"/>
           <p:cNvSpPr txBox="1"/>
           <p:nvPr/>
         </p:nvSpPr>
         <p:spPr>
           <a:xfrm>
-            <a:off x="813816" y="4480560"/>
-            <a:ext cx="10564063" cy="411480"/>
+            <a:off x="1133856" y="3291840"/>
+            <a:ext cx="2667914" cy="822960"/>
           </a:xfrm>
           <a:prstGeom prst="rect">
             <a:avLst/>
@@ -6461,20 +7243,722 @@
               <a:buNone/>
             </a:pPr>
             <a:r>
+              <a:rPr lang="en-US" sz="2000" b="1" dirty="0">
+                <a:solidFill>
+                  <a:srgbClr val="14213D"/>
+                </a:solidFill>
+                <a:latin typeface="Malgun Gothic" pitchFamily="34" charset="0"/>
+                <a:ea typeface="Malgun Gothic" pitchFamily="34" charset="-122"/>
+                <a:cs typeface="Malgun Gothic" pitchFamily="34" charset="-120"/>
+              </a:rPr>
+              <a:t>채널 · 제품이</a:t>
+            </a:r>
+            <a:endParaRPr lang="en-US" sz="2000" dirty="0"/>
+          </a:p>
+          <a:p>
+            <a:pPr indent="0" marL="0">
+              <a:buNone/>
+            </a:pPr>
+            <a:r>
+              <a:rPr lang="en-US" sz="2000" b="1" dirty="0">
+                <a:solidFill>
+                  <a:srgbClr val="14213D"/>
+                </a:solidFill>
+                <a:latin typeface="Malgun Gothic" pitchFamily="34" charset="0"/>
+                <a:ea typeface="Malgun Gothic" pitchFamily="34" charset="-122"/>
+                <a:cs typeface="Malgun Gothic" pitchFamily="34" charset="-120"/>
+              </a:rPr>
+              <a:t>섞여 있다</a:t>
+            </a:r>
+            <a:endParaRPr lang="en-US" sz="2000" dirty="0"/>
+          </a:p>
+        </p:txBody>
+      </p:sp>
+      <p:sp>
+        <p:nvSpPr>
+          <p:cNvPr id="9" name="Text 6"/>
+          <p:cNvSpPr txBox="1"/>
+          <p:nvPr/>
+        </p:nvSpPr>
+        <p:spPr>
+          <a:xfrm>
+            <a:off x="1133856" y="4160520"/>
+            <a:ext cx="2667914" cy="1417320"/>
+          </a:xfrm>
+          <a:prstGeom prst="rect">
+            <a:avLst/>
+          </a:prstGeom>
+          <a:noFill/>
+          <a:ln/>
+        </p:spPr>
+        <p:txBody>
+          <a:bodyPr wrap="square" lIns="0" tIns="0" rIns="0" bIns="0" rtlCol="0" anchor="t"/>
+          <a:lstStyle/>
+          <a:p>
+            <a:pPr indent="0" marL="0">
+              <a:lnSpc>
+                <a:spcPct val="130000"/>
+              </a:lnSpc>
+              <a:buNone/>
+            </a:pPr>
+            <a:r>
               <a:rPr lang="en-US" sz="1500" dirty="0">
                 <a:solidFill>
-                  <a:srgbClr val="C9D1E0"/>
-                </a:solidFill>
-                <a:latin typeface="Malgun Gothic" pitchFamily="34" charset="0"/>
-                <a:ea typeface="Malgun Gothic" pitchFamily="34" charset="-122"/>
-                <a:cs typeface="Malgun Gothic" pitchFamily="34" charset="-120"/>
-              </a:rPr>
-              <a:t>체험  ctaleez51-art.github.io/sales-analysis/part5/</a:t>
+                  <a:srgbClr val="4A5568"/>
+                </a:solidFill>
+                <a:latin typeface="Malgun Gothic" pitchFamily="34" charset="0"/>
+                <a:ea typeface="Malgun Gothic" pitchFamily="34" charset="-122"/>
+                <a:cs typeface="Malgun Gothic" pitchFamily="34" charset="-120"/>
+              </a:rPr>
+              <a:t>쿠팡 · 네이버스토어 · 자사몰,</a:t>
             </a:r>
             <a:endParaRPr lang="en-US" sz="1500" dirty="0"/>
           </a:p>
-        </p:txBody>
-      </p:sp>
+          <a:p>
+            <a:pPr indent="0" marL="0">
+              <a:lnSpc>
+                <a:spcPct val="130000"/>
+              </a:lnSpc>
+              <a:buNone/>
+            </a:pPr>
+            <a:r>
+              <a:rPr lang="en-US" sz="1500" dirty="0">
+                <a:solidFill>
+                  <a:srgbClr val="4A5568"/>
+                </a:solidFill>
+                <a:latin typeface="Malgun Gothic" pitchFamily="34" charset="0"/>
+                <a:ea typeface="Malgun Gothic" pitchFamily="34" charset="-122"/>
+                <a:cs typeface="Malgun Gothic" pitchFamily="34" charset="-120"/>
+              </a:rPr>
+              <a:t>제품 20종의 숫자가 한 파일에</a:t>
+            </a:r>
+            <a:endParaRPr lang="en-US" sz="1500" dirty="0"/>
+          </a:p>
+          <a:p>
+            <a:pPr indent="0" marL="0">
+              <a:lnSpc>
+                <a:spcPct val="130000"/>
+              </a:lnSpc>
+              <a:buNone/>
+            </a:pPr>
+            <a:r>
+              <a:rPr lang="en-US" sz="1500" dirty="0">
+                <a:solidFill>
+                  <a:srgbClr val="4A5568"/>
+                </a:solidFill>
+                <a:latin typeface="Malgun Gothic" pitchFamily="34" charset="0"/>
+                <a:ea typeface="Malgun Gothic" pitchFamily="34" charset="-122"/>
+                <a:cs typeface="Malgun Gothic" pitchFamily="34" charset="-120"/>
+              </a:rPr>
+              <a:t>섞여 있어 어느 쪽이 줄었는지</a:t>
+            </a:r>
+            <a:endParaRPr lang="en-US" sz="1500" dirty="0"/>
+          </a:p>
+          <a:p>
+            <a:pPr indent="0" marL="0">
+              <a:lnSpc>
+                <a:spcPct val="130000"/>
+              </a:lnSpc>
+              <a:buNone/>
+            </a:pPr>
+            <a:r>
+              <a:rPr lang="en-US" sz="1500" dirty="0">
+                <a:solidFill>
+                  <a:srgbClr val="4A5568"/>
+                </a:solidFill>
+                <a:latin typeface="Malgun Gothic" pitchFamily="34" charset="0"/>
+                <a:ea typeface="Malgun Gothic" pitchFamily="34" charset="-122"/>
+                <a:cs typeface="Malgun Gothic" pitchFamily="34" charset="-120"/>
+              </a:rPr>
+              <a:t>눈으로 찾기 어렵다</a:t>
+            </a:r>
+            <a:endParaRPr lang="en-US" sz="1500" dirty="0"/>
+          </a:p>
+        </p:txBody>
+      </p:sp>
+      <p:sp>
+        <p:nvSpPr>
+          <p:cNvPr id="10" name="Shape 7"/>
+          <p:cNvSpPr/>
+          <p:nvPr/>
+        </p:nvSpPr>
+        <p:spPr>
+          <a:xfrm>
+            <a:off x="4441850" y="2286000"/>
+            <a:ext cx="3307994" cy="3429000"/>
+          </a:xfrm>
+          <a:prstGeom prst="roundRect">
+            <a:avLst>
+              <a:gd name="adj" fmla="val 3317"/>
+            </a:avLst>
+          </a:prstGeom>
+          <a:gradFill rotWithShape="1">
+            <a:gsLst>
+              <a:gs pos="0">
+                <a:srgbClr val="FFFFFF"/>
+              </a:gs>
+              <a:gs pos="45000">
+                <a:srgbClr val="F0F2FF"/>
+              </a:gs>
+              <a:gs pos="100000">
+                <a:srgbClr val="DDE3FF"/>
+              </a:gs>
+            </a:gsLst>
+            <a:lin ang="4200000" scaled="0"/>
+          </a:gradFill>
+          <a:ln w="12700">
+            <a:solidFill>
+              <a:srgbClr val="E5E9F2"/>
+            </a:solidFill>
+            <a:prstDash val="solid"/>
+          </a:ln>
+        </p:spPr>
+      </p:sp>
+      <p:sp>
+        <p:nvSpPr>
+          <p:cNvPr id="11" name="Shape 8"/>
+          <p:cNvSpPr/>
+          <p:nvPr/>
+        </p:nvSpPr>
+        <p:spPr>
+          <a:xfrm>
+            <a:off x="4761890" y="2606040"/>
+            <a:ext cx="502920" cy="502920"/>
+          </a:xfrm>
+          <a:prstGeom prst="ellipse">
+            <a:avLst/>
+          </a:prstGeom>
+          <a:solidFill>
+            <a:srgbClr val="5468FF"/>
+          </a:solidFill>
+          <a:ln w="12700">
+            <a:solidFill>
+              <a:srgbClr val="5468FF"/>
+            </a:solidFill>
+            <a:prstDash val="solid"/>
+          </a:ln>
+        </p:spPr>
+      </p:sp>
+      <p:sp>
+        <p:nvSpPr>
+          <p:cNvPr id="12" name="Text 9"/>
+          <p:cNvSpPr txBox="1"/>
+          <p:nvPr/>
+        </p:nvSpPr>
+        <p:spPr>
+          <a:xfrm>
+            <a:off x="4761890" y="2606040"/>
+            <a:ext cx="502920" cy="502920"/>
+          </a:xfrm>
+          <a:prstGeom prst="rect">
+            <a:avLst/>
+          </a:prstGeom>
+          <a:noFill/>
+          <a:ln/>
+        </p:spPr>
+        <p:txBody>
+          <a:bodyPr wrap="square" lIns="0" tIns="0" rIns="0" bIns="0" rtlCol="0" anchor="ctr"/>
+          <a:lstStyle/>
+          <a:p>
+            <a:pPr algn="ctr" indent="0" marL="0">
+              <a:buNone/>
+            </a:pPr>
+            <a:r>
+              <a:rPr lang="en-US" sz="1500" b="1" dirty="0">
+                <a:solidFill>
+                  <a:srgbClr val="FFFFFF"/>
+                </a:solidFill>
+                <a:latin typeface="Malgun Gothic" pitchFamily="34" charset="0"/>
+                <a:ea typeface="Malgun Gothic" pitchFamily="34" charset="-122"/>
+                <a:cs typeface="Malgun Gothic" pitchFamily="34" charset="-120"/>
+              </a:rPr>
+              <a:t>2</a:t>
+            </a:r>
+            <a:endParaRPr lang="en-US" sz="1500" dirty="0"/>
+          </a:p>
+        </p:txBody>
+      </p:sp>
+      <p:sp>
+        <p:nvSpPr>
+          <p:cNvPr id="13" name="Text 10"/>
+          <p:cNvSpPr txBox="1"/>
+          <p:nvPr/>
+        </p:nvSpPr>
+        <p:spPr>
+          <a:xfrm>
+            <a:off x="4761890" y="3291840"/>
+            <a:ext cx="2667914" cy="822960"/>
+          </a:xfrm>
+          <a:prstGeom prst="rect">
+            <a:avLst/>
+          </a:prstGeom>
+          <a:noFill/>
+          <a:ln/>
+        </p:spPr>
+        <p:txBody>
+          <a:bodyPr wrap="square" lIns="0" tIns="0" rIns="0" bIns="0" rtlCol="0" anchor="t"/>
+          <a:lstStyle/>
+          <a:p>
+            <a:pPr indent="0" marL="0">
+              <a:buNone/>
+            </a:pPr>
+            <a:r>
+              <a:rPr lang="en-US" sz="2000" b="1" dirty="0">
+                <a:solidFill>
+                  <a:srgbClr val="14213D"/>
+                </a:solidFill>
+                <a:latin typeface="Malgun Gothic" pitchFamily="34" charset="0"/>
+                <a:ea typeface="Malgun Gothic" pitchFamily="34" charset="-122"/>
+                <a:cs typeface="Malgun Gothic" pitchFamily="34" charset="-120"/>
+              </a:rPr>
+              <a:t>지표를</a:t>
+            </a:r>
+            <a:endParaRPr lang="en-US" sz="2000" dirty="0"/>
+          </a:p>
+          <a:p>
+            <a:pPr indent="0" marL="0">
+              <a:buNone/>
+            </a:pPr>
+            <a:r>
+              <a:rPr lang="en-US" sz="2000" b="1" dirty="0">
+                <a:solidFill>
+                  <a:srgbClr val="14213D"/>
+                </a:solidFill>
+                <a:latin typeface="Malgun Gothic" pitchFamily="34" charset="0"/>
+                <a:ea typeface="Malgun Gothic" pitchFamily="34" charset="-122"/>
+                <a:cs typeface="Malgun Gothic" pitchFamily="34" charset="-120"/>
+              </a:rPr>
+              <a:t>이어 봐야 한다</a:t>
+            </a:r>
+            <a:endParaRPr lang="en-US" sz="2000" dirty="0"/>
+          </a:p>
+        </p:txBody>
+      </p:sp>
+      <p:sp>
+        <p:nvSpPr>
+          <p:cNvPr id="14" name="Text 11"/>
+          <p:cNvSpPr txBox="1"/>
+          <p:nvPr/>
+        </p:nvSpPr>
+        <p:spPr>
+          <a:xfrm>
+            <a:off x="4761890" y="4160520"/>
+            <a:ext cx="2667914" cy="1417320"/>
+          </a:xfrm>
+          <a:prstGeom prst="rect">
+            <a:avLst/>
+          </a:prstGeom>
+          <a:noFill/>
+          <a:ln/>
+        </p:spPr>
+        <p:txBody>
+          <a:bodyPr wrap="square" lIns="0" tIns="0" rIns="0" bIns="0" rtlCol="0" anchor="t"/>
+          <a:lstStyle/>
+          <a:p>
+            <a:pPr indent="0" marL="0">
+              <a:lnSpc>
+                <a:spcPct val="130000"/>
+              </a:lnSpc>
+              <a:buNone/>
+            </a:pPr>
+            <a:r>
+              <a:rPr lang="en-US" sz="1500" dirty="0">
+                <a:solidFill>
+                  <a:srgbClr val="4A5568"/>
+                </a:solidFill>
+                <a:latin typeface="Malgun Gothic" pitchFamily="34" charset="0"/>
+                <a:ea typeface="Malgun Gothic" pitchFamily="34" charset="-122"/>
+                <a:cs typeface="Malgun Gothic" pitchFamily="34" charset="-120"/>
+              </a:rPr>
+              <a:t>광고비 · 방문 · 구매전환율 ·</a:t>
+            </a:r>
+            <a:endParaRPr lang="en-US" sz="1500" dirty="0"/>
+          </a:p>
+          <a:p>
+            <a:pPr indent="0" marL="0">
+              <a:lnSpc>
+                <a:spcPct val="130000"/>
+              </a:lnSpc>
+              <a:buNone/>
+            </a:pPr>
+            <a:r>
+              <a:rPr lang="en-US" sz="1500" dirty="0">
+                <a:solidFill>
+                  <a:srgbClr val="4A5568"/>
+                </a:solidFill>
+                <a:latin typeface="Malgun Gothic" pitchFamily="34" charset="0"/>
+                <a:ea typeface="Malgun Gothic" pitchFamily="34" charset="-122"/>
+                <a:cs typeface="Malgun Gothic" pitchFamily="34" charset="-120"/>
+              </a:rPr>
+              <a:t>ROAS 를 따로 보면 원인이</a:t>
+            </a:r>
+            <a:endParaRPr lang="en-US" sz="1500" dirty="0"/>
+          </a:p>
+          <a:p>
+            <a:pPr indent="0" marL="0">
+              <a:lnSpc>
+                <a:spcPct val="130000"/>
+              </a:lnSpc>
+              <a:buNone/>
+            </a:pPr>
+            <a:r>
+              <a:rPr lang="en-US" sz="1500" dirty="0">
+                <a:solidFill>
+                  <a:srgbClr val="4A5568"/>
+                </a:solidFill>
+                <a:latin typeface="Malgun Gothic" pitchFamily="34" charset="0"/>
+                <a:ea typeface="Malgun Gothic" pitchFamily="34" charset="-122"/>
+                <a:cs typeface="Malgun Gothic" pitchFamily="34" charset="-120"/>
+              </a:rPr>
+              <a:t>안 보인다. 함께 이어 봐야</a:t>
+            </a:r>
+            <a:endParaRPr lang="en-US" sz="1500" dirty="0"/>
+          </a:p>
+          <a:p>
+            <a:pPr indent="0" marL="0">
+              <a:lnSpc>
+                <a:spcPct val="130000"/>
+              </a:lnSpc>
+              <a:buNone/>
+            </a:pPr>
+            <a:r>
+              <a:rPr lang="en-US" sz="1500" dirty="0">
+                <a:solidFill>
+                  <a:srgbClr val="4A5568"/>
+                </a:solidFill>
+                <a:latin typeface="Malgun Gothic" pitchFamily="34" charset="0"/>
+                <a:ea typeface="Malgun Gothic" pitchFamily="34" charset="-122"/>
+                <a:cs typeface="Malgun Gothic" pitchFamily="34" charset="-120"/>
+              </a:rPr>
+              <a:t>한다</a:t>
+            </a:r>
+            <a:endParaRPr lang="en-US" sz="1500" dirty="0"/>
+          </a:p>
+        </p:txBody>
+      </p:sp>
+      <p:sp>
+        <p:nvSpPr>
+          <p:cNvPr id="15" name="Shape 12"/>
+          <p:cNvSpPr/>
+          <p:nvPr/>
+        </p:nvSpPr>
+        <p:spPr>
+          <a:xfrm>
+            <a:off x="8069885" y="2286000"/>
+            <a:ext cx="3307994" cy="3429000"/>
+          </a:xfrm>
+          <a:prstGeom prst="roundRect">
+            <a:avLst>
+              <a:gd name="adj" fmla="val 3317"/>
+            </a:avLst>
+          </a:prstGeom>
+          <a:gradFill rotWithShape="1">
+            <a:gsLst>
+              <a:gs pos="0">
+                <a:srgbClr val="FFFFFF"/>
+              </a:gs>
+              <a:gs pos="45000">
+                <a:srgbClr val="F0F2FF"/>
+              </a:gs>
+              <a:gs pos="100000">
+                <a:srgbClr val="DDE3FF"/>
+              </a:gs>
+            </a:gsLst>
+            <a:lin ang="4200000" scaled="0"/>
+          </a:gradFill>
+          <a:ln w="12700">
+            <a:solidFill>
+              <a:srgbClr val="E5E9F2"/>
+            </a:solidFill>
+            <a:prstDash val="solid"/>
+          </a:ln>
+        </p:spPr>
+      </p:sp>
+      <p:sp>
+        <p:nvSpPr>
+          <p:cNvPr id="16" name="Shape 13"/>
+          <p:cNvSpPr/>
+          <p:nvPr/>
+        </p:nvSpPr>
+        <p:spPr>
+          <a:xfrm>
+            <a:off x="8389925" y="2606040"/>
+            <a:ext cx="502920" cy="502920"/>
+          </a:xfrm>
+          <a:prstGeom prst="ellipse">
+            <a:avLst/>
+          </a:prstGeom>
+          <a:solidFill>
+            <a:srgbClr val="5468FF"/>
+          </a:solidFill>
+          <a:ln w="12700">
+            <a:solidFill>
+              <a:srgbClr val="5468FF"/>
+            </a:solidFill>
+            <a:prstDash val="solid"/>
+          </a:ln>
+        </p:spPr>
+      </p:sp>
+      <p:sp>
+        <p:nvSpPr>
+          <p:cNvPr id="17" name="Text 14"/>
+          <p:cNvSpPr txBox="1"/>
+          <p:nvPr/>
+        </p:nvSpPr>
+        <p:spPr>
+          <a:xfrm>
+            <a:off x="8389925" y="2606040"/>
+            <a:ext cx="502920" cy="502920"/>
+          </a:xfrm>
+          <a:prstGeom prst="rect">
+            <a:avLst/>
+          </a:prstGeom>
+          <a:noFill/>
+          <a:ln/>
+        </p:spPr>
+        <p:txBody>
+          <a:bodyPr wrap="square" lIns="0" tIns="0" rIns="0" bIns="0" rtlCol="0" anchor="ctr"/>
+          <a:lstStyle/>
+          <a:p>
+            <a:pPr algn="ctr" indent="0" marL="0">
+              <a:buNone/>
+            </a:pPr>
+            <a:r>
+              <a:rPr lang="en-US" sz="1500" b="1" dirty="0">
+                <a:solidFill>
+                  <a:srgbClr val="FFFFFF"/>
+                </a:solidFill>
+                <a:latin typeface="Malgun Gothic" pitchFamily="34" charset="0"/>
+                <a:ea typeface="Malgun Gothic" pitchFamily="34" charset="-122"/>
+                <a:cs typeface="Malgun Gothic" pitchFamily="34" charset="-120"/>
+              </a:rPr>
+              <a:t>3</a:t>
+            </a:r>
+            <a:endParaRPr lang="en-US" sz="1500" dirty="0"/>
+          </a:p>
+        </p:txBody>
+      </p:sp>
+      <p:sp>
+        <p:nvSpPr>
+          <p:cNvPr id="18" name="Text 15"/>
+          <p:cNvSpPr txBox="1"/>
+          <p:nvPr/>
+        </p:nvSpPr>
+        <p:spPr>
+          <a:xfrm>
+            <a:off x="8389925" y="3291840"/>
+            <a:ext cx="2667914" cy="822960"/>
+          </a:xfrm>
+          <a:prstGeom prst="rect">
+            <a:avLst/>
+          </a:prstGeom>
+          <a:noFill/>
+          <a:ln/>
+        </p:spPr>
+        <p:txBody>
+          <a:bodyPr wrap="square" lIns="0" tIns="0" rIns="0" bIns="0" rtlCol="0" anchor="t"/>
+          <a:lstStyle/>
+          <a:p>
+            <a:pPr indent="0" marL="0">
+              <a:buNone/>
+            </a:pPr>
+            <a:r>
+              <a:rPr lang="en-US" sz="2000" b="1" dirty="0">
+                <a:solidFill>
+                  <a:srgbClr val="14213D"/>
+                </a:solidFill>
+                <a:latin typeface="Malgun Gothic" pitchFamily="34" charset="0"/>
+                <a:ea typeface="Malgun Gothic" pitchFamily="34" charset="-122"/>
+                <a:cs typeface="Malgun Gothic" pitchFamily="34" charset="-120"/>
+              </a:rPr>
+              <a:t>AI 에 계산을 맡기면</a:t>
+            </a:r>
+            <a:endParaRPr lang="en-US" sz="2000" dirty="0"/>
+          </a:p>
+          <a:p>
+            <a:pPr indent="0" marL="0">
+              <a:buNone/>
+            </a:pPr>
+            <a:r>
+              <a:rPr lang="en-US" sz="2000" b="1" dirty="0">
+                <a:solidFill>
+                  <a:srgbClr val="14213D"/>
+                </a:solidFill>
+                <a:latin typeface="Malgun Gothic" pitchFamily="34" charset="0"/>
+                <a:ea typeface="Malgun Gothic" pitchFamily="34" charset="-122"/>
+                <a:cs typeface="Malgun Gothic" pitchFamily="34" charset="-120"/>
+              </a:rPr>
+              <a:t>위험하다</a:t>
+            </a:r>
+            <a:endParaRPr lang="en-US" sz="2000" dirty="0"/>
+          </a:p>
+        </p:txBody>
+      </p:sp>
+      <p:sp>
+        <p:nvSpPr>
+          <p:cNvPr id="19" name="Text 16"/>
+          <p:cNvSpPr txBox="1"/>
+          <p:nvPr/>
+        </p:nvSpPr>
+        <p:spPr>
+          <a:xfrm>
+            <a:off x="8389925" y="4160520"/>
+            <a:ext cx="2667914" cy="1417320"/>
+          </a:xfrm>
+          <a:prstGeom prst="rect">
+            <a:avLst/>
+          </a:prstGeom>
+          <a:noFill/>
+          <a:ln/>
+        </p:spPr>
+        <p:txBody>
+          <a:bodyPr wrap="square" lIns="0" tIns="0" rIns="0" bIns="0" rtlCol="0" anchor="t"/>
+          <a:lstStyle/>
+          <a:p>
+            <a:pPr indent="0" marL="0">
+              <a:lnSpc>
+                <a:spcPct val="130000"/>
+              </a:lnSpc>
+              <a:buNone/>
+            </a:pPr>
+            <a:r>
+              <a:rPr lang="en-US" sz="1500" dirty="0">
+                <a:solidFill>
+                  <a:srgbClr val="4A5568"/>
+                </a:solidFill>
+                <a:latin typeface="Malgun Gothic" pitchFamily="34" charset="0"/>
+                <a:ea typeface="Malgun Gothic" pitchFamily="34" charset="-122"/>
+                <a:cs typeface="Malgun Gothic" pitchFamily="34" charset="-120"/>
+              </a:rPr>
+              <a:t>숫자를 AI 가 직접 계산하면</a:t>
+            </a:r>
+            <a:endParaRPr lang="en-US" sz="1500" dirty="0"/>
+          </a:p>
+          <a:p>
+            <a:pPr indent="0" marL="0">
+              <a:lnSpc>
+                <a:spcPct val="130000"/>
+              </a:lnSpc>
+              <a:buNone/>
+            </a:pPr>
+            <a:r>
+              <a:rPr lang="en-US" sz="1500" dirty="0">
+                <a:solidFill>
+                  <a:srgbClr val="4A5568"/>
+                </a:solidFill>
+                <a:latin typeface="Malgun Gothic" pitchFamily="34" charset="0"/>
+                <a:ea typeface="Malgun Gothic" pitchFamily="34" charset="-122"/>
+                <a:cs typeface="Malgun Gothic" pitchFamily="34" charset="-120"/>
+              </a:rPr>
+              <a:t>틀리거나 지어낼 수 있다.</a:t>
+            </a:r>
+            <a:endParaRPr lang="en-US" sz="1500" dirty="0"/>
+          </a:p>
+          <a:p>
+            <a:pPr indent="0" marL="0">
+              <a:lnSpc>
+                <a:spcPct val="130000"/>
+              </a:lnSpc>
+              <a:buNone/>
+            </a:pPr>
+            <a:r>
+              <a:rPr lang="en-US" sz="1500" dirty="0">
+                <a:solidFill>
+                  <a:srgbClr val="4A5568"/>
+                </a:solidFill>
+                <a:latin typeface="Malgun Gothic" pitchFamily="34" charset="0"/>
+                <a:ea typeface="Malgun Gothic" pitchFamily="34" charset="-122"/>
+                <a:cs typeface="Malgun Gothic" pitchFamily="34" charset="-120"/>
+              </a:rPr>
+              <a:t>같은 입력에 같은 숫자가</a:t>
+            </a:r>
+            <a:endParaRPr lang="en-US" sz="1500" dirty="0"/>
+          </a:p>
+          <a:p>
+            <a:pPr indent="0" marL="0">
+              <a:lnSpc>
+                <a:spcPct val="130000"/>
+              </a:lnSpc>
+              <a:buNone/>
+            </a:pPr>
+            <a:r>
+              <a:rPr lang="en-US" sz="1500" dirty="0">
+                <a:solidFill>
+                  <a:srgbClr val="4A5568"/>
+                </a:solidFill>
+                <a:latin typeface="Malgun Gothic" pitchFamily="34" charset="0"/>
+                <a:ea typeface="Malgun Gothic" pitchFamily="34" charset="-122"/>
+                <a:cs typeface="Malgun Gothic" pitchFamily="34" charset="-120"/>
+              </a:rPr>
+              <a:t>나와야 한다</a:t>
+            </a:r>
+            <a:endParaRPr lang="en-US" sz="1500" dirty="0"/>
+          </a:p>
+        </p:txBody>
+      </p:sp>
+      <p:sp>
+        <p:nvSpPr>
+          <p:cNvPr id="20" name="Text 17"/>
+          <p:cNvSpPr txBox="1"/>
+          <p:nvPr/>
+        </p:nvSpPr>
+        <p:spPr>
+          <a:xfrm>
+            <a:off x="813816" y="6327648"/>
+            <a:ext cx="10564063" cy="274320"/>
+          </a:xfrm>
+          <a:prstGeom prst="rect">
+            <a:avLst/>
+          </a:prstGeom>
+          <a:noFill/>
+          <a:ln/>
+        </p:spPr>
+        <p:txBody>
+          <a:bodyPr wrap="square" lIns="0" tIns="0" rIns="0" bIns="0" rtlCol="0" anchor="t"/>
+          <a:lstStyle/>
+          <a:p>
+            <a:pPr indent="0" marL="0">
+              <a:buNone/>
+            </a:pPr>
+            <a:r>
+              <a:rPr lang="en-US" sz="1100" dirty="0">
+                <a:solidFill>
+                  <a:srgbClr val="5B6478"/>
+                </a:solidFill>
+                <a:latin typeface="Malgun Gothic" pitchFamily="34" charset="0"/>
+                <a:ea typeface="Malgun Gothic" pitchFamily="34" charset="-122"/>
+                <a:cs typeface="Malgun Gothic" pitchFamily="34" charset="-120"/>
+              </a:rPr>
+              <a:t>M1팀 · 매출분석 툴 · 02</a:t>
+            </a:r>
+            <a:endParaRPr lang="en-US" sz="1100" dirty="0"/>
+          </a:p>
+        </p:txBody>
+      </p:sp>
+      <p:pic>
+        <p:nvPicPr>
+          <p:cNvPr id="21" name="Picture 20" descr="s2_chart_decreasing.png"/>
+          <p:cNvPicPr>
+            <a:picLocks noChangeAspect="1"/>
+          </p:cNvPicPr>
+          <p:nvPr/>
+        </p:nvPicPr>
+        <p:blipFill>
+          <a:blip r:embed="rId3"/>
+          <a:stretch>
+            <a:fillRect/>
+          </a:stretch>
+        </p:blipFill>
+        <p:spPr>
+          <a:xfrm>
+            <a:off x="10774680" y="274320"/>
+            <a:ext cx="603504" cy="603504"/>
+          </a:xfrm>
+          <a:prstGeom prst="rect">
+            <a:avLst/>
+          </a:prstGeom>
+        </p:spPr>
+      </p:pic>
     </p:spTree>
   </p:cSld>
   <p:clrMapOvr>
@@ -6483,13 +7967,632 @@
 </p:sld>
 </file>
 
-<file path=ppt/slides/slide2.xml><?xml version="1.0" encoding="utf-8"?>
+<file path=ppt/slides/slide3.xml><?xml version="1.0" encoding="utf-8"?>
 <p:sld xmlns:a="http://schemas.openxmlformats.org/drawingml/2006/main" xmlns:r="http://schemas.openxmlformats.org/officeDocument/2006/relationships" xmlns:p="http://schemas.openxmlformats.org/presentationml/2006/main">
-  <p:cSld name="Slide 2">
+  <p:cSld name="Slide 3">
+    <p:bg>
+      <p:bgPr>
+        <a:gradFill rotWithShape="1">
+          <a:gsLst>
+            <a:gs pos="0">
+              <a:srgbClr val="131A2E"/>
+            </a:gs>
+            <a:gs pos="55000">
+              <a:srgbClr val="1F2C6B"/>
+            </a:gs>
+            <a:gs pos="100000">
+              <a:srgbClr val="3346C9"/>
+            </a:gs>
+          </a:gsLst>
+          <a:lin ang="2280000" scaled="0"/>
+        </a:gradFill>
+      </p:bgPr>
+    </p:bg>
+    <p:spTree>
+      <p:nvGrpSpPr>
+        <p:cNvPr id="1" name=""/>
+        <p:cNvGrpSpPr/>
+        <p:nvPr/>
+      </p:nvGrpSpPr>
+      <p:grpSpPr>
+        <a:xfrm>
+          <a:off x="0" y="0"/>
+          <a:ext cx="0" cy="0"/>
+          <a:chOff x="0" y="0"/>
+          <a:chExt cx="0" cy="0"/>
+        </a:xfrm>
+      </p:grpSpPr>
+      <p:sp>
+        <p:nvSpPr>
+          <p:cNvPr id="3" name="Text 0"/>
+          <p:cNvSpPr txBox="1"/>
+          <p:nvPr/>
+        </p:nvSpPr>
+        <p:spPr>
+          <a:xfrm>
+            <a:off x="813816" y="1234440"/>
+            <a:ext cx="10564063" cy="365760"/>
+          </a:xfrm>
+          <a:prstGeom prst="rect">
+            <a:avLst/>
+          </a:prstGeom>
+          <a:noFill/>
+          <a:ln/>
+        </p:spPr>
+        <p:txBody>
+          <a:bodyPr wrap="square" lIns="0" tIns="0" rIns="0" bIns="0" rtlCol="0" anchor="t"/>
+          <a:lstStyle/>
+          <a:p>
+            <a:pPr indent="0" marL="0">
+              <a:buNone/>
+            </a:pPr>
+            <a:r>
+              <a:rPr lang="en-US" sz="1500" b="1" dirty="0">
+                <a:solidFill>
+                  <a:srgbClr val="9DAAFF"/>
+                </a:solidFill>
+                <a:latin typeface="Malgun Gothic" pitchFamily="34" charset="0"/>
+                <a:ea typeface="Malgun Gothic" pitchFamily="34" charset="-122"/>
+                <a:cs typeface="Malgun Gothic" pitchFamily="34" charset="-120"/>
+              </a:rPr>
+              <a:t>해결</a:t>
+            </a:r>
+            <a:endParaRPr lang="en-US" sz="1500" dirty="0"/>
+          </a:p>
+        </p:txBody>
+      </p:sp>
+      <p:sp>
+        <p:nvSpPr>
+          <p:cNvPr id="4" name="Text 1"/>
+          <p:cNvSpPr txBox="1"/>
+          <p:nvPr/>
+        </p:nvSpPr>
+        <p:spPr>
+          <a:xfrm>
+            <a:off x="813816" y="1645920"/>
+            <a:ext cx="10564063" cy="1005840"/>
+          </a:xfrm>
+          <a:prstGeom prst="rect">
+            <a:avLst/>
+          </a:prstGeom>
+          <a:noFill/>
+          <a:ln/>
+        </p:spPr>
+        <p:txBody>
+          <a:bodyPr wrap="square" lIns="0" tIns="0" rIns="0" bIns="0" rtlCol="0" anchor="t"/>
+          <a:lstStyle/>
+          <a:p>
+            <a:pPr indent="0" marL="0">
+              <a:buNone/>
+            </a:pPr>
+            <a:r>
+              <a:rPr lang="en-US" sz="5400" b="1" dirty="0">
+                <a:solidFill>
+                  <a:srgbClr val="F5F7FC"/>
+                </a:solidFill>
+                <a:latin typeface="Malgun Gothic" pitchFamily="34" charset="0"/>
+                <a:ea typeface="Malgun Gothic" pitchFamily="34" charset="-122"/>
+                <a:cs typeface="Malgun Gothic" pitchFamily="34" charset="-120"/>
+              </a:rPr>
+              <a:t>계산은 코드, 해석은 AI</a:t>
+            </a:r>
+            <a:endParaRPr lang="en-US" sz="5400" dirty="0"/>
+          </a:p>
+        </p:txBody>
+      </p:sp>
+      <p:sp>
+        <p:nvSpPr>
+          <p:cNvPr id="5" name="Shape 2"/>
+          <p:cNvSpPr/>
+          <p:nvPr/>
+        </p:nvSpPr>
+        <p:spPr>
+          <a:xfrm>
+            <a:off x="813816" y="3429000"/>
+            <a:ext cx="502920" cy="502920"/>
+          </a:xfrm>
+          <a:prstGeom prst="ellipse">
+            <a:avLst/>
+          </a:prstGeom>
+          <a:solidFill>
+            <a:srgbClr val="9DAAFF"/>
+          </a:solidFill>
+          <a:ln w="12700">
+            <a:solidFill>
+              <a:srgbClr val="9DAAFF"/>
+            </a:solidFill>
+            <a:prstDash val="solid"/>
+          </a:ln>
+        </p:spPr>
+      </p:sp>
+      <p:sp>
+        <p:nvSpPr>
+          <p:cNvPr id="6" name="Text 3"/>
+          <p:cNvSpPr txBox="1"/>
+          <p:nvPr/>
+        </p:nvSpPr>
+        <p:spPr>
+          <a:xfrm>
+            <a:off x="813816" y="3429000"/>
+            <a:ext cx="502920" cy="502920"/>
+          </a:xfrm>
+          <a:prstGeom prst="rect">
+            <a:avLst/>
+          </a:prstGeom>
+          <a:noFill/>
+          <a:ln/>
+        </p:spPr>
+        <p:txBody>
+          <a:bodyPr wrap="square" lIns="0" tIns="0" rIns="0" bIns="0" rtlCol="0" anchor="ctr"/>
+          <a:lstStyle/>
+          <a:p>
+            <a:pPr algn="ctr" indent="0" marL="0">
+              <a:buNone/>
+            </a:pPr>
+            <a:r>
+              <a:rPr lang="en-US" sz="1500" b="1" dirty="0">
+                <a:solidFill>
+                  <a:srgbClr val="14213D"/>
+                </a:solidFill>
+                <a:latin typeface="Malgun Gothic" pitchFamily="34" charset="0"/>
+                <a:ea typeface="Malgun Gothic" pitchFamily="34" charset="-122"/>
+                <a:cs typeface="Malgun Gothic" pitchFamily="34" charset="-120"/>
+              </a:rPr>
+              <a:t>1</a:t>
+            </a:r>
+            <a:endParaRPr lang="en-US" sz="1500" dirty="0"/>
+          </a:p>
+        </p:txBody>
+      </p:sp>
+      <p:sp>
+        <p:nvSpPr>
+          <p:cNvPr id="7" name="Text 4"/>
+          <p:cNvSpPr txBox="1"/>
+          <p:nvPr/>
+        </p:nvSpPr>
+        <p:spPr>
+          <a:xfrm>
+            <a:off x="813816" y="4160520"/>
+            <a:ext cx="3247034" cy="457200"/>
+          </a:xfrm>
+          <a:prstGeom prst="rect">
+            <a:avLst/>
+          </a:prstGeom>
+          <a:noFill/>
+          <a:ln/>
+        </p:spPr>
+        <p:txBody>
+          <a:bodyPr wrap="square" lIns="0" tIns="0" rIns="0" bIns="0" rtlCol="0" anchor="t"/>
+          <a:lstStyle/>
+          <a:p>
+            <a:pPr indent="0" marL="0">
+              <a:buNone/>
+            </a:pPr>
+            <a:r>
+              <a:rPr lang="en-US" sz="2000" b="1" dirty="0">
+                <a:solidFill>
+                  <a:srgbClr val="F5F7FC"/>
+                </a:solidFill>
+                <a:latin typeface="Malgun Gothic" pitchFamily="34" charset="0"/>
+                <a:ea typeface="Malgun Gothic" pitchFamily="34" charset="-122"/>
+                <a:cs typeface="Malgun Gothic" pitchFamily="34" charset="-120"/>
+              </a:rPr>
+              <a:t>숫자는 코드가</a:t>
+            </a:r>
+            <a:endParaRPr lang="en-US" sz="2000" dirty="0"/>
+          </a:p>
+        </p:txBody>
+      </p:sp>
+      <p:sp>
+        <p:nvSpPr>
+          <p:cNvPr id="8" name="Text 5"/>
+          <p:cNvSpPr txBox="1"/>
+          <p:nvPr/>
+        </p:nvSpPr>
+        <p:spPr>
+          <a:xfrm>
+            <a:off x="813816" y="4663440"/>
+            <a:ext cx="3247034" cy="1005840"/>
+          </a:xfrm>
+          <a:prstGeom prst="rect">
+            <a:avLst/>
+          </a:prstGeom>
+          <a:noFill/>
+          <a:ln/>
+        </p:spPr>
+        <p:txBody>
+          <a:bodyPr wrap="square" lIns="0" tIns="0" rIns="0" bIns="0" rtlCol="0" anchor="t"/>
+          <a:lstStyle/>
+          <a:p>
+            <a:pPr indent="0" marL="0">
+              <a:lnSpc>
+                <a:spcPct val="130000"/>
+              </a:lnSpc>
+              <a:buNone/>
+            </a:pPr>
+            <a:r>
+              <a:rPr lang="en-US" sz="1500" dirty="0">
+                <a:solidFill>
+                  <a:srgbClr val="C9D1E0"/>
+                </a:solidFill>
+                <a:latin typeface="Malgun Gothic" pitchFamily="34" charset="0"/>
+                <a:ea typeface="Malgun Gothic" pitchFamily="34" charset="-122"/>
+                <a:cs typeface="Malgun Gothic" pitchFamily="34" charset="-120"/>
+              </a:rPr>
+              <a:t>정해진 공식으로 계산. 같은 입력이면 늘 같은 숫자</a:t>
+            </a:r>
+            <a:endParaRPr lang="en-US" sz="1500" dirty="0"/>
+          </a:p>
+        </p:txBody>
+      </p:sp>
+      <p:sp>
+        <p:nvSpPr>
+          <p:cNvPr id="9" name="Shape 6"/>
+          <p:cNvSpPr/>
+          <p:nvPr/>
+        </p:nvSpPr>
+        <p:spPr>
+          <a:xfrm>
+            <a:off x="4472330" y="3429000"/>
+            <a:ext cx="502920" cy="502920"/>
+          </a:xfrm>
+          <a:prstGeom prst="ellipse">
+            <a:avLst/>
+          </a:prstGeom>
+          <a:solidFill>
+            <a:srgbClr val="9DAAFF"/>
+          </a:solidFill>
+          <a:ln w="12700">
+            <a:solidFill>
+              <a:srgbClr val="9DAAFF"/>
+            </a:solidFill>
+            <a:prstDash val="solid"/>
+          </a:ln>
+        </p:spPr>
+      </p:sp>
+      <p:sp>
+        <p:nvSpPr>
+          <p:cNvPr id="10" name="Text 7"/>
+          <p:cNvSpPr txBox="1"/>
+          <p:nvPr/>
+        </p:nvSpPr>
+        <p:spPr>
+          <a:xfrm>
+            <a:off x="4472330" y="3429000"/>
+            <a:ext cx="502920" cy="502920"/>
+          </a:xfrm>
+          <a:prstGeom prst="rect">
+            <a:avLst/>
+          </a:prstGeom>
+          <a:noFill/>
+          <a:ln/>
+        </p:spPr>
+        <p:txBody>
+          <a:bodyPr wrap="square" lIns="0" tIns="0" rIns="0" bIns="0" rtlCol="0" anchor="ctr"/>
+          <a:lstStyle/>
+          <a:p>
+            <a:pPr algn="ctr" indent="0" marL="0">
+              <a:buNone/>
+            </a:pPr>
+            <a:r>
+              <a:rPr lang="en-US" sz="1500" b="1" dirty="0">
+                <a:solidFill>
+                  <a:srgbClr val="14213D"/>
+                </a:solidFill>
+                <a:latin typeface="Malgun Gothic" pitchFamily="34" charset="0"/>
+                <a:ea typeface="Malgun Gothic" pitchFamily="34" charset="-122"/>
+                <a:cs typeface="Malgun Gothic" pitchFamily="34" charset="-120"/>
+              </a:rPr>
+              <a:t>2</a:t>
+            </a:r>
+            <a:endParaRPr lang="en-US" sz="1500" dirty="0"/>
+          </a:p>
+        </p:txBody>
+      </p:sp>
+      <p:sp>
+        <p:nvSpPr>
+          <p:cNvPr id="11" name="Text 8"/>
+          <p:cNvSpPr txBox="1"/>
+          <p:nvPr/>
+        </p:nvSpPr>
+        <p:spPr>
+          <a:xfrm>
+            <a:off x="4472330" y="4160520"/>
+            <a:ext cx="3247034" cy="457200"/>
+          </a:xfrm>
+          <a:prstGeom prst="rect">
+            <a:avLst/>
+          </a:prstGeom>
+          <a:noFill/>
+          <a:ln/>
+        </p:spPr>
+        <p:txBody>
+          <a:bodyPr wrap="square" lIns="0" tIns="0" rIns="0" bIns="0" rtlCol="0" anchor="t"/>
+          <a:lstStyle/>
+          <a:p>
+            <a:pPr indent="0" marL="0">
+              <a:buNone/>
+            </a:pPr>
+            <a:r>
+              <a:rPr lang="en-US" sz="2000" b="1" dirty="0">
+                <a:solidFill>
+                  <a:srgbClr val="F5F7FC"/>
+                </a:solidFill>
+                <a:latin typeface="Malgun Gothic" pitchFamily="34" charset="0"/>
+                <a:ea typeface="Malgun Gothic" pitchFamily="34" charset="-122"/>
+                <a:cs typeface="Malgun Gothic" pitchFamily="34" charset="-120"/>
+              </a:rPr>
+              <a:t>AI 는 결과만 받아서</a:t>
+            </a:r>
+            <a:endParaRPr lang="en-US" sz="2000" dirty="0"/>
+          </a:p>
+        </p:txBody>
+      </p:sp>
+      <p:sp>
+        <p:nvSpPr>
+          <p:cNvPr id="12" name="Text 9"/>
+          <p:cNvSpPr txBox="1"/>
+          <p:nvPr/>
+        </p:nvSpPr>
+        <p:spPr>
+          <a:xfrm>
+            <a:off x="4472330" y="4663440"/>
+            <a:ext cx="3247034" cy="1005840"/>
+          </a:xfrm>
+          <a:prstGeom prst="rect">
+            <a:avLst/>
+          </a:prstGeom>
+          <a:noFill/>
+          <a:ln/>
+        </p:spPr>
+        <p:txBody>
+          <a:bodyPr wrap="square" lIns="0" tIns="0" rIns="0" bIns="0" rtlCol="0" anchor="t"/>
+          <a:lstStyle/>
+          <a:p>
+            <a:pPr indent="0" marL="0">
+              <a:lnSpc>
+                <a:spcPct val="130000"/>
+              </a:lnSpc>
+              <a:buNone/>
+            </a:pPr>
+            <a:r>
+              <a:rPr lang="en-US" sz="1500" dirty="0">
+                <a:solidFill>
+                  <a:srgbClr val="C9D1E0"/>
+                </a:solidFill>
+                <a:latin typeface="Malgun Gothic" pitchFamily="34" charset="0"/>
+                <a:ea typeface="Malgun Gothic" pitchFamily="34" charset="-122"/>
+                <a:cs typeface="Malgun Gothic" pitchFamily="34" charset="-120"/>
+              </a:rPr>
+              <a:t>계산된 결과를 해석할 뿐, 숫자를 다시 계산하지 않음</a:t>
+            </a:r>
+            <a:endParaRPr lang="en-US" sz="1500" dirty="0"/>
+          </a:p>
+        </p:txBody>
+      </p:sp>
+      <p:sp>
+        <p:nvSpPr>
+          <p:cNvPr id="13" name="Shape 10"/>
+          <p:cNvSpPr/>
+          <p:nvPr/>
+        </p:nvSpPr>
+        <p:spPr>
+          <a:xfrm>
+            <a:off x="8130845" y="3429000"/>
+            <a:ext cx="502920" cy="502920"/>
+          </a:xfrm>
+          <a:prstGeom prst="ellipse">
+            <a:avLst/>
+          </a:prstGeom>
+          <a:solidFill>
+            <a:srgbClr val="9DAAFF"/>
+          </a:solidFill>
+          <a:ln w="12700">
+            <a:solidFill>
+              <a:srgbClr val="9DAAFF"/>
+            </a:solidFill>
+            <a:prstDash val="solid"/>
+          </a:ln>
+        </p:spPr>
+      </p:sp>
+      <p:sp>
+        <p:nvSpPr>
+          <p:cNvPr id="14" name="Text 11"/>
+          <p:cNvSpPr txBox="1"/>
+          <p:nvPr/>
+        </p:nvSpPr>
+        <p:spPr>
+          <a:xfrm>
+            <a:off x="8130845" y="3429000"/>
+            <a:ext cx="502920" cy="502920"/>
+          </a:xfrm>
+          <a:prstGeom prst="rect">
+            <a:avLst/>
+          </a:prstGeom>
+          <a:noFill/>
+          <a:ln/>
+        </p:spPr>
+        <p:txBody>
+          <a:bodyPr wrap="square" lIns="0" tIns="0" rIns="0" bIns="0" rtlCol="0" anchor="ctr"/>
+          <a:lstStyle/>
+          <a:p>
+            <a:pPr algn="ctr" indent="0" marL="0">
+              <a:buNone/>
+            </a:pPr>
+            <a:r>
+              <a:rPr lang="en-US" sz="1500" b="1" dirty="0">
+                <a:solidFill>
+                  <a:srgbClr val="14213D"/>
+                </a:solidFill>
+                <a:latin typeface="Malgun Gothic" pitchFamily="34" charset="0"/>
+                <a:ea typeface="Malgun Gothic" pitchFamily="34" charset="-122"/>
+                <a:cs typeface="Malgun Gothic" pitchFamily="34" charset="-120"/>
+              </a:rPr>
+              <a:t>3</a:t>
+            </a:r>
+            <a:endParaRPr lang="en-US" sz="1500" dirty="0"/>
+          </a:p>
+        </p:txBody>
+      </p:sp>
+      <p:sp>
+        <p:nvSpPr>
+          <p:cNvPr id="15" name="Text 12"/>
+          <p:cNvSpPr txBox="1"/>
+          <p:nvPr/>
+        </p:nvSpPr>
+        <p:spPr>
+          <a:xfrm>
+            <a:off x="8130845" y="4160520"/>
+            <a:ext cx="3247034" cy="457200"/>
+          </a:xfrm>
+          <a:prstGeom prst="rect">
+            <a:avLst/>
+          </a:prstGeom>
+          <a:noFill/>
+          <a:ln/>
+        </p:spPr>
+        <p:txBody>
+          <a:bodyPr wrap="square" lIns="0" tIns="0" rIns="0" bIns="0" rtlCol="0" anchor="t"/>
+          <a:lstStyle/>
+          <a:p>
+            <a:pPr indent="0" marL="0">
+              <a:buNone/>
+            </a:pPr>
+            <a:r>
+              <a:rPr lang="en-US" sz="2000" b="1" dirty="0">
+                <a:solidFill>
+                  <a:srgbClr val="F5F7FC"/>
+                </a:solidFill>
+                <a:latin typeface="Malgun Gothic" pitchFamily="34" charset="0"/>
+                <a:ea typeface="Malgun Gothic" pitchFamily="34" charset="-122"/>
+                <a:cs typeface="Malgun Gothic" pitchFamily="34" charset="-120"/>
+              </a:rPr>
+              <a:t>사실과 추정을 나눠서</a:t>
+            </a:r>
+            <a:endParaRPr lang="en-US" sz="2000" dirty="0"/>
+          </a:p>
+        </p:txBody>
+      </p:sp>
+      <p:sp>
+        <p:nvSpPr>
+          <p:cNvPr id="16" name="Text 13"/>
+          <p:cNvSpPr txBox="1"/>
+          <p:nvPr/>
+        </p:nvSpPr>
+        <p:spPr>
+          <a:xfrm>
+            <a:off x="8130845" y="4663440"/>
+            <a:ext cx="3247034" cy="1005840"/>
+          </a:xfrm>
+          <a:prstGeom prst="rect">
+            <a:avLst/>
+          </a:prstGeom>
+          <a:noFill/>
+          <a:ln/>
+        </p:spPr>
+        <p:txBody>
+          <a:bodyPr wrap="square" lIns="0" tIns="0" rIns="0" bIns="0" rtlCol="0" anchor="t"/>
+          <a:lstStyle/>
+          <a:p>
+            <a:pPr indent="0" marL="0">
+              <a:lnSpc>
+                <a:spcPct val="130000"/>
+              </a:lnSpc>
+              <a:buNone/>
+            </a:pPr>
+            <a:r>
+              <a:rPr lang="en-US" sz="1500" dirty="0">
+                <a:solidFill>
+                  <a:srgbClr val="C9D1E0"/>
+                </a:solidFill>
+                <a:latin typeface="Malgun Gothic" pitchFamily="34" charset="0"/>
+                <a:ea typeface="Malgun Gothic" pitchFamily="34" charset="-122"/>
+                <a:cs typeface="Malgun Gothic" pitchFamily="34" charset="-120"/>
+              </a:rPr>
+              <a:t>확인된 사실 / 원인 후보 / 실행 제안 / 한계를 따로 보여 줌</a:t>
+            </a:r>
+            <a:endParaRPr lang="en-US" sz="1500" dirty="0"/>
+          </a:p>
+        </p:txBody>
+      </p:sp>
+      <p:sp>
+        <p:nvSpPr>
+          <p:cNvPr id="17" name="Text 14"/>
+          <p:cNvSpPr txBox="1"/>
+          <p:nvPr/>
+        </p:nvSpPr>
+        <p:spPr>
+          <a:xfrm>
+            <a:off x="813816" y="6327648"/>
+            <a:ext cx="10564063" cy="274320"/>
+          </a:xfrm>
+          <a:prstGeom prst="rect">
+            <a:avLst/>
+          </a:prstGeom>
+          <a:noFill/>
+          <a:ln/>
+        </p:spPr>
+        <p:txBody>
+          <a:bodyPr wrap="square" lIns="0" tIns="0" rIns="0" bIns="0" rtlCol="0" anchor="t"/>
+          <a:lstStyle/>
+          <a:p>
+            <a:pPr indent="0" marL="0">
+              <a:buNone/>
+            </a:pPr>
+            <a:r>
+              <a:rPr lang="en-US" sz="1100" dirty="0">
+                <a:solidFill>
+                  <a:srgbClr val="C9D1E0"/>
+                </a:solidFill>
+                <a:latin typeface="Malgun Gothic" pitchFamily="34" charset="0"/>
+                <a:ea typeface="Malgun Gothic" pitchFamily="34" charset="-122"/>
+                <a:cs typeface="Malgun Gothic" pitchFamily="34" charset="-120"/>
+              </a:rPr>
+              <a:t>M1팀 · 매출분석 툴 · 03</a:t>
+            </a:r>
+            <a:endParaRPr lang="en-US" sz="1100" dirty="0"/>
+          </a:p>
+        </p:txBody>
+      </p:sp>
+      <p:pic>
+        <p:nvPicPr>
+          <p:cNvPr id="18" name="Picture 17" descr="s3_light_bulb.png"/>
+          <p:cNvPicPr>
+            <a:picLocks noChangeAspect="1"/>
+          </p:cNvPicPr>
+          <p:nvPr/>
+        </p:nvPicPr>
+        <p:blipFill>
+          <a:blip r:embed="rId3"/>
+          <a:stretch>
+            <a:fillRect/>
+          </a:stretch>
+        </p:blipFill>
+        <p:spPr>
+          <a:xfrm>
+            <a:off x="10774680" y="274320"/>
+            <a:ext cx="603504" cy="603504"/>
+          </a:xfrm>
+          <a:prstGeom prst="rect">
+            <a:avLst/>
+          </a:prstGeom>
+        </p:spPr>
+      </p:pic>
+    </p:spTree>
+  </p:cSld>
+  <p:clrMapOvr>
+    <a:masterClrMapping/>
+  </p:clrMapOvr>
+</p:sld>
+</file>
+
+<file path=ppt/slides/slide4.xml><?xml version="1.0" encoding="utf-8"?>
+<p:sld xmlns:a="http://schemas.openxmlformats.org/drawingml/2006/main" xmlns:r="http://schemas.openxmlformats.org/officeDocument/2006/relationships" xmlns:p="http://schemas.openxmlformats.org/presentationml/2006/main">
+  <p:cSld name="Slide 4">
     <p:bg>
       <p:bgPr>
         <a:solidFill>
-          <a:srgbClr val="F7F6F2"/>
+          <a:srgbClr val="F5F7FC"/>
         </a:solidFill>
       </p:bgPr>
     </p:bg>
@@ -6534,1487 +8637,7 @@
             <a:r>
               <a:rPr lang="en-US" sz="1500" b="1" dirty="0">
                 <a:solidFill>
-                  <a:srgbClr val="2F5FD0"/>
-                </a:solidFill>
-                <a:latin typeface="Malgun Gothic" pitchFamily="34" charset="0"/>
-                <a:ea typeface="Malgun Gothic" pitchFamily="34" charset="-122"/>
-                <a:cs typeface="Malgun Gothic" pitchFamily="34" charset="-120"/>
-              </a:rPr>
-              <a:t>문제</a:t>
-            </a:r>
-            <a:endParaRPr lang="en-US" sz="1500" dirty="0"/>
-          </a:p>
-        </p:txBody>
-      </p:sp>
-      <p:sp>
-        <p:nvSpPr>
-          <p:cNvPr id="4" name="Text 1"/>
-          <p:cNvSpPr txBox="1"/>
-          <p:nvPr/>
-        </p:nvSpPr>
-        <p:spPr>
-          <a:xfrm>
-            <a:off x="813816" y="932688"/>
-            <a:ext cx="10564063" cy="960120"/>
-          </a:xfrm>
-          <a:prstGeom prst="rect">
-            <a:avLst/>
-          </a:prstGeom>
-          <a:noFill/>
-          <a:ln/>
-        </p:spPr>
-        <p:txBody>
-          <a:bodyPr wrap="square" lIns="0" tIns="0" rIns="0" bIns="0" rtlCol="0" anchor="t"/>
-          <a:lstStyle/>
-          <a:p>
-            <a:pPr indent="0" marL="0">
-              <a:buNone/>
-            </a:pPr>
-            <a:r>
-              <a:rPr lang="en-US" sz="3200" b="1" dirty="0">
-                <a:solidFill>
-                  <a:srgbClr val="14213D"/>
-                </a:solidFill>
-                <a:latin typeface="Malgun Gothic" pitchFamily="34" charset="0"/>
-                <a:ea typeface="Malgun Gothic" pitchFamily="34" charset="-122"/>
-                <a:cs typeface="Malgun Gothic" pitchFamily="34" charset="-120"/>
-              </a:rPr>
-              <a:t>매출이 줄었을 때, 어디서 왜 줄었는지 바로 알기 어렵다</a:t>
-            </a:r>
-            <a:endParaRPr lang="en-US" sz="3200" dirty="0"/>
-          </a:p>
-        </p:txBody>
-      </p:sp>
-      <p:sp>
-        <p:nvSpPr>
-          <p:cNvPr id="5" name="Shape 2"/>
-          <p:cNvSpPr/>
-          <p:nvPr/>
-        </p:nvSpPr>
-        <p:spPr>
-          <a:xfrm>
-            <a:off x="813816" y="2286000"/>
-            <a:ext cx="3307994" cy="3429000"/>
-          </a:xfrm>
-          <a:prstGeom prst="roundRect">
-            <a:avLst>
-              <a:gd name="adj" fmla="val 3317"/>
-            </a:avLst>
-          </a:prstGeom>
-          <a:solidFill>
-            <a:srgbClr val="FFFFFF"/>
-          </a:solidFill>
-          <a:ln w="12700">
-            <a:solidFill>
-              <a:srgbClr val="E1E4EA"/>
-            </a:solidFill>
-            <a:prstDash val="solid"/>
-          </a:ln>
-        </p:spPr>
-      </p:sp>
-      <p:sp>
-        <p:nvSpPr>
-          <p:cNvPr id="6" name="Shape 3"/>
-          <p:cNvSpPr/>
-          <p:nvPr/>
-        </p:nvSpPr>
-        <p:spPr>
-          <a:xfrm>
-            <a:off x="1133856" y="2606040"/>
-            <a:ext cx="502920" cy="502920"/>
-          </a:xfrm>
-          <a:prstGeom prst="ellipse">
-            <a:avLst/>
-          </a:prstGeom>
-          <a:solidFill>
-            <a:srgbClr val="2F5FD0"/>
-          </a:solidFill>
-          <a:ln w="12700">
-            <a:solidFill>
-              <a:srgbClr val="2F5FD0"/>
-            </a:solidFill>
-            <a:prstDash val="solid"/>
-          </a:ln>
-        </p:spPr>
-      </p:sp>
-      <p:sp>
-        <p:nvSpPr>
-          <p:cNvPr id="7" name="Text 4"/>
-          <p:cNvSpPr txBox="1"/>
-          <p:nvPr/>
-        </p:nvSpPr>
-        <p:spPr>
-          <a:xfrm>
-            <a:off x="1133856" y="2606040"/>
-            <a:ext cx="502920" cy="502920"/>
-          </a:xfrm>
-          <a:prstGeom prst="rect">
-            <a:avLst/>
-          </a:prstGeom>
-          <a:noFill/>
-          <a:ln/>
-        </p:spPr>
-        <p:txBody>
-          <a:bodyPr wrap="square" lIns="0" tIns="0" rIns="0" bIns="0" rtlCol="0" anchor="ctr"/>
-          <a:lstStyle/>
-          <a:p>
-            <a:pPr algn="ctr" indent="0" marL="0">
-              <a:buNone/>
-            </a:pPr>
-            <a:r>
-              <a:rPr lang="en-US" sz="1500" b="1" dirty="0">
-                <a:solidFill>
-                  <a:srgbClr val="FFFFFF"/>
-                </a:solidFill>
-                <a:latin typeface="Malgun Gothic" pitchFamily="34" charset="0"/>
-                <a:ea typeface="Malgun Gothic" pitchFamily="34" charset="-122"/>
-                <a:cs typeface="Malgun Gothic" pitchFamily="34" charset="-120"/>
-              </a:rPr>
-              <a:t>1</a:t>
-            </a:r>
-            <a:endParaRPr lang="en-US" sz="1500" dirty="0"/>
-          </a:p>
-        </p:txBody>
-      </p:sp>
-      <p:sp>
-        <p:nvSpPr>
-          <p:cNvPr id="8" name="Text 5"/>
-          <p:cNvSpPr txBox="1"/>
-          <p:nvPr/>
-        </p:nvSpPr>
-        <p:spPr>
-          <a:xfrm>
-            <a:off x="1133856" y="3291840"/>
-            <a:ext cx="2667914" cy="822960"/>
-          </a:xfrm>
-          <a:prstGeom prst="rect">
-            <a:avLst/>
-          </a:prstGeom>
-          <a:noFill/>
-          <a:ln/>
-        </p:spPr>
-        <p:txBody>
-          <a:bodyPr wrap="square" lIns="0" tIns="0" rIns="0" bIns="0" rtlCol="0" anchor="t"/>
-          <a:lstStyle/>
-          <a:p>
-            <a:pPr indent="0" marL="0">
-              <a:buNone/>
-            </a:pPr>
-            <a:r>
-              <a:rPr lang="en-US" sz="2000" b="1" dirty="0">
-                <a:solidFill>
-                  <a:srgbClr val="14213D"/>
-                </a:solidFill>
-                <a:latin typeface="Malgun Gothic" pitchFamily="34" charset="0"/>
-                <a:ea typeface="Malgun Gothic" pitchFamily="34" charset="-122"/>
-                <a:cs typeface="Malgun Gothic" pitchFamily="34" charset="-120"/>
-              </a:rPr>
-              <a:t>채널 · 제품이</a:t>
-            </a:r>
-            <a:endParaRPr lang="en-US" sz="2000" dirty="0"/>
-          </a:p>
-          <a:p>
-            <a:pPr indent="0" marL="0">
-              <a:buNone/>
-            </a:pPr>
-            <a:r>
-              <a:rPr lang="en-US" sz="2000" b="1" dirty="0">
-                <a:solidFill>
-                  <a:srgbClr val="14213D"/>
-                </a:solidFill>
-                <a:latin typeface="Malgun Gothic" pitchFamily="34" charset="0"/>
-                <a:ea typeface="Malgun Gothic" pitchFamily="34" charset="-122"/>
-                <a:cs typeface="Malgun Gothic" pitchFamily="34" charset="-120"/>
-              </a:rPr>
-              <a:t>섞여 있다</a:t>
-            </a:r>
-            <a:endParaRPr lang="en-US" sz="2000" dirty="0"/>
-          </a:p>
-        </p:txBody>
-      </p:sp>
-      <p:sp>
-        <p:nvSpPr>
-          <p:cNvPr id="9" name="Text 6"/>
-          <p:cNvSpPr txBox="1"/>
-          <p:nvPr/>
-        </p:nvSpPr>
-        <p:spPr>
-          <a:xfrm>
-            <a:off x="1133856" y="4160520"/>
-            <a:ext cx="2667914" cy="1417320"/>
-          </a:xfrm>
-          <a:prstGeom prst="rect">
-            <a:avLst/>
-          </a:prstGeom>
-          <a:noFill/>
-          <a:ln/>
-        </p:spPr>
-        <p:txBody>
-          <a:bodyPr wrap="square" lIns="0" tIns="0" rIns="0" bIns="0" rtlCol="0" anchor="t"/>
-          <a:lstStyle/>
-          <a:p>
-            <a:pPr indent="0" marL="0">
-              <a:lnSpc>
-                <a:spcPct val="130000"/>
-              </a:lnSpc>
-              <a:buNone/>
-            </a:pPr>
-            <a:r>
-              <a:rPr lang="en-US" sz="1500" dirty="0">
-                <a:solidFill>
-                  <a:srgbClr val="4A5568"/>
-                </a:solidFill>
-                <a:latin typeface="Malgun Gothic" pitchFamily="34" charset="0"/>
-                <a:ea typeface="Malgun Gothic" pitchFamily="34" charset="-122"/>
-                <a:cs typeface="Malgun Gothic" pitchFamily="34" charset="-120"/>
-              </a:rPr>
-              <a:t>쿠팡 · 네이버스토어 · 자사몰,</a:t>
-            </a:r>
-            <a:endParaRPr lang="en-US" sz="1500" dirty="0"/>
-          </a:p>
-          <a:p>
-            <a:pPr indent="0" marL="0">
-              <a:lnSpc>
-                <a:spcPct val="130000"/>
-              </a:lnSpc>
-              <a:buNone/>
-            </a:pPr>
-            <a:r>
-              <a:rPr lang="en-US" sz="1500" dirty="0">
-                <a:solidFill>
-                  <a:srgbClr val="4A5568"/>
-                </a:solidFill>
-                <a:latin typeface="Malgun Gothic" pitchFamily="34" charset="0"/>
-                <a:ea typeface="Malgun Gothic" pitchFamily="34" charset="-122"/>
-                <a:cs typeface="Malgun Gothic" pitchFamily="34" charset="-120"/>
-              </a:rPr>
-              <a:t>제품 20종의 숫자가 한 파일에</a:t>
-            </a:r>
-            <a:endParaRPr lang="en-US" sz="1500" dirty="0"/>
-          </a:p>
-          <a:p>
-            <a:pPr indent="0" marL="0">
-              <a:lnSpc>
-                <a:spcPct val="130000"/>
-              </a:lnSpc>
-              <a:buNone/>
-            </a:pPr>
-            <a:r>
-              <a:rPr lang="en-US" sz="1500" dirty="0">
-                <a:solidFill>
-                  <a:srgbClr val="4A5568"/>
-                </a:solidFill>
-                <a:latin typeface="Malgun Gothic" pitchFamily="34" charset="0"/>
-                <a:ea typeface="Malgun Gothic" pitchFamily="34" charset="-122"/>
-                <a:cs typeface="Malgun Gothic" pitchFamily="34" charset="-120"/>
-              </a:rPr>
-              <a:t>섞여 있어 어느 쪽이 줄었는지</a:t>
-            </a:r>
-            <a:endParaRPr lang="en-US" sz="1500" dirty="0"/>
-          </a:p>
-          <a:p>
-            <a:pPr indent="0" marL="0">
-              <a:lnSpc>
-                <a:spcPct val="130000"/>
-              </a:lnSpc>
-              <a:buNone/>
-            </a:pPr>
-            <a:r>
-              <a:rPr lang="en-US" sz="1500" dirty="0">
-                <a:solidFill>
-                  <a:srgbClr val="4A5568"/>
-                </a:solidFill>
-                <a:latin typeface="Malgun Gothic" pitchFamily="34" charset="0"/>
-                <a:ea typeface="Malgun Gothic" pitchFamily="34" charset="-122"/>
-                <a:cs typeface="Malgun Gothic" pitchFamily="34" charset="-120"/>
-              </a:rPr>
-              <a:t>눈으로 찾기 어렵다</a:t>
-            </a:r>
-            <a:endParaRPr lang="en-US" sz="1500" dirty="0"/>
-          </a:p>
-        </p:txBody>
-      </p:sp>
-      <p:sp>
-        <p:nvSpPr>
-          <p:cNvPr id="10" name="Shape 7"/>
-          <p:cNvSpPr/>
-          <p:nvPr/>
-        </p:nvSpPr>
-        <p:spPr>
-          <a:xfrm>
-            <a:off x="4441850" y="2286000"/>
-            <a:ext cx="3307994" cy="3429000"/>
-          </a:xfrm>
-          <a:prstGeom prst="roundRect">
-            <a:avLst>
-              <a:gd name="adj" fmla="val 3317"/>
-            </a:avLst>
-          </a:prstGeom>
-          <a:solidFill>
-            <a:srgbClr val="FFFFFF"/>
-          </a:solidFill>
-          <a:ln w="12700">
-            <a:solidFill>
-              <a:srgbClr val="E1E4EA"/>
-            </a:solidFill>
-            <a:prstDash val="solid"/>
-          </a:ln>
-        </p:spPr>
-      </p:sp>
-      <p:sp>
-        <p:nvSpPr>
-          <p:cNvPr id="11" name="Shape 8"/>
-          <p:cNvSpPr/>
-          <p:nvPr/>
-        </p:nvSpPr>
-        <p:spPr>
-          <a:xfrm>
-            <a:off x="4761890" y="2606040"/>
-            <a:ext cx="502920" cy="502920"/>
-          </a:xfrm>
-          <a:prstGeom prst="ellipse">
-            <a:avLst/>
-          </a:prstGeom>
-          <a:solidFill>
-            <a:srgbClr val="2F5FD0"/>
-          </a:solidFill>
-          <a:ln w="12700">
-            <a:solidFill>
-              <a:srgbClr val="2F5FD0"/>
-            </a:solidFill>
-            <a:prstDash val="solid"/>
-          </a:ln>
-        </p:spPr>
-      </p:sp>
-      <p:sp>
-        <p:nvSpPr>
-          <p:cNvPr id="12" name="Text 9"/>
-          <p:cNvSpPr txBox="1"/>
-          <p:nvPr/>
-        </p:nvSpPr>
-        <p:spPr>
-          <a:xfrm>
-            <a:off x="4761890" y="2606040"/>
-            <a:ext cx="502920" cy="502920"/>
-          </a:xfrm>
-          <a:prstGeom prst="rect">
-            <a:avLst/>
-          </a:prstGeom>
-          <a:noFill/>
-          <a:ln/>
-        </p:spPr>
-        <p:txBody>
-          <a:bodyPr wrap="square" lIns="0" tIns="0" rIns="0" bIns="0" rtlCol="0" anchor="ctr"/>
-          <a:lstStyle/>
-          <a:p>
-            <a:pPr algn="ctr" indent="0" marL="0">
-              <a:buNone/>
-            </a:pPr>
-            <a:r>
-              <a:rPr lang="en-US" sz="1500" b="1" dirty="0">
-                <a:solidFill>
-                  <a:srgbClr val="FFFFFF"/>
-                </a:solidFill>
-                <a:latin typeface="Malgun Gothic" pitchFamily="34" charset="0"/>
-                <a:ea typeface="Malgun Gothic" pitchFamily="34" charset="-122"/>
-                <a:cs typeface="Malgun Gothic" pitchFamily="34" charset="-120"/>
-              </a:rPr>
-              <a:t>2</a:t>
-            </a:r>
-            <a:endParaRPr lang="en-US" sz="1500" dirty="0"/>
-          </a:p>
-        </p:txBody>
-      </p:sp>
-      <p:sp>
-        <p:nvSpPr>
-          <p:cNvPr id="13" name="Text 10"/>
-          <p:cNvSpPr txBox="1"/>
-          <p:nvPr/>
-        </p:nvSpPr>
-        <p:spPr>
-          <a:xfrm>
-            <a:off x="4761890" y="3291840"/>
-            <a:ext cx="2667914" cy="822960"/>
-          </a:xfrm>
-          <a:prstGeom prst="rect">
-            <a:avLst/>
-          </a:prstGeom>
-          <a:noFill/>
-          <a:ln/>
-        </p:spPr>
-        <p:txBody>
-          <a:bodyPr wrap="square" lIns="0" tIns="0" rIns="0" bIns="0" rtlCol="0" anchor="t"/>
-          <a:lstStyle/>
-          <a:p>
-            <a:pPr indent="0" marL="0">
-              <a:buNone/>
-            </a:pPr>
-            <a:r>
-              <a:rPr lang="en-US" sz="2000" b="1" dirty="0">
-                <a:solidFill>
-                  <a:srgbClr val="14213D"/>
-                </a:solidFill>
-                <a:latin typeface="Malgun Gothic" pitchFamily="34" charset="0"/>
-                <a:ea typeface="Malgun Gothic" pitchFamily="34" charset="-122"/>
-                <a:cs typeface="Malgun Gothic" pitchFamily="34" charset="-120"/>
-              </a:rPr>
-              <a:t>지표를</a:t>
-            </a:r>
-            <a:endParaRPr lang="en-US" sz="2000" dirty="0"/>
-          </a:p>
-          <a:p>
-            <a:pPr indent="0" marL="0">
-              <a:buNone/>
-            </a:pPr>
-            <a:r>
-              <a:rPr lang="en-US" sz="2000" b="1" dirty="0">
-                <a:solidFill>
-                  <a:srgbClr val="14213D"/>
-                </a:solidFill>
-                <a:latin typeface="Malgun Gothic" pitchFamily="34" charset="0"/>
-                <a:ea typeface="Malgun Gothic" pitchFamily="34" charset="-122"/>
-                <a:cs typeface="Malgun Gothic" pitchFamily="34" charset="-120"/>
-              </a:rPr>
-              <a:t>이어 봐야 한다</a:t>
-            </a:r>
-            <a:endParaRPr lang="en-US" sz="2000" dirty="0"/>
-          </a:p>
-        </p:txBody>
-      </p:sp>
-      <p:sp>
-        <p:nvSpPr>
-          <p:cNvPr id="14" name="Text 11"/>
-          <p:cNvSpPr txBox="1"/>
-          <p:nvPr/>
-        </p:nvSpPr>
-        <p:spPr>
-          <a:xfrm>
-            <a:off x="4761890" y="4160520"/>
-            <a:ext cx="2667914" cy="1417320"/>
-          </a:xfrm>
-          <a:prstGeom prst="rect">
-            <a:avLst/>
-          </a:prstGeom>
-          <a:noFill/>
-          <a:ln/>
-        </p:spPr>
-        <p:txBody>
-          <a:bodyPr wrap="square" lIns="0" tIns="0" rIns="0" bIns="0" rtlCol="0" anchor="t"/>
-          <a:lstStyle/>
-          <a:p>
-            <a:pPr indent="0" marL="0">
-              <a:lnSpc>
-                <a:spcPct val="130000"/>
-              </a:lnSpc>
-              <a:buNone/>
-            </a:pPr>
-            <a:r>
-              <a:rPr lang="en-US" sz="1500" dirty="0">
-                <a:solidFill>
-                  <a:srgbClr val="4A5568"/>
-                </a:solidFill>
-                <a:latin typeface="Malgun Gothic" pitchFamily="34" charset="0"/>
-                <a:ea typeface="Malgun Gothic" pitchFamily="34" charset="-122"/>
-                <a:cs typeface="Malgun Gothic" pitchFamily="34" charset="-120"/>
-              </a:rPr>
-              <a:t>광고비 · 방문 · 구매전환율 ·</a:t>
-            </a:r>
-            <a:endParaRPr lang="en-US" sz="1500" dirty="0"/>
-          </a:p>
-          <a:p>
-            <a:pPr indent="0" marL="0">
-              <a:lnSpc>
-                <a:spcPct val="130000"/>
-              </a:lnSpc>
-              <a:buNone/>
-            </a:pPr>
-            <a:r>
-              <a:rPr lang="en-US" sz="1500" dirty="0">
-                <a:solidFill>
-                  <a:srgbClr val="4A5568"/>
-                </a:solidFill>
-                <a:latin typeface="Malgun Gothic" pitchFamily="34" charset="0"/>
-                <a:ea typeface="Malgun Gothic" pitchFamily="34" charset="-122"/>
-                <a:cs typeface="Malgun Gothic" pitchFamily="34" charset="-120"/>
-              </a:rPr>
-              <a:t>ROAS 를 따로 보면 원인이</a:t>
-            </a:r>
-            <a:endParaRPr lang="en-US" sz="1500" dirty="0"/>
-          </a:p>
-          <a:p>
-            <a:pPr indent="0" marL="0">
-              <a:lnSpc>
-                <a:spcPct val="130000"/>
-              </a:lnSpc>
-              <a:buNone/>
-            </a:pPr>
-            <a:r>
-              <a:rPr lang="en-US" sz="1500" dirty="0">
-                <a:solidFill>
-                  <a:srgbClr val="4A5568"/>
-                </a:solidFill>
-                <a:latin typeface="Malgun Gothic" pitchFamily="34" charset="0"/>
-                <a:ea typeface="Malgun Gothic" pitchFamily="34" charset="-122"/>
-                <a:cs typeface="Malgun Gothic" pitchFamily="34" charset="-120"/>
-              </a:rPr>
-              <a:t>안 보인다. 함께 이어 봐야</a:t>
-            </a:r>
-            <a:endParaRPr lang="en-US" sz="1500" dirty="0"/>
-          </a:p>
-          <a:p>
-            <a:pPr indent="0" marL="0">
-              <a:lnSpc>
-                <a:spcPct val="130000"/>
-              </a:lnSpc>
-              <a:buNone/>
-            </a:pPr>
-            <a:r>
-              <a:rPr lang="en-US" sz="1500" dirty="0">
-                <a:solidFill>
-                  <a:srgbClr val="4A5568"/>
-                </a:solidFill>
-                <a:latin typeface="Malgun Gothic" pitchFamily="34" charset="0"/>
-                <a:ea typeface="Malgun Gothic" pitchFamily="34" charset="-122"/>
-                <a:cs typeface="Malgun Gothic" pitchFamily="34" charset="-120"/>
-              </a:rPr>
-              <a:t>한다</a:t>
-            </a:r>
-            <a:endParaRPr lang="en-US" sz="1500" dirty="0"/>
-          </a:p>
-        </p:txBody>
-      </p:sp>
-      <p:sp>
-        <p:nvSpPr>
-          <p:cNvPr id="15" name="Shape 12"/>
-          <p:cNvSpPr/>
-          <p:nvPr/>
-        </p:nvSpPr>
-        <p:spPr>
-          <a:xfrm>
-            <a:off x="8069885" y="2286000"/>
-            <a:ext cx="3307994" cy="3429000"/>
-          </a:xfrm>
-          <a:prstGeom prst="roundRect">
-            <a:avLst>
-              <a:gd name="adj" fmla="val 3317"/>
-            </a:avLst>
-          </a:prstGeom>
-          <a:solidFill>
-            <a:srgbClr val="FFFFFF"/>
-          </a:solidFill>
-          <a:ln w="12700">
-            <a:solidFill>
-              <a:srgbClr val="E1E4EA"/>
-            </a:solidFill>
-            <a:prstDash val="solid"/>
-          </a:ln>
-        </p:spPr>
-      </p:sp>
-      <p:sp>
-        <p:nvSpPr>
-          <p:cNvPr id="16" name="Shape 13"/>
-          <p:cNvSpPr/>
-          <p:nvPr/>
-        </p:nvSpPr>
-        <p:spPr>
-          <a:xfrm>
-            <a:off x="8389925" y="2606040"/>
-            <a:ext cx="502920" cy="502920"/>
-          </a:xfrm>
-          <a:prstGeom prst="ellipse">
-            <a:avLst/>
-          </a:prstGeom>
-          <a:solidFill>
-            <a:srgbClr val="2F5FD0"/>
-          </a:solidFill>
-          <a:ln w="12700">
-            <a:solidFill>
-              <a:srgbClr val="2F5FD0"/>
-            </a:solidFill>
-            <a:prstDash val="solid"/>
-          </a:ln>
-        </p:spPr>
-      </p:sp>
-      <p:sp>
-        <p:nvSpPr>
-          <p:cNvPr id="17" name="Text 14"/>
-          <p:cNvSpPr txBox="1"/>
-          <p:nvPr/>
-        </p:nvSpPr>
-        <p:spPr>
-          <a:xfrm>
-            <a:off x="8389925" y="2606040"/>
-            <a:ext cx="502920" cy="502920"/>
-          </a:xfrm>
-          <a:prstGeom prst="rect">
-            <a:avLst/>
-          </a:prstGeom>
-          <a:noFill/>
-          <a:ln/>
-        </p:spPr>
-        <p:txBody>
-          <a:bodyPr wrap="square" lIns="0" tIns="0" rIns="0" bIns="0" rtlCol="0" anchor="ctr"/>
-          <a:lstStyle/>
-          <a:p>
-            <a:pPr algn="ctr" indent="0" marL="0">
-              <a:buNone/>
-            </a:pPr>
-            <a:r>
-              <a:rPr lang="en-US" sz="1500" b="1" dirty="0">
-                <a:solidFill>
-                  <a:srgbClr val="FFFFFF"/>
-                </a:solidFill>
-                <a:latin typeface="Malgun Gothic" pitchFamily="34" charset="0"/>
-                <a:ea typeface="Malgun Gothic" pitchFamily="34" charset="-122"/>
-                <a:cs typeface="Malgun Gothic" pitchFamily="34" charset="-120"/>
-              </a:rPr>
-              <a:t>3</a:t>
-            </a:r>
-            <a:endParaRPr lang="en-US" sz="1500" dirty="0"/>
-          </a:p>
-        </p:txBody>
-      </p:sp>
-      <p:sp>
-        <p:nvSpPr>
-          <p:cNvPr id="18" name="Text 15"/>
-          <p:cNvSpPr txBox="1"/>
-          <p:nvPr/>
-        </p:nvSpPr>
-        <p:spPr>
-          <a:xfrm>
-            <a:off x="8389925" y="3291840"/>
-            <a:ext cx="2667914" cy="822960"/>
-          </a:xfrm>
-          <a:prstGeom prst="rect">
-            <a:avLst/>
-          </a:prstGeom>
-          <a:noFill/>
-          <a:ln/>
-        </p:spPr>
-        <p:txBody>
-          <a:bodyPr wrap="square" lIns="0" tIns="0" rIns="0" bIns="0" rtlCol="0" anchor="t"/>
-          <a:lstStyle/>
-          <a:p>
-            <a:pPr indent="0" marL="0">
-              <a:buNone/>
-            </a:pPr>
-            <a:r>
-              <a:rPr lang="en-US" sz="2000" b="1" dirty="0">
-                <a:solidFill>
-                  <a:srgbClr val="14213D"/>
-                </a:solidFill>
-                <a:latin typeface="Malgun Gothic" pitchFamily="34" charset="0"/>
-                <a:ea typeface="Malgun Gothic" pitchFamily="34" charset="-122"/>
-                <a:cs typeface="Malgun Gothic" pitchFamily="34" charset="-120"/>
-              </a:rPr>
-              <a:t>AI 에 계산을 맡기면</a:t>
-            </a:r>
-            <a:endParaRPr lang="en-US" sz="2000" dirty="0"/>
-          </a:p>
-          <a:p>
-            <a:pPr indent="0" marL="0">
-              <a:buNone/>
-            </a:pPr>
-            <a:r>
-              <a:rPr lang="en-US" sz="2000" b="1" dirty="0">
-                <a:solidFill>
-                  <a:srgbClr val="14213D"/>
-                </a:solidFill>
-                <a:latin typeface="Malgun Gothic" pitchFamily="34" charset="0"/>
-                <a:ea typeface="Malgun Gothic" pitchFamily="34" charset="-122"/>
-                <a:cs typeface="Malgun Gothic" pitchFamily="34" charset="-120"/>
-              </a:rPr>
-              <a:t>위험하다</a:t>
-            </a:r>
-            <a:endParaRPr lang="en-US" sz="2000" dirty="0"/>
-          </a:p>
-        </p:txBody>
-      </p:sp>
-      <p:sp>
-        <p:nvSpPr>
-          <p:cNvPr id="19" name="Text 16"/>
-          <p:cNvSpPr txBox="1"/>
-          <p:nvPr/>
-        </p:nvSpPr>
-        <p:spPr>
-          <a:xfrm>
-            <a:off x="8389925" y="4160520"/>
-            <a:ext cx="2667914" cy="1417320"/>
-          </a:xfrm>
-          <a:prstGeom prst="rect">
-            <a:avLst/>
-          </a:prstGeom>
-          <a:noFill/>
-          <a:ln/>
-        </p:spPr>
-        <p:txBody>
-          <a:bodyPr wrap="square" lIns="0" tIns="0" rIns="0" bIns="0" rtlCol="0" anchor="t"/>
-          <a:lstStyle/>
-          <a:p>
-            <a:pPr indent="0" marL="0">
-              <a:lnSpc>
-                <a:spcPct val="130000"/>
-              </a:lnSpc>
-              <a:buNone/>
-            </a:pPr>
-            <a:r>
-              <a:rPr lang="en-US" sz="1500" dirty="0">
-                <a:solidFill>
-                  <a:srgbClr val="4A5568"/>
-                </a:solidFill>
-                <a:latin typeface="Malgun Gothic" pitchFamily="34" charset="0"/>
-                <a:ea typeface="Malgun Gothic" pitchFamily="34" charset="-122"/>
-                <a:cs typeface="Malgun Gothic" pitchFamily="34" charset="-120"/>
-              </a:rPr>
-              <a:t>숫자를 AI 가 직접 계산하면</a:t>
-            </a:r>
-            <a:endParaRPr lang="en-US" sz="1500" dirty="0"/>
-          </a:p>
-          <a:p>
-            <a:pPr indent="0" marL="0">
-              <a:lnSpc>
-                <a:spcPct val="130000"/>
-              </a:lnSpc>
-              <a:buNone/>
-            </a:pPr>
-            <a:r>
-              <a:rPr lang="en-US" sz="1500" dirty="0">
-                <a:solidFill>
-                  <a:srgbClr val="4A5568"/>
-                </a:solidFill>
-                <a:latin typeface="Malgun Gothic" pitchFamily="34" charset="0"/>
-                <a:ea typeface="Malgun Gothic" pitchFamily="34" charset="-122"/>
-                <a:cs typeface="Malgun Gothic" pitchFamily="34" charset="-120"/>
-              </a:rPr>
-              <a:t>틀리거나 지어낼 수 있다.</a:t>
-            </a:r>
-            <a:endParaRPr lang="en-US" sz="1500" dirty="0"/>
-          </a:p>
-          <a:p>
-            <a:pPr indent="0" marL="0">
-              <a:lnSpc>
-                <a:spcPct val="130000"/>
-              </a:lnSpc>
-              <a:buNone/>
-            </a:pPr>
-            <a:r>
-              <a:rPr lang="en-US" sz="1500" dirty="0">
-                <a:solidFill>
-                  <a:srgbClr val="4A5568"/>
-                </a:solidFill>
-                <a:latin typeface="Malgun Gothic" pitchFamily="34" charset="0"/>
-                <a:ea typeface="Malgun Gothic" pitchFamily="34" charset="-122"/>
-                <a:cs typeface="Malgun Gothic" pitchFamily="34" charset="-120"/>
-              </a:rPr>
-              <a:t>같은 입력에 같은 숫자가</a:t>
-            </a:r>
-            <a:endParaRPr lang="en-US" sz="1500" dirty="0"/>
-          </a:p>
-          <a:p>
-            <a:pPr indent="0" marL="0">
-              <a:lnSpc>
-                <a:spcPct val="130000"/>
-              </a:lnSpc>
-              <a:buNone/>
-            </a:pPr>
-            <a:r>
-              <a:rPr lang="en-US" sz="1500" dirty="0">
-                <a:solidFill>
-                  <a:srgbClr val="4A5568"/>
-                </a:solidFill>
-                <a:latin typeface="Malgun Gothic" pitchFamily="34" charset="0"/>
-                <a:ea typeface="Malgun Gothic" pitchFamily="34" charset="-122"/>
-                <a:cs typeface="Malgun Gothic" pitchFamily="34" charset="-120"/>
-              </a:rPr>
-              <a:t>나와야 한다</a:t>
-            </a:r>
-            <a:endParaRPr lang="en-US" sz="1500" dirty="0"/>
-          </a:p>
-        </p:txBody>
-      </p:sp>
-      <p:sp>
-        <p:nvSpPr>
-          <p:cNvPr id="20" name="Text 17"/>
-          <p:cNvSpPr txBox="1"/>
-          <p:nvPr/>
-        </p:nvSpPr>
-        <p:spPr>
-          <a:xfrm>
-            <a:off x="813816" y="6327648"/>
-            <a:ext cx="10564063" cy="274320"/>
-          </a:xfrm>
-          <a:prstGeom prst="rect">
-            <a:avLst/>
-          </a:prstGeom>
-          <a:noFill/>
-          <a:ln/>
-        </p:spPr>
-        <p:txBody>
-          <a:bodyPr wrap="square" lIns="0" tIns="0" rIns="0" bIns="0" rtlCol="0" anchor="t"/>
-          <a:lstStyle/>
-          <a:p>
-            <a:pPr indent="0" marL="0">
-              <a:buNone/>
-            </a:pPr>
-            <a:r>
-              <a:rPr lang="en-US" sz="1100" dirty="0">
-                <a:solidFill>
-                  <a:srgbClr val="8A93A6"/>
-                </a:solidFill>
-                <a:latin typeface="Malgun Gothic" pitchFamily="34" charset="0"/>
-                <a:ea typeface="Malgun Gothic" pitchFamily="34" charset="-122"/>
-                <a:cs typeface="Malgun Gothic" pitchFamily="34" charset="-120"/>
-              </a:rPr>
-              <a:t>M1팀 · 매출분석 툴 · 02</a:t>
-            </a:r>
-            <a:endParaRPr lang="en-US" sz="1100" dirty="0"/>
-          </a:p>
-        </p:txBody>
-      </p:sp>
-    </p:spTree>
-  </p:cSld>
-  <p:clrMapOvr>
-    <a:masterClrMapping/>
-  </p:clrMapOvr>
-</p:sld>
-</file>
-
-<file path=ppt/slides/slide3.xml><?xml version="1.0" encoding="utf-8"?>
-<p:sld xmlns:a="http://schemas.openxmlformats.org/drawingml/2006/main" xmlns:r="http://schemas.openxmlformats.org/officeDocument/2006/relationships" xmlns:p="http://schemas.openxmlformats.org/presentationml/2006/main">
-  <p:cSld name="Slide 3">
-    <p:bg>
-      <p:bgPr>
-        <a:solidFill>
-          <a:srgbClr val="14213D"/>
-        </a:solidFill>
-      </p:bgPr>
-    </p:bg>
-    <p:spTree>
-      <p:nvGrpSpPr>
-        <p:cNvPr id="1" name=""/>
-        <p:cNvGrpSpPr/>
-        <p:nvPr/>
-      </p:nvGrpSpPr>
-      <p:grpSpPr>
-        <a:xfrm>
-          <a:off x="0" y="0"/>
-          <a:ext cx="0" cy="0"/>
-          <a:chOff x="0" y="0"/>
-          <a:chExt cx="0" cy="0"/>
-        </a:xfrm>
-      </p:grpSpPr>
-      <p:sp>
-        <p:nvSpPr>
-          <p:cNvPr id="3" name="Text 0"/>
-          <p:cNvSpPr txBox="1"/>
-          <p:nvPr/>
-        </p:nvSpPr>
-        <p:spPr>
-          <a:xfrm>
-            <a:off x="813816" y="1234440"/>
-            <a:ext cx="10564063" cy="365760"/>
-          </a:xfrm>
-          <a:prstGeom prst="rect">
-            <a:avLst/>
-          </a:prstGeom>
-          <a:noFill/>
-          <a:ln/>
-        </p:spPr>
-        <p:txBody>
-          <a:bodyPr wrap="square" lIns="0" tIns="0" rIns="0" bIns="0" rtlCol="0" anchor="t"/>
-          <a:lstStyle/>
-          <a:p>
-            <a:pPr indent="0" marL="0">
-              <a:buNone/>
-            </a:pPr>
-            <a:r>
-              <a:rPr lang="en-US" sz="1500" b="1" dirty="0">
-                <a:solidFill>
-                  <a:srgbClr val="F2A65A"/>
-                </a:solidFill>
-                <a:latin typeface="Malgun Gothic" pitchFamily="34" charset="0"/>
-                <a:ea typeface="Malgun Gothic" pitchFamily="34" charset="-122"/>
-                <a:cs typeface="Malgun Gothic" pitchFamily="34" charset="-120"/>
-              </a:rPr>
-              <a:t>해결</a:t>
-            </a:r>
-            <a:endParaRPr lang="en-US" sz="1500" dirty="0"/>
-          </a:p>
-        </p:txBody>
-      </p:sp>
-      <p:sp>
-        <p:nvSpPr>
-          <p:cNvPr id="4" name="Text 1"/>
-          <p:cNvSpPr txBox="1"/>
-          <p:nvPr/>
-        </p:nvSpPr>
-        <p:spPr>
-          <a:xfrm>
-            <a:off x="813816" y="1645920"/>
-            <a:ext cx="10564063" cy="1005840"/>
-          </a:xfrm>
-          <a:prstGeom prst="rect">
-            <a:avLst/>
-          </a:prstGeom>
-          <a:noFill/>
-          <a:ln/>
-        </p:spPr>
-        <p:txBody>
-          <a:bodyPr wrap="square" lIns="0" tIns="0" rIns="0" bIns="0" rtlCol="0" anchor="t"/>
-          <a:lstStyle/>
-          <a:p>
-            <a:pPr indent="0" marL="0">
-              <a:buNone/>
-            </a:pPr>
-            <a:r>
-              <a:rPr lang="en-US" sz="5400" b="1" dirty="0">
-                <a:solidFill>
-                  <a:srgbClr val="F7F6F2"/>
-                </a:solidFill>
-                <a:latin typeface="Malgun Gothic" pitchFamily="34" charset="0"/>
-                <a:ea typeface="Malgun Gothic" pitchFamily="34" charset="-122"/>
-                <a:cs typeface="Malgun Gothic" pitchFamily="34" charset="-120"/>
-              </a:rPr>
-              <a:t>계산은 코드, 해석은 AI</a:t>
-            </a:r>
-            <a:endParaRPr lang="en-US" sz="5400" dirty="0"/>
-          </a:p>
-        </p:txBody>
-      </p:sp>
-      <p:sp>
-        <p:nvSpPr>
-          <p:cNvPr id="5" name="Shape 2"/>
-          <p:cNvSpPr/>
-          <p:nvPr/>
-        </p:nvSpPr>
-        <p:spPr>
-          <a:xfrm>
-            <a:off x="813816" y="3429000"/>
-            <a:ext cx="502920" cy="502920"/>
-          </a:xfrm>
-          <a:prstGeom prst="ellipse">
-            <a:avLst/>
-          </a:prstGeom>
-          <a:solidFill>
-            <a:srgbClr val="F2A65A"/>
-          </a:solidFill>
-          <a:ln w="12700">
-            <a:solidFill>
-              <a:srgbClr val="F2A65A"/>
-            </a:solidFill>
-            <a:prstDash val="solid"/>
-          </a:ln>
-        </p:spPr>
-      </p:sp>
-      <p:sp>
-        <p:nvSpPr>
-          <p:cNvPr id="6" name="Text 3"/>
-          <p:cNvSpPr txBox="1"/>
-          <p:nvPr/>
-        </p:nvSpPr>
-        <p:spPr>
-          <a:xfrm>
-            <a:off x="813816" y="3429000"/>
-            <a:ext cx="502920" cy="502920"/>
-          </a:xfrm>
-          <a:prstGeom prst="rect">
-            <a:avLst/>
-          </a:prstGeom>
-          <a:noFill/>
-          <a:ln/>
-        </p:spPr>
-        <p:txBody>
-          <a:bodyPr wrap="square" lIns="0" tIns="0" rIns="0" bIns="0" rtlCol="0" anchor="ctr"/>
-          <a:lstStyle/>
-          <a:p>
-            <a:pPr algn="ctr" indent="0" marL="0">
-              <a:buNone/>
-            </a:pPr>
-            <a:r>
-              <a:rPr lang="en-US" sz="1500" b="1" dirty="0">
-                <a:solidFill>
-                  <a:srgbClr val="14213D"/>
-                </a:solidFill>
-                <a:latin typeface="Malgun Gothic" pitchFamily="34" charset="0"/>
-                <a:ea typeface="Malgun Gothic" pitchFamily="34" charset="-122"/>
-                <a:cs typeface="Malgun Gothic" pitchFamily="34" charset="-120"/>
-              </a:rPr>
-              <a:t>1</a:t>
-            </a:r>
-            <a:endParaRPr lang="en-US" sz="1500" dirty="0"/>
-          </a:p>
-        </p:txBody>
-      </p:sp>
-      <p:sp>
-        <p:nvSpPr>
-          <p:cNvPr id="7" name="Text 4"/>
-          <p:cNvSpPr txBox="1"/>
-          <p:nvPr/>
-        </p:nvSpPr>
-        <p:spPr>
-          <a:xfrm>
-            <a:off x="813816" y="4160520"/>
-            <a:ext cx="3247034" cy="457200"/>
-          </a:xfrm>
-          <a:prstGeom prst="rect">
-            <a:avLst/>
-          </a:prstGeom>
-          <a:noFill/>
-          <a:ln/>
-        </p:spPr>
-        <p:txBody>
-          <a:bodyPr wrap="square" lIns="0" tIns="0" rIns="0" bIns="0" rtlCol="0" anchor="t"/>
-          <a:lstStyle/>
-          <a:p>
-            <a:pPr indent="0" marL="0">
-              <a:buNone/>
-            </a:pPr>
-            <a:r>
-              <a:rPr lang="en-US" sz="2000" b="1" dirty="0">
-                <a:solidFill>
-                  <a:srgbClr val="F7F6F2"/>
-                </a:solidFill>
-                <a:latin typeface="Malgun Gothic" pitchFamily="34" charset="0"/>
-                <a:ea typeface="Malgun Gothic" pitchFamily="34" charset="-122"/>
-                <a:cs typeface="Malgun Gothic" pitchFamily="34" charset="-120"/>
-              </a:rPr>
-              <a:t>숫자는 코드가</a:t>
-            </a:r>
-            <a:endParaRPr lang="en-US" sz="2000" dirty="0"/>
-          </a:p>
-        </p:txBody>
-      </p:sp>
-      <p:sp>
-        <p:nvSpPr>
-          <p:cNvPr id="8" name="Text 5"/>
-          <p:cNvSpPr txBox="1"/>
-          <p:nvPr/>
-        </p:nvSpPr>
-        <p:spPr>
-          <a:xfrm>
-            <a:off x="813816" y="4663440"/>
-            <a:ext cx="3247034" cy="1005840"/>
-          </a:xfrm>
-          <a:prstGeom prst="rect">
-            <a:avLst/>
-          </a:prstGeom>
-          <a:noFill/>
-          <a:ln/>
-        </p:spPr>
-        <p:txBody>
-          <a:bodyPr wrap="square" lIns="0" tIns="0" rIns="0" bIns="0" rtlCol="0" anchor="t"/>
-          <a:lstStyle/>
-          <a:p>
-            <a:pPr indent="0" marL="0">
-              <a:lnSpc>
-                <a:spcPct val="130000"/>
-              </a:lnSpc>
-              <a:buNone/>
-            </a:pPr>
-            <a:r>
-              <a:rPr lang="en-US" sz="1500" dirty="0">
-                <a:solidFill>
-                  <a:srgbClr val="C9D1E0"/>
-                </a:solidFill>
-                <a:latin typeface="Malgun Gothic" pitchFamily="34" charset="0"/>
-                <a:ea typeface="Malgun Gothic" pitchFamily="34" charset="-122"/>
-                <a:cs typeface="Malgun Gothic" pitchFamily="34" charset="-120"/>
-              </a:rPr>
-              <a:t>정해진 공식으로 계산. 같은 입력이면 늘 같은 숫자</a:t>
-            </a:r>
-            <a:endParaRPr lang="en-US" sz="1500" dirty="0"/>
-          </a:p>
-        </p:txBody>
-      </p:sp>
-      <p:sp>
-        <p:nvSpPr>
-          <p:cNvPr id="9" name="Shape 6"/>
-          <p:cNvSpPr/>
-          <p:nvPr/>
-        </p:nvSpPr>
-        <p:spPr>
-          <a:xfrm>
-            <a:off x="4472330" y="3429000"/>
-            <a:ext cx="502920" cy="502920"/>
-          </a:xfrm>
-          <a:prstGeom prst="ellipse">
-            <a:avLst/>
-          </a:prstGeom>
-          <a:solidFill>
-            <a:srgbClr val="F2A65A"/>
-          </a:solidFill>
-          <a:ln w="12700">
-            <a:solidFill>
-              <a:srgbClr val="F2A65A"/>
-            </a:solidFill>
-            <a:prstDash val="solid"/>
-          </a:ln>
-        </p:spPr>
-      </p:sp>
-      <p:sp>
-        <p:nvSpPr>
-          <p:cNvPr id="10" name="Text 7"/>
-          <p:cNvSpPr txBox="1"/>
-          <p:nvPr/>
-        </p:nvSpPr>
-        <p:spPr>
-          <a:xfrm>
-            <a:off x="4472330" y="3429000"/>
-            <a:ext cx="502920" cy="502920"/>
-          </a:xfrm>
-          <a:prstGeom prst="rect">
-            <a:avLst/>
-          </a:prstGeom>
-          <a:noFill/>
-          <a:ln/>
-        </p:spPr>
-        <p:txBody>
-          <a:bodyPr wrap="square" lIns="0" tIns="0" rIns="0" bIns="0" rtlCol="0" anchor="ctr"/>
-          <a:lstStyle/>
-          <a:p>
-            <a:pPr algn="ctr" indent="0" marL="0">
-              <a:buNone/>
-            </a:pPr>
-            <a:r>
-              <a:rPr lang="en-US" sz="1500" b="1" dirty="0">
-                <a:solidFill>
-                  <a:srgbClr val="14213D"/>
-                </a:solidFill>
-                <a:latin typeface="Malgun Gothic" pitchFamily="34" charset="0"/>
-                <a:ea typeface="Malgun Gothic" pitchFamily="34" charset="-122"/>
-                <a:cs typeface="Malgun Gothic" pitchFamily="34" charset="-120"/>
-              </a:rPr>
-              <a:t>2</a:t>
-            </a:r>
-            <a:endParaRPr lang="en-US" sz="1500" dirty="0"/>
-          </a:p>
-        </p:txBody>
-      </p:sp>
-      <p:sp>
-        <p:nvSpPr>
-          <p:cNvPr id="11" name="Text 8"/>
-          <p:cNvSpPr txBox="1"/>
-          <p:nvPr/>
-        </p:nvSpPr>
-        <p:spPr>
-          <a:xfrm>
-            <a:off x="4472330" y="4160520"/>
-            <a:ext cx="3247034" cy="457200"/>
-          </a:xfrm>
-          <a:prstGeom prst="rect">
-            <a:avLst/>
-          </a:prstGeom>
-          <a:noFill/>
-          <a:ln/>
-        </p:spPr>
-        <p:txBody>
-          <a:bodyPr wrap="square" lIns="0" tIns="0" rIns="0" bIns="0" rtlCol="0" anchor="t"/>
-          <a:lstStyle/>
-          <a:p>
-            <a:pPr indent="0" marL="0">
-              <a:buNone/>
-            </a:pPr>
-            <a:r>
-              <a:rPr lang="en-US" sz="2000" b="1" dirty="0">
-                <a:solidFill>
-                  <a:srgbClr val="F7F6F2"/>
-                </a:solidFill>
-                <a:latin typeface="Malgun Gothic" pitchFamily="34" charset="0"/>
-                <a:ea typeface="Malgun Gothic" pitchFamily="34" charset="-122"/>
-                <a:cs typeface="Malgun Gothic" pitchFamily="34" charset="-120"/>
-              </a:rPr>
-              <a:t>AI 는 결과만 받아서</a:t>
-            </a:r>
-            <a:endParaRPr lang="en-US" sz="2000" dirty="0"/>
-          </a:p>
-        </p:txBody>
-      </p:sp>
-      <p:sp>
-        <p:nvSpPr>
-          <p:cNvPr id="12" name="Text 9"/>
-          <p:cNvSpPr txBox="1"/>
-          <p:nvPr/>
-        </p:nvSpPr>
-        <p:spPr>
-          <a:xfrm>
-            <a:off x="4472330" y="4663440"/>
-            <a:ext cx="3247034" cy="1005840"/>
-          </a:xfrm>
-          <a:prstGeom prst="rect">
-            <a:avLst/>
-          </a:prstGeom>
-          <a:noFill/>
-          <a:ln/>
-        </p:spPr>
-        <p:txBody>
-          <a:bodyPr wrap="square" lIns="0" tIns="0" rIns="0" bIns="0" rtlCol="0" anchor="t"/>
-          <a:lstStyle/>
-          <a:p>
-            <a:pPr indent="0" marL="0">
-              <a:lnSpc>
-                <a:spcPct val="130000"/>
-              </a:lnSpc>
-              <a:buNone/>
-            </a:pPr>
-            <a:r>
-              <a:rPr lang="en-US" sz="1500" dirty="0">
-                <a:solidFill>
-                  <a:srgbClr val="C9D1E0"/>
-                </a:solidFill>
-                <a:latin typeface="Malgun Gothic" pitchFamily="34" charset="0"/>
-                <a:ea typeface="Malgun Gothic" pitchFamily="34" charset="-122"/>
-                <a:cs typeface="Malgun Gothic" pitchFamily="34" charset="-120"/>
-              </a:rPr>
-              <a:t>계산된 결과를 해석할 뿐, 숫자를 다시 계산하지 않음</a:t>
-            </a:r>
-            <a:endParaRPr lang="en-US" sz="1500" dirty="0"/>
-          </a:p>
-        </p:txBody>
-      </p:sp>
-      <p:sp>
-        <p:nvSpPr>
-          <p:cNvPr id="13" name="Shape 10"/>
-          <p:cNvSpPr/>
-          <p:nvPr/>
-        </p:nvSpPr>
-        <p:spPr>
-          <a:xfrm>
-            <a:off x="8130845" y="3429000"/>
-            <a:ext cx="502920" cy="502920"/>
-          </a:xfrm>
-          <a:prstGeom prst="ellipse">
-            <a:avLst/>
-          </a:prstGeom>
-          <a:solidFill>
-            <a:srgbClr val="F2A65A"/>
-          </a:solidFill>
-          <a:ln w="12700">
-            <a:solidFill>
-              <a:srgbClr val="F2A65A"/>
-            </a:solidFill>
-            <a:prstDash val="solid"/>
-          </a:ln>
-        </p:spPr>
-      </p:sp>
-      <p:sp>
-        <p:nvSpPr>
-          <p:cNvPr id="14" name="Text 11"/>
-          <p:cNvSpPr txBox="1"/>
-          <p:nvPr/>
-        </p:nvSpPr>
-        <p:spPr>
-          <a:xfrm>
-            <a:off x="8130845" y="3429000"/>
-            <a:ext cx="502920" cy="502920"/>
-          </a:xfrm>
-          <a:prstGeom prst="rect">
-            <a:avLst/>
-          </a:prstGeom>
-          <a:noFill/>
-          <a:ln/>
-        </p:spPr>
-        <p:txBody>
-          <a:bodyPr wrap="square" lIns="0" tIns="0" rIns="0" bIns="0" rtlCol="0" anchor="ctr"/>
-          <a:lstStyle/>
-          <a:p>
-            <a:pPr algn="ctr" indent="0" marL="0">
-              <a:buNone/>
-            </a:pPr>
-            <a:r>
-              <a:rPr lang="en-US" sz="1500" b="1" dirty="0">
-                <a:solidFill>
-                  <a:srgbClr val="14213D"/>
-                </a:solidFill>
-                <a:latin typeface="Malgun Gothic" pitchFamily="34" charset="0"/>
-                <a:ea typeface="Malgun Gothic" pitchFamily="34" charset="-122"/>
-                <a:cs typeface="Malgun Gothic" pitchFamily="34" charset="-120"/>
-              </a:rPr>
-              <a:t>3</a:t>
-            </a:r>
-            <a:endParaRPr lang="en-US" sz="1500" dirty="0"/>
-          </a:p>
-        </p:txBody>
-      </p:sp>
-      <p:sp>
-        <p:nvSpPr>
-          <p:cNvPr id="15" name="Text 12"/>
-          <p:cNvSpPr txBox="1"/>
-          <p:nvPr/>
-        </p:nvSpPr>
-        <p:spPr>
-          <a:xfrm>
-            <a:off x="8130845" y="4160520"/>
-            <a:ext cx="3247034" cy="457200"/>
-          </a:xfrm>
-          <a:prstGeom prst="rect">
-            <a:avLst/>
-          </a:prstGeom>
-          <a:noFill/>
-          <a:ln/>
-        </p:spPr>
-        <p:txBody>
-          <a:bodyPr wrap="square" lIns="0" tIns="0" rIns="0" bIns="0" rtlCol="0" anchor="t"/>
-          <a:lstStyle/>
-          <a:p>
-            <a:pPr indent="0" marL="0">
-              <a:buNone/>
-            </a:pPr>
-            <a:r>
-              <a:rPr lang="en-US" sz="2000" b="1" dirty="0">
-                <a:solidFill>
-                  <a:srgbClr val="F7F6F2"/>
-                </a:solidFill>
-                <a:latin typeface="Malgun Gothic" pitchFamily="34" charset="0"/>
-                <a:ea typeface="Malgun Gothic" pitchFamily="34" charset="-122"/>
-                <a:cs typeface="Malgun Gothic" pitchFamily="34" charset="-120"/>
-              </a:rPr>
-              <a:t>사실과 추정을 나눠서</a:t>
-            </a:r>
-            <a:endParaRPr lang="en-US" sz="2000" dirty="0"/>
-          </a:p>
-        </p:txBody>
-      </p:sp>
-      <p:sp>
-        <p:nvSpPr>
-          <p:cNvPr id="16" name="Text 13"/>
-          <p:cNvSpPr txBox="1"/>
-          <p:nvPr/>
-        </p:nvSpPr>
-        <p:spPr>
-          <a:xfrm>
-            <a:off x="8130845" y="4663440"/>
-            <a:ext cx="3247034" cy="1005840"/>
-          </a:xfrm>
-          <a:prstGeom prst="rect">
-            <a:avLst/>
-          </a:prstGeom>
-          <a:noFill/>
-          <a:ln/>
-        </p:spPr>
-        <p:txBody>
-          <a:bodyPr wrap="square" lIns="0" tIns="0" rIns="0" bIns="0" rtlCol="0" anchor="t"/>
-          <a:lstStyle/>
-          <a:p>
-            <a:pPr indent="0" marL="0">
-              <a:lnSpc>
-                <a:spcPct val="130000"/>
-              </a:lnSpc>
-              <a:buNone/>
-            </a:pPr>
-            <a:r>
-              <a:rPr lang="en-US" sz="1500" dirty="0">
-                <a:solidFill>
-                  <a:srgbClr val="C9D1E0"/>
-                </a:solidFill>
-                <a:latin typeface="Malgun Gothic" pitchFamily="34" charset="0"/>
-                <a:ea typeface="Malgun Gothic" pitchFamily="34" charset="-122"/>
-                <a:cs typeface="Malgun Gothic" pitchFamily="34" charset="-120"/>
-              </a:rPr>
-              <a:t>확인된 사실 / 원인 후보 / 실행 제안 / 한계를 따로 보여 줌</a:t>
-            </a:r>
-            <a:endParaRPr lang="en-US" sz="1500" dirty="0"/>
-          </a:p>
-        </p:txBody>
-      </p:sp>
-      <p:sp>
-        <p:nvSpPr>
-          <p:cNvPr id="17" name="Text 14"/>
-          <p:cNvSpPr txBox="1"/>
-          <p:nvPr/>
-        </p:nvSpPr>
-        <p:spPr>
-          <a:xfrm>
-            <a:off x="813816" y="6327648"/>
-            <a:ext cx="10564063" cy="274320"/>
-          </a:xfrm>
-          <a:prstGeom prst="rect">
-            <a:avLst/>
-          </a:prstGeom>
-          <a:noFill/>
-          <a:ln/>
-        </p:spPr>
-        <p:txBody>
-          <a:bodyPr wrap="square" lIns="0" tIns="0" rIns="0" bIns="0" rtlCol="0" anchor="t"/>
-          <a:lstStyle/>
-          <a:p>
-            <a:pPr indent="0" marL="0">
-              <a:buNone/>
-            </a:pPr>
-            <a:r>
-              <a:rPr lang="en-US" sz="1100" dirty="0">
-                <a:solidFill>
-                  <a:srgbClr val="C9D1E0"/>
-                </a:solidFill>
-                <a:latin typeface="Malgun Gothic" pitchFamily="34" charset="0"/>
-                <a:ea typeface="Malgun Gothic" pitchFamily="34" charset="-122"/>
-                <a:cs typeface="Malgun Gothic" pitchFamily="34" charset="-120"/>
-              </a:rPr>
-              <a:t>M1팀 · 매출분석 툴 · 03</a:t>
-            </a:r>
-            <a:endParaRPr lang="en-US" sz="1100" dirty="0"/>
-          </a:p>
-        </p:txBody>
-      </p:sp>
-    </p:spTree>
-  </p:cSld>
-  <p:clrMapOvr>
-    <a:masterClrMapping/>
-  </p:clrMapOvr>
-</p:sld>
-</file>
-
-<file path=ppt/slides/slide4.xml><?xml version="1.0" encoding="utf-8"?>
-<p:sld xmlns:a="http://schemas.openxmlformats.org/drawingml/2006/main" xmlns:r="http://schemas.openxmlformats.org/officeDocument/2006/relationships" xmlns:p="http://schemas.openxmlformats.org/presentationml/2006/main">
-  <p:cSld name="Slide 4">
-    <p:bg>
-      <p:bgPr>
-        <a:solidFill>
-          <a:srgbClr val="F7F6F2"/>
-        </a:solidFill>
-      </p:bgPr>
-    </p:bg>
-    <p:spTree>
-      <p:nvGrpSpPr>
-        <p:cNvPr id="1" name=""/>
-        <p:cNvGrpSpPr/>
-        <p:nvPr/>
-      </p:nvGrpSpPr>
-      <p:grpSpPr>
-        <a:xfrm>
-          <a:off x="0" y="0"/>
-          <a:ext cx="0" cy="0"/>
-          <a:chOff x="0" y="0"/>
-          <a:chExt cx="0" cy="0"/>
-        </a:xfrm>
-      </p:grpSpPr>
-      <p:sp>
-        <p:nvSpPr>
-          <p:cNvPr id="3" name="Text 0"/>
-          <p:cNvSpPr txBox="1"/>
-          <p:nvPr/>
-        </p:nvSpPr>
-        <p:spPr>
-          <a:xfrm>
-            <a:off x="813816" y="566928"/>
-            <a:ext cx="10564063" cy="365760"/>
-          </a:xfrm>
-          <a:prstGeom prst="rect">
-            <a:avLst/>
-          </a:prstGeom>
-          <a:noFill/>
-          <a:ln/>
-        </p:spPr>
-        <p:txBody>
-          <a:bodyPr wrap="square" lIns="0" tIns="0" rIns="0" bIns="0" rtlCol="0" anchor="t"/>
-          <a:lstStyle/>
-          <a:p>
-            <a:pPr indent="0" marL="0">
-              <a:buNone/>
-            </a:pPr>
-            <a:r>
-              <a:rPr lang="en-US" sz="1500" b="1" dirty="0">
-                <a:solidFill>
-                  <a:srgbClr val="2F5FD0"/>
+                  <a:srgbClr val="5468FF"/>
                 </a:solidFill>
                 <a:latin typeface="Malgun Gothic" pitchFamily="34" charset="0"/>
                 <a:ea typeface="Malgun Gothic" pitchFamily="34" charset="-122"/>
@@ -8706,7 +9329,7 @@
                       <a:tailEnd type="none" w="med" len="med"/>
                     </a:lnB>
                     <a:solidFill>
-                      <a:srgbClr val="EEF1F6"/>
+                      <a:srgbClr val="EEF1FF"/>
                     </a:solidFill>
                   </a:tcPr>
                 </a:tc>
@@ -8774,7 +9397,7 @@
                       <a:tailEnd type="none" w="med" len="med"/>
                     </a:lnB>
                     <a:solidFill>
-                      <a:srgbClr val="EEF1F6"/>
+                      <a:srgbClr val="EEF1FF"/>
                     </a:solidFill>
                   </a:tcPr>
                 </a:tc>
@@ -8842,7 +9465,7 @@
                       <a:tailEnd type="none" w="med" len="med"/>
                     </a:lnB>
                     <a:solidFill>
-                      <a:srgbClr val="EEF1F6"/>
+                      <a:srgbClr val="EEF1FF"/>
                     </a:solidFill>
                   </a:tcPr>
                 </a:tc>
@@ -8910,7 +9533,7 @@
                       <a:tailEnd type="none" w="med" len="med"/>
                     </a:lnB>
                     <a:solidFill>
-                      <a:srgbClr val="EEF1F6"/>
+                      <a:srgbClr val="EEF1FF"/>
                     </a:solidFill>
                   </a:tcPr>
                 </a:tc>
@@ -9254,7 +9877,7 @@
                       <a:tailEnd type="none" w="med" len="med"/>
                     </a:lnB>
                     <a:solidFill>
-                      <a:srgbClr val="EEF1F6"/>
+                      <a:srgbClr val="EEF1FF"/>
                     </a:solidFill>
                   </a:tcPr>
                 </a:tc>
@@ -9322,7 +9945,7 @@
                       <a:tailEnd type="none" w="med" len="med"/>
                     </a:lnB>
                     <a:solidFill>
-                      <a:srgbClr val="EEF1F6"/>
+                      <a:srgbClr val="EEF1FF"/>
                     </a:solidFill>
                   </a:tcPr>
                 </a:tc>
@@ -9390,7 +10013,7 @@
                       <a:tailEnd type="none" w="med" len="med"/>
                     </a:lnB>
                     <a:solidFill>
-                      <a:srgbClr val="EEF1F6"/>
+                      <a:srgbClr val="EEF1FF"/>
                     </a:solidFill>
                   </a:tcPr>
                 </a:tc>
@@ -9458,7 +10081,7 @@
                       <a:tailEnd type="none" w="med" len="med"/>
                     </a:lnB>
                     <a:solidFill>
-                      <a:srgbClr val="EEF1F6"/>
+                      <a:srgbClr val="EEF1FF"/>
                     </a:solidFill>
                   </a:tcPr>
                 </a:tc>
@@ -9768,7 +10391,7 @@
             <a:r>
               <a:rPr lang="en-US" sz="1100" dirty="0">
                 <a:solidFill>
-                  <a:srgbClr val="8A93A6"/>
+                  <a:srgbClr val="5B6478"/>
                 </a:solidFill>
                 <a:latin typeface="Malgun Gothic" pitchFamily="34" charset="0"/>
                 <a:ea typeface="Malgun Gothic" pitchFamily="34" charset="-122"/>
@@ -9780,6 +10403,30 @@
           </a:p>
         </p:txBody>
       </p:sp>
+      <p:pic>
+        <p:nvPicPr>
+          <p:cNvPr id="7" name="Picture 6" descr="s4_busts.png"/>
+          <p:cNvPicPr>
+            <a:picLocks noChangeAspect="1"/>
+          </p:cNvPicPr>
+          <p:nvPr/>
+        </p:nvPicPr>
+        <p:blipFill>
+          <a:blip r:embed="rId3"/>
+          <a:stretch>
+            <a:fillRect/>
+          </a:stretch>
+        </p:blipFill>
+        <p:spPr>
+          <a:xfrm>
+            <a:off x="10774680" y="274320"/>
+            <a:ext cx="603504" cy="603504"/>
+          </a:xfrm>
+          <a:prstGeom prst="rect">
+            <a:avLst/>
+          </a:prstGeom>
+        </p:spPr>
+      </p:pic>
     </p:spTree>
   </p:cSld>
   <p:clrMapOvr>
@@ -9794,7 +10441,7 @@
     <p:bg>
       <p:bgPr>
         <a:solidFill>
-          <a:srgbClr val="F7F6F2"/>
+          <a:srgbClr val="F5F7FC"/>
         </a:solidFill>
       </p:bgPr>
     </p:bg>
@@ -9839,7 +10486,7 @@
             <a:r>
               <a:rPr lang="en-US" sz="1500" b="1" dirty="0">
                 <a:solidFill>
-                  <a:srgbClr val="2F5FD0"/>
+                  <a:srgbClr val="5468FF"/>
                 </a:solidFill>
                 <a:latin typeface="Malgun Gothic" pitchFamily="34" charset="0"/>
                 <a:ea typeface="Malgun Gothic" pitchFamily="34" charset="-122"/>
@@ -9906,12 +10553,23 @@
               <a:gd name="adj" fmla="val 5622"/>
             </a:avLst>
           </a:prstGeom>
-          <a:solidFill>
-            <a:srgbClr val="FFFFFF"/>
-          </a:solidFill>
+          <a:gradFill rotWithShape="1">
+            <a:gsLst>
+              <a:gs pos="0">
+                <a:srgbClr val="FFFFFF"/>
+              </a:gs>
+              <a:gs pos="45000">
+                <a:srgbClr val="F0F2FF"/>
+              </a:gs>
+              <a:gs pos="100000">
+                <a:srgbClr val="DDE3FF"/>
+              </a:gs>
+            </a:gsLst>
+            <a:lin ang="4200000" scaled="0"/>
+          </a:gradFill>
           <a:ln w="12700">
             <a:solidFill>
-              <a:srgbClr val="E1E4EA"/>
+              <a:srgbClr val="E5E9F2"/>
             </a:solidFill>
             <a:prstDash val="solid"/>
           </a:ln>
@@ -9934,11 +10592,11 @@
             </a:avLst>
           </a:prstGeom>
           <a:solidFill>
-            <a:srgbClr val="2F5FD0"/>
+            <a:srgbClr val="5468FF"/>
           </a:solidFill>
           <a:ln w="12700">
             <a:solidFill>
-              <a:srgbClr val="2F5FD0"/>
+              <a:srgbClr val="5468FF"/>
             </a:solidFill>
             <a:prstDash val="solid"/>
           </a:ln>
@@ -10120,12 +10778,23 @@
               <a:gd name="adj" fmla="val 5622"/>
             </a:avLst>
           </a:prstGeom>
-          <a:solidFill>
-            <a:srgbClr val="FFFFFF"/>
-          </a:solidFill>
+          <a:gradFill rotWithShape="1">
+            <a:gsLst>
+              <a:gs pos="0">
+                <a:srgbClr val="FFFFFF"/>
+              </a:gs>
+              <a:gs pos="45000">
+                <a:srgbClr val="F0F2FF"/>
+              </a:gs>
+              <a:gs pos="100000">
+                <a:srgbClr val="DDE3FF"/>
+              </a:gs>
+            </a:gsLst>
+            <a:lin ang="4200000" scaled="0"/>
+          </a:gradFill>
           <a:ln w="12700">
             <a:solidFill>
-              <a:srgbClr val="E1E4EA"/>
+              <a:srgbClr val="E5E9F2"/>
             </a:solidFill>
             <a:prstDash val="solid"/>
           </a:ln>
@@ -10148,11 +10817,11 @@
             </a:avLst>
           </a:prstGeom>
           <a:solidFill>
-            <a:srgbClr val="2F5FD0"/>
+            <a:srgbClr val="5468FF"/>
           </a:solidFill>
           <a:ln w="12700">
             <a:solidFill>
-              <a:srgbClr val="2F5FD0"/>
+              <a:srgbClr val="5468FF"/>
             </a:solidFill>
             <a:prstDash val="solid"/>
           </a:ln>
@@ -10314,12 +10983,23 @@
               <a:gd name="adj" fmla="val 5622"/>
             </a:avLst>
           </a:prstGeom>
-          <a:solidFill>
-            <a:srgbClr val="FFFFFF"/>
-          </a:solidFill>
+          <a:gradFill rotWithShape="1">
+            <a:gsLst>
+              <a:gs pos="0">
+                <a:srgbClr val="FFFFFF"/>
+              </a:gs>
+              <a:gs pos="45000">
+                <a:srgbClr val="F0F2FF"/>
+              </a:gs>
+              <a:gs pos="100000">
+                <a:srgbClr val="DDE3FF"/>
+              </a:gs>
+            </a:gsLst>
+            <a:lin ang="4200000" scaled="0"/>
+          </a:gradFill>
           <a:ln w="12700">
             <a:solidFill>
-              <a:srgbClr val="E1E4EA"/>
+              <a:srgbClr val="E5E9F2"/>
             </a:solidFill>
             <a:prstDash val="solid"/>
           </a:ln>
@@ -10342,11 +11022,11 @@
             </a:avLst>
           </a:prstGeom>
           <a:solidFill>
-            <a:srgbClr val="2F5FD0"/>
+            <a:srgbClr val="5468FF"/>
           </a:solidFill>
           <a:ln w="12700">
             <a:solidFill>
-              <a:srgbClr val="2F5FD0"/>
+              <a:srgbClr val="5468FF"/>
             </a:solidFill>
             <a:prstDash val="solid"/>
           </a:ln>
@@ -10548,12 +11228,23 @@
               <a:gd name="adj" fmla="val 5622"/>
             </a:avLst>
           </a:prstGeom>
-          <a:solidFill>
-            <a:srgbClr val="FFFFFF"/>
-          </a:solidFill>
+          <a:gradFill rotWithShape="1">
+            <a:gsLst>
+              <a:gs pos="0">
+                <a:srgbClr val="FFFFFF"/>
+              </a:gs>
+              <a:gs pos="45000">
+                <a:srgbClr val="F0F2FF"/>
+              </a:gs>
+              <a:gs pos="100000">
+                <a:srgbClr val="DDE3FF"/>
+              </a:gs>
+            </a:gsLst>
+            <a:lin ang="4200000" scaled="0"/>
+          </a:gradFill>
           <a:ln w="12700">
             <a:solidFill>
-              <a:srgbClr val="E1E4EA"/>
+              <a:srgbClr val="E5E9F2"/>
             </a:solidFill>
             <a:prstDash val="solid"/>
           </a:ln>
@@ -10576,11 +11267,11 @@
             </a:avLst>
           </a:prstGeom>
           <a:solidFill>
-            <a:srgbClr val="2F5FD0"/>
+            <a:srgbClr val="5468FF"/>
           </a:solidFill>
           <a:ln w="12700">
             <a:solidFill>
-              <a:srgbClr val="2F5FD0"/>
+              <a:srgbClr val="5468FF"/>
             </a:solidFill>
             <a:prstDash val="solid"/>
           </a:ln>
@@ -10782,12 +11473,23 @@
               <a:gd name="adj" fmla="val 5622"/>
             </a:avLst>
           </a:prstGeom>
-          <a:solidFill>
-            <a:srgbClr val="FFFFFF"/>
-          </a:solidFill>
+          <a:gradFill rotWithShape="1">
+            <a:gsLst>
+              <a:gs pos="0">
+                <a:srgbClr val="FFFFFF"/>
+              </a:gs>
+              <a:gs pos="45000">
+                <a:srgbClr val="F0F2FF"/>
+              </a:gs>
+              <a:gs pos="100000">
+                <a:srgbClr val="DDE3FF"/>
+              </a:gs>
+            </a:gsLst>
+            <a:lin ang="4200000" scaled="0"/>
+          </a:gradFill>
           <a:ln w="12700">
             <a:solidFill>
-              <a:srgbClr val="E1E4EA"/>
+              <a:srgbClr val="E5E9F2"/>
             </a:solidFill>
             <a:prstDash val="solid"/>
           </a:ln>
@@ -10810,11 +11512,11 @@
             </a:avLst>
           </a:prstGeom>
           <a:solidFill>
-            <a:srgbClr val="C4581C"/>
+            <a:srgbClr val="B42318"/>
           </a:solidFill>
           <a:ln w="12700">
             <a:solidFill>
-              <a:srgbClr val="C4581C"/>
+              <a:srgbClr val="B42318"/>
             </a:solidFill>
             <a:prstDash val="solid"/>
           </a:ln>
@@ -10987,7 +11689,7 @@
             <a:r>
               <a:rPr lang="en-US" sz="1100" dirty="0">
                 <a:solidFill>
-                  <a:srgbClr val="8A93A6"/>
+                  <a:srgbClr val="5B6478"/>
                 </a:solidFill>
                 <a:latin typeface="Malgun Gothic" pitchFamily="34" charset="0"/>
                 <a:ea typeface="Malgun Gothic" pitchFamily="34" charset="-122"/>
@@ -10999,6 +11701,30 @@
           </a:p>
         </p:txBody>
       </p:sp>
+      <p:pic>
+        <p:nvPicPr>
+          <p:cNvPr id="31" name="Picture 30" descr="s5_calendar.png"/>
+          <p:cNvPicPr>
+            <a:picLocks noChangeAspect="1"/>
+          </p:cNvPicPr>
+          <p:nvPr/>
+        </p:nvPicPr>
+        <p:blipFill>
+          <a:blip r:embed="rId3"/>
+          <a:stretch>
+            <a:fillRect/>
+          </a:stretch>
+        </p:blipFill>
+        <p:spPr>
+          <a:xfrm>
+            <a:off x="10774680" y="274320"/>
+            <a:ext cx="603504" cy="603504"/>
+          </a:xfrm>
+          <a:prstGeom prst="rect">
+            <a:avLst/>
+          </a:prstGeom>
+        </p:spPr>
+      </p:pic>
     </p:spTree>
   </p:cSld>
   <p:clrMapOvr>
@@ -11013,7 +11739,7 @@
     <p:bg>
       <p:bgPr>
         <a:solidFill>
-          <a:srgbClr val="F7F6F2"/>
+          <a:srgbClr val="F5F7FC"/>
         </a:solidFill>
       </p:bgPr>
     </p:bg>
@@ -11058,7 +11784,7 @@
             <a:r>
               <a:rPr lang="en-US" sz="1500" b="1" dirty="0">
                 <a:solidFill>
-                  <a:srgbClr val="2F5FD0"/>
+                  <a:srgbClr val="5468FF"/>
                 </a:solidFill>
                 <a:latin typeface="Malgun Gothic" pitchFamily="34" charset="0"/>
                 <a:ea typeface="Malgun Gothic" pitchFamily="34" charset="-122"/>
@@ -11125,12 +11851,23 @@
               <a:gd name="adj" fmla="val 6334"/>
             </a:avLst>
           </a:prstGeom>
-          <a:solidFill>
-            <a:srgbClr val="FFFFFF"/>
-          </a:solidFill>
+          <a:gradFill rotWithShape="1">
+            <a:gsLst>
+              <a:gs pos="0">
+                <a:srgbClr val="FFFFFF"/>
+              </a:gs>
+              <a:gs pos="45000">
+                <a:srgbClr val="F0F2FF"/>
+              </a:gs>
+              <a:gs pos="100000">
+                <a:srgbClr val="DDE3FF"/>
+              </a:gs>
+            </a:gsLst>
+            <a:lin ang="4200000" scaled="0"/>
+          </a:gradFill>
           <a:ln w="12700">
             <a:solidFill>
-              <a:srgbClr val="E1E4EA"/>
+              <a:srgbClr val="E5E9F2"/>
             </a:solidFill>
             <a:prstDash val="solid"/>
           </a:ln>
@@ -11163,7 +11900,7 @@
             <a:r>
               <a:rPr lang="en-US" sz="1200" b="1" dirty="0">
                 <a:solidFill>
-                  <a:srgbClr val="2F5FD0"/>
+                  <a:srgbClr val="5468FF"/>
                 </a:solidFill>
                 <a:latin typeface="Malgun Gothic" pitchFamily="34" charset="0"/>
                 <a:ea typeface="Malgun Gothic" pitchFamily="34" charset="-122"/>
@@ -11337,12 +12074,23 @@
               <a:gd name="adj" fmla="val 6334"/>
             </a:avLst>
           </a:prstGeom>
-          <a:solidFill>
-            <a:srgbClr val="FFFFFF"/>
-          </a:solidFill>
+          <a:gradFill rotWithShape="1">
+            <a:gsLst>
+              <a:gs pos="0">
+                <a:srgbClr val="FFFFFF"/>
+              </a:gs>
+              <a:gs pos="45000">
+                <a:srgbClr val="F0F2FF"/>
+              </a:gs>
+              <a:gs pos="100000">
+                <a:srgbClr val="DDE3FF"/>
+              </a:gs>
+            </a:gsLst>
+            <a:lin ang="4200000" scaled="0"/>
+          </a:gradFill>
           <a:ln w="12700">
             <a:solidFill>
-              <a:srgbClr val="E1E4EA"/>
+              <a:srgbClr val="E5E9F2"/>
             </a:solidFill>
             <a:prstDash val="solid"/>
           </a:ln>
@@ -11375,7 +12123,7 @@
             <a:r>
               <a:rPr lang="en-US" sz="1200" b="1" dirty="0">
                 <a:solidFill>
-                  <a:srgbClr val="2F5FD0"/>
+                  <a:srgbClr val="5468FF"/>
                 </a:solidFill>
                 <a:latin typeface="Malgun Gothic" pitchFamily="34" charset="0"/>
                 <a:ea typeface="Malgun Gothic" pitchFamily="34" charset="-122"/>
@@ -11549,12 +12297,23 @@
               <a:gd name="adj" fmla="val 6334"/>
             </a:avLst>
           </a:prstGeom>
-          <a:solidFill>
-            <a:srgbClr val="FFFFFF"/>
-          </a:solidFill>
+          <a:gradFill rotWithShape="1">
+            <a:gsLst>
+              <a:gs pos="0">
+                <a:srgbClr val="FFFFFF"/>
+              </a:gs>
+              <a:gs pos="45000">
+                <a:srgbClr val="F0F2FF"/>
+              </a:gs>
+              <a:gs pos="100000">
+                <a:srgbClr val="DDE3FF"/>
+              </a:gs>
+            </a:gsLst>
+            <a:lin ang="4200000" scaled="0"/>
+          </a:gradFill>
           <a:ln w="12700">
             <a:solidFill>
-              <a:srgbClr val="E1E4EA"/>
+              <a:srgbClr val="E5E9F2"/>
             </a:solidFill>
             <a:prstDash val="solid"/>
           </a:ln>
@@ -11587,7 +12346,7 @@
             <a:r>
               <a:rPr lang="en-US" sz="1200" b="1" dirty="0">
                 <a:solidFill>
-                  <a:srgbClr val="2F5FD0"/>
+                  <a:srgbClr val="5468FF"/>
                 </a:solidFill>
                 <a:latin typeface="Malgun Gothic" pitchFamily="34" charset="0"/>
                 <a:ea typeface="Malgun Gothic" pitchFamily="34" charset="-122"/>
@@ -11761,12 +12520,23 @@
               <a:gd name="adj" fmla="val 6334"/>
             </a:avLst>
           </a:prstGeom>
-          <a:solidFill>
-            <a:srgbClr val="FFFFFF"/>
-          </a:solidFill>
+          <a:gradFill rotWithShape="1">
+            <a:gsLst>
+              <a:gs pos="0">
+                <a:srgbClr val="FFFFFF"/>
+              </a:gs>
+              <a:gs pos="45000">
+                <a:srgbClr val="F0F2FF"/>
+              </a:gs>
+              <a:gs pos="100000">
+                <a:srgbClr val="DDE3FF"/>
+              </a:gs>
+            </a:gsLst>
+            <a:lin ang="4200000" scaled="0"/>
+          </a:gradFill>
           <a:ln w="12700">
             <a:solidFill>
-              <a:srgbClr val="E1E4EA"/>
+              <a:srgbClr val="E5E9F2"/>
             </a:solidFill>
             <a:prstDash val="solid"/>
           </a:ln>
@@ -11799,7 +12569,7 @@
             <a:r>
               <a:rPr lang="en-US" sz="1200" b="1" dirty="0">
                 <a:solidFill>
-                  <a:srgbClr val="2F5FD0"/>
+                  <a:srgbClr val="5468FF"/>
                 </a:solidFill>
                 <a:latin typeface="Malgun Gothic" pitchFamily="34" charset="0"/>
                 <a:ea typeface="Malgun Gothic" pitchFamily="34" charset="-122"/>
@@ -11953,12 +12723,23 @@
               <a:gd name="adj" fmla="val 6334"/>
             </a:avLst>
           </a:prstGeom>
-          <a:solidFill>
-            <a:srgbClr val="FFFFFF"/>
-          </a:solidFill>
+          <a:gradFill rotWithShape="1">
+            <a:gsLst>
+              <a:gs pos="0">
+                <a:srgbClr val="FFFFFF"/>
+              </a:gs>
+              <a:gs pos="45000">
+                <a:srgbClr val="F0F2FF"/>
+              </a:gs>
+              <a:gs pos="100000">
+                <a:srgbClr val="DDE3FF"/>
+              </a:gs>
+            </a:gsLst>
+            <a:lin ang="4200000" scaled="0"/>
+          </a:gradFill>
           <a:ln w="12700">
             <a:solidFill>
-              <a:srgbClr val="E1E4EA"/>
+              <a:srgbClr val="E5E9F2"/>
             </a:solidFill>
             <a:prstDash val="solid"/>
           </a:ln>
@@ -11991,7 +12772,7 @@
             <a:r>
               <a:rPr lang="en-US" sz="1200" b="1" dirty="0">
                 <a:solidFill>
-                  <a:srgbClr val="2F5FD0"/>
+                  <a:srgbClr val="5468FF"/>
                 </a:solidFill>
                 <a:latin typeface="Malgun Gothic" pitchFamily="34" charset="0"/>
                 <a:ea typeface="Malgun Gothic" pitchFamily="34" charset="-122"/>
@@ -12141,11 +12922,11 @@
             </a:avLst>
           </a:prstGeom>
           <a:solidFill>
-            <a:srgbClr val="EEF1F6"/>
+            <a:srgbClr val="EEF1FF"/>
           </a:solidFill>
           <a:ln w="12700">
             <a:solidFill>
-              <a:srgbClr val="EEF1F6"/>
+              <a:srgbClr val="EEF1FF"/>
             </a:solidFill>
             <a:prstDash val="solid"/>
           </a:ln>
@@ -12245,7 +13026,7 @@
             <a:r>
               <a:rPr lang="en-US" sz="1100" dirty="0">
                 <a:solidFill>
-                  <a:srgbClr val="8A93A6"/>
+                  <a:srgbClr val="5B6478"/>
                 </a:solidFill>
                 <a:latin typeface="Malgun Gothic" pitchFamily="34" charset="0"/>
                 <a:ea typeface="Malgun Gothic" pitchFamily="34" charset="-122"/>
@@ -12257,6 +13038,30 @@
           </a:p>
         </p:txBody>
       </p:sp>
+      <p:pic>
+        <p:nvPicPr>
+          <p:cNvPr id="32" name="Picture 31" descr="s6_puzzle.png"/>
+          <p:cNvPicPr>
+            <a:picLocks noChangeAspect="1"/>
+          </p:cNvPicPr>
+          <p:nvPr/>
+        </p:nvPicPr>
+        <p:blipFill>
+          <a:blip r:embed="rId3"/>
+          <a:stretch>
+            <a:fillRect/>
+          </a:stretch>
+        </p:blipFill>
+        <p:spPr>
+          <a:xfrm>
+            <a:off x="10774680" y="274320"/>
+            <a:ext cx="603504" cy="603504"/>
+          </a:xfrm>
+          <a:prstGeom prst="rect">
+            <a:avLst/>
+          </a:prstGeom>
+        </p:spPr>
+      </p:pic>
     </p:spTree>
   </p:cSld>
   <p:clrMapOvr>
@@ -12271,7 +13076,7 @@
     <p:bg>
       <p:bgPr>
         <a:solidFill>
-          <a:srgbClr val="F7F6F2"/>
+          <a:srgbClr val="F5F7FC"/>
         </a:solidFill>
       </p:bgPr>
     </p:bg>
@@ -12316,7 +13121,7 @@
             <a:r>
               <a:rPr lang="en-US" sz="1500" b="1" dirty="0">
                 <a:solidFill>
-                  <a:srgbClr val="2F5FD0"/>
+                  <a:srgbClr val="5468FF"/>
                 </a:solidFill>
                 <a:latin typeface="Malgun Gothic" pitchFamily="34" charset="0"/>
                 <a:ea typeface="Malgun Gothic" pitchFamily="34" charset="-122"/>
@@ -12529,11 +13334,11 @@
             </a:avLst>
           </a:prstGeom>
           <a:solidFill>
-            <a:srgbClr val="FDF1E6"/>
+            <a:srgbClr val="EEF1FF"/>
           </a:solidFill>
           <a:ln w="12700">
             <a:solidFill>
-              <a:srgbClr val="F2C8A4"/>
+              <a:srgbClr val="D8DEF8"/>
             </a:solidFill>
             <a:prstDash val="solid"/>
           </a:ln>
@@ -12566,7 +13371,7 @@
             <a:r>
               <a:rPr lang="en-US" sz="2000" b="1" dirty="0">
                 <a:solidFill>
-                  <a:srgbClr val="9A4412"/>
+                  <a:srgbClr val="3346C9"/>
                 </a:solidFill>
                 <a:latin typeface="Malgun Gothic" pitchFamily="34" charset="0"/>
                 <a:ea typeface="Malgun Gothic" pitchFamily="34" charset="-122"/>
@@ -12608,7 +13413,7 @@
             <a:r>
               <a:rPr lang="en-US" sz="1500" dirty="0">
                 <a:solidFill>
-                  <a:srgbClr val="4A3524"/>
+                  <a:srgbClr val="2B3550"/>
                 </a:solidFill>
                 <a:latin typeface="Malgun Gothic" pitchFamily="34" charset="0"/>
                 <a:ea typeface="Malgun Gothic" pitchFamily="34" charset="-122"/>
@@ -12628,7 +13433,7 @@
             <a:r>
               <a:rPr lang="en-US" sz="1500" dirty="0">
                 <a:solidFill>
-                  <a:srgbClr val="4A3524"/>
+                  <a:srgbClr val="2B3550"/>
                 </a:solidFill>
                 <a:latin typeface="Malgun Gothic" pitchFamily="34" charset="0"/>
                 <a:ea typeface="Malgun Gothic" pitchFamily="34" charset="-122"/>
@@ -12648,7 +13453,7 @@
             <a:r>
               <a:rPr lang="en-US" sz="1500" dirty="0">
                 <a:solidFill>
-                  <a:srgbClr val="4A3524"/>
+                  <a:srgbClr val="2B3550"/>
                 </a:solidFill>
                 <a:latin typeface="Malgun Gothic" pitchFamily="34" charset="0"/>
                 <a:ea typeface="Malgun Gothic" pitchFamily="34" charset="-122"/>
@@ -12668,7 +13473,7 @@
             <a:r>
               <a:rPr lang="en-US" sz="1500" dirty="0">
                 <a:solidFill>
-                  <a:srgbClr val="4A3524"/>
+                  <a:srgbClr val="2B3550"/>
                 </a:solidFill>
                 <a:latin typeface="Malgun Gothic" pitchFamily="34" charset="0"/>
                 <a:ea typeface="Malgun Gothic" pitchFamily="34" charset="-122"/>
@@ -12688,7 +13493,7 @@
             <a:r>
               <a:rPr lang="en-US" sz="1500" dirty="0">
                 <a:solidFill>
-                  <a:srgbClr val="4A3524"/>
+                  <a:srgbClr val="2B3550"/>
                 </a:solidFill>
                 <a:latin typeface="Malgun Gothic" pitchFamily="34" charset="0"/>
                 <a:ea typeface="Malgun Gothic" pitchFamily="34" charset="-122"/>
@@ -12727,7 +13532,7 @@
             <a:r>
               <a:rPr lang="en-US" sz="1100" dirty="0">
                 <a:solidFill>
-                  <a:srgbClr val="8A93A6"/>
+                  <a:srgbClr val="5B6478"/>
                 </a:solidFill>
                 <a:latin typeface="Malgun Gothic" pitchFamily="34" charset="0"/>
                 <a:ea typeface="Malgun Gothic" pitchFamily="34" charset="-122"/>
@@ -12739,6 +13544,30 @@
           </a:p>
         </p:txBody>
       </p:sp>
+      <p:pic>
+        <p:nvPicPr>
+          <p:cNvPr id="11" name="Picture 10" descr="s7_cart.png"/>
+          <p:cNvPicPr>
+            <a:picLocks noChangeAspect="1"/>
+          </p:cNvPicPr>
+          <p:nvPr/>
+        </p:nvPicPr>
+        <p:blipFill>
+          <a:blip r:embed="rId3"/>
+          <a:stretch>
+            <a:fillRect/>
+          </a:stretch>
+        </p:blipFill>
+        <p:spPr>
+          <a:xfrm>
+            <a:off x="10774680" y="274320"/>
+            <a:ext cx="603504" cy="603504"/>
+          </a:xfrm>
+          <a:prstGeom prst="rect">
+            <a:avLst/>
+          </a:prstGeom>
+        </p:spPr>
+      </p:pic>
     </p:spTree>
   </p:cSld>
   <p:clrMapOvr>
@@ -12753,7 +13582,7 @@
     <p:bg>
       <p:bgPr>
         <a:solidFill>
-          <a:srgbClr val="F7F6F2"/>
+          <a:srgbClr val="F5F7FC"/>
         </a:solidFill>
       </p:bgPr>
     </p:bg>
@@ -12798,7 +13627,7 @@
             <a:r>
               <a:rPr lang="en-US" sz="1500" b="1" dirty="0">
                 <a:solidFill>
-                  <a:srgbClr val="2F5FD0"/>
+                  <a:srgbClr val="5468FF"/>
                 </a:solidFill>
                 <a:latin typeface="Malgun Gothic" pitchFamily="34" charset="0"/>
                 <a:ea typeface="Malgun Gothic" pitchFamily="34" charset="-122"/>
@@ -12865,12 +13694,23 @@
               <a:gd name="adj" fmla="val 4706"/>
             </a:avLst>
           </a:prstGeom>
-          <a:solidFill>
-            <a:srgbClr val="FFFFFF"/>
-          </a:solidFill>
+          <a:gradFill rotWithShape="1">
+            <a:gsLst>
+              <a:gs pos="0">
+                <a:srgbClr val="FFFFFF"/>
+              </a:gs>
+              <a:gs pos="45000">
+                <a:srgbClr val="F0F2FF"/>
+              </a:gs>
+              <a:gs pos="100000">
+                <a:srgbClr val="DDE3FF"/>
+              </a:gs>
+            </a:gsLst>
+            <a:lin ang="4200000" scaled="0"/>
+          </a:gradFill>
           <a:ln w="12700">
             <a:solidFill>
-              <a:srgbClr val="E1E4EA"/>
+              <a:srgbClr val="E5E9F2"/>
             </a:solidFill>
             <a:prstDash val="solid"/>
           </a:ln>
@@ -12981,7 +13821,7 @@
             <a:r>
               <a:rPr lang="en-US" sz="1500" b="1" dirty="0">
                 <a:solidFill>
-                  <a:srgbClr val="C4581C"/>
+                  <a:srgbClr val="B42318"/>
                 </a:solidFill>
                 <a:latin typeface="Malgun Gothic" pitchFamily="34" charset="0"/>
                 <a:ea typeface="Malgun Gothic" pitchFamily="34" charset="-122"/>
@@ -13009,9 +13849,20 @@
               <a:gd name="adj" fmla="val 4706"/>
             </a:avLst>
           </a:prstGeom>
-          <a:solidFill>
-            <a:srgbClr val="14213D"/>
-          </a:solidFill>
+          <a:gradFill rotWithShape="1">
+            <a:gsLst>
+              <a:gs pos="0">
+                <a:srgbClr val="131A2E"/>
+              </a:gs>
+              <a:gs pos="55000">
+                <a:srgbClr val="1F2C6B"/>
+              </a:gs>
+              <a:gs pos="100000">
+                <a:srgbClr val="3346C9"/>
+              </a:gs>
+            </a:gsLst>
+            <a:lin ang="2280000" scaled="0"/>
+          </a:gradFill>
           <a:ln w="12700">
             <a:solidFill>
               <a:srgbClr val="14213D"/>
@@ -13086,7 +13937,7 @@
             <a:r>
               <a:rPr lang="en-US" sz="3200" b="1" dirty="0">
                 <a:solidFill>
-                  <a:srgbClr val="F7F6F2"/>
+                  <a:srgbClr val="F5F7FC"/>
                 </a:solidFill>
                 <a:latin typeface="Malgun Gothic" pitchFamily="34" charset="0"/>
                 <a:ea typeface="Malgun Gothic" pitchFamily="34" charset="-122"/>
@@ -13125,7 +13976,7 @@
             <a:r>
               <a:rPr lang="en-US" sz="1500" b="1" dirty="0">
                 <a:solidFill>
-                  <a:srgbClr val="F2A65A"/>
+                  <a:srgbClr val="9DAAFF"/>
                 </a:solidFill>
                 <a:latin typeface="Malgun Gothic" pitchFamily="34" charset="0"/>
                 <a:ea typeface="Malgun Gothic" pitchFamily="34" charset="-122"/>
@@ -13153,12 +14004,23 @@
               <a:gd name="adj" fmla="val 4706"/>
             </a:avLst>
           </a:prstGeom>
-          <a:solidFill>
-            <a:srgbClr val="FFFFFF"/>
-          </a:solidFill>
+          <a:gradFill rotWithShape="1">
+            <a:gsLst>
+              <a:gs pos="0">
+                <a:srgbClr val="FFFFFF"/>
+              </a:gs>
+              <a:gs pos="45000">
+                <a:srgbClr val="F0F2FF"/>
+              </a:gs>
+              <a:gs pos="100000">
+                <a:srgbClr val="DDE3FF"/>
+              </a:gs>
+            </a:gsLst>
+            <a:lin ang="4200000" scaled="0"/>
+          </a:gradFill>
           <a:ln w="12700">
             <a:solidFill>
-              <a:srgbClr val="E1E4EA"/>
+              <a:srgbClr val="E5E9F2"/>
             </a:solidFill>
             <a:prstDash val="solid"/>
           </a:ln>
@@ -13269,7 +14131,7 @@
             <a:r>
               <a:rPr lang="en-US" sz="1500" b="1" dirty="0">
                 <a:solidFill>
-                  <a:srgbClr val="C4581C"/>
+                  <a:srgbClr val="B42318"/>
                 </a:solidFill>
                 <a:latin typeface="Malgun Gothic" pitchFamily="34" charset="0"/>
                 <a:ea typeface="Malgun Gothic" pitchFamily="34" charset="-122"/>
@@ -13297,12 +14159,23 @@
               <a:gd name="adj" fmla="val 4706"/>
             </a:avLst>
           </a:prstGeom>
-          <a:solidFill>
-            <a:srgbClr val="FFFFFF"/>
-          </a:solidFill>
+          <a:gradFill rotWithShape="1">
+            <a:gsLst>
+              <a:gs pos="0">
+                <a:srgbClr val="FFFFFF"/>
+              </a:gs>
+              <a:gs pos="45000">
+                <a:srgbClr val="F0F2FF"/>
+              </a:gs>
+              <a:gs pos="100000">
+                <a:srgbClr val="DDE3FF"/>
+              </a:gs>
+            </a:gsLst>
+            <a:lin ang="4200000" scaled="0"/>
+          </a:gradFill>
           <a:ln w="12700">
             <a:solidFill>
-              <a:srgbClr val="E1E4EA"/>
+              <a:srgbClr val="E5E9F2"/>
             </a:solidFill>
             <a:prstDash val="solid"/>
           </a:ln>
@@ -13413,7 +14286,7 @@
             <a:r>
               <a:rPr lang="en-US" sz="1500" b="1" dirty="0">
                 <a:solidFill>
-                  <a:srgbClr val="C4581C"/>
+                  <a:srgbClr val="B42318"/>
                 </a:solidFill>
                 <a:latin typeface="Malgun Gothic" pitchFamily="34" charset="0"/>
                 <a:ea typeface="Malgun Gothic" pitchFamily="34" charset="-122"/>
@@ -13547,7 +14420,7 @@
             <a:r>
               <a:rPr lang="en-US" sz="1100" dirty="0">
                 <a:solidFill>
-                  <a:srgbClr val="8A93A6"/>
+                  <a:srgbClr val="5B6478"/>
                 </a:solidFill>
                 <a:latin typeface="Malgun Gothic" pitchFamily="34" charset="0"/>
                 <a:ea typeface="Malgun Gothic" pitchFamily="34" charset="-122"/>
@@ -13559,6 +14432,30 @@
           </a:p>
         </p:txBody>
       </p:sp>
+      <p:pic>
+        <p:nvPicPr>
+          <p:cNvPr id="23" name="Picture 22" descr="s8_magnifier.png"/>
+          <p:cNvPicPr>
+            <a:picLocks noChangeAspect="1"/>
+          </p:cNvPicPr>
+          <p:nvPr/>
+        </p:nvPicPr>
+        <p:blipFill>
+          <a:blip r:embed="rId3"/>
+          <a:stretch>
+            <a:fillRect/>
+          </a:stretch>
+        </p:blipFill>
+        <p:spPr>
+          <a:xfrm>
+            <a:off x="10774680" y="274320"/>
+            <a:ext cx="603504" cy="603504"/>
+          </a:xfrm>
+          <a:prstGeom prst="rect">
+            <a:avLst/>
+          </a:prstGeom>
+        </p:spPr>
+      </p:pic>
     </p:spTree>
   </p:cSld>
   <p:clrMapOvr>
@@ -13572,9 +14469,20 @@
   <p:cSld name="Slide 9">
     <p:bg>
       <p:bgPr>
-        <a:solidFill>
-          <a:srgbClr val="14213D"/>
-        </a:solidFill>
+        <a:gradFill rotWithShape="1">
+          <a:gsLst>
+            <a:gs pos="0">
+              <a:srgbClr val="131A2E"/>
+            </a:gs>
+            <a:gs pos="55000">
+              <a:srgbClr val="1F2C6B"/>
+            </a:gs>
+            <a:gs pos="100000">
+              <a:srgbClr val="3346C9"/>
+            </a:gs>
+          </a:gsLst>
+          <a:lin ang="2280000" scaled="0"/>
+        </a:gradFill>
       </p:bgPr>
     </p:bg>
     <p:spTree>
@@ -13618,7 +14526,7 @@
             <a:r>
               <a:rPr lang="en-US" sz="1500" b="1" dirty="0">
                 <a:solidFill>
-                  <a:srgbClr val="F2A65A"/>
+                  <a:srgbClr val="9DAAFF"/>
                 </a:solidFill>
                 <a:latin typeface="Malgun Gothic" pitchFamily="34" charset="0"/>
                 <a:ea typeface="Malgun Gothic" pitchFamily="34" charset="-122"/>
@@ -13657,7 +14565,7 @@
             <a:r>
               <a:rPr lang="en-US" sz="3200" b="1" dirty="0">
                 <a:solidFill>
-                  <a:srgbClr val="F7F6F2"/>
+                  <a:srgbClr val="F5F7FC"/>
                 </a:solidFill>
                 <a:latin typeface="Malgun Gothic" pitchFamily="34" charset="0"/>
                 <a:ea typeface="Malgun Gothic" pitchFamily="34" charset="-122"/>
@@ -13684,11 +14592,11 @@
             <a:avLst/>
           </a:prstGeom>
           <a:solidFill>
-            <a:srgbClr val="F2A65A"/>
+            <a:srgbClr val="9DAAFF"/>
           </a:solidFill>
           <a:ln w="12700">
             <a:solidFill>
-              <a:srgbClr val="F2A65A"/>
+              <a:srgbClr val="9DAAFF"/>
             </a:solidFill>
             <a:prstDash val="solid"/>
           </a:ln>
@@ -13760,7 +14668,7 @@
             <a:r>
               <a:rPr lang="en-US" sz="1600" dirty="0">
                 <a:solidFill>
-                  <a:srgbClr val="F7F6F2"/>
+                  <a:srgbClr val="F5F7FC"/>
                 </a:solidFill>
                 <a:latin typeface="Malgun Gothic" pitchFamily="34" charset="0"/>
                 <a:ea typeface="Malgun Gothic" pitchFamily="34" charset="-122"/>
@@ -13787,11 +14695,11 @@
             <a:avLst/>
           </a:prstGeom>
           <a:solidFill>
-            <a:srgbClr val="F2A65A"/>
+            <a:srgbClr val="9DAAFF"/>
           </a:solidFill>
           <a:ln w="12700">
             <a:solidFill>
-              <a:srgbClr val="F2A65A"/>
+              <a:srgbClr val="9DAAFF"/>
             </a:solidFill>
             <a:prstDash val="solid"/>
           </a:ln>
@@ -13863,7 +14771,7 @@
             <a:r>
               <a:rPr lang="en-US" sz="1600" dirty="0">
                 <a:solidFill>
-                  <a:srgbClr val="F7F6F2"/>
+                  <a:srgbClr val="F5F7FC"/>
                 </a:solidFill>
                 <a:latin typeface="Malgun Gothic" pitchFamily="34" charset="0"/>
                 <a:ea typeface="Malgun Gothic" pitchFamily="34" charset="-122"/>
@@ -13890,11 +14798,11 @@
             <a:avLst/>
           </a:prstGeom>
           <a:solidFill>
-            <a:srgbClr val="F2A65A"/>
+            <a:srgbClr val="9DAAFF"/>
           </a:solidFill>
           <a:ln w="12700">
             <a:solidFill>
-              <a:srgbClr val="F2A65A"/>
+              <a:srgbClr val="9DAAFF"/>
             </a:solidFill>
             <a:prstDash val="solid"/>
           </a:ln>
@@ -13966,7 +14874,7 @@
             <a:r>
               <a:rPr lang="en-US" sz="1600" dirty="0">
                 <a:solidFill>
-                  <a:srgbClr val="F7F6F2"/>
+                  <a:srgbClr val="F5F7FC"/>
                 </a:solidFill>
                 <a:latin typeface="Malgun Gothic" pitchFamily="34" charset="0"/>
                 <a:ea typeface="Malgun Gothic" pitchFamily="34" charset="-122"/>
@@ -13993,11 +14901,11 @@
             <a:avLst/>
           </a:prstGeom>
           <a:solidFill>
-            <a:srgbClr val="F2A65A"/>
+            <a:srgbClr val="9DAAFF"/>
           </a:solidFill>
           <a:ln w="12700">
             <a:solidFill>
-              <a:srgbClr val="F2A65A"/>
+              <a:srgbClr val="9DAAFF"/>
             </a:solidFill>
             <a:prstDash val="solid"/>
           </a:ln>
@@ -14069,7 +14977,7 @@
             <a:r>
               <a:rPr lang="en-US" sz="1600" dirty="0">
                 <a:solidFill>
-                  <a:srgbClr val="F7F6F2"/>
+                  <a:srgbClr val="F5F7FC"/>
                 </a:solidFill>
                 <a:latin typeface="Malgun Gothic" pitchFamily="34" charset="0"/>
                 <a:ea typeface="Malgun Gothic" pitchFamily="34" charset="-122"/>
@@ -14096,11 +15004,11 @@
             <a:avLst/>
           </a:prstGeom>
           <a:solidFill>
-            <a:srgbClr val="F2A65A"/>
+            <a:srgbClr val="9DAAFF"/>
           </a:solidFill>
           <a:ln w="12700">
             <a:solidFill>
-              <a:srgbClr val="F2A65A"/>
+              <a:srgbClr val="9DAAFF"/>
             </a:solidFill>
             <a:prstDash val="solid"/>
           </a:ln>
@@ -14172,7 +15080,7 @@
             <a:r>
               <a:rPr lang="en-US" sz="1600" dirty="0">
                 <a:solidFill>
-                  <a:srgbClr val="F7F6F2"/>
+                  <a:srgbClr val="F5F7FC"/>
                 </a:solidFill>
                 <a:latin typeface="Malgun Gothic" pitchFamily="34" charset="0"/>
                 <a:ea typeface="Malgun Gothic" pitchFamily="34" charset="-122"/>
@@ -14199,11 +15107,11 @@
             <a:avLst/>
           </a:prstGeom>
           <a:solidFill>
-            <a:srgbClr val="F2A65A"/>
+            <a:srgbClr val="9DAAFF"/>
           </a:solidFill>
           <a:ln w="12700">
             <a:solidFill>
-              <a:srgbClr val="F2A65A"/>
+              <a:srgbClr val="9DAAFF"/>
             </a:solidFill>
             <a:prstDash val="solid"/>
           </a:ln>
@@ -14275,7 +15183,7 @@
             <a:r>
               <a:rPr lang="en-US" sz="1600" dirty="0">
                 <a:solidFill>
-                  <a:srgbClr val="F7F6F2"/>
+                  <a:srgbClr val="F5F7FC"/>
                 </a:solidFill>
                 <a:latin typeface="Malgun Gothic" pitchFamily="34" charset="0"/>
                 <a:ea typeface="Malgun Gothic" pitchFamily="34" charset="-122"/>
@@ -14304,11 +15212,15 @@
             </a:avLst>
           </a:prstGeom>
           <a:solidFill>
-            <a:srgbClr val="1F2E52"/>
+            <a:srgbClr val="FFFFFF">
+              <a:alpha val="12000"/>
+            </a:srgbClr>
           </a:solidFill>
           <a:ln w="12700">
             <a:solidFill>
-              <a:srgbClr val="1F2E52"/>
+              <a:srgbClr val="FFFFFF">
+                <a:alpha val="12000"/>
+              </a:srgbClr>
             </a:solidFill>
             <a:prstDash val="solid"/>
           </a:ln>
@@ -14392,6 +15304,30 @@
           </a:p>
         </p:txBody>
       </p:sp>
+      <p:pic>
+        <p:nvPicPr>
+          <p:cNvPr id="26" name="Picture 25" descr="s9_laptop.png"/>
+          <p:cNvPicPr>
+            <a:picLocks noChangeAspect="1"/>
+          </p:cNvPicPr>
+          <p:nvPr/>
+        </p:nvPicPr>
+        <p:blipFill>
+          <a:blip r:embed="rId3"/>
+          <a:stretch>
+            <a:fillRect/>
+          </a:stretch>
+        </p:blipFill>
+        <p:spPr>
+          <a:xfrm>
+            <a:off x="10774680" y="274320"/>
+            <a:ext cx="603504" cy="603504"/>
+          </a:xfrm>
+          <a:prstGeom prst="rect">
+            <a:avLst/>
+          </a:prstGeom>
+        </p:spPr>
+      </p:pic>
     </p:spTree>
   </p:cSld>
   <p:clrMapOvr>

--- a/docs/presentation/M1_presentation_draft_v0.1.pptx
+++ b/docs/presentation/M1_presentation_draft_v0.1.pptx
@@ -4,6 +4,9 @@
   <p:sldMasterIdLst>
     <p:sldMasterId id="2147483648" r:id="rId1"/>
   </p:sldMasterIdLst>
+  <p:notesMasterIdLst>
+    <p:notesMasterId r:id="rId16"/>
+  </p:notesMasterIdLst>
   <p:sldIdLst>
     <p:sldId id="256" r:id="rId2"/>
     <p:sldId id="257" r:id="rId3"/>
@@ -20,9 +23,6 @@
     <p:sldId id="268" r:id="rId14"/>
     <p:sldId id="269" r:id="rId15"/>
   </p:sldIdLst>
-  <p:notesMasterIdLst>
-    <p:notesMasterId r:id="rId16"/>
-  </p:notesMasterIdLst>
   <p:sldSz cx="12192000" cy="6858000"/>
   <p:notesSz cx="6858000" cy="12192000"/>
   <p:defaultTextStyle>
@@ -117,6 +117,11 @@
       </a:defRPr>
     </a:lvl9pPr>
   </p:defaultTextStyle>
+  <p:extLst>
+    <p:ext uri="{EFAFB233-063F-42B5-8137-9DF3F51BA10A}">
+      <p15:sldGuideLst xmlns:p15="http://schemas.microsoft.com/office/powerpoint/2012/main"/>
+    </p:ext>
+  </p:extLst>
 </p:presentation>
 </file>
 
@@ -142,240 +147,16 @@
           <a:chExt cx="0" cy="0"/>
         </a:xfrm>
       </p:grpSpPr>
-      <p:sp>
-        <p:nvSpPr>
-          <p:cNvPr id="2" name="Header Placeholder 1"/>
-          <p:cNvSpPr>
-            <a:spLocks noGrp="1"/>
-          </p:cNvSpPr>
-          <p:nvPr>
-            <p:ph type="hdr" sz="quarter"/>
-          </p:nvPr>
-        </p:nvSpPr>
-        <p:spPr>
-          <a:xfrm>
-            <a:off x="0" y="0"/>
-            <a:ext cx="2971800" cy="458788"/>
-          </a:xfrm>
-          <a:prstGeom prst="rect">
-            <a:avLst/>
-          </a:prstGeom>
-        </p:spPr>
-        <p:txBody>
-          <a:bodyPr vert="horz" lIns="91440" tIns="45720" rIns="91440" bIns="45720" rtlCol="0"/>
-          <a:lstStyle>
-            <a:lvl1pPr algn="l">
-              <a:defRPr sz="1200"/>
-            </a:lvl1pPr>
-          </a:lstStyle>
-          <a:p>
-            <a:endParaRPr lang="en-US"/>
-          </a:p>
-        </p:txBody>
-      </p:sp>
-      <p:sp>
-        <p:nvSpPr>
-          <p:cNvPr id="3" name="Date Placeholder 2"/>
-          <p:cNvSpPr>
-            <a:spLocks noGrp="1"/>
-          </p:cNvSpPr>
-          <p:nvPr>
-            <p:ph type="dt" idx="1"/>
-          </p:nvPr>
-        </p:nvSpPr>
-        <p:spPr>
-          <a:xfrm>
-            <a:off x="3884613" y="0"/>
-            <a:ext cx="2971800" cy="458788"/>
-          </a:xfrm>
-          <a:prstGeom prst="rect">
-            <a:avLst/>
-          </a:prstGeom>
-        </p:spPr>
-        <p:txBody>
-          <a:bodyPr vert="horz" lIns="91440" tIns="45720" rIns="91440" bIns="45720" rtlCol="0"/>
-          <a:lstStyle>
-            <a:lvl1pPr algn="r">
-              <a:defRPr sz="1200"/>
-            </a:lvl1pPr>
-          </a:lstStyle>
-          <a:p>
-            <a:fld id="{5282F153-3F37-0F45-9E97-73ACFA13230C}" type="datetimeFigureOut">
-              <a:rPr lang="en-US"/>
-              <a:t>7/23/19</a:t>
-            </a:fld>
-            <a:endParaRPr lang="en-US"/>
-          </a:p>
-        </p:txBody>
-      </p:sp>
-      <p:sp>
-        <p:nvSpPr>
-          <p:cNvPr id="4" name="Slide Image Placeholder 3"/>
-          <p:cNvSpPr>
-            <a:spLocks noGrp="1" noRot="1" noChangeAspect="1"/>
-          </p:cNvSpPr>
-          <p:nvPr>
-            <p:ph type="sldImg" idx="2"/>
-          </p:nvPr>
-        </p:nvSpPr>
-        <p:spPr>
-          <a:xfrm>
-            <a:off x="685800" y="1143000"/>
-            <a:ext cx="5486400" cy="3086100"/>
-          </a:xfrm>
-          <a:prstGeom prst="rect">
-            <a:avLst/>
-          </a:prstGeom>
-          <a:noFill/>
-          <a:ln w="12700">
-            <a:solidFill>
-              <a:prstClr val="black"/>
-            </a:solidFill>
-          </a:ln>
-        </p:spPr>
-        <p:txBody>
-          <a:bodyPr vert="horz" lIns="91440" tIns="45720" rIns="91440" bIns="45720" rtlCol="0" anchor="ctr"/>
-          <a:lstStyle/>
-          <a:p>
-            <a:endParaRPr lang="en-US"/>
-          </a:p>
-        </p:txBody>
-      </p:sp>
-      <p:sp>
-        <p:nvSpPr>
-          <p:cNvPr id="5" name="Notes Placeholder 4"/>
-          <p:cNvSpPr>
-            <a:spLocks noGrp="1"/>
-          </p:cNvSpPr>
-          <p:nvPr>
-            <p:ph type="body" sz="quarter" idx="3"/>
-          </p:nvPr>
-        </p:nvSpPr>
-        <p:spPr>
-          <a:xfrm>
-            <a:off x="685800" y="4400550"/>
-            <a:ext cx="5486400" cy="3600450"/>
-          </a:xfrm>
-          <a:prstGeom prst="rect">
-            <a:avLst/>
-          </a:prstGeom>
-        </p:spPr>
-        <p:txBody>
-          <a:bodyPr vert="horz" lIns="91440" tIns="45720" rIns="91440" bIns="45720" rtlCol="0"/>
-          <a:lstStyle/>
-          <a:p>
-            <a:pPr lvl="0"/>
-            <a:r>
-              <a:rPr lang="en-US"/>
-              <a:t>Click to edit Master text styles</a:t>
-            </a:r>
-          </a:p>
-          <a:p>
-            <a:pPr lvl="1"/>
-            <a:r>
-              <a:rPr lang="en-US"/>
-              <a:t>Second level</a:t>
-            </a:r>
-          </a:p>
-          <a:p>
-            <a:pPr lvl="2"/>
-            <a:r>
-              <a:rPr lang="en-US"/>
-              <a:t>Third level</a:t>
-            </a:r>
-          </a:p>
-          <a:p>
-            <a:pPr lvl="3"/>
-            <a:r>
-              <a:rPr lang="en-US"/>
-              <a:t>Fourth level</a:t>
-            </a:r>
-          </a:p>
-          <a:p>
-            <a:pPr lvl="4"/>
-            <a:r>
-              <a:rPr lang="en-US"/>
-              <a:t>Fifth level</a:t>
-            </a:r>
-          </a:p>
-        </p:txBody>
-      </p:sp>
-      <p:sp>
-        <p:nvSpPr>
-          <p:cNvPr id="6" name="Footer Placeholder 5"/>
-          <p:cNvSpPr>
-            <a:spLocks noGrp="1"/>
-          </p:cNvSpPr>
-          <p:nvPr>
-            <p:ph type="ftr" sz="quarter" idx="4"/>
-          </p:nvPr>
-        </p:nvSpPr>
-        <p:spPr>
-          <a:xfrm>
-            <a:off x="0" y="8685213"/>
-            <a:ext cx="2971800" cy="458787"/>
-          </a:xfrm>
-          <a:prstGeom prst="rect">
-            <a:avLst/>
-          </a:prstGeom>
-        </p:spPr>
-        <p:txBody>
-          <a:bodyPr vert="horz" lIns="91440" tIns="45720" rIns="91440" bIns="45720" rtlCol="0" anchor="b"/>
-          <a:lstStyle>
-            <a:lvl1pPr algn="l">
-              <a:defRPr sz="1200"/>
-            </a:lvl1pPr>
-          </a:lstStyle>
-          <a:p>
-            <a:endParaRPr lang="en-US"/>
-          </a:p>
-        </p:txBody>
-      </p:sp>
-      <p:sp>
-        <p:nvSpPr>
-          <p:cNvPr id="7" name="Slide Number Placeholder 6"/>
-          <p:cNvSpPr>
-            <a:spLocks noGrp="1"/>
-          </p:cNvSpPr>
-          <p:nvPr>
-            <p:ph type="sldNum" sz="quarter" idx="5"/>
-          </p:nvPr>
-        </p:nvSpPr>
-        <p:spPr>
-          <a:xfrm>
-            <a:off x="3884613" y="8685213"/>
-            <a:ext cx="2971800" cy="458787"/>
-          </a:xfrm>
-          <a:prstGeom prst="rect">
-            <a:avLst/>
-          </a:prstGeom>
-        </p:spPr>
-        <p:txBody>
-          <a:bodyPr vert="horz" lIns="91440" tIns="45720" rIns="91440" bIns="45720" rtlCol="0" anchor="b"/>
-          <a:lstStyle>
-            <a:lvl1pPr algn="r">
-              <a:defRPr sz="1200"/>
-            </a:lvl1pPr>
-          </a:lstStyle>
-          <a:p>
-            <a:fld id="{CE5E9CC1-C706-0F49-92D6-E571CC5EEA8F}" type="slidenum">
-              <a:rPr lang="en-US"/>
-              <a:t>‹#›</a:t>
-            </a:fld>
-            <a:endParaRPr lang="en-US"/>
-          </a:p>
-        </p:txBody>
-      </p:sp>
     </p:spTree>
     <p:extLst>
       <p:ext uri="{BB962C8B-B14F-4D97-AF65-F5344CB8AC3E}">
-        <p14:creationId xmlns:p14="http://schemas.microsoft.com/office/powerpoint/2010/main" val="1024086991"/>
+        <p14:creationId xmlns:p14="http://schemas.microsoft.com/office/powerpoint/2010/main" val="2115235852"/>
       </p:ext>
     </p:extLst>
   </p:cSld>
   <p:clrMap bg1="lt1" tx1="dk1" bg2="lt2" tx2="dk2" accent1="accent1" accent2="accent2" accent3="accent3" accent4="accent4" accent5="accent5" accent6="accent6" hlink="hlink" folHlink="folHlink"/>
   <p:notesStyle>
-    <a:lvl1pPr marL="0" algn="l" defTabSz="914400" rtl="0" eaLnBrk="1" latinLnBrk="0" hangingPunct="1">
+    <a:lvl1pPr marL="0" algn="l" defTabSz="914400" rtl="0" eaLnBrk="1" latinLnBrk="1" hangingPunct="1">
       <a:defRPr sz="1200" kern="1200">
         <a:solidFill>
           <a:schemeClr val="tx1"/>
@@ -385,7 +166,7 @@
         <a:cs typeface="+mn-cs"/>
       </a:defRPr>
     </a:lvl1pPr>
-    <a:lvl2pPr marL="457200" algn="l" defTabSz="914400" rtl="0" eaLnBrk="1" latinLnBrk="0" hangingPunct="1">
+    <a:lvl2pPr marL="457200" algn="l" defTabSz="914400" rtl="0" eaLnBrk="1" latinLnBrk="1" hangingPunct="1">
       <a:defRPr sz="1200" kern="1200">
         <a:solidFill>
           <a:schemeClr val="tx1"/>
@@ -395,7 +176,7 @@
         <a:cs typeface="+mn-cs"/>
       </a:defRPr>
     </a:lvl2pPr>
-    <a:lvl3pPr marL="914400" algn="l" defTabSz="914400" rtl="0" eaLnBrk="1" latinLnBrk="0" hangingPunct="1">
+    <a:lvl3pPr marL="914400" algn="l" defTabSz="914400" rtl="0" eaLnBrk="1" latinLnBrk="1" hangingPunct="1">
       <a:defRPr sz="1200" kern="1200">
         <a:solidFill>
           <a:schemeClr val="tx1"/>
@@ -405,7 +186,7 @@
         <a:cs typeface="+mn-cs"/>
       </a:defRPr>
     </a:lvl3pPr>
-    <a:lvl4pPr marL="1371600" algn="l" defTabSz="914400" rtl="0" eaLnBrk="1" latinLnBrk="0" hangingPunct="1">
+    <a:lvl4pPr marL="1371600" algn="l" defTabSz="914400" rtl="0" eaLnBrk="1" latinLnBrk="1" hangingPunct="1">
       <a:defRPr sz="1200" kern="1200">
         <a:solidFill>
           <a:schemeClr val="tx1"/>
@@ -415,7 +196,7 @@
         <a:cs typeface="+mn-cs"/>
       </a:defRPr>
     </a:lvl4pPr>
-    <a:lvl5pPr marL="1828800" algn="l" defTabSz="914400" rtl="0" eaLnBrk="1" latinLnBrk="0" hangingPunct="1">
+    <a:lvl5pPr marL="1828800" algn="l" defTabSz="914400" rtl="0" eaLnBrk="1" latinLnBrk="1" hangingPunct="1">
       <a:defRPr sz="1200" kern="1200">
         <a:solidFill>
           <a:schemeClr val="tx1"/>
@@ -425,7 +206,7 @@
         <a:cs typeface="+mn-cs"/>
       </a:defRPr>
     </a:lvl5pPr>
-    <a:lvl6pPr marL="2286000" algn="l" defTabSz="914400" rtl="0" eaLnBrk="1" latinLnBrk="0" hangingPunct="1">
+    <a:lvl6pPr marL="2286000" algn="l" defTabSz="914400" rtl="0" eaLnBrk="1" latinLnBrk="1" hangingPunct="1">
       <a:defRPr sz="1200" kern="1200">
         <a:solidFill>
           <a:schemeClr val="tx1"/>
@@ -435,7 +216,7 @@
         <a:cs typeface="+mn-cs"/>
       </a:defRPr>
     </a:lvl6pPr>
-    <a:lvl7pPr marL="2743200" algn="l" defTabSz="914400" rtl="0" eaLnBrk="1" latinLnBrk="0" hangingPunct="1">
+    <a:lvl7pPr marL="2743200" algn="l" defTabSz="914400" rtl="0" eaLnBrk="1" latinLnBrk="1" hangingPunct="1">
       <a:defRPr sz="1200" kern="1200">
         <a:solidFill>
           <a:schemeClr val="tx1"/>
@@ -445,7 +226,7 @@
         <a:cs typeface="+mn-cs"/>
       </a:defRPr>
     </a:lvl7pPr>
-    <a:lvl8pPr marL="3200400" algn="l" defTabSz="914400" rtl="0" eaLnBrk="1" latinLnBrk="0" hangingPunct="1">
+    <a:lvl8pPr marL="3200400" algn="l" defTabSz="914400" rtl="0" eaLnBrk="1" latinLnBrk="1" hangingPunct="1">
       <a:defRPr sz="1200" kern="1200">
         <a:solidFill>
           <a:schemeClr val="tx1"/>
@@ -455,7 +236,7 @@
         <a:cs typeface="+mn-cs"/>
       </a:defRPr>
     </a:lvl8pPr>
-    <a:lvl9pPr marL="3657600" algn="l" defTabSz="914400" rtl="0" eaLnBrk="1" latinLnBrk="0" hangingPunct="1">
+    <a:lvl9pPr marL="3657600" algn="l" defTabSz="914400" rtl="0" eaLnBrk="1" latinLnBrk="1" hangingPunct="1">
       <a:defRPr sz="1200" kern="1200">
         <a:solidFill>
           <a:schemeClr val="tx1"/>
@@ -2066,6 +1847,11 @@
 <file path=ppt/slideMasters/slideMaster1.xml><?xml version="1.0" encoding="utf-8"?>
 <p:sldMaster xmlns:a="http://schemas.openxmlformats.org/drawingml/2006/main" xmlns:r="http://schemas.openxmlformats.org/officeDocument/2006/relationships" xmlns:p="http://schemas.openxmlformats.org/presentationml/2006/main">
   <p:cSld>
+    <p:bg>
+      <p:bgRef idx="1001">
+        <a:schemeClr val="bg1"/>
+      </p:bgRef>
+    </p:bg>
     <p:spTree>
       <p:nvGrpSpPr>
         <p:cNvPr id="1" name=""/>
@@ -2359,6 +2145,7 @@
           </a:gsLst>
           <a:lin ang="2280000" scaled="0"/>
         </a:gradFill>
+        <a:effectLst/>
       </p:bgPr>
     </p:bg>
     <p:spTree>
@@ -2396,11 +2183,11 @@
           <a:bodyPr wrap="square" lIns="0" tIns="0" rIns="0" bIns="0" rtlCol="0" anchor="t"/>
           <a:lstStyle/>
           <a:p>
-            <a:pPr indent="0" marL="0">
-              <a:buNone/>
-            </a:pPr>
-            <a:r>
-              <a:rPr lang="en-US" sz="1500" b="1" spc="200" kern="0" dirty="0">
+            <a:pPr marL="0" indent="0">
+              <a:buNone/>
+            </a:pPr>
+            <a:r>
+              <a:rPr lang="en-US" sz="1500" b="1" kern="0" spc="200" dirty="0">
                 <a:solidFill>
                   <a:srgbClr val="9DAAFF"/>
                 </a:solidFill>
@@ -2435,7 +2222,7 @@
           <a:bodyPr wrap="square" lIns="0" tIns="0" rIns="0" bIns="0" rtlCol="0" anchor="t"/>
           <a:lstStyle/>
           <a:p>
-            <a:pPr indent="0" marL="0">
+            <a:pPr marL="0" indent="0">
               <a:buNone/>
             </a:pPr>
             <a:r>
@@ -2474,7 +2261,7 @@
           <a:bodyPr wrap="square" lIns="0" tIns="0" rIns="0" bIns="0" rtlCol="0" anchor="t"/>
           <a:lstStyle/>
           <a:p>
-            <a:pPr indent="0" marL="0">
+            <a:pPr marL="0" indent="0">
               <a:lnSpc>
                 <a:spcPct val="125000"/>
               </a:lnSpc>
@@ -2494,7 +2281,7 @@
             <a:endParaRPr lang="en-US" sz="2000" dirty="0"/>
           </a:p>
           <a:p>
-            <a:pPr indent="0" marL="0">
+            <a:pPr marL="0" indent="0">
               <a:lnSpc>
                 <a:spcPct val="125000"/>
               </a:lnSpc>
@@ -2536,7 +2323,7 @@
           <a:bodyPr wrap="square" lIns="0" tIns="0" rIns="0" bIns="0" rtlCol="0" anchor="t"/>
           <a:lstStyle/>
           <a:p>
-            <a:pPr indent="0" marL="0">
+            <a:pPr marL="0" indent="0">
               <a:buNone/>
             </a:pPr>
             <a:r>
@@ -2575,7 +2362,7 @@
           <a:bodyPr wrap="square" lIns="0" tIns="0" rIns="0" bIns="0" rtlCol="0" anchor="t"/>
           <a:lstStyle/>
           <a:p>
-            <a:pPr algn="r" indent="0" marL="0">
+            <a:pPr marL="0" indent="0" algn="r">
               <a:buNone/>
             </a:pPr>
             <a:r>
@@ -2609,8 +2396,8 @@
         </p:blipFill>
         <p:spPr>
           <a:xfrm>
-            <a:off x="8717280" y="1828800"/>
-            <a:ext cx="2377440" cy="2377440"/>
+            <a:off x="6384874" y="978134"/>
+            <a:ext cx="4901732" cy="4901732"/>
           </a:xfrm>
           <a:prstGeom prst="rect">
             <a:avLst/>
@@ -2633,6 +2420,7 @@
         <a:solidFill>
           <a:srgbClr val="F5F7FC"/>
         </a:solidFill>
+        <a:effectLst/>
       </p:bgPr>
     </p:bg>
     <p:spTree>
@@ -2670,7 +2458,7 @@
           <a:bodyPr wrap="square" lIns="0" tIns="0" rIns="0" bIns="0" rtlCol="0" anchor="t"/>
           <a:lstStyle/>
           <a:p>
-            <a:pPr indent="0" marL="0">
+            <a:pPr marL="0" indent="0">
               <a:buNone/>
             </a:pPr>
             <a:r>
@@ -2709,7 +2497,7 @@
           <a:bodyPr wrap="square" lIns="0" tIns="0" rIns="0" bIns="0" rtlCol="0" anchor="t"/>
           <a:lstStyle/>
           <a:p>
-            <a:pPr indent="0" marL="0">
+            <a:pPr marL="0" indent="0">
               <a:buNone/>
             </a:pPr>
             <a:r>
@@ -2748,7 +2536,7 @@
           <a:bodyPr wrap="square" lIns="0" tIns="0" rIns="0" bIns="0" rtlCol="0" anchor="t"/>
           <a:lstStyle/>
           <a:p>
-            <a:pPr indent="0" marL="0">
+            <a:pPr marL="0" indent="0">
               <a:buNone/>
             </a:pPr>
             <a:r>
@@ -2812,7 +2600,7 @@
           <a:noFill/>
         </p:spPr>
         <p:txBody>
-          <a:bodyPr wrap="square" lIns="0" rIns="0" tIns="0" bIns="0">
+          <a:bodyPr wrap="square" lIns="0" tIns="0" rIns="0" bIns="0">
             <a:spAutoFit/>
           </a:bodyPr>
           <a:lstStyle/>
@@ -2881,7 +2669,7 @@
           <a:noFill/>
         </p:spPr>
         <p:txBody>
-          <a:bodyPr wrap="square" lIns="0" rIns="0" tIns="0" bIns="0">
+          <a:bodyPr wrap="square" lIns="0" tIns="0" rIns="0" bIns="0">
             <a:spAutoFit/>
           </a:bodyPr>
           <a:lstStyle/>
@@ -2950,7 +2738,7 @@
           <a:noFill/>
         </p:spPr>
         <p:txBody>
-          <a:bodyPr wrap="square" lIns="0" rIns="0" tIns="0" bIns="0">
+          <a:bodyPr wrap="square" lIns="0" tIns="0" rIns="0" bIns="0">
             <a:spAutoFit/>
           </a:bodyPr>
           <a:lstStyle/>
@@ -3019,7 +2807,7 @@
           <a:noFill/>
         </p:spPr>
         <p:txBody>
-          <a:bodyPr wrap="square" lIns="0" rIns="0" tIns="0" bIns="0">
+          <a:bodyPr wrap="square" lIns="0" tIns="0" rIns="0" bIns="0">
             <a:spAutoFit/>
           </a:bodyPr>
           <a:lstStyle/>
@@ -3077,6 +2865,7 @@
         <a:solidFill>
           <a:srgbClr val="F5F7FC"/>
         </a:solidFill>
+        <a:effectLst/>
       </p:bgPr>
     </p:bg>
     <p:spTree>
@@ -3114,7 +2903,7 @@
           <a:bodyPr wrap="square" lIns="0" tIns="0" rIns="0" bIns="0" rtlCol="0" anchor="t"/>
           <a:lstStyle/>
           <a:p>
-            <a:pPr indent="0" marL="0">
+            <a:pPr marL="0" indent="0">
               <a:buNone/>
             </a:pPr>
             <a:r>
@@ -3153,7 +2942,7 @@
           <a:bodyPr wrap="square" lIns="0" tIns="0" rIns="0" bIns="0" rtlCol="0" anchor="t"/>
           <a:lstStyle/>
           <a:p>
-            <a:pPr indent="0" marL="0">
+            <a:pPr marL="0" indent="0">
               <a:buNone/>
             </a:pPr>
             <a:r>
@@ -3187,17 +2976,41 @@
         </p:nvGraphicFramePr>
         <p:xfrm>
           <a:off x="813816" y="2148840"/>
-          <a:ext cx="10564063" cy="914400"/>
+          <a:ext cx="10566806" cy="3401568"/>
         </p:xfrm>
         <a:graphic>
           <a:graphicData uri="http://schemas.openxmlformats.org/drawingml/2006/table">
             <a:tbl>
               <a:tblPr/>
               <a:tblGrid>
-                <a:gridCol w="2377440"/>
-                <a:gridCol w="4754880"/>
-                <a:gridCol w="1828800"/>
-                <a:gridCol w="1605686"/>
+                <a:gridCol w="2377440">
+                  <a:extLst>
+                    <a:ext uri="{9D8B030D-6E8A-4147-A177-3AD203B41FA5}">
+                      <a16:colId xmlns:a16="http://schemas.microsoft.com/office/drawing/2014/main" val="20000"/>
+                    </a:ext>
+                  </a:extLst>
+                </a:gridCol>
+                <a:gridCol w="4754880">
+                  <a:extLst>
+                    <a:ext uri="{9D8B030D-6E8A-4147-A177-3AD203B41FA5}">
+                      <a16:colId xmlns:a16="http://schemas.microsoft.com/office/drawing/2014/main" val="20001"/>
+                    </a:ext>
+                  </a:extLst>
+                </a:gridCol>
+                <a:gridCol w="1828800">
+                  <a:extLst>
+                    <a:ext uri="{9D8B030D-6E8A-4147-A177-3AD203B41FA5}">
+                      <a16:colId xmlns:a16="http://schemas.microsoft.com/office/drawing/2014/main" val="20002"/>
+                    </a:ext>
+                  </a:extLst>
+                </a:gridCol>
+                <a:gridCol w="1605686">
+                  <a:extLst>
+                    <a:ext uri="{9D8B030D-6E8A-4147-A177-3AD203B41FA5}">
+                      <a16:colId xmlns:a16="http://schemas.microsoft.com/office/drawing/2014/main" val="20003"/>
+                    </a:ext>
+                  </a:extLst>
+                </a:gridCol>
               </a:tblGrid>
               <a:tr h="566928">
                 <a:tc>
@@ -3205,7 +3018,7 @@
                     <a:bodyPr/>
                     <a:lstStyle/>
                     <a:p>
-                      <a:pPr indent="0" marL="0">
+                      <a:pPr marL="0" indent="0">
                         <a:buNone/>
                       </a:pPr>
                       <a:r>
@@ -3273,7 +3086,7 @@
                     <a:bodyPr/>
                     <a:lstStyle/>
                     <a:p>
-                      <a:pPr indent="0" marL="0">
+                      <a:pPr marL="0" indent="0">
                         <a:buNone/>
                       </a:pPr>
                       <a:r>
@@ -3341,7 +3154,7 @@
                     <a:bodyPr/>
                     <a:lstStyle/>
                     <a:p>
-                      <a:pPr indent="0" marL="0">
+                      <a:pPr marL="0" indent="0">
                         <a:buNone/>
                       </a:pPr>
                       <a:r>
@@ -3409,7 +3222,7 @@
                     <a:bodyPr/>
                     <a:lstStyle/>
                     <a:p>
-                      <a:pPr indent="0" marL="0">
+                      <a:pPr marL="0" indent="0">
                         <a:buNone/>
                       </a:pPr>
                       <a:r>
@@ -3472,6 +3285,11 @@
                     </a:solidFill>
                   </a:tcPr>
                 </a:tc>
+                <a:extLst>
+                  <a:ext uri="{0D108BD9-81ED-4DB2-BD59-A6C34878D82A}">
+                    <a16:rowId xmlns:a16="http://schemas.microsoft.com/office/drawing/2014/main" val="10000"/>
+                  </a:ext>
+                </a:extLst>
               </a:tr>
               <a:tr h="566928">
                 <a:tc>
@@ -3479,7 +3297,7 @@
                     <a:bodyPr/>
                     <a:lstStyle/>
                     <a:p>
-                      <a:pPr indent="0" marL="0">
+                      <a:pPr marL="0" indent="0">
                         <a:buNone/>
                       </a:pPr>
                       <a:r>
@@ -3547,7 +3365,7 @@
                     <a:bodyPr/>
                     <a:lstStyle/>
                     <a:p>
-                      <a:pPr indent="0" marL="0">
+                      <a:pPr marL="0" indent="0">
                         <a:buNone/>
                       </a:pPr>
                       <a:r>
@@ -3615,7 +3433,7 @@
                     <a:bodyPr/>
                     <a:lstStyle/>
                     <a:p>
-                      <a:pPr indent="0" marL="0">
+                      <a:pPr marL="0" indent="0">
                         <a:buNone/>
                       </a:pPr>
                       <a:r>
@@ -3683,7 +3501,7 @@
                     <a:bodyPr/>
                     <a:lstStyle/>
                     <a:p>
-                      <a:pPr indent="0" marL="0">
+                      <a:pPr marL="0" indent="0">
                         <a:buNone/>
                       </a:pPr>
                       <a:r>
@@ -3746,6 +3564,11 @@
                     </a:solidFill>
                   </a:tcPr>
                 </a:tc>
+                <a:extLst>
+                  <a:ext uri="{0D108BD9-81ED-4DB2-BD59-A6C34878D82A}">
+                    <a16:rowId xmlns:a16="http://schemas.microsoft.com/office/drawing/2014/main" val="10001"/>
+                  </a:ext>
+                </a:extLst>
               </a:tr>
               <a:tr h="566928">
                 <a:tc>
@@ -3753,7 +3576,7 @@
                     <a:bodyPr/>
                     <a:lstStyle/>
                     <a:p>
-                      <a:pPr indent="0" marL="0">
+                      <a:pPr marL="0" indent="0">
                         <a:buNone/>
                       </a:pPr>
                       <a:r>
@@ -3821,7 +3644,7 @@
                     <a:bodyPr/>
                     <a:lstStyle/>
                     <a:p>
-                      <a:pPr indent="0" marL="0">
+                      <a:pPr marL="0" indent="0">
                         <a:buNone/>
                       </a:pPr>
                       <a:r>
@@ -3889,7 +3712,7 @@
                     <a:bodyPr/>
                     <a:lstStyle/>
                     <a:p>
-                      <a:pPr indent="0" marL="0">
+                      <a:pPr marL="0" indent="0">
                         <a:buNone/>
                       </a:pPr>
                       <a:r>
@@ -3957,7 +3780,7 @@
                     <a:bodyPr/>
                     <a:lstStyle/>
                     <a:p>
-                      <a:pPr indent="0" marL="0">
+                      <a:pPr marL="0" indent="0">
                         <a:buNone/>
                       </a:pPr>
                       <a:r>
@@ -4020,6 +3843,11 @@
                     </a:solidFill>
                   </a:tcPr>
                 </a:tc>
+                <a:extLst>
+                  <a:ext uri="{0D108BD9-81ED-4DB2-BD59-A6C34878D82A}">
+                    <a16:rowId xmlns:a16="http://schemas.microsoft.com/office/drawing/2014/main" val="10002"/>
+                  </a:ext>
+                </a:extLst>
               </a:tr>
               <a:tr h="566928">
                 <a:tc>
@@ -4027,7 +3855,7 @@
                     <a:bodyPr/>
                     <a:lstStyle/>
                     <a:p>
-                      <a:pPr indent="0" marL="0">
+                      <a:pPr marL="0" indent="0">
                         <a:buNone/>
                       </a:pPr>
                       <a:r>
@@ -4095,7 +3923,7 @@
                     <a:bodyPr/>
                     <a:lstStyle/>
                     <a:p>
-                      <a:pPr indent="0" marL="0">
+                      <a:pPr marL="0" indent="0">
                         <a:buNone/>
                       </a:pPr>
                       <a:r>
@@ -4163,7 +3991,7 @@
                     <a:bodyPr/>
                     <a:lstStyle/>
                     <a:p>
-                      <a:pPr indent="0" marL="0">
+                      <a:pPr marL="0" indent="0">
                         <a:buNone/>
                       </a:pPr>
                       <a:r>
@@ -4231,7 +4059,7 @@
                     <a:bodyPr/>
                     <a:lstStyle/>
                     <a:p>
-                      <a:pPr indent="0" marL="0">
+                      <a:pPr marL="0" indent="0">
                         <a:buNone/>
                       </a:pPr>
                       <a:r>
@@ -4294,6 +4122,11 @@
                     </a:solidFill>
                   </a:tcPr>
                 </a:tc>
+                <a:extLst>
+                  <a:ext uri="{0D108BD9-81ED-4DB2-BD59-A6C34878D82A}">
+                    <a16:rowId xmlns:a16="http://schemas.microsoft.com/office/drawing/2014/main" val="10003"/>
+                  </a:ext>
+                </a:extLst>
               </a:tr>
               <a:tr h="566928">
                 <a:tc>
@@ -4301,7 +4134,7 @@
                     <a:bodyPr/>
                     <a:lstStyle/>
                     <a:p>
-                      <a:pPr indent="0" marL="0">
+                      <a:pPr marL="0" indent="0">
                         <a:buNone/>
                       </a:pPr>
                       <a:r>
@@ -4369,7 +4202,7 @@
                     <a:bodyPr/>
                     <a:lstStyle/>
                     <a:p>
-                      <a:pPr indent="0" marL="0">
+                      <a:pPr marL="0" indent="0">
                         <a:buNone/>
                       </a:pPr>
                       <a:r>
@@ -4437,7 +4270,7 @@
                     <a:bodyPr/>
                     <a:lstStyle/>
                     <a:p>
-                      <a:pPr indent="0" marL="0">
+                      <a:pPr marL="0" indent="0">
                         <a:buNone/>
                       </a:pPr>
                       <a:r>
@@ -4505,7 +4338,7 @@
                     <a:bodyPr/>
                     <a:lstStyle/>
                     <a:p>
-                      <a:pPr indent="0" marL="0">
+                      <a:pPr marL="0" indent="0">
                         <a:buNone/>
                       </a:pPr>
                       <a:r>
@@ -4568,6 +4401,11 @@
                     </a:solidFill>
                   </a:tcPr>
                 </a:tc>
+                <a:extLst>
+                  <a:ext uri="{0D108BD9-81ED-4DB2-BD59-A6C34878D82A}">
+                    <a16:rowId xmlns:a16="http://schemas.microsoft.com/office/drawing/2014/main" val="10004"/>
+                  </a:ext>
+                </a:extLst>
               </a:tr>
               <a:tr h="566928">
                 <a:tc>
@@ -4575,7 +4413,7 @@
                     <a:bodyPr/>
                     <a:lstStyle/>
                     <a:p>
-                      <a:pPr indent="0" marL="0">
+                      <a:pPr marL="0" indent="0">
                         <a:buNone/>
                       </a:pPr>
                       <a:r>
@@ -4643,7 +4481,7 @@
                     <a:bodyPr/>
                     <a:lstStyle/>
                     <a:p>
-                      <a:pPr indent="0" marL="0">
+                      <a:pPr marL="0" indent="0">
                         <a:buNone/>
                       </a:pPr>
                       <a:r>
@@ -4711,7 +4549,7 @@
                     <a:bodyPr/>
                     <a:lstStyle/>
                     <a:p>
-                      <a:pPr indent="0" marL="0">
+                      <a:pPr marL="0" indent="0">
                         <a:buNone/>
                       </a:pPr>
                       <a:r>
@@ -4779,7 +4617,7 @@
                     <a:bodyPr/>
                     <a:lstStyle/>
                     <a:p>
-                      <a:pPr indent="0" marL="0">
+                      <a:pPr marL="0" indent="0">
                         <a:buNone/>
                       </a:pPr>
                       <a:r>
@@ -4842,6 +4680,11 @@
                     </a:solidFill>
                   </a:tcPr>
                 </a:tc>
+                <a:extLst>
+                  <a:ext uri="{0D108BD9-81ED-4DB2-BD59-A6C34878D82A}">
+                    <a16:rowId xmlns:a16="http://schemas.microsoft.com/office/drawing/2014/main" val="10005"/>
+                  </a:ext>
+                </a:extLst>
               </a:tr>
             </a:tbl>
           </a:graphicData>
@@ -4868,7 +4711,7 @@
           <a:bodyPr wrap="square" lIns="0" tIns="0" rIns="0" bIns="0" rtlCol="0" anchor="t"/>
           <a:lstStyle/>
           <a:p>
-            <a:pPr indent="0" marL="0">
+            <a:pPr marL="0" indent="0">
               <a:buNone/>
             </a:pPr>
             <a:r>
@@ -4926,6 +4769,7 @@
         <a:solidFill>
           <a:srgbClr val="F5F7FC"/>
         </a:solidFill>
+        <a:effectLst/>
       </p:bgPr>
     </p:bg>
     <p:spTree>
@@ -4963,7 +4807,7 @@
           <a:bodyPr wrap="square" lIns="0" tIns="0" rIns="0" bIns="0" rtlCol="0" anchor="t"/>
           <a:lstStyle/>
           <a:p>
-            <a:pPr indent="0" marL="0">
+            <a:pPr marL="0" indent="0">
               <a:buNone/>
             </a:pPr>
             <a:r>
@@ -5002,7 +4846,7 @@
           <a:bodyPr wrap="square" lIns="0" tIns="0" rIns="0" bIns="0" rtlCol="0" anchor="t"/>
           <a:lstStyle/>
           <a:p>
-            <a:pPr indent="0" marL="0">
+            <a:pPr marL="0" indent="0">
               <a:buNone/>
             </a:pPr>
             <a:r>
@@ -5104,7 +4948,7 @@
           <a:bodyPr wrap="square" lIns="0" tIns="0" rIns="0" bIns="0" rtlCol="0" anchor="ctr"/>
           <a:lstStyle/>
           <a:p>
-            <a:pPr algn="ctr" indent="0" marL="0">
+            <a:pPr marL="0" indent="0" algn="ctr">
               <a:buNone/>
             </a:pPr>
             <a:r>
@@ -5143,7 +4987,7 @@
           <a:bodyPr wrap="square" lIns="0" tIns="0" rIns="0" bIns="0" rtlCol="0" anchor="t"/>
           <a:lstStyle/>
           <a:p>
-            <a:pPr indent="0" marL="0">
+            <a:pPr marL="0" indent="0">
               <a:buNone/>
             </a:pPr>
             <a:r>
@@ -5182,7 +5026,7 @@
           <a:bodyPr wrap="square" lIns="0" tIns="0" rIns="0" bIns="0" rtlCol="0" anchor="t"/>
           <a:lstStyle/>
           <a:p>
-            <a:pPr indent="0" marL="0">
+            <a:pPr marL="0" indent="0">
               <a:lnSpc>
                 <a:spcPct val="130000"/>
               </a:lnSpc>
@@ -5202,7 +5046,7 @@
             <a:endParaRPr lang="en-US" sz="1500" dirty="0"/>
           </a:p>
           <a:p>
-            <a:pPr indent="0" marL="0">
+            <a:pPr marL="0" indent="0">
               <a:lnSpc>
                 <a:spcPct val="130000"/>
               </a:lnSpc>
@@ -5222,7 +5066,7 @@
             <a:endParaRPr lang="en-US" sz="1500" dirty="0"/>
           </a:p>
           <a:p>
-            <a:pPr indent="0" marL="0">
+            <a:pPr marL="0" indent="0">
               <a:lnSpc>
                 <a:spcPct val="130000"/>
               </a:lnSpc>
@@ -5327,7 +5171,7 @@
           <a:bodyPr wrap="square" lIns="0" tIns="0" rIns="0" bIns="0" rtlCol="0" anchor="ctr"/>
           <a:lstStyle/>
           <a:p>
-            <a:pPr algn="ctr" indent="0" marL="0">
+            <a:pPr marL="0" indent="0" algn="ctr">
               <a:buNone/>
             </a:pPr>
             <a:r>
@@ -5366,7 +5210,7 @@
           <a:bodyPr wrap="square" lIns="0" tIns="0" rIns="0" bIns="0" rtlCol="0" anchor="t"/>
           <a:lstStyle/>
           <a:p>
-            <a:pPr indent="0" marL="0">
+            <a:pPr marL="0" indent="0">
               <a:buNone/>
             </a:pPr>
             <a:r>
@@ -5405,7 +5249,7 @@
           <a:bodyPr wrap="square" lIns="0" tIns="0" rIns="0" bIns="0" rtlCol="0" anchor="t"/>
           <a:lstStyle/>
           <a:p>
-            <a:pPr indent="0" marL="0">
+            <a:pPr marL="0" indent="0">
               <a:lnSpc>
                 <a:spcPct val="130000"/>
               </a:lnSpc>
@@ -5425,7 +5269,7 @@
             <a:endParaRPr lang="en-US" sz="1500" dirty="0"/>
           </a:p>
           <a:p>
-            <a:pPr indent="0" marL="0">
+            <a:pPr marL="0" indent="0">
               <a:lnSpc>
                 <a:spcPct val="130000"/>
               </a:lnSpc>
@@ -5445,7 +5289,7 @@
             <a:endParaRPr lang="en-US" sz="1500" dirty="0"/>
           </a:p>
           <a:p>
-            <a:pPr indent="0" marL="0">
+            <a:pPr marL="0" indent="0">
               <a:lnSpc>
                 <a:spcPct val="130000"/>
               </a:lnSpc>
@@ -5550,7 +5394,7 @@
           <a:bodyPr wrap="square" lIns="0" tIns="0" rIns="0" bIns="0" rtlCol="0" anchor="ctr"/>
           <a:lstStyle/>
           <a:p>
-            <a:pPr algn="ctr" indent="0" marL="0">
+            <a:pPr marL="0" indent="0" algn="ctr">
               <a:buNone/>
             </a:pPr>
             <a:r>
@@ -5589,7 +5433,7 @@
           <a:bodyPr wrap="square" lIns="0" tIns="0" rIns="0" bIns="0" rtlCol="0" anchor="t"/>
           <a:lstStyle/>
           <a:p>
-            <a:pPr indent="0" marL="0">
+            <a:pPr marL="0" indent="0">
               <a:buNone/>
             </a:pPr>
             <a:r>
@@ -5628,7 +5472,7 @@
           <a:bodyPr wrap="square" lIns="0" tIns="0" rIns="0" bIns="0" rtlCol="0" anchor="t"/>
           <a:lstStyle/>
           <a:p>
-            <a:pPr indent="0" marL="0">
+            <a:pPr marL="0" indent="0">
               <a:lnSpc>
                 <a:spcPct val="130000"/>
               </a:lnSpc>
@@ -5648,7 +5492,7 @@
             <a:endParaRPr lang="en-US" sz="1500" dirty="0"/>
           </a:p>
           <a:p>
-            <a:pPr indent="0" marL="0">
+            <a:pPr marL="0" indent="0">
               <a:lnSpc>
                 <a:spcPct val="130000"/>
               </a:lnSpc>
@@ -5668,7 +5512,7 @@
             <a:endParaRPr lang="en-US" sz="1500" dirty="0"/>
           </a:p>
           <a:p>
-            <a:pPr indent="0" marL="0">
+            <a:pPr marL="0" indent="0">
               <a:lnSpc>
                 <a:spcPct val="130000"/>
               </a:lnSpc>
@@ -5710,7 +5554,7 @@
           <a:bodyPr wrap="square" lIns="0" tIns="0" rIns="0" bIns="0" rtlCol="0" anchor="t"/>
           <a:lstStyle/>
           <a:p>
-            <a:pPr indent="0" marL="0">
+            <a:pPr marL="0" indent="0">
               <a:buNone/>
             </a:pPr>
             <a:r>
@@ -5768,6 +5612,7 @@
         <a:solidFill>
           <a:srgbClr val="F5F7FC"/>
         </a:solidFill>
+        <a:effectLst/>
       </p:bgPr>
     </p:bg>
     <p:spTree>
@@ -5805,7 +5650,7 @@
           <a:bodyPr wrap="square" lIns="0" tIns="0" rIns="0" bIns="0" rtlCol="0" anchor="t"/>
           <a:lstStyle/>
           <a:p>
-            <a:pPr indent="0" marL="0">
+            <a:pPr marL="0" indent="0">
               <a:buNone/>
             </a:pPr>
             <a:r>
@@ -5844,7 +5689,7 @@
           <a:bodyPr wrap="square" lIns="0" tIns="0" rIns="0" bIns="0" rtlCol="0" anchor="t"/>
           <a:lstStyle/>
           <a:p>
-            <a:pPr indent="0" marL="0">
+            <a:pPr marL="0" indent="0">
               <a:buNone/>
             </a:pPr>
             <a:r>
@@ -5878,15 +5723,27 @@
         </p:nvGraphicFramePr>
         <p:xfrm>
           <a:off x="813816" y="2148840"/>
-          <a:ext cx="10564063" cy="914400"/>
+          <a:ext cx="10566806" cy="3401568"/>
         </p:xfrm>
         <a:graphic>
           <a:graphicData uri="http://schemas.openxmlformats.org/drawingml/2006/table">
             <a:tbl>
               <a:tblPr/>
               <a:tblGrid>
-                <a:gridCol w="5120640"/>
-                <a:gridCol w="5446166"/>
+                <a:gridCol w="5120640">
+                  <a:extLst>
+                    <a:ext uri="{9D8B030D-6E8A-4147-A177-3AD203B41FA5}">
+                      <a16:colId xmlns:a16="http://schemas.microsoft.com/office/drawing/2014/main" val="20000"/>
+                    </a:ext>
+                  </a:extLst>
+                </a:gridCol>
+                <a:gridCol w="5446166">
+                  <a:extLst>
+                    <a:ext uri="{9D8B030D-6E8A-4147-A177-3AD203B41FA5}">
+                      <a16:colId xmlns:a16="http://schemas.microsoft.com/office/drawing/2014/main" val="20001"/>
+                    </a:ext>
+                  </a:extLst>
+                </a:gridCol>
               </a:tblGrid>
               <a:tr h="566928">
                 <a:tc>
@@ -5894,7 +5751,7 @@
                     <a:bodyPr/>
                     <a:lstStyle/>
                     <a:p>
-                      <a:pPr indent="0" marL="0">
+                      <a:pPr marL="0" indent="0">
                         <a:buNone/>
                       </a:pPr>
                       <a:r>
@@ -5962,7 +5819,7 @@
                     <a:bodyPr/>
                     <a:lstStyle/>
                     <a:p>
-                      <a:pPr indent="0" marL="0">
+                      <a:pPr marL="0" indent="0">
                         <a:buNone/>
                       </a:pPr>
                       <a:r>
@@ -6025,6 +5882,11 @@
                     </a:solidFill>
                   </a:tcPr>
                 </a:tc>
+                <a:extLst>
+                  <a:ext uri="{0D108BD9-81ED-4DB2-BD59-A6C34878D82A}">
+                    <a16:rowId xmlns:a16="http://schemas.microsoft.com/office/drawing/2014/main" val="10000"/>
+                  </a:ext>
+                </a:extLst>
               </a:tr>
               <a:tr h="566928">
                 <a:tc>
@@ -6032,7 +5894,7 @@
                     <a:bodyPr/>
                     <a:lstStyle/>
                     <a:p>
-                      <a:pPr indent="0" marL="0">
+                      <a:pPr marL="0" indent="0">
                         <a:buNone/>
                       </a:pPr>
                       <a:r>
@@ -6100,7 +5962,7 @@
                     <a:bodyPr/>
                     <a:lstStyle/>
                     <a:p>
-                      <a:pPr indent="0" marL="0">
+                      <a:pPr marL="0" indent="0">
                         <a:buNone/>
                       </a:pPr>
                       <a:r>
@@ -6163,6 +6025,11 @@
                     </a:solidFill>
                   </a:tcPr>
                 </a:tc>
+                <a:extLst>
+                  <a:ext uri="{0D108BD9-81ED-4DB2-BD59-A6C34878D82A}">
+                    <a16:rowId xmlns:a16="http://schemas.microsoft.com/office/drawing/2014/main" val="10001"/>
+                  </a:ext>
+                </a:extLst>
               </a:tr>
               <a:tr h="566928">
                 <a:tc>
@@ -6170,7 +6037,7 @@
                     <a:bodyPr/>
                     <a:lstStyle/>
                     <a:p>
-                      <a:pPr indent="0" marL="0">
+                      <a:pPr marL="0" indent="0">
                         <a:buNone/>
                       </a:pPr>
                       <a:r>
@@ -6238,7 +6105,7 @@
                     <a:bodyPr/>
                     <a:lstStyle/>
                     <a:p>
-                      <a:pPr indent="0" marL="0">
+                      <a:pPr marL="0" indent="0">
                         <a:buNone/>
                       </a:pPr>
                       <a:r>
@@ -6301,6 +6168,11 @@
                     </a:solidFill>
                   </a:tcPr>
                 </a:tc>
+                <a:extLst>
+                  <a:ext uri="{0D108BD9-81ED-4DB2-BD59-A6C34878D82A}">
+                    <a16:rowId xmlns:a16="http://schemas.microsoft.com/office/drawing/2014/main" val="10002"/>
+                  </a:ext>
+                </a:extLst>
               </a:tr>
               <a:tr h="566928">
                 <a:tc>
@@ -6308,7 +6180,7 @@
                     <a:bodyPr/>
                     <a:lstStyle/>
                     <a:p>
-                      <a:pPr indent="0" marL="0">
+                      <a:pPr marL="0" indent="0">
                         <a:buNone/>
                       </a:pPr>
                       <a:r>
@@ -6376,7 +6248,7 @@
                     <a:bodyPr/>
                     <a:lstStyle/>
                     <a:p>
-                      <a:pPr indent="0" marL="0">
+                      <a:pPr marL="0" indent="0">
                         <a:buNone/>
                       </a:pPr>
                       <a:r>
@@ -6439,6 +6311,11 @@
                     </a:solidFill>
                   </a:tcPr>
                 </a:tc>
+                <a:extLst>
+                  <a:ext uri="{0D108BD9-81ED-4DB2-BD59-A6C34878D82A}">
+                    <a16:rowId xmlns:a16="http://schemas.microsoft.com/office/drawing/2014/main" val="10003"/>
+                  </a:ext>
+                </a:extLst>
               </a:tr>
               <a:tr h="566928">
                 <a:tc>
@@ -6446,7 +6323,7 @@
                     <a:bodyPr/>
                     <a:lstStyle/>
                     <a:p>
-                      <a:pPr indent="0" marL="0">
+                      <a:pPr marL="0" indent="0">
                         <a:buNone/>
                       </a:pPr>
                       <a:r>
@@ -6514,7 +6391,7 @@
                     <a:bodyPr/>
                     <a:lstStyle/>
                     <a:p>
-                      <a:pPr indent="0" marL="0">
+                      <a:pPr marL="0" indent="0">
                         <a:buNone/>
                       </a:pPr>
                       <a:r>
@@ -6577,6 +6454,11 @@
                     </a:solidFill>
                   </a:tcPr>
                 </a:tc>
+                <a:extLst>
+                  <a:ext uri="{0D108BD9-81ED-4DB2-BD59-A6C34878D82A}">
+                    <a16:rowId xmlns:a16="http://schemas.microsoft.com/office/drawing/2014/main" val="10004"/>
+                  </a:ext>
+                </a:extLst>
               </a:tr>
               <a:tr h="566928">
                 <a:tc>
@@ -6584,7 +6466,7 @@
                     <a:bodyPr/>
                     <a:lstStyle/>
                     <a:p>
-                      <a:pPr indent="0" marL="0">
+                      <a:pPr marL="0" indent="0">
                         <a:buNone/>
                       </a:pPr>
                       <a:r>
@@ -6652,7 +6534,7 @@
                     <a:bodyPr/>
                     <a:lstStyle/>
                     <a:p>
-                      <a:pPr indent="0" marL="0">
+                      <a:pPr marL="0" indent="0">
                         <a:buNone/>
                       </a:pPr>
                       <a:r>
@@ -6715,6 +6597,11 @@
                     </a:solidFill>
                   </a:tcPr>
                 </a:tc>
+                <a:extLst>
+                  <a:ext uri="{0D108BD9-81ED-4DB2-BD59-A6C34878D82A}">
+                    <a16:rowId xmlns:a16="http://schemas.microsoft.com/office/drawing/2014/main" val="10005"/>
+                  </a:ext>
+                </a:extLst>
               </a:tr>
             </a:tbl>
           </a:graphicData>
@@ -6741,7 +6628,7 @@
           <a:bodyPr wrap="square" lIns="0" tIns="0" rIns="0" bIns="0" rtlCol="0" anchor="t"/>
           <a:lstStyle/>
           <a:p>
-            <a:pPr indent="0" marL="0">
+            <a:pPr marL="0" indent="0">
               <a:buNone/>
             </a:pPr>
             <a:r>
@@ -6810,6 +6697,7 @@
           </a:gsLst>
           <a:lin ang="2280000" scaled="0"/>
         </a:gradFill>
+        <a:effectLst/>
       </p:bgPr>
     </p:bg>
     <p:spTree>
@@ -6847,7 +6735,7 @@
           <a:bodyPr wrap="square" lIns="0" tIns="0" rIns="0" bIns="0" rtlCol="0" anchor="t"/>
           <a:lstStyle/>
           <a:p>
-            <a:pPr indent="0" marL="0">
+            <a:pPr marL="0" indent="0">
               <a:buNone/>
             </a:pPr>
             <a:r>
@@ -6886,7 +6774,7 @@
           <a:bodyPr wrap="square" lIns="0" tIns="0" rIns="0" bIns="0" rtlCol="0" anchor="t"/>
           <a:lstStyle/>
           <a:p>
-            <a:pPr indent="0" marL="0">
+            <a:pPr marL="0" indent="0">
               <a:buNone/>
             </a:pPr>
             <a:r>
@@ -6925,7 +6813,7 @@
           <a:bodyPr wrap="square" lIns="0" tIns="0" rIns="0" bIns="0" rtlCol="0" anchor="t"/>
           <a:lstStyle/>
           <a:p>
-            <a:pPr indent="0" marL="0">
+            <a:pPr marL="0" indent="0">
               <a:buNone/>
             </a:pPr>
             <a:r>
@@ -6964,7 +6852,7 @@
           <a:bodyPr wrap="square" lIns="0" tIns="0" rIns="0" bIns="0" rtlCol="0" anchor="t"/>
           <a:lstStyle/>
           <a:p>
-            <a:pPr indent="0" marL="0">
+            <a:pPr marL="0" indent="0">
               <a:buNone/>
             </a:pPr>
             <a:r>
@@ -7022,6 +6910,7 @@
         <a:solidFill>
           <a:srgbClr val="F5F7FC"/>
         </a:solidFill>
+        <a:effectLst/>
       </p:bgPr>
     </p:bg>
     <p:spTree>
@@ -7059,7 +6948,7 @@
           <a:bodyPr wrap="square" lIns="0" tIns="0" rIns="0" bIns="0" rtlCol="0" anchor="t"/>
           <a:lstStyle/>
           <a:p>
-            <a:pPr indent="0" marL="0">
+            <a:pPr marL="0" indent="0">
               <a:buNone/>
             </a:pPr>
             <a:r>
@@ -7098,7 +6987,7 @@
           <a:bodyPr wrap="square" lIns="0" tIns="0" rIns="0" bIns="0" rtlCol="0" anchor="t"/>
           <a:lstStyle/>
           <a:p>
-            <a:pPr indent="0" marL="0">
+            <a:pPr marL="0" indent="0">
               <a:buNone/>
             </a:pPr>
             <a:r>
@@ -7200,7 +7089,7 @@
           <a:bodyPr wrap="square" lIns="0" tIns="0" rIns="0" bIns="0" rtlCol="0" anchor="ctr"/>
           <a:lstStyle/>
           <a:p>
-            <a:pPr algn="ctr" indent="0" marL="0">
+            <a:pPr marL="0" indent="0" algn="ctr">
               <a:buNone/>
             </a:pPr>
             <a:r>
@@ -7239,7 +7128,7 @@
           <a:bodyPr wrap="square" lIns="0" tIns="0" rIns="0" bIns="0" rtlCol="0" anchor="t"/>
           <a:lstStyle/>
           <a:p>
-            <a:pPr indent="0" marL="0">
+            <a:pPr marL="0" indent="0">
               <a:buNone/>
             </a:pPr>
             <a:r>
@@ -7256,7 +7145,7 @@
             <a:endParaRPr lang="en-US" sz="2000" dirty="0"/>
           </a:p>
           <a:p>
-            <a:pPr indent="0" marL="0">
+            <a:pPr marL="0" indent="0">
               <a:buNone/>
             </a:pPr>
             <a:r>
@@ -7295,7 +7184,7 @@
           <a:bodyPr wrap="square" lIns="0" tIns="0" rIns="0" bIns="0" rtlCol="0" anchor="t"/>
           <a:lstStyle/>
           <a:p>
-            <a:pPr indent="0" marL="0">
+            <a:pPr marL="0" indent="0">
               <a:lnSpc>
                 <a:spcPct val="130000"/>
               </a:lnSpc>
@@ -7315,7 +7204,7 @@
             <a:endParaRPr lang="en-US" sz="1500" dirty="0"/>
           </a:p>
           <a:p>
-            <a:pPr indent="0" marL="0">
+            <a:pPr marL="0" indent="0">
               <a:lnSpc>
                 <a:spcPct val="130000"/>
               </a:lnSpc>
@@ -7335,7 +7224,7 @@
             <a:endParaRPr lang="en-US" sz="1500" dirty="0"/>
           </a:p>
           <a:p>
-            <a:pPr indent="0" marL="0">
+            <a:pPr marL="0" indent="0">
               <a:lnSpc>
                 <a:spcPct val="130000"/>
               </a:lnSpc>
@@ -7355,7 +7244,7 @@
             <a:endParaRPr lang="en-US" sz="1500" dirty="0"/>
           </a:p>
           <a:p>
-            <a:pPr indent="0" marL="0">
+            <a:pPr marL="0" indent="0">
               <a:lnSpc>
                 <a:spcPct val="130000"/>
               </a:lnSpc>
@@ -7460,7 +7349,7 @@
           <a:bodyPr wrap="square" lIns="0" tIns="0" rIns="0" bIns="0" rtlCol="0" anchor="ctr"/>
           <a:lstStyle/>
           <a:p>
-            <a:pPr algn="ctr" indent="0" marL="0">
+            <a:pPr marL="0" indent="0" algn="ctr">
               <a:buNone/>
             </a:pPr>
             <a:r>
@@ -7499,7 +7388,7 @@
           <a:bodyPr wrap="square" lIns="0" tIns="0" rIns="0" bIns="0" rtlCol="0" anchor="t"/>
           <a:lstStyle/>
           <a:p>
-            <a:pPr indent="0" marL="0">
+            <a:pPr marL="0" indent="0">
               <a:buNone/>
             </a:pPr>
             <a:r>
@@ -7516,7 +7405,7 @@
             <a:endParaRPr lang="en-US" sz="2000" dirty="0"/>
           </a:p>
           <a:p>
-            <a:pPr indent="0" marL="0">
+            <a:pPr marL="0" indent="0">
               <a:buNone/>
             </a:pPr>
             <a:r>
@@ -7555,7 +7444,7 @@
           <a:bodyPr wrap="square" lIns="0" tIns="0" rIns="0" bIns="0" rtlCol="0" anchor="t"/>
           <a:lstStyle/>
           <a:p>
-            <a:pPr indent="0" marL="0">
+            <a:pPr marL="0" indent="0">
               <a:lnSpc>
                 <a:spcPct val="130000"/>
               </a:lnSpc>
@@ -7575,7 +7464,7 @@
             <a:endParaRPr lang="en-US" sz="1500" dirty="0"/>
           </a:p>
           <a:p>
-            <a:pPr indent="0" marL="0">
+            <a:pPr marL="0" indent="0">
               <a:lnSpc>
                 <a:spcPct val="130000"/>
               </a:lnSpc>
@@ -7595,7 +7484,7 @@
             <a:endParaRPr lang="en-US" sz="1500" dirty="0"/>
           </a:p>
           <a:p>
-            <a:pPr indent="0" marL="0">
+            <a:pPr marL="0" indent="0">
               <a:lnSpc>
                 <a:spcPct val="130000"/>
               </a:lnSpc>
@@ -7615,7 +7504,7 @@
             <a:endParaRPr lang="en-US" sz="1500" dirty="0"/>
           </a:p>
           <a:p>
-            <a:pPr indent="0" marL="0">
+            <a:pPr marL="0" indent="0">
               <a:lnSpc>
                 <a:spcPct val="130000"/>
               </a:lnSpc>
@@ -7720,7 +7609,7 @@
           <a:bodyPr wrap="square" lIns="0" tIns="0" rIns="0" bIns="0" rtlCol="0" anchor="ctr"/>
           <a:lstStyle/>
           <a:p>
-            <a:pPr algn="ctr" indent="0" marL="0">
+            <a:pPr marL="0" indent="0" algn="ctr">
               <a:buNone/>
             </a:pPr>
             <a:r>
@@ -7759,7 +7648,7 @@
           <a:bodyPr wrap="square" lIns="0" tIns="0" rIns="0" bIns="0" rtlCol="0" anchor="t"/>
           <a:lstStyle/>
           <a:p>
-            <a:pPr indent="0" marL="0">
+            <a:pPr marL="0" indent="0">
               <a:buNone/>
             </a:pPr>
             <a:r>
@@ -7776,7 +7665,7 @@
             <a:endParaRPr lang="en-US" sz="2000" dirty="0"/>
           </a:p>
           <a:p>
-            <a:pPr indent="0" marL="0">
+            <a:pPr marL="0" indent="0">
               <a:buNone/>
             </a:pPr>
             <a:r>
@@ -7815,7 +7704,7 @@
           <a:bodyPr wrap="square" lIns="0" tIns="0" rIns="0" bIns="0" rtlCol="0" anchor="t"/>
           <a:lstStyle/>
           <a:p>
-            <a:pPr indent="0" marL="0">
+            <a:pPr marL="0" indent="0">
               <a:lnSpc>
                 <a:spcPct val="130000"/>
               </a:lnSpc>
@@ -7835,7 +7724,7 @@
             <a:endParaRPr lang="en-US" sz="1500" dirty="0"/>
           </a:p>
           <a:p>
-            <a:pPr indent="0" marL="0">
+            <a:pPr marL="0" indent="0">
               <a:lnSpc>
                 <a:spcPct val="130000"/>
               </a:lnSpc>
@@ -7855,7 +7744,7 @@
             <a:endParaRPr lang="en-US" sz="1500" dirty="0"/>
           </a:p>
           <a:p>
-            <a:pPr indent="0" marL="0">
+            <a:pPr marL="0" indent="0">
               <a:lnSpc>
                 <a:spcPct val="130000"/>
               </a:lnSpc>
@@ -7875,7 +7764,7 @@
             <a:endParaRPr lang="en-US" sz="1500" dirty="0"/>
           </a:p>
           <a:p>
-            <a:pPr indent="0" marL="0">
+            <a:pPr marL="0" indent="0">
               <a:lnSpc>
                 <a:spcPct val="130000"/>
               </a:lnSpc>
@@ -7917,7 +7806,7 @@
           <a:bodyPr wrap="square" lIns="0" tIns="0" rIns="0" bIns="0" rtlCol="0" anchor="t"/>
           <a:lstStyle/>
           <a:p>
-            <a:pPr indent="0" marL="0">
+            <a:pPr marL="0" indent="0">
               <a:buNone/>
             </a:pPr>
             <a:r>
@@ -7986,6 +7875,7 @@
           </a:gsLst>
           <a:lin ang="2280000" scaled="0"/>
         </a:gradFill>
+        <a:effectLst/>
       </p:bgPr>
     </p:bg>
     <p:spTree>
@@ -8023,7 +7913,7 @@
           <a:bodyPr wrap="square" lIns="0" tIns="0" rIns="0" bIns="0" rtlCol="0" anchor="t"/>
           <a:lstStyle/>
           <a:p>
-            <a:pPr indent="0" marL="0">
+            <a:pPr marL="0" indent="0">
               <a:buNone/>
             </a:pPr>
             <a:r>
@@ -8062,7 +7952,7 @@
           <a:bodyPr wrap="square" lIns="0" tIns="0" rIns="0" bIns="0" rtlCol="0" anchor="t"/>
           <a:lstStyle/>
           <a:p>
-            <a:pPr indent="0" marL="0">
+            <a:pPr marL="0" indent="0">
               <a:buNone/>
             </a:pPr>
             <a:r>
@@ -8126,7 +8016,7 @@
           <a:bodyPr wrap="square" lIns="0" tIns="0" rIns="0" bIns="0" rtlCol="0" anchor="ctr"/>
           <a:lstStyle/>
           <a:p>
-            <a:pPr algn="ctr" indent="0" marL="0">
+            <a:pPr marL="0" indent="0" algn="ctr">
               <a:buNone/>
             </a:pPr>
             <a:r>
@@ -8165,7 +8055,7 @@
           <a:bodyPr wrap="square" lIns="0" tIns="0" rIns="0" bIns="0" rtlCol="0" anchor="t"/>
           <a:lstStyle/>
           <a:p>
-            <a:pPr indent="0" marL="0">
+            <a:pPr marL="0" indent="0">
               <a:buNone/>
             </a:pPr>
             <a:r>
@@ -8204,7 +8094,7 @@
           <a:bodyPr wrap="square" lIns="0" tIns="0" rIns="0" bIns="0" rtlCol="0" anchor="t"/>
           <a:lstStyle/>
           <a:p>
-            <a:pPr indent="0" marL="0">
+            <a:pPr marL="0" indent="0">
               <a:lnSpc>
                 <a:spcPct val="130000"/>
               </a:lnSpc>
@@ -8271,7 +8161,7 @@
           <a:bodyPr wrap="square" lIns="0" tIns="0" rIns="0" bIns="0" rtlCol="0" anchor="ctr"/>
           <a:lstStyle/>
           <a:p>
-            <a:pPr algn="ctr" indent="0" marL="0">
+            <a:pPr marL="0" indent="0" algn="ctr">
               <a:buNone/>
             </a:pPr>
             <a:r>
@@ -8310,7 +8200,7 @@
           <a:bodyPr wrap="square" lIns="0" tIns="0" rIns="0" bIns="0" rtlCol="0" anchor="t"/>
           <a:lstStyle/>
           <a:p>
-            <a:pPr indent="0" marL="0">
+            <a:pPr marL="0" indent="0">
               <a:buNone/>
             </a:pPr>
             <a:r>
@@ -8349,7 +8239,7 @@
           <a:bodyPr wrap="square" lIns="0" tIns="0" rIns="0" bIns="0" rtlCol="0" anchor="t"/>
           <a:lstStyle/>
           <a:p>
-            <a:pPr indent="0" marL="0">
+            <a:pPr marL="0" indent="0">
               <a:lnSpc>
                 <a:spcPct val="130000"/>
               </a:lnSpc>
@@ -8416,7 +8306,7 @@
           <a:bodyPr wrap="square" lIns="0" tIns="0" rIns="0" bIns="0" rtlCol="0" anchor="ctr"/>
           <a:lstStyle/>
           <a:p>
-            <a:pPr algn="ctr" indent="0" marL="0">
+            <a:pPr marL="0" indent="0" algn="ctr">
               <a:buNone/>
             </a:pPr>
             <a:r>
@@ -8455,7 +8345,7 @@
           <a:bodyPr wrap="square" lIns="0" tIns="0" rIns="0" bIns="0" rtlCol="0" anchor="t"/>
           <a:lstStyle/>
           <a:p>
-            <a:pPr indent="0" marL="0">
+            <a:pPr marL="0" indent="0">
               <a:buNone/>
             </a:pPr>
             <a:r>
@@ -8494,7 +8384,7 @@
           <a:bodyPr wrap="square" lIns="0" tIns="0" rIns="0" bIns="0" rtlCol="0" anchor="t"/>
           <a:lstStyle/>
           <a:p>
-            <a:pPr indent="0" marL="0">
+            <a:pPr marL="0" indent="0">
               <a:lnSpc>
                 <a:spcPct val="130000"/>
               </a:lnSpc>
@@ -8536,7 +8426,7 @@
           <a:bodyPr wrap="square" lIns="0" tIns="0" rIns="0" bIns="0" rtlCol="0" anchor="t"/>
           <a:lstStyle/>
           <a:p>
-            <a:pPr indent="0" marL="0">
+            <a:pPr marL="0" indent="0">
               <a:buNone/>
             </a:pPr>
             <a:r>
@@ -8594,6 +8484,7 @@
         <a:solidFill>
           <a:srgbClr val="F5F7FC"/>
         </a:solidFill>
+        <a:effectLst/>
       </p:bgPr>
     </p:bg>
     <p:spTree>
@@ -8631,7 +8522,7 @@
           <a:bodyPr wrap="square" lIns="0" tIns="0" rIns="0" bIns="0" rtlCol="0" anchor="t"/>
           <a:lstStyle/>
           <a:p>
-            <a:pPr indent="0" marL="0">
+            <a:pPr marL="0" indent="0">
               <a:buNone/>
             </a:pPr>
             <a:r>
@@ -8670,7 +8561,7 @@
           <a:bodyPr wrap="square" lIns="0" tIns="0" rIns="0" bIns="0" rtlCol="0" anchor="t"/>
           <a:lstStyle/>
           <a:p>
-            <a:pPr indent="0" marL="0">
+            <a:pPr marL="0" indent="0">
               <a:buNone/>
             </a:pPr>
             <a:r>
@@ -8704,17 +8595,41 @@
         </p:nvGraphicFramePr>
         <p:xfrm>
           <a:off x="813816" y="2148840"/>
-          <a:ext cx="10564063" cy="914400"/>
+          <a:ext cx="10566806" cy="3401568"/>
         </p:xfrm>
         <a:graphic>
           <a:graphicData uri="http://schemas.openxmlformats.org/drawingml/2006/table">
             <a:tbl>
               <a:tblPr/>
               <a:tblGrid>
-                <a:gridCol w="1005840"/>
-                <a:gridCol w="1554480"/>
-                <a:gridCol w="4023360"/>
-                <a:gridCol w="3983126"/>
+                <a:gridCol w="1005840">
+                  <a:extLst>
+                    <a:ext uri="{9D8B030D-6E8A-4147-A177-3AD203B41FA5}">
+                      <a16:colId xmlns:a16="http://schemas.microsoft.com/office/drawing/2014/main" val="20000"/>
+                    </a:ext>
+                  </a:extLst>
+                </a:gridCol>
+                <a:gridCol w="1554480">
+                  <a:extLst>
+                    <a:ext uri="{9D8B030D-6E8A-4147-A177-3AD203B41FA5}">
+                      <a16:colId xmlns:a16="http://schemas.microsoft.com/office/drawing/2014/main" val="20001"/>
+                    </a:ext>
+                  </a:extLst>
+                </a:gridCol>
+                <a:gridCol w="4023360">
+                  <a:extLst>
+                    <a:ext uri="{9D8B030D-6E8A-4147-A177-3AD203B41FA5}">
+                      <a16:colId xmlns:a16="http://schemas.microsoft.com/office/drawing/2014/main" val="20002"/>
+                    </a:ext>
+                  </a:extLst>
+                </a:gridCol>
+                <a:gridCol w="3983126">
+                  <a:extLst>
+                    <a:ext uri="{9D8B030D-6E8A-4147-A177-3AD203B41FA5}">
+                      <a16:colId xmlns:a16="http://schemas.microsoft.com/office/drawing/2014/main" val="20003"/>
+                    </a:ext>
+                  </a:extLst>
+                </a:gridCol>
               </a:tblGrid>
               <a:tr h="566928">
                 <a:tc>
@@ -8722,7 +8637,7 @@
                     <a:bodyPr/>
                     <a:lstStyle/>
                     <a:p>
-                      <a:pPr indent="0" marL="0">
+                      <a:pPr marL="0" indent="0">
                         <a:buNone/>
                       </a:pPr>
                       <a:r>
@@ -8790,7 +8705,7 @@
                     <a:bodyPr/>
                     <a:lstStyle/>
                     <a:p>
-                      <a:pPr indent="0" marL="0">
+                      <a:pPr marL="0" indent="0">
                         <a:buNone/>
                       </a:pPr>
                       <a:r>
@@ -8858,7 +8773,7 @@
                     <a:bodyPr/>
                     <a:lstStyle/>
                     <a:p>
-                      <a:pPr indent="0" marL="0">
+                      <a:pPr marL="0" indent="0">
                         <a:buNone/>
                       </a:pPr>
                       <a:r>
@@ -8926,7 +8841,7 @@
                     <a:bodyPr/>
                     <a:lstStyle/>
                     <a:p>
-                      <a:pPr indent="0" marL="0">
+                      <a:pPr marL="0" indent="0">
                         <a:buNone/>
                       </a:pPr>
                       <a:r>
@@ -8989,6 +8904,11 @@
                     </a:solidFill>
                   </a:tcPr>
                 </a:tc>
+                <a:extLst>
+                  <a:ext uri="{0D108BD9-81ED-4DB2-BD59-A6C34878D82A}">
+                    <a16:rowId xmlns:a16="http://schemas.microsoft.com/office/drawing/2014/main" val="10000"/>
+                  </a:ext>
+                </a:extLst>
               </a:tr>
               <a:tr h="566928">
                 <a:tc>
@@ -8996,7 +8916,7 @@
                     <a:bodyPr/>
                     <a:lstStyle/>
                     <a:p>
-                      <a:pPr indent="0" marL="0">
+                      <a:pPr marL="0" indent="0">
                         <a:buNone/>
                       </a:pPr>
                       <a:r>
@@ -9064,7 +8984,7 @@
                     <a:bodyPr/>
                     <a:lstStyle/>
                     <a:p>
-                      <a:pPr indent="0" marL="0">
+                      <a:pPr marL="0" indent="0">
                         <a:buNone/>
                       </a:pPr>
                       <a:r>
@@ -9132,7 +9052,7 @@
                     <a:bodyPr/>
                     <a:lstStyle/>
                     <a:p>
-                      <a:pPr indent="0" marL="0">
+                      <a:pPr marL="0" indent="0">
                         <a:buNone/>
                       </a:pPr>
                       <a:r>
@@ -9200,7 +9120,7 @@
                     <a:bodyPr/>
                     <a:lstStyle/>
                     <a:p>
-                      <a:pPr indent="0" marL="0">
+                      <a:pPr marL="0" indent="0">
                         <a:buNone/>
                       </a:pPr>
                       <a:r>
@@ -9263,6 +9183,11 @@
                     </a:solidFill>
                   </a:tcPr>
                 </a:tc>
+                <a:extLst>
+                  <a:ext uri="{0D108BD9-81ED-4DB2-BD59-A6C34878D82A}">
+                    <a16:rowId xmlns:a16="http://schemas.microsoft.com/office/drawing/2014/main" val="10001"/>
+                  </a:ext>
+                </a:extLst>
               </a:tr>
               <a:tr h="566928">
                 <a:tc>
@@ -9270,7 +9195,7 @@
                     <a:bodyPr/>
                     <a:lstStyle/>
                     <a:p>
-                      <a:pPr indent="0" marL="0">
+                      <a:pPr marL="0" indent="0">
                         <a:buNone/>
                       </a:pPr>
                       <a:r>
@@ -9338,7 +9263,7 @@
                     <a:bodyPr/>
                     <a:lstStyle/>
                     <a:p>
-                      <a:pPr indent="0" marL="0">
+                      <a:pPr marL="0" indent="0">
                         <a:buNone/>
                       </a:pPr>
                       <a:r>
@@ -9406,7 +9331,7 @@
                     <a:bodyPr/>
                     <a:lstStyle/>
                     <a:p>
-                      <a:pPr indent="0" marL="0">
+                      <a:pPr marL="0" indent="0">
                         <a:buNone/>
                       </a:pPr>
                       <a:r>
@@ -9474,7 +9399,7 @@
                     <a:bodyPr/>
                     <a:lstStyle/>
                     <a:p>
-                      <a:pPr indent="0" marL="0">
+                      <a:pPr marL="0" indent="0">
                         <a:buNone/>
                       </a:pPr>
                       <a:r>
@@ -9537,6 +9462,11 @@
                     </a:solidFill>
                   </a:tcPr>
                 </a:tc>
+                <a:extLst>
+                  <a:ext uri="{0D108BD9-81ED-4DB2-BD59-A6C34878D82A}">
+                    <a16:rowId xmlns:a16="http://schemas.microsoft.com/office/drawing/2014/main" val="10002"/>
+                  </a:ext>
+                </a:extLst>
               </a:tr>
               <a:tr h="566928">
                 <a:tc>
@@ -9544,7 +9474,7 @@
                     <a:bodyPr/>
                     <a:lstStyle/>
                     <a:p>
-                      <a:pPr indent="0" marL="0">
+                      <a:pPr marL="0" indent="0">
                         <a:buNone/>
                       </a:pPr>
                       <a:r>
@@ -9612,7 +9542,7 @@
                     <a:bodyPr/>
                     <a:lstStyle/>
                     <a:p>
-                      <a:pPr indent="0" marL="0">
+                      <a:pPr marL="0" indent="0">
                         <a:buNone/>
                       </a:pPr>
                       <a:r>
@@ -9680,7 +9610,7 @@
                     <a:bodyPr/>
                     <a:lstStyle/>
                     <a:p>
-                      <a:pPr indent="0" marL="0">
+                      <a:pPr marL="0" indent="0">
                         <a:buNone/>
                       </a:pPr>
                       <a:r>
@@ -9748,7 +9678,7 @@
                     <a:bodyPr/>
                     <a:lstStyle/>
                     <a:p>
-                      <a:pPr indent="0" marL="0">
+                      <a:pPr marL="0" indent="0">
                         <a:buNone/>
                       </a:pPr>
                       <a:r>
@@ -9811,6 +9741,11 @@
                     </a:solidFill>
                   </a:tcPr>
                 </a:tc>
+                <a:extLst>
+                  <a:ext uri="{0D108BD9-81ED-4DB2-BD59-A6C34878D82A}">
+                    <a16:rowId xmlns:a16="http://schemas.microsoft.com/office/drawing/2014/main" val="10003"/>
+                  </a:ext>
+                </a:extLst>
               </a:tr>
               <a:tr h="566928">
                 <a:tc>
@@ -9818,7 +9753,7 @@
                     <a:bodyPr/>
                     <a:lstStyle/>
                     <a:p>
-                      <a:pPr indent="0" marL="0">
+                      <a:pPr marL="0" indent="0">
                         <a:buNone/>
                       </a:pPr>
                       <a:r>
@@ -9886,7 +9821,7 @@
                     <a:bodyPr/>
                     <a:lstStyle/>
                     <a:p>
-                      <a:pPr indent="0" marL="0">
+                      <a:pPr marL="0" indent="0">
                         <a:buNone/>
                       </a:pPr>
                       <a:r>
@@ -9954,7 +9889,7 @@
                     <a:bodyPr/>
                     <a:lstStyle/>
                     <a:p>
-                      <a:pPr indent="0" marL="0">
+                      <a:pPr marL="0" indent="0">
                         <a:buNone/>
                       </a:pPr>
                       <a:r>
@@ -10022,7 +9957,7 @@
                     <a:bodyPr/>
                     <a:lstStyle/>
                     <a:p>
-                      <a:pPr indent="0" marL="0">
+                      <a:pPr marL="0" indent="0">
                         <a:buNone/>
                       </a:pPr>
                       <a:r>
@@ -10085,6 +10020,11 @@
                     </a:solidFill>
                   </a:tcPr>
                 </a:tc>
+                <a:extLst>
+                  <a:ext uri="{0D108BD9-81ED-4DB2-BD59-A6C34878D82A}">
+                    <a16:rowId xmlns:a16="http://schemas.microsoft.com/office/drawing/2014/main" val="10004"/>
+                  </a:ext>
+                </a:extLst>
               </a:tr>
               <a:tr h="566928">
                 <a:tc>
@@ -10092,7 +10032,7 @@
                     <a:bodyPr/>
                     <a:lstStyle/>
                     <a:p>
-                      <a:pPr indent="0" marL="0">
+                      <a:pPr marL="0" indent="0">
                         <a:buNone/>
                       </a:pPr>
                       <a:r>
@@ -10160,7 +10100,7 @@
                     <a:bodyPr/>
                     <a:lstStyle/>
                     <a:p>
-                      <a:pPr indent="0" marL="0">
+                      <a:pPr marL="0" indent="0">
                         <a:buNone/>
                       </a:pPr>
                       <a:r>
@@ -10228,7 +10168,7 @@
                     <a:bodyPr/>
                     <a:lstStyle/>
                     <a:p>
-                      <a:pPr indent="0" marL="0">
+                      <a:pPr marL="0" indent="0">
                         <a:buNone/>
                       </a:pPr>
                       <a:r>
@@ -10296,7 +10236,7 @@
                     <a:bodyPr/>
                     <a:lstStyle/>
                     <a:p>
-                      <a:pPr indent="0" marL="0">
+                      <a:pPr marL="0" indent="0">
                         <a:buNone/>
                       </a:pPr>
                       <a:r>
@@ -10359,6 +10299,11 @@
                     </a:solidFill>
                   </a:tcPr>
                 </a:tc>
+                <a:extLst>
+                  <a:ext uri="{0D108BD9-81ED-4DB2-BD59-A6C34878D82A}">
+                    <a16:rowId xmlns:a16="http://schemas.microsoft.com/office/drawing/2014/main" val="10005"/>
+                  </a:ext>
+                </a:extLst>
               </a:tr>
             </a:tbl>
           </a:graphicData>
@@ -10385,7 +10330,7 @@
           <a:bodyPr wrap="square" lIns="0" tIns="0" rIns="0" bIns="0" rtlCol="0" anchor="t"/>
           <a:lstStyle/>
           <a:p>
-            <a:pPr indent="0" marL="0">
+            <a:pPr marL="0" indent="0">
               <a:buNone/>
             </a:pPr>
             <a:r>
@@ -10443,6 +10388,7 @@
         <a:solidFill>
           <a:srgbClr val="F5F7FC"/>
         </a:solidFill>
+        <a:effectLst/>
       </p:bgPr>
     </p:bg>
     <p:spTree>
@@ -10480,7 +10426,7 @@
           <a:bodyPr wrap="square" lIns="0" tIns="0" rIns="0" bIns="0" rtlCol="0" anchor="t"/>
           <a:lstStyle/>
           <a:p>
-            <a:pPr indent="0" marL="0">
+            <a:pPr marL="0" indent="0">
               <a:buNone/>
             </a:pPr>
             <a:r>
@@ -10519,7 +10465,7 @@
           <a:bodyPr wrap="square" lIns="0" tIns="0" rIns="0" bIns="0" rtlCol="0" anchor="t"/>
           <a:lstStyle/>
           <a:p>
-            <a:pPr indent="0" marL="0">
+            <a:pPr marL="0" indent="0">
               <a:buNone/>
             </a:pPr>
             <a:r>
@@ -10623,7 +10569,7 @@
           <a:bodyPr wrap="square" lIns="0" tIns="0" rIns="0" bIns="0" rtlCol="0" anchor="ctr"/>
           <a:lstStyle/>
           <a:p>
-            <a:pPr algn="ctr" indent="0" marL="0">
+            <a:pPr marL="0" indent="0" algn="ctr">
               <a:buNone/>
             </a:pPr>
             <a:r>
@@ -10662,7 +10608,7 @@
           <a:bodyPr wrap="square" lIns="0" tIns="0" rIns="0" bIns="0" rtlCol="0" anchor="t"/>
           <a:lstStyle/>
           <a:p>
-            <a:pPr indent="0" marL="0">
+            <a:pPr marL="0" indent="0">
               <a:buNone/>
             </a:pPr>
             <a:r>
@@ -10701,7 +10647,7 @@
           <a:bodyPr wrap="square" lIns="0" tIns="0" rIns="0" bIns="0" rtlCol="0" anchor="t"/>
           <a:lstStyle/>
           <a:p>
-            <a:pPr indent="0" marL="0">
+            <a:pPr marL="0" indent="0">
               <a:lnSpc>
                 <a:spcPct val="135000"/>
               </a:lnSpc>
@@ -10721,7 +10667,7 @@
             <a:endParaRPr lang="en-US" sz="1300" dirty="0"/>
           </a:p>
           <a:p>
-            <a:pPr indent="0" marL="0">
+            <a:pPr marL="0" indent="0">
               <a:lnSpc>
                 <a:spcPct val="135000"/>
               </a:lnSpc>
@@ -10741,7 +10687,7 @@
             <a:endParaRPr lang="en-US" sz="1300" dirty="0"/>
           </a:p>
           <a:p>
-            <a:pPr indent="0" marL="0">
+            <a:pPr marL="0" indent="0">
               <a:lnSpc>
                 <a:spcPct val="135000"/>
               </a:lnSpc>
@@ -10848,7 +10794,7 @@
           <a:bodyPr wrap="square" lIns="0" tIns="0" rIns="0" bIns="0" rtlCol="0" anchor="ctr"/>
           <a:lstStyle/>
           <a:p>
-            <a:pPr algn="ctr" indent="0" marL="0">
+            <a:pPr marL="0" indent="0" algn="ctr">
               <a:buNone/>
             </a:pPr>
             <a:r>
@@ -10887,7 +10833,7 @@
           <a:bodyPr wrap="square" lIns="0" tIns="0" rIns="0" bIns="0" rtlCol="0" anchor="t"/>
           <a:lstStyle/>
           <a:p>
-            <a:pPr indent="0" marL="0">
+            <a:pPr marL="0" indent="0">
               <a:buNone/>
             </a:pPr>
             <a:r>
@@ -10926,7 +10872,7 @@
           <a:bodyPr wrap="square" lIns="0" tIns="0" rIns="0" bIns="0" rtlCol="0" anchor="t"/>
           <a:lstStyle/>
           <a:p>
-            <a:pPr indent="0" marL="0">
+            <a:pPr marL="0" indent="0">
               <a:lnSpc>
                 <a:spcPct val="135000"/>
               </a:lnSpc>
@@ -10946,7 +10892,7 @@
             <a:endParaRPr lang="en-US" sz="1300" dirty="0"/>
           </a:p>
           <a:p>
-            <a:pPr indent="0" marL="0">
+            <a:pPr marL="0" indent="0">
               <a:lnSpc>
                 <a:spcPct val="135000"/>
               </a:lnSpc>
@@ -11053,7 +10999,7 @@
           <a:bodyPr wrap="square" lIns="0" tIns="0" rIns="0" bIns="0" rtlCol="0" anchor="ctr"/>
           <a:lstStyle/>
           <a:p>
-            <a:pPr algn="ctr" indent="0" marL="0">
+            <a:pPr marL="0" indent="0" algn="ctr">
               <a:buNone/>
             </a:pPr>
             <a:r>
@@ -11092,7 +11038,7 @@
           <a:bodyPr wrap="square" lIns="0" tIns="0" rIns="0" bIns="0" rtlCol="0" anchor="t"/>
           <a:lstStyle/>
           <a:p>
-            <a:pPr indent="0" marL="0">
+            <a:pPr marL="0" indent="0">
               <a:buNone/>
             </a:pPr>
             <a:r>
@@ -11131,7 +11077,7 @@
           <a:bodyPr wrap="square" lIns="0" tIns="0" rIns="0" bIns="0" rtlCol="0" anchor="t"/>
           <a:lstStyle/>
           <a:p>
-            <a:pPr indent="0" marL="0">
+            <a:pPr marL="0" indent="0">
               <a:lnSpc>
                 <a:spcPct val="135000"/>
               </a:lnSpc>
@@ -11151,7 +11097,7 @@
             <a:endParaRPr lang="en-US" sz="1300" dirty="0"/>
           </a:p>
           <a:p>
-            <a:pPr indent="0" marL="0">
+            <a:pPr marL="0" indent="0">
               <a:lnSpc>
                 <a:spcPct val="135000"/>
               </a:lnSpc>
@@ -11171,7 +11117,7 @@
             <a:endParaRPr lang="en-US" sz="1300" dirty="0"/>
           </a:p>
           <a:p>
-            <a:pPr indent="0" marL="0">
+            <a:pPr marL="0" indent="0">
               <a:lnSpc>
                 <a:spcPct val="135000"/>
               </a:lnSpc>
@@ -11191,7 +11137,7 @@
             <a:endParaRPr lang="en-US" sz="1300" dirty="0"/>
           </a:p>
           <a:p>
-            <a:pPr indent="0" marL="0">
+            <a:pPr marL="0" indent="0">
               <a:lnSpc>
                 <a:spcPct val="135000"/>
               </a:lnSpc>
@@ -11298,7 +11244,7 @@
           <a:bodyPr wrap="square" lIns="0" tIns="0" rIns="0" bIns="0" rtlCol="0" anchor="ctr"/>
           <a:lstStyle/>
           <a:p>
-            <a:pPr algn="ctr" indent="0" marL="0">
+            <a:pPr marL="0" indent="0" algn="ctr">
               <a:buNone/>
             </a:pPr>
             <a:r>
@@ -11337,7 +11283,7 @@
           <a:bodyPr wrap="square" lIns="0" tIns="0" rIns="0" bIns="0" rtlCol="0" anchor="t"/>
           <a:lstStyle/>
           <a:p>
-            <a:pPr indent="0" marL="0">
+            <a:pPr marL="0" indent="0">
               <a:buNone/>
             </a:pPr>
             <a:r>
@@ -11376,7 +11322,7 @@
           <a:bodyPr wrap="square" lIns="0" tIns="0" rIns="0" bIns="0" rtlCol="0" anchor="t"/>
           <a:lstStyle/>
           <a:p>
-            <a:pPr indent="0" marL="0">
+            <a:pPr marL="0" indent="0">
               <a:lnSpc>
                 <a:spcPct val="135000"/>
               </a:lnSpc>
@@ -11396,7 +11342,7 @@
             <a:endParaRPr lang="en-US" sz="1300" dirty="0"/>
           </a:p>
           <a:p>
-            <a:pPr indent="0" marL="0">
+            <a:pPr marL="0" indent="0">
               <a:lnSpc>
                 <a:spcPct val="135000"/>
               </a:lnSpc>
@@ -11416,7 +11362,7 @@
             <a:endParaRPr lang="en-US" sz="1300" dirty="0"/>
           </a:p>
           <a:p>
-            <a:pPr indent="0" marL="0">
+            <a:pPr marL="0" indent="0">
               <a:lnSpc>
                 <a:spcPct val="135000"/>
               </a:lnSpc>
@@ -11436,7 +11382,7 @@
             <a:endParaRPr lang="en-US" sz="1300" dirty="0"/>
           </a:p>
           <a:p>
-            <a:pPr indent="0" marL="0">
+            <a:pPr marL="0" indent="0">
               <a:lnSpc>
                 <a:spcPct val="135000"/>
               </a:lnSpc>
@@ -11543,7 +11489,7 @@
           <a:bodyPr wrap="square" lIns="0" tIns="0" rIns="0" bIns="0" rtlCol="0" anchor="ctr"/>
           <a:lstStyle/>
           <a:p>
-            <a:pPr algn="ctr" indent="0" marL="0">
+            <a:pPr marL="0" indent="0" algn="ctr">
               <a:buNone/>
             </a:pPr>
             <a:r>
@@ -11582,7 +11528,7 @@
           <a:bodyPr wrap="square" lIns="0" tIns="0" rIns="0" bIns="0" rtlCol="0" anchor="t"/>
           <a:lstStyle/>
           <a:p>
-            <a:pPr indent="0" marL="0">
+            <a:pPr marL="0" indent="0">
               <a:buNone/>
             </a:pPr>
             <a:r>
@@ -11621,7 +11567,7 @@
           <a:bodyPr wrap="square" lIns="0" tIns="0" rIns="0" bIns="0" rtlCol="0" anchor="t"/>
           <a:lstStyle/>
           <a:p>
-            <a:pPr indent="0" marL="0">
+            <a:pPr marL="0" indent="0">
               <a:lnSpc>
                 <a:spcPct val="135000"/>
               </a:lnSpc>
@@ -11641,7 +11587,7 @@
             <a:endParaRPr lang="en-US" sz="1300" dirty="0"/>
           </a:p>
           <a:p>
-            <a:pPr indent="0" marL="0">
+            <a:pPr marL="0" indent="0">
               <a:lnSpc>
                 <a:spcPct val="135000"/>
               </a:lnSpc>
@@ -11683,7 +11629,7 @@
           <a:bodyPr wrap="square" lIns="0" tIns="0" rIns="0" bIns="0" rtlCol="0" anchor="t"/>
           <a:lstStyle/>
           <a:p>
-            <a:pPr indent="0" marL="0">
+            <a:pPr marL="0" indent="0">
               <a:buNone/>
             </a:pPr>
             <a:r>
@@ -11741,6 +11687,7 @@
         <a:solidFill>
           <a:srgbClr val="F5F7FC"/>
         </a:solidFill>
+        <a:effectLst/>
       </p:bgPr>
     </p:bg>
     <p:spTree>
@@ -11778,7 +11725,7 @@
           <a:bodyPr wrap="square" lIns="0" tIns="0" rIns="0" bIns="0" rtlCol="0" anchor="t"/>
           <a:lstStyle/>
           <a:p>
-            <a:pPr indent="0" marL="0">
+            <a:pPr marL="0" indent="0">
               <a:buNone/>
             </a:pPr>
             <a:r>
@@ -11817,7 +11764,7 @@
           <a:bodyPr wrap="square" lIns="0" tIns="0" rIns="0" bIns="0" rtlCol="0" anchor="t"/>
           <a:lstStyle/>
           <a:p>
-            <a:pPr indent="0" marL="0">
+            <a:pPr marL="0" indent="0">
               <a:buNone/>
             </a:pPr>
             <a:r>
@@ -11894,7 +11841,7 @@
           <a:bodyPr wrap="square" lIns="0" tIns="0" rIns="0" bIns="0" rtlCol="0" anchor="t"/>
           <a:lstStyle/>
           <a:p>
-            <a:pPr indent="0" marL="0">
+            <a:pPr marL="0" indent="0">
               <a:buNone/>
             </a:pPr>
             <a:r>
@@ -11933,7 +11880,7 @@
           <a:bodyPr wrap="square" lIns="0" tIns="0" rIns="0" bIns="0" rtlCol="0" anchor="t"/>
           <a:lstStyle/>
           <a:p>
-            <a:pPr indent="0" marL="0">
+            <a:pPr marL="0" indent="0">
               <a:buNone/>
             </a:pPr>
             <a:r>
@@ -11972,7 +11919,7 @@
           <a:bodyPr wrap="square" lIns="0" tIns="0" rIns="0" bIns="0" rtlCol="0" anchor="t"/>
           <a:lstStyle/>
           <a:p>
-            <a:pPr indent="0" marL="0">
+            <a:pPr marL="0" indent="0">
               <a:lnSpc>
                 <a:spcPct val="130000"/>
               </a:lnSpc>
@@ -11992,7 +11939,7 @@
             <a:endParaRPr lang="en-US" sz="1200" dirty="0"/>
           </a:p>
           <a:p>
-            <a:pPr indent="0" marL="0">
+            <a:pPr marL="0" indent="0">
               <a:lnSpc>
                 <a:spcPct val="130000"/>
               </a:lnSpc>
@@ -12012,7 +11959,7 @@
             <a:endParaRPr lang="en-US" sz="1200" dirty="0"/>
           </a:p>
           <a:p>
-            <a:pPr indent="0" marL="0">
+            <a:pPr marL="0" indent="0">
               <a:lnSpc>
                 <a:spcPct val="130000"/>
               </a:lnSpc>
@@ -12117,7 +12064,7 @@
           <a:bodyPr wrap="square" lIns="0" tIns="0" rIns="0" bIns="0" rtlCol="0" anchor="t"/>
           <a:lstStyle/>
           <a:p>
-            <a:pPr indent="0" marL="0">
+            <a:pPr marL="0" indent="0">
               <a:buNone/>
             </a:pPr>
             <a:r>
@@ -12156,7 +12103,7 @@
           <a:bodyPr wrap="square" lIns="0" tIns="0" rIns="0" bIns="0" rtlCol="0" anchor="t"/>
           <a:lstStyle/>
           <a:p>
-            <a:pPr indent="0" marL="0">
+            <a:pPr marL="0" indent="0">
               <a:buNone/>
             </a:pPr>
             <a:r>
@@ -12195,7 +12142,7 @@
           <a:bodyPr wrap="square" lIns="0" tIns="0" rIns="0" bIns="0" rtlCol="0" anchor="t"/>
           <a:lstStyle/>
           <a:p>
-            <a:pPr indent="0" marL="0">
+            <a:pPr marL="0" indent="0">
               <a:lnSpc>
                 <a:spcPct val="130000"/>
               </a:lnSpc>
@@ -12215,7 +12162,7 @@
             <a:endParaRPr lang="en-US" sz="1200" dirty="0"/>
           </a:p>
           <a:p>
-            <a:pPr indent="0" marL="0">
+            <a:pPr marL="0" indent="0">
               <a:lnSpc>
                 <a:spcPct val="130000"/>
               </a:lnSpc>
@@ -12235,7 +12182,7 @@
             <a:endParaRPr lang="en-US" sz="1200" dirty="0"/>
           </a:p>
           <a:p>
-            <a:pPr indent="0" marL="0">
+            <a:pPr marL="0" indent="0">
               <a:lnSpc>
                 <a:spcPct val="130000"/>
               </a:lnSpc>
@@ -12340,7 +12287,7 @@
           <a:bodyPr wrap="square" lIns="0" tIns="0" rIns="0" bIns="0" rtlCol="0" anchor="t"/>
           <a:lstStyle/>
           <a:p>
-            <a:pPr indent="0" marL="0">
+            <a:pPr marL="0" indent="0">
               <a:buNone/>
             </a:pPr>
             <a:r>
@@ -12379,7 +12326,7 @@
           <a:bodyPr wrap="square" lIns="0" tIns="0" rIns="0" bIns="0" rtlCol="0" anchor="t"/>
           <a:lstStyle/>
           <a:p>
-            <a:pPr indent="0" marL="0">
+            <a:pPr marL="0" indent="0">
               <a:buNone/>
             </a:pPr>
             <a:r>
@@ -12418,7 +12365,7 @@
           <a:bodyPr wrap="square" lIns="0" tIns="0" rIns="0" bIns="0" rtlCol="0" anchor="t"/>
           <a:lstStyle/>
           <a:p>
-            <a:pPr indent="0" marL="0">
+            <a:pPr marL="0" indent="0">
               <a:lnSpc>
                 <a:spcPct val="130000"/>
               </a:lnSpc>
@@ -12438,7 +12385,7 @@
             <a:endParaRPr lang="en-US" sz="1200" dirty="0"/>
           </a:p>
           <a:p>
-            <a:pPr indent="0" marL="0">
+            <a:pPr marL="0" indent="0">
               <a:lnSpc>
                 <a:spcPct val="130000"/>
               </a:lnSpc>
@@ -12458,7 +12405,7 @@
             <a:endParaRPr lang="en-US" sz="1200" dirty="0"/>
           </a:p>
           <a:p>
-            <a:pPr indent="0" marL="0">
+            <a:pPr marL="0" indent="0">
               <a:lnSpc>
                 <a:spcPct val="130000"/>
               </a:lnSpc>
@@ -12563,7 +12510,7 @@
           <a:bodyPr wrap="square" lIns="0" tIns="0" rIns="0" bIns="0" rtlCol="0" anchor="t"/>
           <a:lstStyle/>
           <a:p>
-            <a:pPr indent="0" marL="0">
+            <a:pPr marL="0" indent="0">
               <a:buNone/>
             </a:pPr>
             <a:r>
@@ -12602,7 +12549,7 @@
           <a:bodyPr wrap="square" lIns="0" tIns="0" rIns="0" bIns="0" rtlCol="0" anchor="t"/>
           <a:lstStyle/>
           <a:p>
-            <a:pPr indent="0" marL="0">
+            <a:pPr marL="0" indent="0">
               <a:buNone/>
             </a:pPr>
             <a:r>
@@ -12641,7 +12588,7 @@
           <a:bodyPr wrap="square" lIns="0" tIns="0" rIns="0" bIns="0" rtlCol="0" anchor="t"/>
           <a:lstStyle/>
           <a:p>
-            <a:pPr indent="0" marL="0">
+            <a:pPr marL="0" indent="0">
               <a:lnSpc>
                 <a:spcPct val="130000"/>
               </a:lnSpc>
@@ -12661,7 +12608,7 @@
             <a:endParaRPr lang="en-US" sz="1200" dirty="0"/>
           </a:p>
           <a:p>
-            <a:pPr indent="0" marL="0">
+            <a:pPr marL="0" indent="0">
               <a:lnSpc>
                 <a:spcPct val="130000"/>
               </a:lnSpc>
@@ -12766,7 +12713,7 @@
           <a:bodyPr wrap="square" lIns="0" tIns="0" rIns="0" bIns="0" rtlCol="0" anchor="t"/>
           <a:lstStyle/>
           <a:p>
-            <a:pPr indent="0" marL="0">
+            <a:pPr marL="0" indent="0">
               <a:buNone/>
             </a:pPr>
             <a:r>
@@ -12805,7 +12752,7 @@
           <a:bodyPr wrap="square" lIns="0" tIns="0" rIns="0" bIns="0" rtlCol="0" anchor="t"/>
           <a:lstStyle/>
           <a:p>
-            <a:pPr indent="0" marL="0">
+            <a:pPr marL="0" indent="0">
               <a:buNone/>
             </a:pPr>
             <a:r>
@@ -12844,7 +12791,7 @@
           <a:bodyPr wrap="square" lIns="0" tIns="0" rIns="0" bIns="0" rtlCol="0" anchor="t"/>
           <a:lstStyle/>
           <a:p>
-            <a:pPr indent="0" marL="0">
+            <a:pPr marL="0" indent="0">
               <a:lnSpc>
                 <a:spcPct val="130000"/>
               </a:lnSpc>
@@ -12864,7 +12811,7 @@
             <a:endParaRPr lang="en-US" sz="1200" dirty="0"/>
           </a:p>
           <a:p>
-            <a:pPr indent="0" marL="0">
+            <a:pPr marL="0" indent="0">
               <a:lnSpc>
                 <a:spcPct val="130000"/>
               </a:lnSpc>
@@ -12884,7 +12831,7 @@
             <a:endParaRPr lang="en-US" sz="1200" dirty="0"/>
           </a:p>
           <a:p>
-            <a:pPr indent="0" marL="0">
+            <a:pPr marL="0" indent="0">
               <a:lnSpc>
                 <a:spcPct val="130000"/>
               </a:lnSpc>
@@ -12953,7 +12900,7 @@
           <a:bodyPr wrap="square" lIns="0" tIns="0" rIns="0" bIns="0" rtlCol="0" anchor="ctr"/>
           <a:lstStyle/>
           <a:p>
-            <a:pPr indent="0" marL="0">
+            <a:pPr marL="0" indent="0">
               <a:buNone/>
             </a:pPr>
             <a:r>
@@ -12967,9 +12914,6 @@
               </a:rPr>
               <a:t>AI 는 </a:t>
             </a:r>
-            <a:pPr indent="0" marL="0">
-              <a:buNone/>
-            </a:pPr>
             <a:r>
               <a:rPr lang="en-US" sz="1500" b="1" dirty="0">
                 <a:solidFill>
@@ -12981,9 +12925,6 @@
               </a:rPr>
               <a:t>[승인]을 누른 뒤에만</a:t>
             </a:r>
-            <a:pPr indent="0" marL="0">
-              <a:buNone/>
-            </a:pPr>
             <a:r>
               <a:rPr lang="en-US" sz="1500" dirty="0">
                 <a:solidFill>
@@ -13020,7 +12961,7 @@
           <a:bodyPr wrap="square" lIns="0" tIns="0" rIns="0" bIns="0" rtlCol="0" anchor="t"/>
           <a:lstStyle/>
           <a:p>
-            <a:pPr indent="0" marL="0">
+            <a:pPr marL="0" indent="0">
               <a:buNone/>
             </a:pPr>
             <a:r>
@@ -13078,6 +13019,7 @@
         <a:solidFill>
           <a:srgbClr val="F5F7FC"/>
         </a:solidFill>
+        <a:effectLst/>
       </p:bgPr>
     </p:bg>
     <p:spTree>
@@ -13115,7 +13057,7 @@
           <a:bodyPr wrap="square" lIns="0" tIns="0" rIns="0" bIns="0" rtlCol="0" anchor="t"/>
           <a:lstStyle/>
           <a:p>
-            <a:pPr indent="0" marL="0">
+            <a:pPr marL="0" indent="0">
               <a:buNone/>
             </a:pPr>
             <a:r>
@@ -13154,7 +13096,7 @@
           <a:bodyPr wrap="square" lIns="0" tIns="0" rIns="0" bIns="0" rtlCol="0" anchor="t"/>
           <a:lstStyle/>
           <a:p>
-            <a:pPr indent="0" marL="0">
+            <a:pPr marL="0" indent="0">
               <a:buNone/>
             </a:pPr>
             <a:r>
@@ -13193,7 +13135,7 @@
           <a:bodyPr wrap="square" lIns="0" tIns="0" rIns="0" bIns="0" rtlCol="0" anchor="t"/>
           <a:lstStyle/>
           <a:p>
-            <a:pPr indent="0" marL="0">
+            <a:pPr marL="0" indent="0">
               <a:buNone/>
             </a:pPr>
             <a:r>
@@ -13365,7 +13307,7 @@
           <a:bodyPr wrap="square" lIns="0" tIns="0" rIns="0" bIns="0" rtlCol="0" anchor="t"/>
           <a:lstStyle/>
           <a:p>
-            <a:pPr indent="0" marL="0">
+            <a:pPr marL="0" indent="0">
               <a:buNone/>
             </a:pPr>
             <a:r>
@@ -13404,7 +13346,7 @@
           <a:bodyPr wrap="square" lIns="0" tIns="0" rIns="0" bIns="0" rtlCol="0" anchor="t"/>
           <a:lstStyle/>
           <a:p>
-            <a:pPr indent="0" marL="0">
+            <a:pPr marL="0" indent="0">
               <a:lnSpc>
                 <a:spcPct val="140000"/>
               </a:lnSpc>
@@ -13424,7 +13366,7 @@
             <a:endParaRPr lang="en-US" sz="1500" dirty="0"/>
           </a:p>
           <a:p>
-            <a:pPr indent="0" marL="0">
+            <a:pPr marL="0" indent="0">
               <a:lnSpc>
                 <a:spcPct val="140000"/>
               </a:lnSpc>
@@ -13444,7 +13386,7 @@
             <a:endParaRPr lang="en-US" sz="1500" dirty="0"/>
           </a:p>
           <a:p>
-            <a:pPr indent="0" marL="0">
+            <a:pPr marL="0" indent="0">
               <a:lnSpc>
                 <a:spcPct val="140000"/>
               </a:lnSpc>
@@ -13464,7 +13406,7 @@
             <a:endParaRPr lang="en-US" sz="1500" dirty="0"/>
           </a:p>
           <a:p>
-            <a:pPr indent="0" marL="0">
+            <a:pPr marL="0" indent="0">
               <a:lnSpc>
                 <a:spcPct val="140000"/>
               </a:lnSpc>
@@ -13484,7 +13426,7 @@
             <a:endParaRPr lang="en-US" sz="1500" dirty="0"/>
           </a:p>
           <a:p>
-            <a:pPr indent="0" marL="0">
+            <a:pPr marL="0" indent="0">
               <a:lnSpc>
                 <a:spcPct val="140000"/>
               </a:lnSpc>
@@ -13526,7 +13468,7 @@
           <a:bodyPr wrap="square" lIns="0" tIns="0" rIns="0" bIns="0" rtlCol="0" anchor="t"/>
           <a:lstStyle/>
           <a:p>
-            <a:pPr indent="0" marL="0">
+            <a:pPr marL="0" indent="0">
               <a:buNone/>
             </a:pPr>
             <a:r>
@@ -13584,6 +13526,7 @@
         <a:solidFill>
           <a:srgbClr val="F5F7FC"/>
         </a:solidFill>
+        <a:effectLst/>
       </p:bgPr>
     </p:bg>
     <p:spTree>
@@ -13621,7 +13564,7 @@
           <a:bodyPr wrap="square" lIns="0" tIns="0" rIns="0" bIns="0" rtlCol="0" anchor="t"/>
           <a:lstStyle/>
           <a:p>
-            <a:pPr indent="0" marL="0">
+            <a:pPr marL="0" indent="0">
               <a:buNone/>
             </a:pPr>
             <a:r>
@@ -13660,7 +13603,7 @@
           <a:bodyPr wrap="square" lIns="0" tIns="0" rIns="0" bIns="0" rtlCol="0" anchor="t"/>
           <a:lstStyle/>
           <a:p>
-            <a:pPr indent="0" marL="0">
+            <a:pPr marL="0" indent="0">
               <a:buNone/>
             </a:pPr>
             <a:r>
@@ -13737,7 +13680,7 @@
           <a:bodyPr wrap="square" lIns="0" tIns="0" rIns="0" bIns="0" rtlCol="0" anchor="t"/>
           <a:lstStyle/>
           <a:p>
-            <a:pPr indent="0" marL="0">
+            <a:pPr marL="0" indent="0">
               <a:buNone/>
             </a:pPr>
             <a:r>
@@ -13776,7 +13719,7 @@
           <a:bodyPr wrap="square" lIns="0" tIns="0" rIns="0" bIns="0" rtlCol="0" anchor="ctr"/>
           <a:lstStyle/>
           <a:p>
-            <a:pPr indent="0" marL="0">
+            <a:pPr marL="0" indent="0">
               <a:buNone/>
             </a:pPr>
             <a:r>
@@ -13815,7 +13758,7 @@
           <a:bodyPr wrap="square" lIns="0" tIns="0" rIns="0" bIns="0" rtlCol="0" anchor="t"/>
           <a:lstStyle/>
           <a:p>
-            <a:pPr indent="0" marL="0">
+            <a:pPr marL="0" indent="0">
               <a:buNone/>
             </a:pPr>
             <a:r>
@@ -13892,7 +13835,7 @@
           <a:bodyPr wrap="square" lIns="0" tIns="0" rIns="0" bIns="0" rtlCol="0" anchor="t"/>
           <a:lstStyle/>
           <a:p>
-            <a:pPr indent="0" marL="0">
+            <a:pPr marL="0" indent="0">
               <a:buNone/>
             </a:pPr>
             <a:r>
@@ -13931,7 +13874,7 @@
           <a:bodyPr wrap="square" lIns="0" tIns="0" rIns="0" bIns="0" rtlCol="0" anchor="ctr"/>
           <a:lstStyle/>
           <a:p>
-            <a:pPr indent="0" marL="0">
+            <a:pPr marL="0" indent="0">
               <a:buNone/>
             </a:pPr>
             <a:r>
@@ -13970,7 +13913,7 @@
           <a:bodyPr wrap="square" lIns="0" tIns="0" rIns="0" bIns="0" rtlCol="0" anchor="t"/>
           <a:lstStyle/>
           <a:p>
-            <a:pPr indent="0" marL="0">
+            <a:pPr marL="0" indent="0">
               <a:buNone/>
             </a:pPr>
             <a:r>
@@ -14047,7 +13990,7 @@
           <a:bodyPr wrap="square" lIns="0" tIns="0" rIns="0" bIns="0" rtlCol="0" anchor="t"/>
           <a:lstStyle/>
           <a:p>
-            <a:pPr indent="0" marL="0">
+            <a:pPr marL="0" indent="0">
               <a:buNone/>
             </a:pPr>
             <a:r>
@@ -14086,7 +14029,7 @@
           <a:bodyPr wrap="square" lIns="0" tIns="0" rIns="0" bIns="0" rtlCol="0" anchor="ctr"/>
           <a:lstStyle/>
           <a:p>
-            <a:pPr indent="0" marL="0">
+            <a:pPr marL="0" indent="0">
               <a:buNone/>
             </a:pPr>
             <a:r>
@@ -14125,7 +14068,7 @@
           <a:bodyPr wrap="square" lIns="0" tIns="0" rIns="0" bIns="0" rtlCol="0" anchor="t"/>
           <a:lstStyle/>
           <a:p>
-            <a:pPr indent="0" marL="0">
+            <a:pPr marL="0" indent="0">
               <a:buNone/>
             </a:pPr>
             <a:r>
@@ -14202,7 +14145,7 @@
           <a:bodyPr wrap="square" lIns="0" tIns="0" rIns="0" bIns="0" rtlCol="0" anchor="t"/>
           <a:lstStyle/>
           <a:p>
-            <a:pPr indent="0" marL="0">
+            <a:pPr marL="0" indent="0">
               <a:buNone/>
             </a:pPr>
             <a:r>
@@ -14241,7 +14184,7 @@
           <a:bodyPr wrap="square" lIns="0" tIns="0" rIns="0" bIns="0" rtlCol="0" anchor="ctr"/>
           <a:lstStyle/>
           <a:p>
-            <a:pPr indent="0" marL="0">
+            <a:pPr marL="0" indent="0">
               <a:buNone/>
             </a:pPr>
             <a:r>
@@ -14280,7 +14223,7 @@
           <a:bodyPr wrap="square" lIns="0" tIns="0" rIns="0" bIns="0" rtlCol="0" anchor="t"/>
           <a:lstStyle/>
           <a:p>
-            <a:pPr indent="0" marL="0">
+            <a:pPr marL="0" indent="0">
               <a:buNone/>
             </a:pPr>
             <a:r>
@@ -14319,7 +14262,7 @@
           <a:bodyPr wrap="square" lIns="0" tIns="0" rIns="0" bIns="0" rtlCol="0" anchor="t"/>
           <a:lstStyle/>
           <a:p>
-            <a:pPr indent="0" marL="0">
+            <a:pPr marL="0" indent="0">
               <a:buNone/>
             </a:pPr>
             <a:r>
@@ -14333,9 +14276,6 @@
               </a:rPr>
               <a:t>광고비는 </a:t>
             </a:r>
-            <a:pPr indent="0" marL="0">
-              <a:buNone/>
-            </a:pPr>
             <a:r>
               <a:rPr lang="en-US" sz="1500" b="1" dirty="0">
                 <a:solidFill>
@@ -14347,9 +14287,6 @@
               </a:rPr>
               <a:t>+23.07%</a:t>
             </a:r>
-            <a:pPr indent="0" marL="0">
-              <a:buNone/>
-            </a:pPr>
             <a:r>
               <a:rPr lang="en-US" sz="1500" dirty="0">
                 <a:solidFill>
@@ -14361,9 +14298,6 @@
               </a:rPr>
               <a:t> 늘었고 방문은 </a:t>
             </a:r>
-            <a:pPr indent="0" marL="0">
-              <a:buNone/>
-            </a:pPr>
             <a:r>
               <a:rPr lang="en-US" sz="1500" b="1" dirty="0">
                 <a:solidFill>
@@ -14375,9 +14309,6 @@
               </a:rPr>
               <a:t>+0.90%</a:t>
             </a:r>
-            <a:pPr indent="0" marL="0">
-              <a:buNone/>
-            </a:pPr>
             <a:r>
               <a:rPr lang="en-US" sz="1500" dirty="0">
                 <a:solidFill>
@@ -14414,7 +14345,7 @@
           <a:bodyPr wrap="square" lIns="0" tIns="0" rIns="0" bIns="0" rtlCol="0" anchor="t"/>
           <a:lstStyle/>
           <a:p>
-            <a:pPr indent="0" marL="0">
+            <a:pPr marL="0" indent="0">
               <a:buNone/>
             </a:pPr>
             <a:r>
@@ -14483,6 +14414,7 @@
           </a:gsLst>
           <a:lin ang="2280000" scaled="0"/>
         </a:gradFill>
+        <a:effectLst/>
       </p:bgPr>
     </p:bg>
     <p:spTree>
@@ -14520,7 +14452,7 @@
           <a:bodyPr wrap="square" lIns="0" tIns="0" rIns="0" bIns="0" rtlCol="0" anchor="t"/>
           <a:lstStyle/>
           <a:p>
-            <a:pPr indent="0" marL="0">
+            <a:pPr marL="0" indent="0">
               <a:buNone/>
             </a:pPr>
             <a:r>
@@ -14559,7 +14491,7 @@
           <a:bodyPr wrap="square" lIns="0" tIns="0" rIns="0" bIns="0" rtlCol="0" anchor="t"/>
           <a:lstStyle/>
           <a:p>
-            <a:pPr indent="0" marL="0">
+            <a:pPr marL="0" indent="0">
               <a:buNone/>
             </a:pPr>
             <a:r>
@@ -14623,7 +14555,7 @@
           <a:bodyPr wrap="square" lIns="0" tIns="0" rIns="0" bIns="0" rtlCol="0" anchor="ctr"/>
           <a:lstStyle/>
           <a:p>
-            <a:pPr algn="ctr" indent="0" marL="0">
+            <a:pPr marL="0" indent="0" algn="ctr">
               <a:buNone/>
             </a:pPr>
             <a:r>
@@ -14662,7 +14594,7 @@
           <a:bodyPr wrap="square" lIns="0" tIns="0" rIns="0" bIns="0" rtlCol="0" anchor="ctr"/>
           <a:lstStyle/>
           <a:p>
-            <a:pPr indent="0" marL="0">
+            <a:pPr marL="0" indent="0">
               <a:buNone/>
             </a:pPr>
             <a:r>
@@ -14726,7 +14658,7 @@
           <a:bodyPr wrap="square" lIns="0" tIns="0" rIns="0" bIns="0" rtlCol="0" anchor="ctr"/>
           <a:lstStyle/>
           <a:p>
-            <a:pPr algn="ctr" indent="0" marL="0">
+            <a:pPr marL="0" indent="0" algn="ctr">
               <a:buNone/>
             </a:pPr>
             <a:r>
@@ -14765,7 +14697,7 @@
           <a:bodyPr wrap="square" lIns="0" tIns="0" rIns="0" bIns="0" rtlCol="0" anchor="ctr"/>
           <a:lstStyle/>
           <a:p>
-            <a:pPr indent="0" marL="0">
+            <a:pPr marL="0" indent="0">
               <a:buNone/>
             </a:pPr>
             <a:r>
@@ -14829,7 +14761,7 @@
           <a:bodyPr wrap="square" lIns="0" tIns="0" rIns="0" bIns="0" rtlCol="0" anchor="ctr"/>
           <a:lstStyle/>
           <a:p>
-            <a:pPr algn="ctr" indent="0" marL="0">
+            <a:pPr marL="0" indent="0" algn="ctr">
               <a:buNone/>
             </a:pPr>
             <a:r>
@@ -14868,7 +14800,7 @@
           <a:bodyPr wrap="square" lIns="0" tIns="0" rIns="0" bIns="0" rtlCol="0" anchor="ctr"/>
           <a:lstStyle/>
           <a:p>
-            <a:pPr indent="0" marL="0">
+            <a:pPr marL="0" indent="0">
               <a:buNone/>
             </a:pPr>
             <a:r>
@@ -14932,7 +14864,7 @@
           <a:bodyPr wrap="square" lIns="0" tIns="0" rIns="0" bIns="0" rtlCol="0" anchor="ctr"/>
           <a:lstStyle/>
           <a:p>
-            <a:pPr algn="ctr" indent="0" marL="0">
+            <a:pPr marL="0" indent="0" algn="ctr">
               <a:buNone/>
             </a:pPr>
             <a:r>
@@ -14971,7 +14903,7 @@
           <a:bodyPr wrap="square" lIns="0" tIns="0" rIns="0" bIns="0" rtlCol="0" anchor="ctr"/>
           <a:lstStyle/>
           <a:p>
-            <a:pPr indent="0" marL="0">
+            <a:pPr marL="0" indent="0">
               <a:buNone/>
             </a:pPr>
             <a:r>
@@ -15035,7 +14967,7 @@
           <a:bodyPr wrap="square" lIns="0" tIns="0" rIns="0" bIns="0" rtlCol="0" anchor="ctr"/>
           <a:lstStyle/>
           <a:p>
-            <a:pPr algn="ctr" indent="0" marL="0">
+            <a:pPr marL="0" indent="0" algn="ctr">
               <a:buNone/>
             </a:pPr>
             <a:r>
@@ -15074,7 +15006,7 @@
           <a:bodyPr wrap="square" lIns="0" tIns="0" rIns="0" bIns="0" rtlCol="0" anchor="ctr"/>
           <a:lstStyle/>
           <a:p>
-            <a:pPr indent="0" marL="0">
+            <a:pPr marL="0" indent="0">
               <a:buNone/>
             </a:pPr>
             <a:r>
@@ -15138,7 +15070,7 @@
           <a:bodyPr wrap="square" lIns="0" tIns="0" rIns="0" bIns="0" rtlCol="0" anchor="ctr"/>
           <a:lstStyle/>
           <a:p>
-            <a:pPr algn="ctr" indent="0" marL="0">
+            <a:pPr marL="0" indent="0" algn="ctr">
               <a:buNone/>
             </a:pPr>
             <a:r>
@@ -15177,7 +15109,7 @@
           <a:bodyPr wrap="square" lIns="0" tIns="0" rIns="0" bIns="0" rtlCol="0" anchor="ctr"/>
           <a:lstStyle/>
           <a:p>
-            <a:pPr indent="0" marL="0">
+            <a:pPr marL="0" indent="0">
               <a:buNone/>
             </a:pPr>
             <a:r>
@@ -15247,7 +15179,7 @@
           <a:bodyPr wrap="square" lIns="0" tIns="0" rIns="0" bIns="0" rtlCol="0" anchor="ctr"/>
           <a:lstStyle/>
           <a:p>
-            <a:pPr indent="0" marL="0">
+            <a:pPr marL="0" indent="0">
               <a:buNone/>
             </a:pPr>
             <a:r>
@@ -15286,7 +15218,7 @@
           <a:bodyPr wrap="square" lIns="0" tIns="0" rIns="0" bIns="0" rtlCol="0" anchor="t"/>
           <a:lstStyle/>
           <a:p>
-            <a:pPr indent="0" marL="0">
+            <a:pPr marL="0" indent="0">
               <a:buNone/>
             </a:pPr>
             <a:r>
@@ -15629,4 +15561,299 @@
     </a:ext>
   </a:extLst>
 </a:theme>
+</file>
+
+<file path=ppt/theme/theme2.xml><?xml version="1.0" encoding="utf-8"?>
+<a:theme xmlns:a="http://schemas.openxmlformats.org/drawingml/2006/main" name="Office 테마">
+  <a:themeElements>
+    <a:clrScheme name="Office">
+      <a:dk1>
+        <a:sysClr val="windowText" lastClr="000000"/>
+      </a:dk1>
+      <a:lt1>
+        <a:sysClr val="window" lastClr="FFFFFF"/>
+      </a:lt1>
+      <a:dk2>
+        <a:srgbClr val="44546A"/>
+      </a:dk2>
+      <a:lt2>
+        <a:srgbClr val="E7E6E6"/>
+      </a:lt2>
+      <a:accent1>
+        <a:srgbClr val="4472C4"/>
+      </a:accent1>
+      <a:accent2>
+        <a:srgbClr val="ED7D31"/>
+      </a:accent2>
+      <a:accent3>
+        <a:srgbClr val="A5A5A5"/>
+      </a:accent3>
+      <a:accent4>
+        <a:srgbClr val="FFC000"/>
+      </a:accent4>
+      <a:accent5>
+        <a:srgbClr val="5B9BD5"/>
+      </a:accent5>
+      <a:accent6>
+        <a:srgbClr val="70AD47"/>
+      </a:accent6>
+      <a:hlink>
+        <a:srgbClr val="0563C1"/>
+      </a:hlink>
+      <a:folHlink>
+        <a:srgbClr val="954F72"/>
+      </a:folHlink>
+    </a:clrScheme>
+    <a:fontScheme name="Office">
+      <a:majorFont>
+        <a:latin typeface="맑은 고딕" panose="020F0302020204030204"/>
+        <a:ea typeface=""/>
+        <a:cs typeface=""/>
+        <a:font script="Jpan" typeface="游ゴシック Light"/>
+        <a:font script="Hang" typeface="맑은 고딕"/>
+        <a:font script="Hans" typeface="等线 Light"/>
+        <a:font script="Hant" typeface="新細明體"/>
+        <a:font script="Arab" typeface="Times New Roman"/>
+        <a:font script="Hebr" typeface="Times New Roman"/>
+        <a:font script="Thai" typeface="Angsana New"/>
+        <a:font script="Ethi" typeface="Nyala"/>
+        <a:font script="Beng" typeface="Vrinda"/>
+        <a:font script="Gujr" typeface="Shruti"/>
+        <a:font script="Khmr" typeface="MoolBoran"/>
+        <a:font script="Knda" typeface="Tunga"/>
+        <a:font script="Guru" typeface="Raavi"/>
+        <a:font script="Cans" typeface="Euphemia"/>
+        <a:font script="Cher" typeface="Plantagenet Cherokee"/>
+        <a:font script="Yiii" typeface="Microsoft Yi Baiti"/>
+        <a:font script="Tibt" typeface="Microsoft Himalaya"/>
+        <a:font script="Thaa" typeface="MV Boli"/>
+        <a:font script="Deva" typeface="Mangal"/>
+        <a:font script="Telu" typeface="Gautami"/>
+        <a:font script="Taml" typeface="Latha"/>
+        <a:font script="Syrc" typeface="Estrangelo Edessa"/>
+        <a:font script="Orya" typeface="Kalinga"/>
+        <a:font script="Mlym" typeface="Kartika"/>
+        <a:font script="Laoo" typeface="DokChampa"/>
+        <a:font script="Sinh" typeface="Iskoola Pota"/>
+        <a:font script="Mong" typeface="Mongolian Baiti"/>
+        <a:font script="Viet" typeface="Times New Roman"/>
+        <a:font script="Uigh" typeface="Microsoft Uighur"/>
+        <a:font script="Geor" typeface="Sylfaen"/>
+        <a:font script="Armn" typeface="Arial"/>
+        <a:font script="Bugi" typeface="Leelawadee UI"/>
+        <a:font script="Bopo" typeface="Microsoft JhengHei"/>
+        <a:font script="Java" typeface="Javanese Text"/>
+        <a:font script="Lisu" typeface="Segoe UI"/>
+        <a:font script="Mymr" typeface="Myanmar Text"/>
+        <a:font script="Nkoo" typeface="Ebrima"/>
+        <a:font script="Olck" typeface="Nirmala UI"/>
+        <a:font script="Osma" typeface="Ebrima"/>
+        <a:font script="Phag" typeface="Phagspa"/>
+        <a:font script="Syrn" typeface="Estrangelo Edessa"/>
+        <a:font script="Syrj" typeface="Estrangelo Edessa"/>
+        <a:font script="Syre" typeface="Estrangelo Edessa"/>
+        <a:font script="Sora" typeface="Nirmala UI"/>
+        <a:font script="Tale" typeface="Microsoft Tai Le"/>
+        <a:font script="Talu" typeface="Microsoft New Tai Lue"/>
+        <a:font script="Tfng" typeface="Ebrima"/>
+      </a:majorFont>
+      <a:minorFont>
+        <a:latin typeface="맑은 고딕" panose="020F0502020204030204"/>
+        <a:ea typeface=""/>
+        <a:cs typeface=""/>
+        <a:font script="Jpan" typeface="游ゴシック"/>
+        <a:font script="Hang" typeface="맑은 고딕"/>
+        <a:font script="Hans" typeface="等线"/>
+        <a:font script="Hant" typeface="新細明體"/>
+        <a:font script="Arab" typeface="Arial"/>
+        <a:font script="Hebr" typeface="Arial"/>
+        <a:font script="Thai" typeface="Cordia New"/>
+        <a:font script="Ethi" typeface="Nyala"/>
+        <a:font script="Beng" typeface="Vrinda"/>
+        <a:font script="Gujr" typeface="Shruti"/>
+        <a:font script="Khmr" typeface="DaunPenh"/>
+        <a:font script="Knda" typeface="Tunga"/>
+        <a:font script="Guru" typeface="Raavi"/>
+        <a:font script="Cans" typeface="Euphemia"/>
+        <a:font script="Cher" typeface="Plantagenet Cherokee"/>
+        <a:font script="Yiii" typeface="Microsoft Yi Baiti"/>
+        <a:font script="Tibt" typeface="Microsoft Himalaya"/>
+        <a:font script="Thaa" typeface="MV Boli"/>
+        <a:font script="Deva" typeface="Mangal"/>
+        <a:font script="Telu" typeface="Gautami"/>
+        <a:font script="Taml" typeface="Latha"/>
+        <a:font script="Syrc" typeface="Estrangelo Edessa"/>
+        <a:font script="Orya" typeface="Kalinga"/>
+        <a:font script="Mlym" typeface="Kartika"/>
+        <a:font script="Laoo" typeface="DokChampa"/>
+        <a:font script="Sinh" typeface="Iskoola Pota"/>
+        <a:font script="Mong" typeface="Mongolian Baiti"/>
+        <a:font script="Viet" typeface="Arial"/>
+        <a:font script="Uigh" typeface="Microsoft Uighur"/>
+        <a:font script="Geor" typeface="Sylfaen"/>
+        <a:font script="Armn" typeface="Arial"/>
+        <a:font script="Bugi" typeface="Leelawadee UI"/>
+        <a:font script="Bopo" typeface="Microsoft JhengHei"/>
+        <a:font script="Java" typeface="Javanese Text"/>
+        <a:font script="Lisu" typeface="Segoe UI"/>
+        <a:font script="Mymr" typeface="Myanmar Text"/>
+        <a:font script="Nkoo" typeface="Ebrima"/>
+        <a:font script="Olck" typeface="Nirmala UI"/>
+        <a:font script="Osma" typeface="Ebrima"/>
+        <a:font script="Phag" typeface="Phagspa"/>
+        <a:font script="Syrn" typeface="Estrangelo Edessa"/>
+        <a:font script="Syrj" typeface="Estrangelo Edessa"/>
+        <a:font script="Syre" typeface="Estrangelo Edessa"/>
+        <a:font script="Sora" typeface="Nirmala UI"/>
+        <a:font script="Tale" typeface="Microsoft Tai Le"/>
+        <a:font script="Talu" typeface="Microsoft New Tai Lue"/>
+        <a:font script="Tfng" typeface="Ebrima"/>
+      </a:minorFont>
+    </a:fontScheme>
+    <a:fmtScheme name="Office">
+      <a:fillStyleLst>
+        <a:solidFill>
+          <a:schemeClr val="phClr"/>
+        </a:solidFill>
+        <a:gradFill rotWithShape="1">
+          <a:gsLst>
+            <a:gs pos="0">
+              <a:schemeClr val="phClr">
+                <a:lumMod val="110000"/>
+                <a:satMod val="105000"/>
+                <a:tint val="67000"/>
+              </a:schemeClr>
+            </a:gs>
+            <a:gs pos="50000">
+              <a:schemeClr val="phClr">
+                <a:lumMod val="105000"/>
+                <a:satMod val="103000"/>
+                <a:tint val="73000"/>
+              </a:schemeClr>
+            </a:gs>
+            <a:gs pos="100000">
+              <a:schemeClr val="phClr">
+                <a:lumMod val="105000"/>
+                <a:satMod val="109000"/>
+                <a:tint val="81000"/>
+              </a:schemeClr>
+            </a:gs>
+          </a:gsLst>
+          <a:lin ang="5400000" scaled="0"/>
+        </a:gradFill>
+        <a:gradFill rotWithShape="1">
+          <a:gsLst>
+            <a:gs pos="0">
+              <a:schemeClr val="phClr">
+                <a:satMod val="103000"/>
+                <a:lumMod val="102000"/>
+                <a:tint val="94000"/>
+              </a:schemeClr>
+            </a:gs>
+            <a:gs pos="50000">
+              <a:schemeClr val="phClr">
+                <a:satMod val="110000"/>
+                <a:lumMod val="100000"/>
+                <a:shade val="100000"/>
+              </a:schemeClr>
+            </a:gs>
+            <a:gs pos="100000">
+              <a:schemeClr val="phClr">
+                <a:lumMod val="99000"/>
+                <a:satMod val="120000"/>
+                <a:shade val="78000"/>
+              </a:schemeClr>
+            </a:gs>
+          </a:gsLst>
+          <a:lin ang="5400000" scaled="0"/>
+        </a:gradFill>
+      </a:fillStyleLst>
+      <a:lnStyleLst>
+        <a:ln w="6350" cap="flat" cmpd="sng" algn="ctr">
+          <a:solidFill>
+            <a:schemeClr val="phClr"/>
+          </a:solidFill>
+          <a:prstDash val="solid"/>
+          <a:miter lim="800000"/>
+        </a:ln>
+        <a:ln w="12700" cap="flat" cmpd="sng" algn="ctr">
+          <a:solidFill>
+            <a:schemeClr val="phClr"/>
+          </a:solidFill>
+          <a:prstDash val="solid"/>
+          <a:miter lim="800000"/>
+        </a:ln>
+        <a:ln w="19050" cap="flat" cmpd="sng" algn="ctr">
+          <a:solidFill>
+            <a:schemeClr val="phClr"/>
+          </a:solidFill>
+          <a:prstDash val="solid"/>
+          <a:miter lim="800000"/>
+        </a:ln>
+      </a:lnStyleLst>
+      <a:effectStyleLst>
+        <a:effectStyle>
+          <a:effectLst/>
+        </a:effectStyle>
+        <a:effectStyle>
+          <a:effectLst/>
+        </a:effectStyle>
+        <a:effectStyle>
+          <a:effectLst>
+            <a:outerShdw blurRad="57150" dist="19050" dir="5400000" algn="ctr" rotWithShape="0">
+              <a:srgbClr val="000000">
+                <a:alpha val="63000"/>
+              </a:srgbClr>
+            </a:outerShdw>
+          </a:effectLst>
+        </a:effectStyle>
+      </a:effectStyleLst>
+      <a:bgFillStyleLst>
+        <a:solidFill>
+          <a:schemeClr val="phClr"/>
+        </a:solidFill>
+        <a:solidFill>
+          <a:schemeClr val="phClr">
+            <a:tint val="95000"/>
+            <a:satMod val="170000"/>
+          </a:schemeClr>
+        </a:solidFill>
+        <a:gradFill rotWithShape="1">
+          <a:gsLst>
+            <a:gs pos="0">
+              <a:schemeClr val="phClr">
+                <a:tint val="93000"/>
+                <a:satMod val="150000"/>
+                <a:shade val="98000"/>
+                <a:lumMod val="102000"/>
+              </a:schemeClr>
+            </a:gs>
+            <a:gs pos="50000">
+              <a:schemeClr val="phClr">
+                <a:tint val="98000"/>
+                <a:satMod val="130000"/>
+                <a:shade val="90000"/>
+                <a:lumMod val="103000"/>
+              </a:schemeClr>
+            </a:gs>
+            <a:gs pos="100000">
+              <a:schemeClr val="phClr">
+                <a:shade val="63000"/>
+                <a:satMod val="120000"/>
+              </a:schemeClr>
+            </a:gs>
+          </a:gsLst>
+          <a:lin ang="5400000" scaled="0"/>
+        </a:gradFill>
+      </a:bgFillStyleLst>
+    </a:fmtScheme>
+  </a:themeElements>
+  <a:objectDefaults/>
+  <a:extraClrSchemeLst/>
+  <a:extLst>
+    <a:ext uri="{05A4C25C-085E-4340-85A3-A5531E510DB2}">
+      <thm15:themeFamily xmlns:thm15="http://schemas.microsoft.com/office/thememl/2012/main" name="Office Theme" id="{62F939B6-93AF-4DB8-9C6B-D6C7DFDC589F}" vid="{4A3C46E8-61CC-4603-A589-7422A47A8E4A}"/>
+    </a:ext>
+  </a:extLst>
+</a:theme>
 </file>